--- a/source/Instructor Week 3 Grams/Instructor Week 3 Grams.pptx
+++ b/source/Instructor Week 3 Grams/Instructor Week 3 Grams.pptx
@@ -3143,11 +3143,11 @@
       </p:sp>
       <p:sp>
         <p:nvSpPr>
-          <p:cNvPr id="3" name="Rounded Rectangle 2"/>
+          <p:cNvPr id="3" name="Rounded Rectangle 2">
+            <a:hlinkClick r:id="rId2"/>
+          </p:cNvPr>
           <p:cNvSpPr/>
-          <p:nvPr>
-            <a:hlinkClick r:id="rId2"/>
-          </p:nvPr>
+          <p:nvPr/>
         </p:nvSpPr>
         <p:spPr>
           <a:xfrm>
@@ -3245,11 +3245,11 @@
       </p:sp>
       <p:sp>
         <p:nvSpPr>
-          <p:cNvPr id="5" name="Rounded Rectangle 4"/>
+          <p:cNvPr id="5" name="Rounded Rectangle 4">
+            <a:hlinkClick r:id="rId6"/>
+          </p:cNvPr>
           <p:cNvSpPr/>
-          <p:nvPr>
-            <a:hlinkClick r:id="rId6"/>
-          </p:nvPr>
+          <p:nvPr/>
         </p:nvSpPr>
         <p:spPr>
           <a:xfrm>
@@ -3339,11 +3339,11 @@
       </p:sp>
       <p:sp>
         <p:nvSpPr>
-          <p:cNvPr id="7" name="Rounded Rectangle 6"/>
+          <p:cNvPr id="7" name="Rounded Rectangle 6">
+            <a:hlinkClick r:id="rId9"/>
+          </p:cNvPr>
           <p:cNvSpPr/>
-          <p:nvPr>
-            <a:hlinkClick r:id="rId9"/>
-          </p:nvPr>
+          <p:nvPr/>
         </p:nvSpPr>
         <p:spPr>
           <a:xfrm>
@@ -3441,11 +3441,11 @@
       </p:sp>
       <p:sp>
         <p:nvSpPr>
-          <p:cNvPr id="9" name="Rounded Rectangle 8"/>
+          <p:cNvPr id="9" name="Rounded Rectangle 8">
+            <a:hlinkClick r:id="rId13"/>
+          </p:cNvPr>
           <p:cNvSpPr/>
-          <p:nvPr>
-            <a:hlinkClick r:id="rId13"/>
-          </p:nvPr>
+          <p:nvPr/>
         </p:nvSpPr>
         <p:spPr>
           <a:xfrm>
@@ -3551,11 +3551,11 @@
       </p:sp>
       <p:sp>
         <p:nvSpPr>
-          <p:cNvPr id="11" name="Rounded Rectangle 10"/>
+          <p:cNvPr id="11" name="Rounded Rectangle 10">
+            <a:hlinkClick r:id="rId18"/>
+          </p:cNvPr>
           <p:cNvSpPr/>
-          <p:nvPr>
-            <a:hlinkClick r:id="rId18"/>
-          </p:nvPr>
+          <p:nvPr/>
         </p:nvSpPr>
         <p:spPr>
           <a:xfrm>
@@ -3661,11 +3661,11 @@
       </p:sp>
       <p:sp>
         <p:nvSpPr>
-          <p:cNvPr id="13" name="Rounded Rectangle 12"/>
+          <p:cNvPr id="13" name="Rounded Rectangle 12">
+            <a:hlinkClick r:id="rId23"/>
+          </p:cNvPr>
           <p:cNvSpPr/>
-          <p:nvPr>
-            <a:hlinkClick r:id="rId23"/>
-          </p:nvPr>
+          <p:nvPr/>
         </p:nvSpPr>
         <p:spPr>
           <a:xfrm>
@@ -3747,11 +3747,11 @@
       </p:sp>
       <p:sp>
         <p:nvSpPr>
-          <p:cNvPr id="15" name="Rounded Rectangle 14"/>
+          <p:cNvPr id="15" name="Rounded Rectangle 14">
+            <a:hlinkClick r:id="rId25"/>
+          </p:cNvPr>
           <p:cNvSpPr/>
-          <p:nvPr>
-            <a:hlinkClick r:id="rId25"/>
-          </p:nvPr>
+          <p:nvPr/>
         </p:nvSpPr>
         <p:spPr>
           <a:xfrm>
@@ -3841,11 +3841,11 @@
       </p:sp>
       <p:sp>
         <p:nvSpPr>
-          <p:cNvPr id="17" name="Rounded Rectangle 16"/>
+          <p:cNvPr id="17" name="Rounded Rectangle 16">
+            <a:hlinkClick r:id="rId28"/>
+          </p:cNvPr>
           <p:cNvSpPr/>
-          <p:nvPr>
-            <a:hlinkClick r:id="rId28"/>
-          </p:nvPr>
+          <p:nvPr/>
         </p:nvSpPr>
         <p:spPr>
           <a:xfrm>
@@ -3935,11 +3935,11 @@
       </p:sp>
       <p:sp>
         <p:nvSpPr>
-          <p:cNvPr id="19" name="Rounded Rectangle 18"/>
+          <p:cNvPr id="19" name="Rounded Rectangle 18">
+            <a:hlinkClick r:id="rId31"/>
+          </p:cNvPr>
           <p:cNvSpPr/>
-          <p:nvPr>
-            <a:hlinkClick r:id="rId31"/>
-          </p:nvPr>
+          <p:nvPr/>
         </p:nvSpPr>
         <p:spPr>
           <a:xfrm>
@@ -4037,11 +4037,11 @@
       </p:sp>
       <p:sp>
         <p:nvSpPr>
-          <p:cNvPr id="21" name="Rounded Rectangle 20"/>
+          <p:cNvPr id="21" name="Rounded Rectangle 20">
+            <a:hlinkClick r:id="rId35"/>
+          </p:cNvPr>
           <p:cNvSpPr/>
-          <p:nvPr>
-            <a:hlinkClick r:id="rId35"/>
-          </p:nvPr>
+          <p:nvPr/>
         </p:nvSpPr>
         <p:spPr>
           <a:xfrm>
@@ -4147,11 +4147,11 @@
       </p:sp>
       <p:sp>
         <p:nvSpPr>
-          <p:cNvPr id="23" name="Rounded Rectangle 22"/>
+          <p:cNvPr id="23" name="Rounded Rectangle 22">
+            <a:hlinkClick r:id="rId40"/>
+          </p:cNvPr>
           <p:cNvSpPr/>
-          <p:nvPr>
-            <a:hlinkClick r:id="rId40"/>
-          </p:nvPr>
+          <p:nvPr/>
         </p:nvSpPr>
         <p:spPr>
           <a:xfrm>
@@ -4257,11 +4257,11 @@
       </p:sp>
       <p:sp>
         <p:nvSpPr>
-          <p:cNvPr id="25" name="Rounded Rectangle 24"/>
+          <p:cNvPr id="25" name="Rounded Rectangle 24">
+            <a:hlinkClick r:id="rId45"/>
+          </p:cNvPr>
           <p:cNvSpPr/>
-          <p:nvPr>
-            <a:hlinkClick r:id="rId45"/>
-          </p:nvPr>
+          <p:nvPr/>
         </p:nvSpPr>
         <p:spPr>
           <a:xfrm>
@@ -4367,11 +4367,11 @@
       </p:sp>
       <p:sp>
         <p:nvSpPr>
-          <p:cNvPr id="27" name="Rounded Rectangle 26"/>
+          <p:cNvPr id="27" name="Rounded Rectangle 26">
+            <a:hlinkClick r:id="rId50"/>
+          </p:cNvPr>
           <p:cNvSpPr/>
-          <p:nvPr>
-            <a:hlinkClick r:id="rId50"/>
-          </p:nvPr>
+          <p:nvPr/>
         </p:nvSpPr>
         <p:spPr>
           <a:xfrm>
@@ -4453,11 +4453,11 @@
       </p:sp>
       <p:sp>
         <p:nvSpPr>
-          <p:cNvPr id="29" name="Rounded Rectangle 28"/>
+          <p:cNvPr id="29" name="Rounded Rectangle 28">
+            <a:hlinkClick r:id="rId52"/>
+          </p:cNvPr>
           <p:cNvSpPr/>
-          <p:nvPr>
-            <a:hlinkClick r:id="rId52"/>
-          </p:nvPr>
+          <p:nvPr/>
         </p:nvSpPr>
         <p:spPr>
           <a:xfrm>
@@ -4563,11 +4563,11 @@
       </p:sp>
       <p:sp>
         <p:nvSpPr>
-          <p:cNvPr id="31" name="Rounded Rectangle 30"/>
+          <p:cNvPr id="31" name="Rounded Rectangle 30">
+            <a:hlinkClick r:id="rId57"/>
+          </p:cNvPr>
           <p:cNvSpPr/>
-          <p:nvPr>
-            <a:hlinkClick r:id="rId57"/>
-          </p:nvPr>
+          <p:nvPr/>
         </p:nvSpPr>
         <p:spPr>
           <a:xfrm>
@@ -4734,11 +4734,11 @@
       </p:sp>
       <p:sp>
         <p:nvSpPr>
-          <p:cNvPr id="3" name="Rounded Rectangle 2"/>
+          <p:cNvPr id="3" name="Rounded Rectangle 2">
+            <a:hlinkClick r:id="rId2"/>
+          </p:cNvPr>
           <p:cNvSpPr/>
-          <p:nvPr>
-            <a:hlinkClick r:id="rId2"/>
-          </p:nvPr>
+          <p:nvPr/>
         </p:nvSpPr>
         <p:spPr>
           <a:xfrm>
@@ -4844,11 +4844,11 @@
       </p:sp>
       <p:sp>
         <p:nvSpPr>
-          <p:cNvPr id="5" name="Rounded Rectangle 4"/>
+          <p:cNvPr id="5" name="Rounded Rectangle 4">
+            <a:hlinkClick r:id="rId7"/>
+          </p:cNvPr>
           <p:cNvSpPr/>
-          <p:nvPr>
-            <a:hlinkClick r:id="rId7"/>
-          </p:nvPr>
+          <p:nvPr/>
         </p:nvSpPr>
         <p:spPr>
           <a:xfrm>
@@ -4930,11 +4930,11 @@
       </p:sp>
       <p:sp>
         <p:nvSpPr>
-          <p:cNvPr id="7" name="Rounded Rectangle 6"/>
+          <p:cNvPr id="7" name="Rounded Rectangle 6">
+            <a:hlinkClick r:id="rId9"/>
+          </p:cNvPr>
           <p:cNvSpPr/>
-          <p:nvPr>
-            <a:hlinkClick r:id="rId9"/>
-          </p:nvPr>
+          <p:nvPr/>
         </p:nvSpPr>
         <p:spPr>
           <a:xfrm>
@@ -5016,11 +5016,11 @@
       </p:sp>
       <p:sp>
         <p:nvSpPr>
-          <p:cNvPr id="9" name="Rounded Rectangle 8"/>
+          <p:cNvPr id="9" name="Rounded Rectangle 8">
+            <a:hlinkClick r:id="rId11"/>
+          </p:cNvPr>
           <p:cNvSpPr/>
-          <p:nvPr>
-            <a:hlinkClick r:id="rId11"/>
-          </p:nvPr>
+          <p:nvPr/>
         </p:nvSpPr>
         <p:spPr>
           <a:xfrm>
@@ -5126,11 +5126,11 @@
       </p:sp>
       <p:sp>
         <p:nvSpPr>
-          <p:cNvPr id="11" name="Rounded Rectangle 10"/>
+          <p:cNvPr id="11" name="Rounded Rectangle 10">
+            <a:hlinkClick r:id="rId16"/>
+          </p:cNvPr>
           <p:cNvSpPr/>
-          <p:nvPr>
-            <a:hlinkClick r:id="rId16"/>
-          </p:nvPr>
+          <p:nvPr/>
         </p:nvSpPr>
         <p:spPr>
           <a:xfrm>
@@ -5236,11 +5236,11 @@
       </p:sp>
       <p:sp>
         <p:nvSpPr>
-          <p:cNvPr id="13" name="Rounded Rectangle 12"/>
+          <p:cNvPr id="13" name="Rounded Rectangle 12">
+            <a:hlinkClick r:id="rId21"/>
+          </p:cNvPr>
           <p:cNvSpPr/>
-          <p:nvPr>
-            <a:hlinkClick r:id="rId21"/>
-          </p:nvPr>
+          <p:nvPr/>
         </p:nvSpPr>
         <p:spPr>
           <a:xfrm>
@@ -5330,11 +5330,11 @@
       </p:sp>
       <p:sp>
         <p:nvSpPr>
-          <p:cNvPr id="15" name="Rounded Rectangle 14"/>
+          <p:cNvPr id="15" name="Rounded Rectangle 14">
+            <a:hlinkClick r:id="rId24"/>
+          </p:cNvPr>
           <p:cNvSpPr/>
-          <p:nvPr>
-            <a:hlinkClick r:id="rId24"/>
-          </p:nvPr>
+          <p:nvPr/>
         </p:nvSpPr>
         <p:spPr>
           <a:xfrm>
@@ -5440,11 +5440,11 @@
       </p:sp>
       <p:sp>
         <p:nvSpPr>
-          <p:cNvPr id="17" name="Rounded Rectangle 16"/>
+          <p:cNvPr id="17" name="Rounded Rectangle 16">
+            <a:hlinkClick r:id="rId29"/>
+          </p:cNvPr>
           <p:cNvSpPr/>
-          <p:nvPr>
-            <a:hlinkClick r:id="rId29"/>
-          </p:nvPr>
+          <p:nvPr/>
         </p:nvSpPr>
         <p:spPr>
           <a:xfrm>
@@ -5534,11 +5534,11 @@
       </p:sp>
       <p:sp>
         <p:nvSpPr>
-          <p:cNvPr id="19" name="Rounded Rectangle 18"/>
+          <p:cNvPr id="19" name="Rounded Rectangle 18">
+            <a:hlinkClick r:id="rId32"/>
+          </p:cNvPr>
           <p:cNvSpPr/>
-          <p:nvPr>
-            <a:hlinkClick r:id="rId32"/>
-          </p:nvPr>
+          <p:nvPr/>
         </p:nvSpPr>
         <p:spPr>
           <a:xfrm>
@@ -5628,11 +5628,11 @@
       </p:sp>
       <p:sp>
         <p:nvSpPr>
-          <p:cNvPr id="21" name="Rounded Rectangle 20"/>
+          <p:cNvPr id="21" name="Rounded Rectangle 20">
+            <a:hlinkClick r:id="rId35"/>
+          </p:cNvPr>
           <p:cNvSpPr/>
-          <p:nvPr>
-            <a:hlinkClick r:id="rId35"/>
-          </p:nvPr>
+          <p:nvPr/>
         </p:nvSpPr>
         <p:spPr>
           <a:xfrm>
@@ -5738,11 +5738,11 @@
       </p:sp>
       <p:sp>
         <p:nvSpPr>
-          <p:cNvPr id="23" name="Rounded Rectangle 22"/>
+          <p:cNvPr id="23" name="Rounded Rectangle 22">
+            <a:hlinkClick r:id="rId40"/>
+          </p:cNvPr>
           <p:cNvSpPr/>
-          <p:nvPr>
-            <a:hlinkClick r:id="rId40"/>
-          </p:nvPr>
+          <p:nvPr/>
         </p:nvSpPr>
         <p:spPr>
           <a:xfrm>
@@ -5824,11 +5824,11 @@
       </p:sp>
       <p:sp>
         <p:nvSpPr>
-          <p:cNvPr id="25" name="Rounded Rectangle 24"/>
+          <p:cNvPr id="25" name="Rounded Rectangle 24">
+            <a:hlinkClick r:id="rId42"/>
+          </p:cNvPr>
           <p:cNvSpPr/>
-          <p:nvPr>
-            <a:hlinkClick r:id="rId42"/>
-          </p:nvPr>
+          <p:nvPr/>
         </p:nvSpPr>
         <p:spPr>
           <a:xfrm>
@@ -5926,11 +5926,11 @@
       </p:sp>
       <p:sp>
         <p:nvSpPr>
-          <p:cNvPr id="27" name="Rounded Rectangle 26"/>
+          <p:cNvPr id="27" name="Rounded Rectangle 26">
+            <a:hlinkClick r:id="rId46"/>
+          </p:cNvPr>
           <p:cNvSpPr/>
-          <p:nvPr>
-            <a:hlinkClick r:id="rId46"/>
-          </p:nvPr>
+          <p:nvPr/>
         </p:nvSpPr>
         <p:spPr>
           <a:xfrm>
@@ -6020,11 +6020,11 @@
       </p:sp>
       <p:sp>
         <p:nvSpPr>
-          <p:cNvPr id="29" name="Rounded Rectangle 28"/>
+          <p:cNvPr id="29" name="Rounded Rectangle 28">
+            <a:hlinkClick r:id="rId49"/>
+          </p:cNvPr>
           <p:cNvSpPr/>
-          <p:nvPr>
-            <a:hlinkClick r:id="rId49"/>
-          </p:nvPr>
+          <p:nvPr/>
         </p:nvSpPr>
         <p:spPr>
           <a:xfrm>
@@ -6130,11 +6130,11 @@
       </p:sp>
       <p:sp>
         <p:nvSpPr>
-          <p:cNvPr id="31" name="Rounded Rectangle 30"/>
+          <p:cNvPr id="31" name="Rounded Rectangle 30">
+            <a:hlinkClick r:id="rId54"/>
+          </p:cNvPr>
           <p:cNvSpPr/>
-          <p:nvPr>
-            <a:hlinkClick r:id="rId54"/>
-          </p:nvPr>
+          <p:nvPr/>
         </p:nvSpPr>
         <p:spPr>
           <a:xfrm>
@@ -6301,11 +6301,11 @@
       </p:sp>
       <p:sp>
         <p:nvSpPr>
-          <p:cNvPr id="3" name="Rounded Rectangle 2"/>
+          <p:cNvPr id="3" name="Rounded Rectangle 2">
+            <a:hlinkClick r:id="rId2"/>
+          </p:cNvPr>
           <p:cNvSpPr/>
-          <p:nvPr>
-            <a:hlinkClick r:id="rId2"/>
-          </p:nvPr>
+          <p:nvPr/>
         </p:nvSpPr>
         <p:spPr>
           <a:xfrm>
@@ -6395,11 +6395,11 @@
       </p:sp>
       <p:sp>
         <p:nvSpPr>
-          <p:cNvPr id="5" name="Rounded Rectangle 4"/>
+          <p:cNvPr id="5" name="Rounded Rectangle 4">
+            <a:hlinkClick r:id="rId5"/>
+          </p:cNvPr>
           <p:cNvSpPr/>
-          <p:nvPr>
-            <a:hlinkClick r:id="rId5"/>
-          </p:nvPr>
+          <p:nvPr/>
         </p:nvSpPr>
         <p:spPr>
           <a:xfrm>
@@ -6505,11 +6505,11 @@
       </p:sp>
       <p:sp>
         <p:nvSpPr>
-          <p:cNvPr id="7" name="Rounded Rectangle 6"/>
+          <p:cNvPr id="7" name="Rounded Rectangle 6">
+            <a:hlinkClick r:id="rId10"/>
+          </p:cNvPr>
           <p:cNvSpPr/>
-          <p:nvPr>
-            <a:hlinkClick r:id="rId10"/>
-          </p:nvPr>
+          <p:nvPr/>
         </p:nvSpPr>
         <p:spPr>
           <a:xfrm>
@@ -6615,11 +6615,11 @@
       </p:sp>
       <p:sp>
         <p:nvSpPr>
-          <p:cNvPr id="9" name="Rounded Rectangle 8"/>
+          <p:cNvPr id="9" name="Rounded Rectangle 8">
+            <a:hlinkClick r:id="rId15"/>
+          </p:cNvPr>
           <p:cNvSpPr/>
-          <p:nvPr>
-            <a:hlinkClick r:id="rId15"/>
-          </p:nvPr>
+          <p:nvPr/>
         </p:nvSpPr>
         <p:spPr>
           <a:xfrm>
@@ -6717,11 +6717,11 @@
       </p:sp>
       <p:sp>
         <p:nvSpPr>
-          <p:cNvPr id="11" name="Rounded Rectangle 10"/>
+          <p:cNvPr id="11" name="Rounded Rectangle 10">
+            <a:hlinkClick r:id="rId19"/>
+          </p:cNvPr>
           <p:cNvSpPr/>
-          <p:nvPr>
-            <a:hlinkClick r:id="rId19"/>
-          </p:nvPr>
+          <p:nvPr/>
         </p:nvSpPr>
         <p:spPr>
           <a:xfrm>

--- a/source/Instructor Week 3 Grams/Instructor Week 3 Grams.pptx
+++ b/source/Instructor Week 3 Grams/Instructor Week 3 Grams.pptx
@@ -8,6 +8,8 @@
     <p:sldId id="256" r:id="rId7"/>
     <p:sldId id="257" r:id="rId8"/>
     <p:sldId id="258" r:id="rId9"/>
+    <p:sldId id="259" r:id="rId10"/>
+    <p:sldId id="260" r:id="rId11"/>
   </p:sldIdLst>
   <p:sldSz cx="12188952" cy="6858000" type="screen4x3"/>
   <p:notesSz cx="6858000" cy="9144000"/>
@@ -3092,120 +3094,48 @@
       <p:grpSpPr/>
       <p:sp>
         <p:nvSpPr>
-          <p:cNvPr id="2" name="Rectangle 1"/>
-          <p:cNvSpPr/>
+          <p:cNvPr id="2" name="TextBox 1"/>
+          <p:cNvSpPr txBox="1"/>
           <p:nvPr/>
         </p:nvSpPr>
         <p:spPr>
           <a:xfrm>
-            <a:off x="0" y="0"/>
-            <a:ext cx="12188952" cy="548640"/>
+            <a:off x="914400" y="2377440"/>
+            <a:ext cx="10360152" cy="1280160"/>
           </a:xfrm>
           <a:prstGeom prst="rect">
             <a:avLst/>
           </a:prstGeom>
-          <a:solidFill>
-            <a:srgbClr val="1F3A5F"/>
-          </a:solidFill>
-          <a:ln>
-            <a:noFill/>
-          </a:ln>
-        </p:spPr>
-        <p:style>
-          <a:lnRef idx="1">
-            <a:schemeClr val="accent1"/>
-          </a:lnRef>
-          <a:fillRef idx="3">
-            <a:schemeClr val="accent1"/>
-          </a:fillRef>
-          <a:effectRef idx="2">
-            <a:schemeClr val="accent1"/>
-          </a:effectRef>
-          <a:fontRef idx="minor">
-            <a:schemeClr val="lt1"/>
-          </a:fontRef>
-        </p:style>
-        <p:txBody>
-          <a:bodyPr rtlCol="0" anchor="ctr" lIns="182880" rIns="182880"/>
+          <a:noFill/>
+        </p:spPr>
+        <p:txBody>
+          <a:bodyPr wrap="square">
+            <a:spAutoFit/>
+          </a:bodyPr>
           <a:lstStyle/>
           <a:p>
             <a:pPr algn="ctr"/>
             <a:r>
-              <a:rPr sz="2000" b="1">
-                <a:solidFill>
-                  <a:srgbClr val="FFFFFF"/>
-                </a:solidFill>
-              </a:rPr>
-              <a:t>Instructor Week 3 Grams — Page 1 of 3</a:t>
-            </a:r>
-          </a:p>
-        </p:txBody>
-      </p:sp>
-      <p:sp>
-        <p:nvSpPr>
-          <p:cNvPr id="3" name="Rounded Rectangle 2"/>
-          <p:cNvSpPr/>
-          <p:nvPr>
-            <a:hlinkClick r:id="rId2"/>
-          </p:nvPr>
-        </p:nvSpPr>
-        <p:spPr>
-          <a:xfrm>
-            <a:off x="365760" y="731520"/>
-            <a:ext cx="2200046" cy="365760"/>
-          </a:xfrm>
-          <a:prstGeom prst="roundRect">
-            <a:avLst/>
-          </a:prstGeom>
-          <a:solidFill>
-            <a:srgbClr val="E8EEF7"/>
-          </a:solidFill>
-          <a:ln>
-            <a:solidFill>
-              <a:srgbClr val="1F3A5F"/>
-            </a:solidFill>
-          </a:ln>
-        </p:spPr>
-        <p:style>
-          <a:lnRef idx="1">
-            <a:schemeClr val="accent1"/>
-          </a:lnRef>
-          <a:fillRef idx="3">
-            <a:schemeClr val="accent1"/>
-          </a:fillRef>
-          <a:effectRef idx="2">
-            <a:schemeClr val="accent1"/>
-          </a:effectRef>
-          <a:fontRef idx="minor">
-            <a:schemeClr val="lt1"/>
-          </a:fontRef>
-        </p:style>
-        <p:txBody>
-          <a:bodyPr rtlCol="0" anchor="ctr" lIns="45720" rIns="45720"/>
-          <a:lstStyle/>
-          <a:p>
-            <a:pPr algn="ctr"/>
-            <a:r>
-              <a:rPr sz="900">
+              <a:rPr sz="4000" b="1">
                 <a:solidFill>
                   <a:srgbClr val="1F3A5F"/>
                 </a:solidFill>
               </a:rPr>
-              <a:t>Gram 1: Intrepid-class contact bearing 127, codename Defiant</a:t>
-            </a:r>
-          </a:p>
-        </p:txBody>
-      </p:sp>
-      <p:sp>
-        <p:nvSpPr>
-          <p:cNvPr id="4" name="TextBox 3"/>
+              <a:t>Welcome to Instructor Week 3 Grams</a:t>
+            </a:r>
+          </a:p>
+        </p:txBody>
+      </p:sp>
+      <p:sp>
+        <p:nvSpPr>
+          <p:cNvPr id="3" name="TextBox 2"/>
           <p:cNvSpPr txBox="1"/>
           <p:nvPr/>
         </p:nvSpPr>
         <p:spPr>
           <a:xfrm>
-            <a:off x="365760" y="1115568"/>
-            <a:ext cx="2200046" cy="1447800"/>
+            <a:off x="914400" y="3840480"/>
+            <a:ext cx="10360152" cy="731520"/>
           </a:xfrm>
           <a:prstGeom prst="rect">
             <a:avLst/>
@@ -3213,1452 +3143,19 @@
           <a:noFill/>
         </p:spPr>
         <p:txBody>
-          <a:bodyPr wrap="square">
+          <a:bodyPr wrap="none">
             <a:spAutoFit/>
           </a:bodyPr>
           <a:lstStyle/>
           <a:p>
-            <a:r>
-              <a:rPr sz="800">
-                <a:hlinkClick r:id="rId3"/>
-              </a:rPr>
-              <a:t>Lofar 1</a:t>
-            </a:r>
-          </a:p>
-          <a:p>
-            <a:r>
-              <a:rPr sz="800">
-                <a:hlinkClick r:id="rId4"/>
-              </a:rPr>
-              <a:t>Lofar 2</a:t>
-            </a:r>
-          </a:p>
-          <a:p>
-            <a:r>
-              <a:rPr sz="800">
-                <a:hlinkClick r:id="rId5"/>
-              </a:rPr>
-              <a:t>Lofar 3</a:t>
-            </a:r>
-          </a:p>
-        </p:txBody>
-      </p:sp>
-      <p:sp>
-        <p:nvSpPr>
-          <p:cNvPr id="5" name="Rounded Rectangle 4"/>
-          <p:cNvSpPr/>
-          <p:nvPr>
-            <a:hlinkClick r:id="rId6"/>
-          </p:nvPr>
-        </p:nvSpPr>
-        <p:spPr>
-          <a:xfrm>
-            <a:off x="2657246" y="731520"/>
-            <a:ext cx="2200046" cy="365760"/>
-          </a:xfrm>
-          <a:prstGeom prst="roundRect">
-            <a:avLst/>
-          </a:prstGeom>
-          <a:solidFill>
-            <a:srgbClr val="E8EEF7"/>
-          </a:solidFill>
-          <a:ln>
-            <a:solidFill>
-              <a:srgbClr val="1F3A5F"/>
-            </a:solidFill>
-          </a:ln>
-        </p:spPr>
-        <p:style>
-          <a:lnRef idx="1">
-            <a:schemeClr val="accent1"/>
-          </a:lnRef>
-          <a:fillRef idx="3">
-            <a:schemeClr val="accent1"/>
-          </a:fillRef>
-          <a:effectRef idx="2">
-            <a:schemeClr val="accent1"/>
-          </a:effectRef>
-          <a:fontRef idx="minor">
-            <a:schemeClr val="lt1"/>
-          </a:fontRef>
-        </p:style>
-        <p:txBody>
-          <a:bodyPr rtlCol="0" anchor="ctr" lIns="45720" rIns="45720"/>
-          <a:lstStyle/>
-          <a:p>
             <a:pPr algn="ctr"/>
             <a:r>
-              <a:rPr sz="900">
+              <a:rPr sz="2400">
                 <a:solidFill>
                   <a:srgbClr val="1F3A5F"/>
                 </a:solidFill>
               </a:rPr>
-              <a:t>Gram 2: FR Miranda-class, Category 3, Tatooine</a:t>
-            </a:r>
-          </a:p>
-        </p:txBody>
-      </p:sp>
-      <p:sp>
-        <p:nvSpPr>
-          <p:cNvPr id="6" name="TextBox 5"/>
-          <p:cNvSpPr txBox="1"/>
-          <p:nvPr/>
-        </p:nvSpPr>
-        <p:spPr>
-          <a:xfrm>
-            <a:off x="2657246" y="1115568"/>
-            <a:ext cx="2200046" cy="1447800"/>
-          </a:xfrm>
-          <a:prstGeom prst="rect">
-            <a:avLst/>
-          </a:prstGeom>
-          <a:noFill/>
-        </p:spPr>
-        <p:txBody>
-          <a:bodyPr wrap="square">
-            <a:spAutoFit/>
-          </a:bodyPr>
-          <a:lstStyle/>
-          <a:p>
-            <a:r>
-              <a:rPr sz="800">
-                <a:hlinkClick r:id="rId7"/>
-              </a:rPr>
-              <a:t>Lofar 1</a:t>
-            </a:r>
-          </a:p>
-          <a:p>
-            <a:r>
-              <a:rPr sz="800">
-                <a:hlinkClick r:id="rId8"/>
-              </a:rPr>
-              <a:t>Lofar 2</a:t>
-            </a:r>
-          </a:p>
-        </p:txBody>
-      </p:sp>
-      <p:sp>
-        <p:nvSpPr>
-          <p:cNvPr id="7" name="Rounded Rectangle 6"/>
-          <p:cNvSpPr/>
-          <p:nvPr>
-            <a:hlinkClick r:id="rId9"/>
-          </p:nvPr>
-        </p:nvSpPr>
-        <p:spPr>
-          <a:xfrm>
-            <a:off x="4948732" y="731520"/>
-            <a:ext cx="2200046" cy="365760"/>
-          </a:xfrm>
-          <a:prstGeom prst="roundRect">
-            <a:avLst/>
-          </a:prstGeom>
-          <a:solidFill>
-            <a:srgbClr val="E8EEF7"/>
-          </a:solidFill>
-          <a:ln>
-            <a:solidFill>
-              <a:srgbClr val="1F3A5F"/>
-            </a:solidFill>
-          </a:ln>
-        </p:spPr>
-        <p:style>
-          <a:lnRef idx="1">
-            <a:schemeClr val="accent1"/>
-          </a:lnRef>
-          <a:fillRef idx="3">
-            <a:schemeClr val="accent1"/>
-          </a:fillRef>
-          <a:effectRef idx="2">
-            <a:schemeClr val="accent1"/>
-          </a:effectRef>
-          <a:fontRef idx="minor">
-            <a:schemeClr val="lt1"/>
-          </a:fontRef>
-        </p:style>
-        <p:txBody>
-          <a:bodyPr rtlCol="0" anchor="ctr" lIns="45720" rIns="45720"/>
-          <a:lstStyle/>
-          <a:p>
-            <a:pPr algn="ctr"/>
-            <a:r>
-              <a:rPr sz="900">
-                <a:solidFill>
-                  <a:srgbClr val="1F3A5F"/>
-                </a:solidFill>
-              </a:rPr>
-              <a:t>Gram 3: FR Outrider, Category 2, Cardassia</a:t>
-            </a:r>
-          </a:p>
-        </p:txBody>
-      </p:sp>
-      <p:sp>
-        <p:nvSpPr>
-          <p:cNvPr id="8" name="TextBox 7"/>
-          <p:cNvSpPr txBox="1"/>
-          <p:nvPr/>
-        </p:nvSpPr>
-        <p:spPr>
-          <a:xfrm>
-            <a:off x="4948732" y="1115568"/>
-            <a:ext cx="2200046" cy="1447800"/>
-          </a:xfrm>
-          <a:prstGeom prst="rect">
-            <a:avLst/>
-          </a:prstGeom>
-          <a:noFill/>
-        </p:spPr>
-        <p:txBody>
-          <a:bodyPr wrap="square">
-            <a:spAutoFit/>
-          </a:bodyPr>
-          <a:lstStyle/>
-          <a:p>
-            <a:r>
-              <a:rPr sz="800">
-                <a:hlinkClick r:id="rId10"/>
-              </a:rPr>
-              <a:t>Lofar 1</a:t>
-            </a:r>
-          </a:p>
-          <a:p>
-            <a:r>
-              <a:rPr sz="800">
-                <a:hlinkClick r:id="rId11"/>
-              </a:rPr>
-              <a:t>Lofar 2</a:t>
-            </a:r>
-          </a:p>
-          <a:p>
-            <a:r>
-              <a:rPr sz="800">
-                <a:hlinkClick r:id="rId12"/>
-              </a:rPr>
-              <a:t>Lofar 3</a:t>
-            </a:r>
-          </a:p>
-        </p:txBody>
-      </p:sp>
-      <p:sp>
-        <p:nvSpPr>
-          <p:cNvPr id="9" name="Rounded Rectangle 8"/>
-          <p:cNvSpPr/>
-          <p:nvPr>
-            <a:hlinkClick r:id="rId13"/>
-          </p:nvPr>
-        </p:nvSpPr>
-        <p:spPr>
-          <a:xfrm>
-            <a:off x="7240219" y="731520"/>
-            <a:ext cx="2200046" cy="365760"/>
-          </a:xfrm>
-          <a:prstGeom prst="roundRect">
-            <a:avLst/>
-          </a:prstGeom>
-          <a:solidFill>
-            <a:srgbClr val="E8EEF7"/>
-          </a:solidFill>
-          <a:ln>
-            <a:solidFill>
-              <a:srgbClr val="1F3A5F"/>
-            </a:solidFill>
-          </a:ln>
-        </p:spPr>
-        <p:style>
-          <a:lnRef idx="1">
-            <a:schemeClr val="accent1"/>
-          </a:lnRef>
-          <a:fillRef idx="3">
-            <a:schemeClr val="accent1"/>
-          </a:fillRef>
-          <a:effectRef idx="2">
-            <a:schemeClr val="accent1"/>
-          </a:effectRef>
-          <a:fontRef idx="minor">
-            <a:schemeClr val="lt1"/>
-          </a:fontRef>
-        </p:style>
-        <p:txBody>
-          <a:bodyPr rtlCol="0" anchor="ctr" lIns="45720" rIns="45720"/>
-          <a:lstStyle/>
-          <a:p>
-            <a:pPr algn="ctr"/>
-            <a:r>
-              <a:rPr sz="900">
-                <a:solidFill>
-                  <a:srgbClr val="1F3A5F"/>
-                </a:solidFill>
-              </a:rPr>
-              <a:t>Gram 4: FR Defiant, Category 4, Defiant</a:t>
-            </a:r>
-          </a:p>
-        </p:txBody>
-      </p:sp>
-      <p:sp>
-        <p:nvSpPr>
-          <p:cNvPr id="10" name="TextBox 9"/>
-          <p:cNvSpPr txBox="1"/>
-          <p:nvPr/>
-        </p:nvSpPr>
-        <p:spPr>
-          <a:xfrm>
-            <a:off x="7240219" y="1115568"/>
-            <a:ext cx="2200046" cy="1447800"/>
-          </a:xfrm>
-          <a:prstGeom prst="rect">
-            <a:avLst/>
-          </a:prstGeom>
-          <a:noFill/>
-        </p:spPr>
-        <p:txBody>
-          <a:bodyPr wrap="square">
-            <a:spAutoFit/>
-          </a:bodyPr>
-          <a:lstStyle/>
-          <a:p>
-            <a:r>
-              <a:rPr sz="800">
-                <a:hlinkClick r:id="rId14"/>
-              </a:rPr>
-              <a:t>Lofar 1</a:t>
-            </a:r>
-          </a:p>
-          <a:p>
-            <a:r>
-              <a:rPr sz="800">
-                <a:hlinkClick r:id="rId15"/>
-              </a:rPr>
-              <a:t>Lofar 2</a:t>
-            </a:r>
-          </a:p>
-          <a:p>
-            <a:r>
-              <a:rPr sz="800">
-                <a:hlinkClick r:id="rId16"/>
-              </a:rPr>
-              <a:t>Lofar 3</a:t>
-            </a:r>
-          </a:p>
-          <a:p>
-            <a:r>
-              <a:rPr sz="800">
-                <a:hlinkClick r:id="rId17"/>
-              </a:rPr>
-              <a:t>Lofar 4</a:t>
-            </a:r>
-          </a:p>
-        </p:txBody>
-      </p:sp>
-      <p:sp>
-        <p:nvSpPr>
-          <p:cNvPr id="11" name="Rounded Rectangle 10"/>
-          <p:cNvSpPr/>
-          <p:nvPr>
-            <a:hlinkClick r:id="rId18"/>
-          </p:nvPr>
-        </p:nvSpPr>
-        <p:spPr>
-          <a:xfrm>
-            <a:off x="9531705" y="731520"/>
-            <a:ext cx="2200046" cy="365760"/>
-          </a:xfrm>
-          <a:prstGeom prst="roundRect">
-            <a:avLst/>
-          </a:prstGeom>
-          <a:solidFill>
-            <a:srgbClr val="E8EEF7"/>
-          </a:solidFill>
-          <a:ln>
-            <a:solidFill>
-              <a:srgbClr val="1F3A5F"/>
-            </a:solidFill>
-          </a:ln>
-        </p:spPr>
-        <p:style>
-          <a:lnRef idx="1">
-            <a:schemeClr val="accent1"/>
-          </a:lnRef>
-          <a:fillRef idx="3">
-            <a:schemeClr val="accent1"/>
-          </a:fillRef>
-          <a:effectRef idx="2">
-            <a:schemeClr val="accent1"/>
-          </a:effectRef>
-          <a:fontRef idx="minor">
-            <a:schemeClr val="lt1"/>
-          </a:fontRef>
-        </p:style>
-        <p:txBody>
-          <a:bodyPr rtlCol="0" anchor="ctr" lIns="45720" rIns="45720"/>
-          <a:lstStyle/>
-          <a:p>
-            <a:pPr algn="ctr"/>
-            <a:r>
-              <a:rPr sz="900">
-                <a:solidFill>
-                  <a:srgbClr val="1F3A5F"/>
-                </a:solidFill>
-              </a:rPr>
-              <a:t>Gram 5: FR Nebulon-B, Category 4, Tatooine</a:t>
-            </a:r>
-          </a:p>
-        </p:txBody>
-      </p:sp>
-      <p:sp>
-        <p:nvSpPr>
-          <p:cNvPr id="12" name="TextBox 11"/>
-          <p:cNvSpPr txBox="1"/>
-          <p:nvPr/>
-        </p:nvSpPr>
-        <p:spPr>
-          <a:xfrm>
-            <a:off x="9531705" y="1115568"/>
-            <a:ext cx="2200046" cy="1447800"/>
-          </a:xfrm>
-          <a:prstGeom prst="rect">
-            <a:avLst/>
-          </a:prstGeom>
-          <a:noFill/>
-        </p:spPr>
-        <p:txBody>
-          <a:bodyPr wrap="square">
-            <a:spAutoFit/>
-          </a:bodyPr>
-          <a:lstStyle/>
-          <a:p>
-            <a:r>
-              <a:rPr sz="800">
-                <a:hlinkClick r:id="rId19"/>
-              </a:rPr>
-              <a:t>Lofar 1</a:t>
-            </a:r>
-          </a:p>
-          <a:p>
-            <a:r>
-              <a:rPr sz="800">
-                <a:hlinkClick r:id="rId20"/>
-              </a:rPr>
-              <a:t>Lofar 2</a:t>
-            </a:r>
-          </a:p>
-          <a:p>
-            <a:r>
-              <a:rPr sz="800">
-                <a:hlinkClick r:id="rId21"/>
-              </a:rPr>
-              <a:t>Lofar 3</a:t>
-            </a:r>
-          </a:p>
-          <a:p>
-            <a:r>
-              <a:rPr sz="800">
-                <a:hlinkClick r:id="rId22"/>
-              </a:rPr>
-              <a:t>Lofar 4</a:t>
-            </a:r>
-          </a:p>
-        </p:txBody>
-      </p:sp>
-      <p:sp>
-        <p:nvSpPr>
-          <p:cNvPr id="13" name="Rounded Rectangle 12"/>
-          <p:cNvSpPr/>
-          <p:nvPr>
-            <a:hlinkClick r:id="rId23"/>
-          </p:nvPr>
-        </p:nvSpPr>
-        <p:spPr>
-          <a:xfrm>
-            <a:off x="365760" y="2682240"/>
-            <a:ext cx="2200046" cy="365760"/>
-          </a:xfrm>
-          <a:prstGeom prst="roundRect">
-            <a:avLst/>
-          </a:prstGeom>
-          <a:solidFill>
-            <a:srgbClr val="E8EEF7"/>
-          </a:solidFill>
-          <a:ln>
-            <a:solidFill>
-              <a:srgbClr val="1F3A5F"/>
-            </a:solidFill>
-          </a:ln>
-        </p:spPr>
-        <p:style>
-          <a:lnRef idx="1">
-            <a:schemeClr val="accent1"/>
-          </a:lnRef>
-          <a:fillRef idx="3">
-            <a:schemeClr val="accent1"/>
-          </a:fillRef>
-          <a:effectRef idx="2">
-            <a:schemeClr val="accent1"/>
-          </a:effectRef>
-          <a:fontRef idx="minor">
-            <a:schemeClr val="lt1"/>
-          </a:fontRef>
-        </p:style>
-        <p:txBody>
-          <a:bodyPr rtlCol="0" anchor="ctr" lIns="45720" rIns="45720"/>
-          <a:lstStyle/>
-          <a:p>
-            <a:pPr algn="ctr"/>
-            <a:r>
-              <a:rPr sz="900">
-                <a:solidFill>
-                  <a:srgbClr val="1F3A5F"/>
-                </a:solidFill>
-              </a:rPr>
-              <a:t>Gram 6: FR Devastator, Category 3, Trill</a:t>
-            </a:r>
-          </a:p>
-        </p:txBody>
-      </p:sp>
-      <p:sp>
-        <p:nvSpPr>
-          <p:cNvPr id="14" name="TextBox 13"/>
-          <p:cNvSpPr txBox="1"/>
-          <p:nvPr/>
-        </p:nvSpPr>
-        <p:spPr>
-          <a:xfrm>
-            <a:off x="365760" y="3066288"/>
-            <a:ext cx="2200046" cy="1447800"/>
-          </a:xfrm>
-          <a:prstGeom prst="rect">
-            <a:avLst/>
-          </a:prstGeom>
-          <a:noFill/>
-        </p:spPr>
-        <p:txBody>
-          <a:bodyPr wrap="square">
-            <a:spAutoFit/>
-          </a:bodyPr>
-          <a:lstStyle/>
-          <a:p>
-            <a:r>
-              <a:rPr sz="800">
-                <a:hlinkClick r:id="rId24"/>
-              </a:rPr>
-              <a:t>Lofar 1</a:t>
-            </a:r>
-          </a:p>
-        </p:txBody>
-      </p:sp>
-      <p:sp>
-        <p:nvSpPr>
-          <p:cNvPr id="15" name="Rounded Rectangle 14"/>
-          <p:cNvSpPr/>
-          <p:nvPr>
-            <a:hlinkClick r:id="rId25"/>
-          </p:nvPr>
-        </p:nvSpPr>
-        <p:spPr>
-          <a:xfrm>
-            <a:off x="2657246" y="2682240"/>
-            <a:ext cx="2200046" cy="365760"/>
-          </a:xfrm>
-          <a:prstGeom prst="roundRect">
-            <a:avLst/>
-          </a:prstGeom>
-          <a:solidFill>
-            <a:srgbClr val="E8EEF7"/>
-          </a:solidFill>
-          <a:ln>
-            <a:solidFill>
-              <a:srgbClr val="1F3A5F"/>
-            </a:solidFill>
-          </a:ln>
-        </p:spPr>
-        <p:style>
-          <a:lnRef idx="1">
-            <a:schemeClr val="accent1"/>
-          </a:lnRef>
-          <a:fillRef idx="3">
-            <a:schemeClr val="accent1"/>
-          </a:fillRef>
-          <a:effectRef idx="2">
-            <a:schemeClr val="accent1"/>
-          </a:effectRef>
-          <a:fontRef idx="minor">
-            <a:schemeClr val="lt1"/>
-          </a:fontRef>
-        </p:style>
-        <p:txBody>
-          <a:bodyPr rtlCol="0" anchor="ctr" lIns="45720" rIns="45720"/>
-          <a:lstStyle/>
-          <a:p>
-            <a:pPr algn="ctr"/>
-            <a:r>
-              <a:rPr sz="900">
-                <a:solidFill>
-                  <a:srgbClr val="1F3A5F"/>
-                </a:solidFill>
-              </a:rPr>
-              <a:t>Gram 9: Discovery contact bearing 231, codename Gandalf</a:t>
-            </a:r>
-          </a:p>
-        </p:txBody>
-      </p:sp>
-      <p:sp>
-        <p:nvSpPr>
-          <p:cNvPr id="16" name="TextBox 15"/>
-          <p:cNvSpPr txBox="1"/>
-          <p:nvPr/>
-        </p:nvSpPr>
-        <p:spPr>
-          <a:xfrm>
-            <a:off x="2657246" y="3066288"/>
-            <a:ext cx="2200046" cy="1447800"/>
-          </a:xfrm>
-          <a:prstGeom prst="rect">
-            <a:avLst/>
-          </a:prstGeom>
-          <a:noFill/>
-        </p:spPr>
-        <p:txBody>
-          <a:bodyPr wrap="square">
-            <a:spAutoFit/>
-          </a:bodyPr>
-          <a:lstStyle/>
-          <a:p>
-            <a:r>
-              <a:rPr sz="800">
-                <a:hlinkClick r:id="rId26"/>
-              </a:rPr>
-              <a:t>Lofar 1</a:t>
-            </a:r>
-          </a:p>
-          <a:p>
-            <a:r>
-              <a:rPr sz="800">
-                <a:hlinkClick r:id="rId27"/>
-              </a:rPr>
-              <a:t>Lofar 2</a:t>
-            </a:r>
-          </a:p>
-        </p:txBody>
-      </p:sp>
-      <p:sp>
-        <p:nvSpPr>
-          <p:cNvPr id="17" name="Rounded Rectangle 16"/>
-          <p:cNvSpPr/>
-          <p:nvPr>
-            <a:hlinkClick r:id="rId28"/>
-          </p:nvPr>
-        </p:nvSpPr>
-        <p:spPr>
-          <a:xfrm>
-            <a:off x="4948732" y="2682240"/>
-            <a:ext cx="2200046" cy="365760"/>
-          </a:xfrm>
-          <a:prstGeom prst="roundRect">
-            <a:avLst/>
-          </a:prstGeom>
-          <a:solidFill>
-            <a:srgbClr val="E8EEF7"/>
-          </a:solidFill>
-          <a:ln>
-            <a:solidFill>
-              <a:srgbClr val="1F3A5F"/>
-            </a:solidFill>
-          </a:ln>
-        </p:spPr>
-        <p:style>
-          <a:lnRef idx="1">
-            <a:schemeClr val="accent1"/>
-          </a:lnRef>
-          <a:fillRef idx="3">
-            <a:schemeClr val="accent1"/>
-          </a:fillRef>
-          <a:effectRef idx="2">
-            <a:schemeClr val="accent1"/>
-          </a:effectRef>
-          <a:fontRef idx="minor">
-            <a:schemeClr val="lt1"/>
-          </a:fontRef>
-        </p:style>
-        <p:txBody>
-          <a:bodyPr rtlCol="0" anchor="ctr" lIns="45720" rIns="45720"/>
-          <a:lstStyle/>
-          <a:p>
-            <a:pPr algn="ctr"/>
-            <a:r>
-              <a:rPr sz="900">
-                <a:solidFill>
-                  <a:srgbClr val="1F3A5F"/>
-                </a:solidFill>
-              </a:rPr>
-              <a:t>Gram 11: FR Devastator, Category 3, Tantive</a:t>
-            </a:r>
-          </a:p>
-        </p:txBody>
-      </p:sp>
-      <p:sp>
-        <p:nvSpPr>
-          <p:cNvPr id="18" name="TextBox 17"/>
-          <p:cNvSpPr txBox="1"/>
-          <p:nvPr/>
-        </p:nvSpPr>
-        <p:spPr>
-          <a:xfrm>
-            <a:off x="4948732" y="3066288"/>
-            <a:ext cx="2200046" cy="1447800"/>
-          </a:xfrm>
-          <a:prstGeom prst="rect">
-            <a:avLst/>
-          </a:prstGeom>
-          <a:noFill/>
-        </p:spPr>
-        <p:txBody>
-          <a:bodyPr wrap="square">
-            <a:spAutoFit/>
-          </a:bodyPr>
-          <a:lstStyle/>
-          <a:p>
-            <a:r>
-              <a:rPr sz="800">
-                <a:hlinkClick r:id="rId29"/>
-              </a:rPr>
-              <a:t>Lofar 1</a:t>
-            </a:r>
-          </a:p>
-          <a:p>
-            <a:r>
-              <a:rPr sz="800">
-                <a:hlinkClick r:id="rId30"/>
-              </a:rPr>
-              <a:t>Lofar 2</a:t>
-            </a:r>
-          </a:p>
-        </p:txBody>
-      </p:sp>
-      <p:sp>
-        <p:nvSpPr>
-          <p:cNvPr id="19" name="Rounded Rectangle 18"/>
-          <p:cNvSpPr/>
-          <p:nvPr>
-            <a:hlinkClick r:id="rId31"/>
-          </p:nvPr>
-        </p:nvSpPr>
-        <p:spPr>
-          <a:xfrm>
-            <a:off x="7240219" y="2682240"/>
-            <a:ext cx="2200046" cy="365760"/>
-          </a:xfrm>
-          <a:prstGeom prst="roundRect">
-            <a:avLst/>
-          </a:prstGeom>
-          <a:solidFill>
-            <a:srgbClr val="E8EEF7"/>
-          </a:solidFill>
-          <a:ln>
-            <a:solidFill>
-              <a:srgbClr val="1F3A5F"/>
-            </a:solidFill>
-          </a:ln>
-        </p:spPr>
-        <p:style>
-          <a:lnRef idx="1">
-            <a:schemeClr val="accent1"/>
-          </a:lnRef>
-          <a:fillRef idx="3">
-            <a:schemeClr val="accent1"/>
-          </a:fillRef>
-          <a:effectRef idx="2">
-            <a:schemeClr val="accent1"/>
-          </a:effectRef>
-          <a:fontRef idx="minor">
-            <a:schemeClr val="lt1"/>
-          </a:fontRef>
-        </p:style>
-        <p:txBody>
-          <a:bodyPr rtlCol="0" anchor="ctr" lIns="45720" rIns="45720"/>
-          <a:lstStyle/>
-          <a:p>
-            <a:pPr algn="ctr"/>
-            <a:r>
-              <a:rPr sz="900">
-                <a:solidFill>
-                  <a:srgbClr val="1F3A5F"/>
-                </a:solidFill>
-              </a:rPr>
-              <a:t>Gram 12: FR Star Destroyer, Category 3, Tantive</a:t>
-            </a:r>
-          </a:p>
-        </p:txBody>
-      </p:sp>
-      <p:sp>
-        <p:nvSpPr>
-          <p:cNvPr id="20" name="TextBox 19"/>
-          <p:cNvSpPr txBox="1"/>
-          <p:nvPr/>
-        </p:nvSpPr>
-        <p:spPr>
-          <a:xfrm>
-            <a:off x="7240219" y="3066288"/>
-            <a:ext cx="2200046" cy="1447800"/>
-          </a:xfrm>
-          <a:prstGeom prst="rect">
-            <a:avLst/>
-          </a:prstGeom>
-          <a:noFill/>
-        </p:spPr>
-        <p:txBody>
-          <a:bodyPr wrap="square">
-            <a:spAutoFit/>
-          </a:bodyPr>
-          <a:lstStyle/>
-          <a:p>
-            <a:r>
-              <a:rPr sz="800">
-                <a:hlinkClick r:id="rId32"/>
-              </a:rPr>
-              <a:t>Lofar 1</a:t>
-            </a:r>
-          </a:p>
-          <a:p>
-            <a:r>
-              <a:rPr sz="800">
-                <a:hlinkClick r:id="rId33"/>
-              </a:rPr>
-              <a:t>Lofar 2</a:t>
-            </a:r>
-          </a:p>
-          <a:p>
-            <a:r>
-              <a:rPr sz="800">
-                <a:hlinkClick r:id="rId34"/>
-              </a:rPr>
-              <a:t>Lofar 3</a:t>
-            </a:r>
-          </a:p>
-        </p:txBody>
-      </p:sp>
-      <p:sp>
-        <p:nvSpPr>
-          <p:cNvPr id="21" name="Rounded Rectangle 20"/>
-          <p:cNvSpPr/>
-          <p:nvPr>
-            <a:hlinkClick r:id="rId35"/>
-          </p:nvPr>
-        </p:nvSpPr>
-        <p:spPr>
-          <a:xfrm>
-            <a:off x="9531705" y="2682240"/>
-            <a:ext cx="2200046" cy="365760"/>
-          </a:xfrm>
-          <a:prstGeom prst="roundRect">
-            <a:avLst/>
-          </a:prstGeom>
-          <a:solidFill>
-            <a:srgbClr val="E8EEF7"/>
-          </a:solidFill>
-          <a:ln>
-            <a:solidFill>
-              <a:srgbClr val="1F3A5F"/>
-            </a:solidFill>
-          </a:ln>
-        </p:spPr>
-        <p:style>
-          <a:lnRef idx="1">
-            <a:schemeClr val="accent1"/>
-          </a:lnRef>
-          <a:fillRef idx="3">
-            <a:schemeClr val="accent1"/>
-          </a:fillRef>
-          <a:effectRef idx="2">
-            <a:schemeClr val="accent1"/>
-          </a:effectRef>
-          <a:fontRef idx="minor">
-            <a:schemeClr val="lt1"/>
-          </a:fontRef>
-        </p:style>
-        <p:txBody>
-          <a:bodyPr rtlCol="0" anchor="ctr" lIns="45720" rIns="45720"/>
-          <a:lstStyle/>
-          <a:p>
-            <a:pPr algn="ctr"/>
-            <a:r>
-              <a:rPr sz="900">
-                <a:solidFill>
-                  <a:srgbClr val="1F3A5F"/>
-                </a:solidFill>
-              </a:rPr>
-              <a:t>Gram 13: FR Imperial-class, Category 1, Yavin</a:t>
-            </a:r>
-          </a:p>
-        </p:txBody>
-      </p:sp>
-      <p:sp>
-        <p:nvSpPr>
-          <p:cNvPr id="22" name="TextBox 21"/>
-          <p:cNvSpPr txBox="1"/>
-          <p:nvPr/>
-        </p:nvSpPr>
-        <p:spPr>
-          <a:xfrm>
-            <a:off x="9531705" y="3066288"/>
-            <a:ext cx="2200046" cy="1447800"/>
-          </a:xfrm>
-          <a:prstGeom prst="rect">
-            <a:avLst/>
-          </a:prstGeom>
-          <a:noFill/>
-        </p:spPr>
-        <p:txBody>
-          <a:bodyPr wrap="square">
-            <a:spAutoFit/>
-          </a:bodyPr>
-          <a:lstStyle/>
-          <a:p>
-            <a:r>
-              <a:rPr sz="800">
-                <a:hlinkClick r:id="rId36"/>
-              </a:rPr>
-              <a:t>Lofar 1</a:t>
-            </a:r>
-          </a:p>
-          <a:p>
-            <a:r>
-              <a:rPr sz="800">
-                <a:hlinkClick r:id="rId37"/>
-              </a:rPr>
-              <a:t>Lofar 2</a:t>
-            </a:r>
-          </a:p>
-          <a:p>
-            <a:r>
-              <a:rPr sz="800">
-                <a:hlinkClick r:id="rId38"/>
-              </a:rPr>
-              <a:t>Lofar 3</a:t>
-            </a:r>
-          </a:p>
-          <a:p>
-            <a:r>
-              <a:rPr sz="800">
-                <a:hlinkClick r:id="rId39"/>
-              </a:rPr>
-              <a:t>Lofar 4</a:t>
-            </a:r>
-          </a:p>
-        </p:txBody>
-      </p:sp>
-      <p:sp>
-        <p:nvSpPr>
-          <p:cNvPr id="23" name="Rounded Rectangle 22"/>
-          <p:cNvSpPr/>
-          <p:nvPr>
-            <a:hlinkClick r:id="rId40"/>
-          </p:nvPr>
-        </p:nvSpPr>
-        <p:spPr>
-          <a:xfrm>
-            <a:off x="365760" y="4632960"/>
-            <a:ext cx="2200046" cy="365760"/>
-          </a:xfrm>
-          <a:prstGeom prst="roundRect">
-            <a:avLst/>
-          </a:prstGeom>
-          <a:solidFill>
-            <a:srgbClr val="E8EEF7"/>
-          </a:solidFill>
-          <a:ln>
-            <a:solidFill>
-              <a:srgbClr val="1F3A5F"/>
-            </a:solidFill>
-          </a:ln>
-        </p:spPr>
-        <p:style>
-          <a:lnRef idx="1">
-            <a:schemeClr val="accent1"/>
-          </a:lnRef>
-          <a:fillRef idx="3">
-            <a:schemeClr val="accent1"/>
-          </a:fillRef>
-          <a:effectRef idx="2">
-            <a:schemeClr val="accent1"/>
-          </a:effectRef>
-          <a:fontRef idx="minor">
-            <a:schemeClr val="lt1"/>
-          </a:fontRef>
-        </p:style>
-        <p:txBody>
-          <a:bodyPr rtlCol="0" anchor="ctr" lIns="45720" rIns="45720"/>
-          <a:lstStyle/>
-          <a:p>
-            <a:pPr algn="ctr"/>
-            <a:r>
-              <a:rPr sz="900">
-                <a:solidFill>
-                  <a:srgbClr val="1F3A5F"/>
-                </a:solidFill>
-              </a:rPr>
-              <a:t>Gram 15: FR Mon Calamari Cruiser, Category 2, Bajor</a:t>
-            </a:r>
-          </a:p>
-        </p:txBody>
-      </p:sp>
-      <p:sp>
-        <p:nvSpPr>
-          <p:cNvPr id="24" name="TextBox 23"/>
-          <p:cNvSpPr txBox="1"/>
-          <p:nvPr/>
-        </p:nvSpPr>
-        <p:spPr>
-          <a:xfrm>
-            <a:off x="365760" y="5017008"/>
-            <a:ext cx="2200046" cy="1447800"/>
-          </a:xfrm>
-          <a:prstGeom prst="rect">
-            <a:avLst/>
-          </a:prstGeom>
-          <a:noFill/>
-        </p:spPr>
-        <p:txBody>
-          <a:bodyPr wrap="square">
-            <a:spAutoFit/>
-          </a:bodyPr>
-          <a:lstStyle/>
-          <a:p>
-            <a:r>
-              <a:rPr sz="800">
-                <a:hlinkClick r:id="rId41"/>
-              </a:rPr>
-              <a:t>Lofar 1</a:t>
-            </a:r>
-          </a:p>
-          <a:p>
-            <a:r>
-              <a:rPr sz="800">
-                <a:hlinkClick r:id="rId42"/>
-              </a:rPr>
-              <a:t>Lofar 2</a:t>
-            </a:r>
-          </a:p>
-          <a:p>
-            <a:r>
-              <a:rPr sz="800">
-                <a:hlinkClick r:id="rId43"/>
-              </a:rPr>
-              <a:t>Lofar 3</a:t>
-            </a:r>
-          </a:p>
-          <a:p>
-            <a:r>
-              <a:rPr sz="800">
-                <a:hlinkClick r:id="rId44"/>
-              </a:rPr>
-              <a:t>Lofar 4</a:t>
-            </a:r>
-          </a:p>
-        </p:txBody>
-      </p:sp>
-      <p:sp>
-        <p:nvSpPr>
-          <p:cNvPr id="25" name="Rounded Rectangle 24"/>
-          <p:cNvSpPr/>
-          <p:nvPr>
-            <a:hlinkClick r:id="rId45"/>
-          </p:nvPr>
-        </p:nvSpPr>
-        <p:spPr>
-          <a:xfrm>
-            <a:off x="2657246" y="4632960"/>
-            <a:ext cx="2200046" cy="365760"/>
-          </a:xfrm>
-          <a:prstGeom prst="roundRect">
-            <a:avLst/>
-          </a:prstGeom>
-          <a:solidFill>
-            <a:srgbClr val="E8EEF7"/>
-          </a:solidFill>
-          <a:ln>
-            <a:solidFill>
-              <a:srgbClr val="1F3A5F"/>
-            </a:solidFill>
-          </a:ln>
-        </p:spPr>
-        <p:style>
-          <a:lnRef idx="1">
-            <a:schemeClr val="accent1"/>
-          </a:lnRef>
-          <a:fillRef idx="3">
-            <a:schemeClr val="accent1"/>
-          </a:fillRef>
-          <a:effectRef idx="2">
-            <a:schemeClr val="accent1"/>
-          </a:effectRef>
-          <a:fontRef idx="minor">
-            <a:schemeClr val="lt1"/>
-          </a:fontRef>
-        </p:style>
-        <p:txBody>
-          <a:bodyPr rtlCol="0" anchor="ctr" lIns="45720" rIns="45720"/>
-          <a:lstStyle/>
-          <a:p>
-            <a:pPr algn="ctr"/>
-            <a:r>
-              <a:rPr sz="900">
-                <a:solidFill>
-                  <a:srgbClr val="1F3A5F"/>
-                </a:solidFill>
-              </a:rPr>
-              <a:t>Gram 17: FR Razor Crest, Category 1, Mustafar</a:t>
-            </a:r>
-          </a:p>
-        </p:txBody>
-      </p:sp>
-      <p:sp>
-        <p:nvSpPr>
-          <p:cNvPr id="26" name="TextBox 25"/>
-          <p:cNvSpPr txBox="1"/>
-          <p:nvPr/>
-        </p:nvSpPr>
-        <p:spPr>
-          <a:xfrm>
-            <a:off x="2657246" y="5017008"/>
-            <a:ext cx="2200046" cy="1447800"/>
-          </a:xfrm>
-          <a:prstGeom prst="rect">
-            <a:avLst/>
-          </a:prstGeom>
-          <a:noFill/>
-        </p:spPr>
-        <p:txBody>
-          <a:bodyPr wrap="square">
-            <a:spAutoFit/>
-          </a:bodyPr>
-          <a:lstStyle/>
-          <a:p>
-            <a:r>
-              <a:rPr sz="800">
-                <a:hlinkClick r:id="rId46"/>
-              </a:rPr>
-              <a:t>Lofar 1</a:t>
-            </a:r>
-          </a:p>
-          <a:p>
-            <a:r>
-              <a:rPr sz="800">
-                <a:hlinkClick r:id="rId47"/>
-              </a:rPr>
-              <a:t>Lofar 2</a:t>
-            </a:r>
-          </a:p>
-          <a:p>
-            <a:r>
-              <a:rPr sz="800">
-                <a:hlinkClick r:id="rId48"/>
-              </a:rPr>
-              <a:t>Lofar 3</a:t>
-            </a:r>
-          </a:p>
-          <a:p>
-            <a:r>
-              <a:rPr sz="800">
-                <a:hlinkClick r:id="rId49"/>
-              </a:rPr>
-              <a:t>Lofar 4</a:t>
-            </a:r>
-          </a:p>
-        </p:txBody>
-      </p:sp>
-      <p:sp>
-        <p:nvSpPr>
-          <p:cNvPr id="27" name="Rounded Rectangle 26"/>
-          <p:cNvSpPr/>
-          <p:nvPr>
-            <a:hlinkClick r:id="rId50"/>
-          </p:nvPr>
-        </p:nvSpPr>
-        <p:spPr>
-          <a:xfrm>
-            <a:off x="4948732" y="4632960"/>
-            <a:ext cx="2200046" cy="365760"/>
-          </a:xfrm>
-          <a:prstGeom prst="roundRect">
-            <a:avLst/>
-          </a:prstGeom>
-          <a:solidFill>
-            <a:srgbClr val="E8EEF7"/>
-          </a:solidFill>
-          <a:ln>
-            <a:solidFill>
-              <a:srgbClr val="1F3A5F"/>
-            </a:solidFill>
-          </a:ln>
-        </p:spPr>
-        <p:style>
-          <a:lnRef idx="1">
-            <a:schemeClr val="accent1"/>
-          </a:lnRef>
-          <a:fillRef idx="3">
-            <a:schemeClr val="accent1"/>
-          </a:fillRef>
-          <a:effectRef idx="2">
-            <a:schemeClr val="accent1"/>
-          </a:effectRef>
-          <a:fontRef idx="minor">
-            <a:schemeClr val="lt1"/>
-          </a:fontRef>
-        </p:style>
-        <p:txBody>
-          <a:bodyPr rtlCol="0" anchor="ctr" lIns="45720" rIns="45720"/>
-          <a:lstStyle/>
-          <a:p>
-            <a:pPr algn="ctr"/>
-            <a:r>
-              <a:rPr sz="900">
-                <a:solidFill>
-                  <a:srgbClr val="1F3A5F"/>
-                </a:solidFill>
-              </a:rPr>
-              <a:t>Gram 18: FR X-wing, Category 3, Defiant</a:t>
-            </a:r>
-          </a:p>
-        </p:txBody>
-      </p:sp>
-      <p:sp>
-        <p:nvSpPr>
-          <p:cNvPr id="28" name="TextBox 27"/>
-          <p:cNvSpPr txBox="1"/>
-          <p:nvPr/>
-        </p:nvSpPr>
-        <p:spPr>
-          <a:xfrm>
-            <a:off x="4948732" y="5017008"/>
-            <a:ext cx="2200046" cy="1447800"/>
-          </a:xfrm>
-          <a:prstGeom prst="rect">
-            <a:avLst/>
-          </a:prstGeom>
-          <a:noFill/>
-        </p:spPr>
-        <p:txBody>
-          <a:bodyPr wrap="square">
-            <a:spAutoFit/>
-          </a:bodyPr>
-          <a:lstStyle/>
-          <a:p>
-            <a:r>
-              <a:rPr sz="800">
-                <a:hlinkClick r:id="rId51"/>
-              </a:rPr>
-              <a:t>Lofar 1</a:t>
-            </a:r>
-          </a:p>
-        </p:txBody>
-      </p:sp>
-      <p:sp>
-        <p:nvSpPr>
-          <p:cNvPr id="29" name="Rounded Rectangle 28"/>
-          <p:cNvSpPr/>
-          <p:nvPr>
-            <a:hlinkClick r:id="rId52"/>
-          </p:nvPr>
-        </p:nvSpPr>
-        <p:spPr>
-          <a:xfrm>
-            <a:off x="7240219" y="4632960"/>
-            <a:ext cx="2200046" cy="365760"/>
-          </a:xfrm>
-          <a:prstGeom prst="roundRect">
-            <a:avLst/>
-          </a:prstGeom>
-          <a:solidFill>
-            <a:srgbClr val="E8EEF7"/>
-          </a:solidFill>
-          <a:ln>
-            <a:solidFill>
-              <a:srgbClr val="1F3A5F"/>
-            </a:solidFill>
-          </a:ln>
-        </p:spPr>
-        <p:style>
-          <a:lnRef idx="1">
-            <a:schemeClr val="accent1"/>
-          </a:lnRef>
-          <a:fillRef idx="3">
-            <a:schemeClr val="accent1"/>
-          </a:fillRef>
-          <a:effectRef idx="2">
-            <a:schemeClr val="accent1"/>
-          </a:effectRef>
-          <a:fontRef idx="minor">
-            <a:schemeClr val="lt1"/>
-          </a:fontRef>
-        </p:style>
-        <p:txBody>
-          <a:bodyPr rtlCol="0" anchor="ctr" lIns="45720" rIns="45720"/>
-          <a:lstStyle/>
-          <a:p>
-            <a:pPr algn="ctr"/>
-            <a:r>
-              <a:rPr sz="900">
-                <a:solidFill>
-                  <a:srgbClr val="1F3A5F"/>
-                </a:solidFill>
-              </a:rPr>
-              <a:t>Gram 19: Devastator contact bearing 194, codename Trill</a:t>
-            </a:r>
-          </a:p>
-        </p:txBody>
-      </p:sp>
-      <p:sp>
-        <p:nvSpPr>
-          <p:cNvPr id="30" name="TextBox 29"/>
-          <p:cNvSpPr txBox="1"/>
-          <p:nvPr/>
-        </p:nvSpPr>
-        <p:spPr>
-          <a:xfrm>
-            <a:off x="7240219" y="5017008"/>
-            <a:ext cx="2200046" cy="1447800"/>
-          </a:xfrm>
-          <a:prstGeom prst="rect">
-            <a:avLst/>
-          </a:prstGeom>
-          <a:noFill/>
-        </p:spPr>
-        <p:txBody>
-          <a:bodyPr wrap="square">
-            <a:spAutoFit/>
-          </a:bodyPr>
-          <a:lstStyle/>
-          <a:p>
-            <a:r>
-              <a:rPr sz="800">
-                <a:hlinkClick r:id="rId53"/>
-              </a:rPr>
-              <a:t>Lofar 1</a:t>
-            </a:r>
-          </a:p>
-          <a:p>
-            <a:r>
-              <a:rPr sz="800">
-                <a:hlinkClick r:id="rId54"/>
-              </a:rPr>
-              <a:t>Lofar 2</a:t>
-            </a:r>
-          </a:p>
-          <a:p>
-            <a:r>
-              <a:rPr sz="800">
-                <a:hlinkClick r:id="rId55"/>
-              </a:rPr>
-              <a:t>Lofar 3</a:t>
-            </a:r>
-          </a:p>
-          <a:p>
-            <a:r>
-              <a:rPr sz="800">
-                <a:hlinkClick r:id="rId56"/>
-              </a:rPr>
-              <a:t>Lofar 4</a:t>
-            </a:r>
-          </a:p>
-        </p:txBody>
-      </p:sp>
-      <p:sp>
-        <p:nvSpPr>
-          <p:cNvPr id="31" name="Rounded Rectangle 30"/>
-          <p:cNvSpPr/>
-          <p:nvPr>
-            <a:hlinkClick r:id="rId57"/>
-          </p:nvPr>
-        </p:nvSpPr>
-        <p:spPr>
-          <a:xfrm>
-            <a:off x="9531705" y="4632960"/>
-            <a:ext cx="2200046" cy="365760"/>
-          </a:xfrm>
-          <a:prstGeom prst="roundRect">
-            <a:avLst/>
-          </a:prstGeom>
-          <a:solidFill>
-            <a:srgbClr val="E8EEF7"/>
-          </a:solidFill>
-          <a:ln>
-            <a:solidFill>
-              <a:srgbClr val="1F3A5F"/>
-            </a:solidFill>
-          </a:ln>
-        </p:spPr>
-        <p:style>
-          <a:lnRef idx="1">
-            <a:schemeClr val="accent1"/>
-          </a:lnRef>
-          <a:fillRef idx="3">
-            <a:schemeClr val="accent1"/>
-          </a:fillRef>
-          <a:effectRef idx="2">
-            <a:schemeClr val="accent1"/>
-          </a:effectRef>
-          <a:fontRef idx="minor">
-            <a:schemeClr val="lt1"/>
-          </a:fontRef>
-        </p:style>
-        <p:txBody>
-          <a:bodyPr rtlCol="0" anchor="ctr" lIns="45720" rIns="45720"/>
-          <a:lstStyle/>
-          <a:p>
-            <a:pPr algn="ctr"/>
-            <a:r>
-              <a:rPr sz="900">
-                <a:solidFill>
-                  <a:srgbClr val="1F3A5F"/>
-                </a:solidFill>
-              </a:rPr>
-              <a:t>Gram 20: FR TIE Fighter, Category 1, Coruscant</a:t>
-            </a:r>
-          </a:p>
-        </p:txBody>
-      </p:sp>
-      <p:sp>
-        <p:nvSpPr>
-          <p:cNvPr id="32" name="TextBox 31"/>
-          <p:cNvSpPr txBox="1"/>
-          <p:nvPr/>
-        </p:nvSpPr>
-        <p:spPr>
-          <a:xfrm>
-            <a:off x="9531705" y="5017008"/>
-            <a:ext cx="2200046" cy="1447800"/>
-          </a:xfrm>
-          <a:prstGeom prst="rect">
-            <a:avLst/>
-          </a:prstGeom>
-          <a:noFill/>
-        </p:spPr>
-        <p:txBody>
-          <a:bodyPr wrap="square">
-            <a:spAutoFit/>
-          </a:bodyPr>
-          <a:lstStyle/>
-          <a:p>
-            <a:r>
-              <a:rPr sz="800">
-                <a:hlinkClick r:id="rId58"/>
-              </a:rPr>
-              <a:t>Lofar 1</a:t>
-            </a:r>
-          </a:p>
-          <a:p>
-            <a:r>
-              <a:rPr sz="800">
-                <a:hlinkClick r:id="rId59"/>
-              </a:rPr>
-              <a:t>Lofar 2</a:t>
-            </a:r>
-          </a:p>
-          <a:p>
-            <a:r>
-              <a:rPr sz="800">
-                <a:hlinkClick r:id="rId60"/>
-              </a:rPr>
-              <a:t>Lofar 3</a:t>
+              <a:t>Instructor Version</a:t>
             </a:r>
           </a:p>
         </p:txBody>
@@ -4727,7 +3224,7 @@
                   <a:srgbClr val="FFFFFF"/>
                 </a:solidFill>
               </a:rPr>
-              <a:t>Instructor Week 3 Grams — Page 2 of 3</a:t>
+              <a:t>Instructor Week 3 Grams — Page 1 of 3</a:t>
             </a:r>
           </a:p>
         </p:txBody>
@@ -4782,7 +3279,7 @@
                   <a:srgbClr val="1F3A5F"/>
                 </a:solidFill>
               </a:rPr>
-              <a:t>Gram 21: FR Discovery, Category 4, Defiant</a:t>
+              <a:t>Gram 1: Intrepid-class contact bearing 127, codename Defiant</a:t>
             </a:r>
           </a:p>
         </p:txBody>
@@ -4832,14 +3329,6 @@
               <a:t>Lofar 3</a:t>
             </a:r>
           </a:p>
-          <a:p>
-            <a:r>
-              <a:rPr sz="800">
-                <a:hlinkClick r:id="rId6"/>
-              </a:rPr>
-              <a:t>Lofar 4</a:t>
-            </a:r>
-          </a:p>
         </p:txBody>
       </p:sp>
       <p:sp>
@@ -4847,7 +3336,7 @@
           <p:cNvPr id="5" name="Rounded Rectangle 4"/>
           <p:cNvSpPr/>
           <p:nvPr>
-            <a:hlinkClick r:id="rId7"/>
+            <a:hlinkClick r:id="rId6"/>
           </p:nvPr>
         </p:nvSpPr>
         <p:spPr>
@@ -4892,7 +3381,7 @@
                   <a:srgbClr val="1F3A5F"/>
                 </a:solidFill>
               </a:rPr>
-              <a:t>Gram 22: Razor Crest contact bearing 239, codename Dank</a:t>
+              <a:t>Gram 2: FR Miranda-class, Category 3, Tatooine</a:t>
             </a:r>
           </a:p>
         </p:txBody>
@@ -4921,9 +3410,17 @@
           <a:p>
             <a:r>
               <a:rPr sz="800">
+                <a:hlinkClick r:id="rId7"/>
+              </a:rPr>
+              <a:t>Lofar 1</a:t>
+            </a:r>
+          </a:p>
+          <a:p>
+            <a:r>
+              <a:rPr sz="800">
                 <a:hlinkClick r:id="rId8"/>
               </a:rPr>
-              <a:t>Lofar 1</a:t>
+              <a:t>Lofar 2</a:t>
             </a:r>
           </a:p>
         </p:txBody>
@@ -4978,7 +3475,7 @@
                   <a:srgbClr val="1F3A5F"/>
                 </a:solidFill>
               </a:rPr>
-              <a:t>Gram 23: FR Devastator, Category 1, Risa</a:t>
+              <a:t>Gram 3: FR Outrider, Category 2, Cardassia</a:t>
             </a:r>
           </a:p>
         </p:txBody>
@@ -5012,6 +3509,22 @@
               <a:t>Lofar 1</a:t>
             </a:r>
           </a:p>
+          <a:p>
+            <a:r>
+              <a:rPr sz="800">
+                <a:hlinkClick r:id="rId11"/>
+              </a:rPr>
+              <a:t>Lofar 2</a:t>
+            </a:r>
+          </a:p>
+          <a:p>
+            <a:r>
+              <a:rPr sz="800">
+                <a:hlinkClick r:id="rId12"/>
+              </a:rPr>
+              <a:t>Lofar 3</a:t>
+            </a:r>
+          </a:p>
         </p:txBody>
       </p:sp>
       <p:sp>
@@ -5019,7 +3532,7 @@
           <p:cNvPr id="9" name="Rounded Rectangle 8"/>
           <p:cNvSpPr/>
           <p:nvPr>
-            <a:hlinkClick r:id="rId11"/>
+            <a:hlinkClick r:id="rId13"/>
           </p:nvPr>
         </p:nvSpPr>
         <p:spPr>
@@ -5064,7 +3577,7 @@
                   <a:srgbClr val="1F3A5F"/>
                 </a:solidFill>
               </a:rPr>
-              <a:t>Gram 25: FR Imperial-class, Category 4, Coruscant</a:t>
+              <a:t>Gram 4: FR Defiant, Category 4, Defiant</a:t>
             </a:r>
           </a:p>
         </p:txBody>
@@ -5093,7 +3606,7 @@
           <a:p>
             <a:r>
               <a:rPr sz="800">
-                <a:hlinkClick r:id="rId12"/>
+                <a:hlinkClick r:id="rId14"/>
               </a:rPr>
               <a:t>Lofar 1</a:t>
             </a:r>
@@ -5101,7 +3614,7 @@
           <a:p>
             <a:r>
               <a:rPr sz="800">
-                <a:hlinkClick r:id="rId13"/>
+                <a:hlinkClick r:id="rId15"/>
               </a:rPr>
               <a:t>Lofar 2</a:t>
             </a:r>
@@ -5109,7 +3622,7 @@
           <a:p>
             <a:r>
               <a:rPr sz="800">
-                <a:hlinkClick r:id="rId14"/>
+                <a:hlinkClick r:id="rId16"/>
               </a:rPr>
               <a:t>Lofar 3</a:t>
             </a:r>
@@ -5117,7 +3630,7 @@
           <a:p>
             <a:r>
               <a:rPr sz="800">
-                <a:hlinkClick r:id="rId15"/>
+                <a:hlinkClick r:id="rId17"/>
               </a:rPr>
               <a:t>Lofar 4</a:t>
             </a:r>
@@ -5129,7 +3642,7 @@
           <p:cNvPr id="11" name="Rounded Rectangle 10"/>
           <p:cNvSpPr/>
           <p:nvPr>
-            <a:hlinkClick r:id="rId16"/>
+            <a:hlinkClick r:id="rId18"/>
           </p:nvPr>
         </p:nvSpPr>
         <p:spPr>
@@ -5174,7 +3687,7 @@
                   <a:srgbClr val="1F3A5F"/>
                 </a:solidFill>
               </a:rPr>
-              <a:t>Gram 26: Enterprise contact bearing 229, codename Betazed</a:t>
+              <a:t>Gram 5: FR Nebulon-B, Category 4, Tatooine</a:t>
             </a:r>
           </a:p>
         </p:txBody>
@@ -5203,7 +3716,7 @@
           <a:p>
             <a:r>
               <a:rPr sz="800">
-                <a:hlinkClick r:id="rId17"/>
+                <a:hlinkClick r:id="rId19"/>
               </a:rPr>
               <a:t>Lofar 1</a:t>
             </a:r>
@@ -5211,7 +3724,7 @@
           <a:p>
             <a:r>
               <a:rPr sz="800">
-                <a:hlinkClick r:id="rId18"/>
+                <a:hlinkClick r:id="rId20"/>
               </a:rPr>
               <a:t>Lofar 2</a:t>
             </a:r>
@@ -5219,7 +3732,7 @@
           <a:p>
             <a:r>
               <a:rPr sz="800">
-                <a:hlinkClick r:id="rId19"/>
+                <a:hlinkClick r:id="rId21"/>
               </a:rPr>
               <a:t>Lofar 3</a:t>
             </a:r>
@@ -5227,7 +3740,7 @@
           <a:p>
             <a:r>
               <a:rPr sz="800">
-                <a:hlinkClick r:id="rId20"/>
+                <a:hlinkClick r:id="rId22"/>
               </a:rPr>
               <a:t>Lofar 4</a:t>
             </a:r>
@@ -5239,7 +3752,7 @@
           <p:cNvPr id="13" name="Rounded Rectangle 12"/>
           <p:cNvSpPr/>
           <p:nvPr>
-            <a:hlinkClick r:id="rId21"/>
+            <a:hlinkClick r:id="rId23"/>
           </p:nvPr>
         </p:nvSpPr>
         <p:spPr>
@@ -5284,7 +3797,7 @@
                   <a:srgbClr val="1F3A5F"/>
                 </a:solidFill>
               </a:rPr>
-              <a:t>Gram 27: FR Prometheus, Category 1, Kobol</a:t>
+              <a:t>Gram 6: FR Devastator, Category 3, Trill</a:t>
             </a:r>
           </a:p>
         </p:txBody>
@@ -5313,17 +3826,9 @@
           <a:p>
             <a:r>
               <a:rPr sz="800">
-                <a:hlinkClick r:id="rId22"/>
+                <a:hlinkClick r:id="rId24"/>
               </a:rPr>
               <a:t>Lofar 1</a:t>
-            </a:r>
-          </a:p>
-          <a:p>
-            <a:r>
-              <a:rPr sz="800">
-                <a:hlinkClick r:id="rId23"/>
-              </a:rPr>
-              <a:t>Lofar 2</a:t>
             </a:r>
           </a:p>
         </p:txBody>
@@ -5333,7 +3838,7 @@
           <p:cNvPr id="15" name="Rounded Rectangle 14"/>
           <p:cNvSpPr/>
           <p:nvPr>
-            <a:hlinkClick r:id="rId24"/>
+            <a:hlinkClick r:id="rId25"/>
           </p:nvPr>
         </p:nvSpPr>
         <p:spPr>
@@ -5378,7 +3883,7 @@
                   <a:srgbClr val="1F3A5F"/>
                 </a:solidFill>
               </a:rPr>
-              <a:t>Gram 29: FR X-wing, Category 1, Betazed</a:t>
+              <a:t>Gram 9: Discovery contact bearing 231, codename Gandalf</a:t>
             </a:r>
           </a:p>
         </p:txBody>
@@ -5407,7 +3912,7 @@
           <a:p>
             <a:r>
               <a:rPr sz="800">
-                <a:hlinkClick r:id="rId25"/>
+                <a:hlinkClick r:id="rId26"/>
               </a:rPr>
               <a:t>Lofar 1</a:t>
             </a:r>
@@ -5415,25 +3920,9 @@
           <a:p>
             <a:r>
               <a:rPr sz="800">
-                <a:hlinkClick r:id="rId26"/>
+                <a:hlinkClick r:id="rId27"/>
               </a:rPr>
               <a:t>Lofar 2</a:t>
-            </a:r>
-          </a:p>
-          <a:p>
-            <a:r>
-              <a:rPr sz="800">
-                <a:hlinkClick r:id="rId27"/>
-              </a:rPr>
-              <a:t>Lofar 3</a:t>
-            </a:r>
-          </a:p>
-          <a:p>
-            <a:r>
-              <a:rPr sz="800">
-                <a:hlinkClick r:id="rId28"/>
-              </a:rPr>
-              <a:t>Lofar 4</a:t>
             </a:r>
           </a:p>
         </p:txBody>
@@ -5443,7 +3932,7 @@
           <p:cNvPr id="17" name="Rounded Rectangle 16"/>
           <p:cNvSpPr/>
           <p:nvPr>
-            <a:hlinkClick r:id="rId29"/>
+            <a:hlinkClick r:id="rId28"/>
           </p:nvPr>
         </p:nvSpPr>
         <p:spPr>
@@ -5488,7 +3977,7 @@
                   <a:srgbClr val="1F3A5F"/>
                 </a:solidFill>
               </a:rPr>
-              <a:t>Gram 30: FR Imperial-class, Category 1, Vulcan</a:t>
+              <a:t>Gram 11: FR Devastator, Category 3, Tantive</a:t>
             </a:r>
           </a:p>
         </p:txBody>
@@ -5517,15 +4006,15 @@
           <a:p>
             <a:r>
               <a:rPr sz="800">
+                <a:hlinkClick r:id="rId29"/>
+              </a:rPr>
+              <a:t>Lofar 1</a:t>
+            </a:r>
+          </a:p>
+          <a:p>
+            <a:r>
+              <a:rPr sz="800">
                 <a:hlinkClick r:id="rId30"/>
-              </a:rPr>
-              <a:t>Lofar 1</a:t>
-            </a:r>
-          </a:p>
-          <a:p>
-            <a:r>
-              <a:rPr sz="800">
-                <a:hlinkClick r:id="rId31"/>
               </a:rPr>
               <a:t>Lofar 2</a:t>
             </a:r>
@@ -5537,7 +4026,7 @@
           <p:cNvPr id="19" name="Rounded Rectangle 18"/>
           <p:cNvSpPr/>
           <p:nvPr>
-            <a:hlinkClick r:id="rId32"/>
+            <a:hlinkClick r:id="rId31"/>
           </p:nvPr>
         </p:nvSpPr>
         <p:spPr>
@@ -5582,7 +4071,7 @@
                   <a:srgbClr val="1F3A5F"/>
                 </a:solidFill>
               </a:rPr>
-              <a:t>Gram 31: FR B-wing, Category 2, Hoth</a:t>
+              <a:t>Gram 12: FR Star Destroyer, Category 3, Tantive</a:t>
             </a:r>
           </a:p>
         </p:txBody>
@@ -5611,9 +4100,17 @@
           <a:p>
             <a:r>
               <a:rPr sz="800">
+                <a:hlinkClick r:id="rId32"/>
+              </a:rPr>
+              <a:t>Lofar 1</a:t>
+            </a:r>
+          </a:p>
+          <a:p>
+            <a:r>
+              <a:rPr sz="800">
                 <a:hlinkClick r:id="rId33"/>
               </a:rPr>
-              <a:t>Lofar 1</a:t>
+              <a:t>Lofar 2</a:t>
             </a:r>
           </a:p>
           <a:p>
@@ -5621,7 +4118,7 @@
               <a:rPr sz="800">
                 <a:hlinkClick r:id="rId34"/>
               </a:rPr>
-              <a:t>Lofar 2</a:t>
+              <a:t>Lofar 3</a:t>
             </a:r>
           </a:p>
         </p:txBody>
@@ -5676,7 +4173,7 @@
                   <a:srgbClr val="1F3A5F"/>
                 </a:solidFill>
               </a:rPr>
-              <a:t>Gram 32: Venator-class contact bearing 263, codename Risa</a:t>
+              <a:t>Gram 13: FR Imperial-class, Category 1, Yavin</a:t>
             </a:r>
           </a:p>
         </p:txBody>
@@ -5786,7 +4283,7 @@
                   <a:srgbClr val="1F3A5F"/>
                 </a:solidFill>
               </a:rPr>
-              <a:t>Gram 33: FR Ghost, Category 2, Kobol</a:t>
+              <a:t>Gram 15: FR Mon Calamari Cruiser, Category 2, Bajor</a:t>
             </a:r>
           </a:p>
         </p:txBody>
@@ -5820,6 +4317,30 @@
               <a:t>Lofar 1</a:t>
             </a:r>
           </a:p>
+          <a:p>
+            <a:r>
+              <a:rPr sz="800">
+                <a:hlinkClick r:id="rId42"/>
+              </a:rPr>
+              <a:t>Lofar 2</a:t>
+            </a:r>
+          </a:p>
+          <a:p>
+            <a:r>
+              <a:rPr sz="800">
+                <a:hlinkClick r:id="rId43"/>
+              </a:rPr>
+              <a:t>Lofar 3</a:t>
+            </a:r>
+          </a:p>
+          <a:p>
+            <a:r>
+              <a:rPr sz="800">
+                <a:hlinkClick r:id="rId44"/>
+              </a:rPr>
+              <a:t>Lofar 4</a:t>
+            </a:r>
+          </a:p>
         </p:txBody>
       </p:sp>
       <p:sp>
@@ -5827,7 +4348,7 @@
           <p:cNvPr id="25" name="Rounded Rectangle 24"/>
           <p:cNvSpPr/>
           <p:nvPr>
-            <a:hlinkClick r:id="rId42"/>
+            <a:hlinkClick r:id="rId45"/>
           </p:nvPr>
         </p:nvSpPr>
         <p:spPr>
@@ -5872,7 +4393,7 @@
                   <a:srgbClr val="1F3A5F"/>
                 </a:solidFill>
               </a:rPr>
-              <a:t>Gram 34: Cerritos contact bearing 004, codename Dank</a:t>
+              <a:t>Gram 17: FR Razor Crest, Category 1, Mustafar</a:t>
             </a:r>
           </a:p>
         </p:txBody>
@@ -5901,7 +4422,7 @@
           <a:p>
             <a:r>
               <a:rPr sz="800">
-                <a:hlinkClick r:id="rId43"/>
+                <a:hlinkClick r:id="rId46"/>
               </a:rPr>
               <a:t>Lofar 1</a:t>
             </a:r>
@@ -5909,7 +4430,7 @@
           <a:p>
             <a:r>
               <a:rPr sz="800">
-                <a:hlinkClick r:id="rId44"/>
+                <a:hlinkClick r:id="rId47"/>
               </a:rPr>
               <a:t>Lofar 2</a:t>
             </a:r>
@@ -5917,9 +4438,17 @@
           <a:p>
             <a:r>
               <a:rPr sz="800">
-                <a:hlinkClick r:id="rId45"/>
+                <a:hlinkClick r:id="rId48"/>
               </a:rPr>
               <a:t>Lofar 3</a:t>
+            </a:r>
+          </a:p>
+          <a:p>
+            <a:r>
+              <a:rPr sz="800">
+                <a:hlinkClick r:id="rId49"/>
+              </a:rPr>
+              <a:t>Lofar 4</a:t>
             </a:r>
           </a:p>
         </p:txBody>
@@ -5929,7 +4458,7 @@
           <p:cNvPr id="27" name="Rounded Rectangle 26"/>
           <p:cNvSpPr/>
           <p:nvPr>
-            <a:hlinkClick r:id="rId46"/>
+            <a:hlinkClick r:id="rId50"/>
           </p:nvPr>
         </p:nvSpPr>
         <p:spPr>
@@ -5974,7 +4503,7 @@
                   <a:srgbClr val="1F3A5F"/>
                 </a:solidFill>
               </a:rPr>
-              <a:t>Gram 35: FR Intrepid-class, Category 2, Gandalf</a:t>
+              <a:t>Gram 18: FR X-wing, Category 3, Defiant</a:t>
             </a:r>
           </a:p>
         </p:txBody>
@@ -6003,17 +4532,9 @@
           <a:p>
             <a:r>
               <a:rPr sz="800">
-                <a:hlinkClick r:id="rId47"/>
+                <a:hlinkClick r:id="rId51"/>
               </a:rPr>
               <a:t>Lofar 1</a:t>
-            </a:r>
-          </a:p>
-          <a:p>
-            <a:r>
-              <a:rPr sz="800">
-                <a:hlinkClick r:id="rId48"/>
-              </a:rPr>
-              <a:t>Lofar 2</a:t>
             </a:r>
           </a:p>
         </p:txBody>
@@ -6023,7 +4544,7 @@
           <p:cNvPr id="29" name="Rounded Rectangle 28"/>
           <p:cNvSpPr/>
           <p:nvPr>
-            <a:hlinkClick r:id="rId49"/>
+            <a:hlinkClick r:id="rId52"/>
           </p:nvPr>
         </p:nvSpPr>
         <p:spPr>
@@ -6068,7 +4589,7 @@
                   <a:srgbClr val="1F3A5F"/>
                 </a:solidFill>
               </a:rPr>
-              <a:t>Gram 36: FR Rebel One, Category 3, Mustafar</a:t>
+              <a:t>Gram 19: Devastator contact bearing 194, codename Trill</a:t>
             </a:r>
           </a:p>
         </p:txBody>
@@ -6097,7 +4618,7 @@
           <a:p>
             <a:r>
               <a:rPr sz="800">
-                <a:hlinkClick r:id="rId50"/>
+                <a:hlinkClick r:id="rId53"/>
               </a:rPr>
               <a:t>Lofar 1</a:t>
             </a:r>
@@ -6105,7 +4626,7 @@
           <a:p>
             <a:r>
               <a:rPr sz="800">
-                <a:hlinkClick r:id="rId51"/>
+                <a:hlinkClick r:id="rId54"/>
               </a:rPr>
               <a:t>Lofar 2</a:t>
             </a:r>
@@ -6113,7 +4634,7 @@
           <a:p>
             <a:r>
               <a:rPr sz="800">
-                <a:hlinkClick r:id="rId52"/>
+                <a:hlinkClick r:id="rId55"/>
               </a:rPr>
               <a:t>Lofar 3</a:t>
             </a:r>
@@ -6121,7 +4642,7 @@
           <a:p>
             <a:r>
               <a:rPr sz="800">
-                <a:hlinkClick r:id="rId53"/>
+                <a:hlinkClick r:id="rId56"/>
               </a:rPr>
               <a:t>Lofar 4</a:t>
             </a:r>
@@ -6133,7 +4654,7 @@
           <p:cNvPr id="31" name="Rounded Rectangle 30"/>
           <p:cNvSpPr/>
           <p:nvPr>
-            <a:hlinkClick r:id="rId54"/>
+            <a:hlinkClick r:id="rId57"/>
           </p:nvPr>
         </p:nvSpPr>
         <p:spPr>
@@ -6178,7 +4699,7 @@
                   <a:srgbClr val="1F3A5F"/>
                 </a:solidFill>
               </a:rPr>
-              <a:t>Gram 37: FR Intrepid-class, Category 2, Tatooine</a:t>
+              <a:t>Gram 20: FR TIE Fighter, Category 1, Coruscant</a:t>
             </a:r>
           </a:p>
         </p:txBody>
@@ -6207,7 +4728,7 @@
           <a:p>
             <a:r>
               <a:rPr sz="800">
-                <a:hlinkClick r:id="rId55"/>
+                <a:hlinkClick r:id="rId58"/>
               </a:rPr>
               <a:t>Lofar 1</a:t>
             </a:r>
@@ -6215,7 +4736,7 @@
           <a:p>
             <a:r>
               <a:rPr sz="800">
-                <a:hlinkClick r:id="rId56"/>
+                <a:hlinkClick r:id="rId59"/>
               </a:rPr>
               <a:t>Lofar 2</a:t>
             </a:r>
@@ -6223,7 +4744,7 @@
           <a:p>
             <a:r>
               <a:rPr sz="800">
-                <a:hlinkClick r:id="rId57"/>
+                <a:hlinkClick r:id="rId60"/>
               </a:rPr>
               <a:t>Lofar 3</a:t>
             </a:r>
@@ -6294,7 +4815,7 @@
                   <a:srgbClr val="FFFFFF"/>
                 </a:solidFill>
               </a:rPr>
-              <a:t>Instructor Week 3 Grams — Page 3 of 3</a:t>
+              <a:t>Instructor Week 3 Grams — Page 2 of 3</a:t>
             </a:r>
           </a:p>
         </p:txBody>
@@ -6349,7 +4870,7 @@
                   <a:srgbClr val="1F3A5F"/>
                 </a:solidFill>
               </a:rPr>
-              <a:t>Gram 38: FR Reliant, Category 3, Caprica</a:t>
+              <a:t>Gram 21: FR Discovery, Category 4, Defiant</a:t>
             </a:r>
           </a:p>
         </p:txBody>
@@ -6391,6 +4912,22 @@
               <a:t>Lofar 2</a:t>
             </a:r>
           </a:p>
+          <a:p>
+            <a:r>
+              <a:rPr sz="800">
+                <a:hlinkClick r:id="rId5"/>
+              </a:rPr>
+              <a:t>Lofar 3</a:t>
+            </a:r>
+          </a:p>
+          <a:p>
+            <a:r>
+              <a:rPr sz="800">
+                <a:hlinkClick r:id="rId6"/>
+              </a:rPr>
+              <a:t>Lofar 4</a:t>
+            </a:r>
+          </a:p>
         </p:txBody>
       </p:sp>
       <p:sp>
@@ -6398,7 +4935,7 @@
           <p:cNvPr id="5" name="Rounded Rectangle 4"/>
           <p:cNvSpPr/>
           <p:nvPr>
-            <a:hlinkClick r:id="rId5"/>
+            <a:hlinkClick r:id="rId7"/>
           </p:nvPr>
         </p:nvSpPr>
         <p:spPr>
@@ -6443,7 +4980,7 @@
                   <a:srgbClr val="1F3A5F"/>
                 </a:solidFill>
               </a:rPr>
-              <a:t>Gram 39: FR Stargazer, Category 1, Betazed</a:t>
+              <a:t>Gram 22: Razor Crest contact bearing 239, codename Dank</a:t>
             </a:r>
           </a:p>
         </p:txBody>
@@ -6472,33 +5009,9 @@
           <a:p>
             <a:r>
               <a:rPr sz="800">
-                <a:hlinkClick r:id="rId6"/>
+                <a:hlinkClick r:id="rId8"/>
               </a:rPr>
               <a:t>Lofar 1</a:t>
-            </a:r>
-          </a:p>
-          <a:p>
-            <a:r>
-              <a:rPr sz="800">
-                <a:hlinkClick r:id="rId7"/>
-              </a:rPr>
-              <a:t>Lofar 2</a:t>
-            </a:r>
-          </a:p>
-          <a:p>
-            <a:r>
-              <a:rPr sz="800">
-                <a:hlinkClick r:id="rId8"/>
-              </a:rPr>
-              <a:t>Lofar 3</a:t>
-            </a:r>
-          </a:p>
-          <a:p>
-            <a:r>
-              <a:rPr sz="800">
-                <a:hlinkClick r:id="rId9"/>
-              </a:rPr>
-              <a:t>Lofar 4</a:t>
             </a:r>
           </a:p>
         </p:txBody>
@@ -6508,7 +5021,7 @@
           <p:cNvPr id="7" name="Rounded Rectangle 6"/>
           <p:cNvSpPr/>
           <p:nvPr>
-            <a:hlinkClick r:id="rId10"/>
+            <a:hlinkClick r:id="rId9"/>
           </p:nvPr>
         </p:nvSpPr>
         <p:spPr>
@@ -6553,7 +5066,7 @@
                   <a:srgbClr val="1F3A5F"/>
                 </a:solidFill>
               </a:rPr>
-              <a:t>Gram 40: FR Defiant-class, Category 2, Endor</a:t>
+              <a:t>Gram 23: FR Devastator, Category 1, Risa</a:t>
             </a:r>
           </a:p>
         </p:txBody>
@@ -6582,33 +5095,9 @@
           <a:p>
             <a:r>
               <a:rPr sz="800">
-                <a:hlinkClick r:id="rId11"/>
+                <a:hlinkClick r:id="rId10"/>
               </a:rPr>
               <a:t>Lofar 1</a:t>
-            </a:r>
-          </a:p>
-          <a:p>
-            <a:r>
-              <a:rPr sz="800">
-                <a:hlinkClick r:id="rId12"/>
-              </a:rPr>
-              <a:t>Lofar 2</a:t>
-            </a:r>
-          </a:p>
-          <a:p>
-            <a:r>
-              <a:rPr sz="800">
-                <a:hlinkClick r:id="rId13"/>
-              </a:rPr>
-              <a:t>Lofar 3</a:t>
-            </a:r>
-          </a:p>
-          <a:p>
-            <a:r>
-              <a:rPr sz="800">
-                <a:hlinkClick r:id="rId14"/>
-              </a:rPr>
-              <a:t>Lofar 4</a:t>
             </a:r>
           </a:p>
         </p:txBody>
@@ -6618,7 +5107,7 @@
           <p:cNvPr id="9" name="Rounded Rectangle 8"/>
           <p:cNvSpPr/>
           <p:nvPr>
-            <a:hlinkClick r:id="rId15"/>
+            <a:hlinkClick r:id="rId11"/>
           </p:nvPr>
         </p:nvSpPr>
         <p:spPr>
@@ -6663,7 +5152,7 @@
                   <a:srgbClr val="1F3A5F"/>
                 </a:solidFill>
               </a:rPr>
-              <a:t>Gram 41: FR Tantive IV, Category 3, Betazed</a:t>
+              <a:t>Gram 25: FR Imperial-class, Category 4, Coruscant</a:t>
             </a:r>
           </a:p>
         </p:txBody>
@@ -6692,7 +5181,7 @@
           <a:p>
             <a:r>
               <a:rPr sz="800">
-                <a:hlinkClick r:id="rId16"/>
+                <a:hlinkClick r:id="rId12"/>
               </a:rPr>
               <a:t>Lofar 1</a:t>
             </a:r>
@@ -6700,7 +5189,7 @@
           <a:p>
             <a:r>
               <a:rPr sz="800">
-                <a:hlinkClick r:id="rId17"/>
+                <a:hlinkClick r:id="rId13"/>
               </a:rPr>
               <a:t>Lofar 2</a:t>
             </a:r>
@@ -6708,9 +5197,17 @@
           <a:p>
             <a:r>
               <a:rPr sz="800">
-                <a:hlinkClick r:id="rId18"/>
+                <a:hlinkClick r:id="rId14"/>
               </a:rPr>
               <a:t>Lofar 3</a:t>
+            </a:r>
+          </a:p>
+          <a:p>
+            <a:r>
+              <a:rPr sz="800">
+                <a:hlinkClick r:id="rId15"/>
+              </a:rPr>
+              <a:t>Lofar 4</a:t>
             </a:r>
           </a:p>
         </p:txBody>
@@ -6720,7 +5217,7 @@
           <p:cNvPr id="11" name="Rounded Rectangle 10"/>
           <p:cNvSpPr/>
           <p:nvPr>
-            <a:hlinkClick r:id="rId19"/>
+            <a:hlinkClick r:id="rId16"/>
           </p:nvPr>
         </p:nvSpPr>
         <p:spPr>
@@ -6765,7 +5262,7 @@
                   <a:srgbClr val="1F3A5F"/>
                 </a:solidFill>
               </a:rPr>
-              <a:t>Gram 42: FR TIE Bomber, Category 3, Mustafar</a:t>
+              <a:t>Gram 26: Enterprise contact bearing 229, codename Betazed</a:t>
             </a:r>
           </a:p>
         </p:txBody>
@@ -6794,9 +5291,1686 @@
           <a:p>
             <a:r>
               <a:rPr sz="800">
+                <a:hlinkClick r:id="rId17"/>
+              </a:rPr>
+              <a:t>Lofar 1</a:t>
+            </a:r>
+          </a:p>
+          <a:p>
+            <a:r>
+              <a:rPr sz="800">
+                <a:hlinkClick r:id="rId18"/>
+              </a:rPr>
+              <a:t>Lofar 2</a:t>
+            </a:r>
+          </a:p>
+          <a:p>
+            <a:r>
+              <a:rPr sz="800">
+                <a:hlinkClick r:id="rId19"/>
+              </a:rPr>
+              <a:t>Lofar 3</a:t>
+            </a:r>
+          </a:p>
+          <a:p>
+            <a:r>
+              <a:rPr sz="800">
                 <a:hlinkClick r:id="rId20"/>
               </a:rPr>
+              <a:t>Lofar 4</a:t>
+            </a:r>
+          </a:p>
+        </p:txBody>
+      </p:sp>
+      <p:sp>
+        <p:nvSpPr>
+          <p:cNvPr id="13" name="Rounded Rectangle 12"/>
+          <p:cNvSpPr/>
+          <p:nvPr>
+            <a:hlinkClick r:id="rId21"/>
+          </p:nvPr>
+        </p:nvSpPr>
+        <p:spPr>
+          <a:xfrm>
+            <a:off x="365760" y="2682240"/>
+            <a:ext cx="2200046" cy="365760"/>
+          </a:xfrm>
+          <a:prstGeom prst="roundRect">
+            <a:avLst/>
+          </a:prstGeom>
+          <a:solidFill>
+            <a:srgbClr val="E8EEF7"/>
+          </a:solidFill>
+          <a:ln>
+            <a:solidFill>
+              <a:srgbClr val="1F3A5F"/>
+            </a:solidFill>
+          </a:ln>
+        </p:spPr>
+        <p:style>
+          <a:lnRef idx="1">
+            <a:schemeClr val="accent1"/>
+          </a:lnRef>
+          <a:fillRef idx="3">
+            <a:schemeClr val="accent1"/>
+          </a:fillRef>
+          <a:effectRef idx="2">
+            <a:schemeClr val="accent1"/>
+          </a:effectRef>
+          <a:fontRef idx="minor">
+            <a:schemeClr val="lt1"/>
+          </a:fontRef>
+        </p:style>
+        <p:txBody>
+          <a:bodyPr rtlCol="0" anchor="ctr" lIns="45720" rIns="45720"/>
+          <a:lstStyle/>
+          <a:p>
+            <a:pPr algn="ctr"/>
+            <a:r>
+              <a:rPr sz="900">
+                <a:solidFill>
+                  <a:srgbClr val="1F3A5F"/>
+                </a:solidFill>
+              </a:rPr>
+              <a:t>Gram 27: FR Prometheus, Category 1, Kobol</a:t>
+            </a:r>
+          </a:p>
+        </p:txBody>
+      </p:sp>
+      <p:sp>
+        <p:nvSpPr>
+          <p:cNvPr id="14" name="TextBox 13"/>
+          <p:cNvSpPr txBox="1"/>
+          <p:nvPr/>
+        </p:nvSpPr>
+        <p:spPr>
+          <a:xfrm>
+            <a:off x="365760" y="3066288"/>
+            <a:ext cx="2200046" cy="1447800"/>
+          </a:xfrm>
+          <a:prstGeom prst="rect">
+            <a:avLst/>
+          </a:prstGeom>
+          <a:noFill/>
+        </p:spPr>
+        <p:txBody>
+          <a:bodyPr wrap="square">
+            <a:spAutoFit/>
+          </a:bodyPr>
+          <a:lstStyle/>
+          <a:p>
+            <a:r>
+              <a:rPr sz="800">
+                <a:hlinkClick r:id="rId22"/>
+              </a:rPr>
               <a:t>Lofar 1</a:t>
+            </a:r>
+          </a:p>
+          <a:p>
+            <a:r>
+              <a:rPr sz="800">
+                <a:hlinkClick r:id="rId23"/>
+              </a:rPr>
+              <a:t>Lofar 2</a:t>
+            </a:r>
+          </a:p>
+        </p:txBody>
+      </p:sp>
+      <p:sp>
+        <p:nvSpPr>
+          <p:cNvPr id="15" name="Rounded Rectangle 14"/>
+          <p:cNvSpPr/>
+          <p:nvPr>
+            <a:hlinkClick r:id="rId24"/>
+          </p:nvPr>
+        </p:nvSpPr>
+        <p:spPr>
+          <a:xfrm>
+            <a:off x="2657246" y="2682240"/>
+            <a:ext cx="2200046" cy="365760"/>
+          </a:xfrm>
+          <a:prstGeom prst="roundRect">
+            <a:avLst/>
+          </a:prstGeom>
+          <a:solidFill>
+            <a:srgbClr val="E8EEF7"/>
+          </a:solidFill>
+          <a:ln>
+            <a:solidFill>
+              <a:srgbClr val="1F3A5F"/>
+            </a:solidFill>
+          </a:ln>
+        </p:spPr>
+        <p:style>
+          <a:lnRef idx="1">
+            <a:schemeClr val="accent1"/>
+          </a:lnRef>
+          <a:fillRef idx="3">
+            <a:schemeClr val="accent1"/>
+          </a:fillRef>
+          <a:effectRef idx="2">
+            <a:schemeClr val="accent1"/>
+          </a:effectRef>
+          <a:fontRef idx="minor">
+            <a:schemeClr val="lt1"/>
+          </a:fontRef>
+        </p:style>
+        <p:txBody>
+          <a:bodyPr rtlCol="0" anchor="ctr" lIns="45720" rIns="45720"/>
+          <a:lstStyle/>
+          <a:p>
+            <a:pPr algn="ctr"/>
+            <a:r>
+              <a:rPr sz="900">
+                <a:solidFill>
+                  <a:srgbClr val="1F3A5F"/>
+                </a:solidFill>
+              </a:rPr>
+              <a:t>Gram 29: FR X-wing, Category 1, Betazed</a:t>
+            </a:r>
+          </a:p>
+        </p:txBody>
+      </p:sp>
+      <p:sp>
+        <p:nvSpPr>
+          <p:cNvPr id="16" name="TextBox 15"/>
+          <p:cNvSpPr txBox="1"/>
+          <p:nvPr/>
+        </p:nvSpPr>
+        <p:spPr>
+          <a:xfrm>
+            <a:off x="2657246" y="3066288"/>
+            <a:ext cx="2200046" cy="1447800"/>
+          </a:xfrm>
+          <a:prstGeom prst="rect">
+            <a:avLst/>
+          </a:prstGeom>
+          <a:noFill/>
+        </p:spPr>
+        <p:txBody>
+          <a:bodyPr wrap="square">
+            <a:spAutoFit/>
+          </a:bodyPr>
+          <a:lstStyle/>
+          <a:p>
+            <a:r>
+              <a:rPr sz="800">
+                <a:hlinkClick r:id="rId25"/>
+              </a:rPr>
+              <a:t>Lofar 1</a:t>
+            </a:r>
+          </a:p>
+          <a:p>
+            <a:r>
+              <a:rPr sz="800">
+                <a:hlinkClick r:id="rId26"/>
+              </a:rPr>
+              <a:t>Lofar 2</a:t>
+            </a:r>
+          </a:p>
+          <a:p>
+            <a:r>
+              <a:rPr sz="800">
+                <a:hlinkClick r:id="rId27"/>
+              </a:rPr>
+              <a:t>Lofar 3</a:t>
+            </a:r>
+          </a:p>
+          <a:p>
+            <a:r>
+              <a:rPr sz="800">
+                <a:hlinkClick r:id="rId28"/>
+              </a:rPr>
+              <a:t>Lofar 4</a:t>
+            </a:r>
+          </a:p>
+        </p:txBody>
+      </p:sp>
+      <p:sp>
+        <p:nvSpPr>
+          <p:cNvPr id="17" name="Rounded Rectangle 16"/>
+          <p:cNvSpPr/>
+          <p:nvPr>
+            <a:hlinkClick r:id="rId29"/>
+          </p:nvPr>
+        </p:nvSpPr>
+        <p:spPr>
+          <a:xfrm>
+            <a:off x="4948732" y="2682240"/>
+            <a:ext cx="2200046" cy="365760"/>
+          </a:xfrm>
+          <a:prstGeom prst="roundRect">
+            <a:avLst/>
+          </a:prstGeom>
+          <a:solidFill>
+            <a:srgbClr val="E8EEF7"/>
+          </a:solidFill>
+          <a:ln>
+            <a:solidFill>
+              <a:srgbClr val="1F3A5F"/>
+            </a:solidFill>
+          </a:ln>
+        </p:spPr>
+        <p:style>
+          <a:lnRef idx="1">
+            <a:schemeClr val="accent1"/>
+          </a:lnRef>
+          <a:fillRef idx="3">
+            <a:schemeClr val="accent1"/>
+          </a:fillRef>
+          <a:effectRef idx="2">
+            <a:schemeClr val="accent1"/>
+          </a:effectRef>
+          <a:fontRef idx="minor">
+            <a:schemeClr val="lt1"/>
+          </a:fontRef>
+        </p:style>
+        <p:txBody>
+          <a:bodyPr rtlCol="0" anchor="ctr" lIns="45720" rIns="45720"/>
+          <a:lstStyle/>
+          <a:p>
+            <a:pPr algn="ctr"/>
+            <a:r>
+              <a:rPr sz="900">
+                <a:solidFill>
+                  <a:srgbClr val="1F3A5F"/>
+                </a:solidFill>
+              </a:rPr>
+              <a:t>Gram 30: FR Imperial-class, Category 1, Vulcan</a:t>
+            </a:r>
+          </a:p>
+        </p:txBody>
+      </p:sp>
+      <p:sp>
+        <p:nvSpPr>
+          <p:cNvPr id="18" name="TextBox 17"/>
+          <p:cNvSpPr txBox="1"/>
+          <p:nvPr/>
+        </p:nvSpPr>
+        <p:spPr>
+          <a:xfrm>
+            <a:off x="4948732" y="3066288"/>
+            <a:ext cx="2200046" cy="1447800"/>
+          </a:xfrm>
+          <a:prstGeom prst="rect">
+            <a:avLst/>
+          </a:prstGeom>
+          <a:noFill/>
+        </p:spPr>
+        <p:txBody>
+          <a:bodyPr wrap="square">
+            <a:spAutoFit/>
+          </a:bodyPr>
+          <a:lstStyle/>
+          <a:p>
+            <a:r>
+              <a:rPr sz="800">
+                <a:hlinkClick r:id="rId30"/>
+              </a:rPr>
+              <a:t>Lofar 1</a:t>
+            </a:r>
+          </a:p>
+          <a:p>
+            <a:r>
+              <a:rPr sz="800">
+                <a:hlinkClick r:id="rId31"/>
+              </a:rPr>
+              <a:t>Lofar 2</a:t>
+            </a:r>
+          </a:p>
+        </p:txBody>
+      </p:sp>
+      <p:sp>
+        <p:nvSpPr>
+          <p:cNvPr id="19" name="Rounded Rectangle 18"/>
+          <p:cNvSpPr/>
+          <p:nvPr>
+            <a:hlinkClick r:id="rId32"/>
+          </p:nvPr>
+        </p:nvSpPr>
+        <p:spPr>
+          <a:xfrm>
+            <a:off x="7240219" y="2682240"/>
+            <a:ext cx="2200046" cy="365760"/>
+          </a:xfrm>
+          <a:prstGeom prst="roundRect">
+            <a:avLst/>
+          </a:prstGeom>
+          <a:solidFill>
+            <a:srgbClr val="E8EEF7"/>
+          </a:solidFill>
+          <a:ln>
+            <a:solidFill>
+              <a:srgbClr val="1F3A5F"/>
+            </a:solidFill>
+          </a:ln>
+        </p:spPr>
+        <p:style>
+          <a:lnRef idx="1">
+            <a:schemeClr val="accent1"/>
+          </a:lnRef>
+          <a:fillRef idx="3">
+            <a:schemeClr val="accent1"/>
+          </a:fillRef>
+          <a:effectRef idx="2">
+            <a:schemeClr val="accent1"/>
+          </a:effectRef>
+          <a:fontRef idx="minor">
+            <a:schemeClr val="lt1"/>
+          </a:fontRef>
+        </p:style>
+        <p:txBody>
+          <a:bodyPr rtlCol="0" anchor="ctr" lIns="45720" rIns="45720"/>
+          <a:lstStyle/>
+          <a:p>
+            <a:pPr algn="ctr"/>
+            <a:r>
+              <a:rPr sz="900">
+                <a:solidFill>
+                  <a:srgbClr val="1F3A5F"/>
+                </a:solidFill>
+              </a:rPr>
+              <a:t>Gram 31: FR B-wing, Category 2, Hoth</a:t>
+            </a:r>
+          </a:p>
+        </p:txBody>
+      </p:sp>
+      <p:sp>
+        <p:nvSpPr>
+          <p:cNvPr id="20" name="TextBox 19"/>
+          <p:cNvSpPr txBox="1"/>
+          <p:nvPr/>
+        </p:nvSpPr>
+        <p:spPr>
+          <a:xfrm>
+            <a:off x="7240219" y="3066288"/>
+            <a:ext cx="2200046" cy="1447800"/>
+          </a:xfrm>
+          <a:prstGeom prst="rect">
+            <a:avLst/>
+          </a:prstGeom>
+          <a:noFill/>
+        </p:spPr>
+        <p:txBody>
+          <a:bodyPr wrap="square">
+            <a:spAutoFit/>
+          </a:bodyPr>
+          <a:lstStyle/>
+          <a:p>
+            <a:r>
+              <a:rPr sz="800">
+                <a:hlinkClick r:id="rId33"/>
+              </a:rPr>
+              <a:t>Lofar 1</a:t>
+            </a:r>
+          </a:p>
+          <a:p>
+            <a:r>
+              <a:rPr sz="800">
+                <a:hlinkClick r:id="rId34"/>
+              </a:rPr>
+              <a:t>Lofar 2</a:t>
+            </a:r>
+          </a:p>
+        </p:txBody>
+      </p:sp>
+      <p:sp>
+        <p:nvSpPr>
+          <p:cNvPr id="21" name="Rounded Rectangle 20"/>
+          <p:cNvSpPr/>
+          <p:nvPr>
+            <a:hlinkClick r:id="rId35"/>
+          </p:nvPr>
+        </p:nvSpPr>
+        <p:spPr>
+          <a:xfrm>
+            <a:off x="9531705" y="2682240"/>
+            <a:ext cx="2200046" cy="365760"/>
+          </a:xfrm>
+          <a:prstGeom prst="roundRect">
+            <a:avLst/>
+          </a:prstGeom>
+          <a:solidFill>
+            <a:srgbClr val="E8EEF7"/>
+          </a:solidFill>
+          <a:ln>
+            <a:solidFill>
+              <a:srgbClr val="1F3A5F"/>
+            </a:solidFill>
+          </a:ln>
+        </p:spPr>
+        <p:style>
+          <a:lnRef idx="1">
+            <a:schemeClr val="accent1"/>
+          </a:lnRef>
+          <a:fillRef idx="3">
+            <a:schemeClr val="accent1"/>
+          </a:fillRef>
+          <a:effectRef idx="2">
+            <a:schemeClr val="accent1"/>
+          </a:effectRef>
+          <a:fontRef idx="minor">
+            <a:schemeClr val="lt1"/>
+          </a:fontRef>
+        </p:style>
+        <p:txBody>
+          <a:bodyPr rtlCol="0" anchor="ctr" lIns="45720" rIns="45720"/>
+          <a:lstStyle/>
+          <a:p>
+            <a:pPr algn="ctr"/>
+            <a:r>
+              <a:rPr sz="900">
+                <a:solidFill>
+                  <a:srgbClr val="1F3A5F"/>
+                </a:solidFill>
+              </a:rPr>
+              <a:t>Gram 32: Venator-class contact bearing 263, codename Risa</a:t>
+            </a:r>
+          </a:p>
+        </p:txBody>
+      </p:sp>
+      <p:sp>
+        <p:nvSpPr>
+          <p:cNvPr id="22" name="TextBox 21"/>
+          <p:cNvSpPr txBox="1"/>
+          <p:nvPr/>
+        </p:nvSpPr>
+        <p:spPr>
+          <a:xfrm>
+            <a:off x="9531705" y="3066288"/>
+            <a:ext cx="2200046" cy="1447800"/>
+          </a:xfrm>
+          <a:prstGeom prst="rect">
+            <a:avLst/>
+          </a:prstGeom>
+          <a:noFill/>
+        </p:spPr>
+        <p:txBody>
+          <a:bodyPr wrap="square">
+            <a:spAutoFit/>
+          </a:bodyPr>
+          <a:lstStyle/>
+          <a:p>
+            <a:r>
+              <a:rPr sz="800">
+                <a:hlinkClick r:id="rId36"/>
+              </a:rPr>
+              <a:t>Lofar 1</a:t>
+            </a:r>
+          </a:p>
+          <a:p>
+            <a:r>
+              <a:rPr sz="800">
+                <a:hlinkClick r:id="rId37"/>
+              </a:rPr>
+              <a:t>Lofar 2</a:t>
+            </a:r>
+          </a:p>
+          <a:p>
+            <a:r>
+              <a:rPr sz="800">
+                <a:hlinkClick r:id="rId38"/>
+              </a:rPr>
+              <a:t>Lofar 3</a:t>
+            </a:r>
+          </a:p>
+          <a:p>
+            <a:r>
+              <a:rPr sz="800">
+                <a:hlinkClick r:id="rId39"/>
+              </a:rPr>
+              <a:t>Lofar 4</a:t>
+            </a:r>
+          </a:p>
+        </p:txBody>
+      </p:sp>
+      <p:sp>
+        <p:nvSpPr>
+          <p:cNvPr id="23" name="Rounded Rectangle 22"/>
+          <p:cNvSpPr/>
+          <p:nvPr>
+            <a:hlinkClick r:id="rId40"/>
+          </p:nvPr>
+        </p:nvSpPr>
+        <p:spPr>
+          <a:xfrm>
+            <a:off x="365760" y="4632960"/>
+            <a:ext cx="2200046" cy="365760"/>
+          </a:xfrm>
+          <a:prstGeom prst="roundRect">
+            <a:avLst/>
+          </a:prstGeom>
+          <a:solidFill>
+            <a:srgbClr val="E8EEF7"/>
+          </a:solidFill>
+          <a:ln>
+            <a:solidFill>
+              <a:srgbClr val="1F3A5F"/>
+            </a:solidFill>
+          </a:ln>
+        </p:spPr>
+        <p:style>
+          <a:lnRef idx="1">
+            <a:schemeClr val="accent1"/>
+          </a:lnRef>
+          <a:fillRef idx="3">
+            <a:schemeClr val="accent1"/>
+          </a:fillRef>
+          <a:effectRef idx="2">
+            <a:schemeClr val="accent1"/>
+          </a:effectRef>
+          <a:fontRef idx="minor">
+            <a:schemeClr val="lt1"/>
+          </a:fontRef>
+        </p:style>
+        <p:txBody>
+          <a:bodyPr rtlCol="0" anchor="ctr" lIns="45720" rIns="45720"/>
+          <a:lstStyle/>
+          <a:p>
+            <a:pPr algn="ctr"/>
+            <a:r>
+              <a:rPr sz="900">
+                <a:solidFill>
+                  <a:srgbClr val="1F3A5F"/>
+                </a:solidFill>
+              </a:rPr>
+              <a:t>Gram 33: FR Ghost, Category 2, Kobol</a:t>
+            </a:r>
+          </a:p>
+        </p:txBody>
+      </p:sp>
+      <p:sp>
+        <p:nvSpPr>
+          <p:cNvPr id="24" name="TextBox 23"/>
+          <p:cNvSpPr txBox="1"/>
+          <p:nvPr/>
+        </p:nvSpPr>
+        <p:spPr>
+          <a:xfrm>
+            <a:off x="365760" y="5017008"/>
+            <a:ext cx="2200046" cy="1447800"/>
+          </a:xfrm>
+          <a:prstGeom prst="rect">
+            <a:avLst/>
+          </a:prstGeom>
+          <a:noFill/>
+        </p:spPr>
+        <p:txBody>
+          <a:bodyPr wrap="square">
+            <a:spAutoFit/>
+          </a:bodyPr>
+          <a:lstStyle/>
+          <a:p>
+            <a:r>
+              <a:rPr sz="800">
+                <a:hlinkClick r:id="rId41"/>
+              </a:rPr>
+              <a:t>Lofar 1</a:t>
+            </a:r>
+          </a:p>
+        </p:txBody>
+      </p:sp>
+      <p:sp>
+        <p:nvSpPr>
+          <p:cNvPr id="25" name="Rounded Rectangle 24"/>
+          <p:cNvSpPr/>
+          <p:nvPr>
+            <a:hlinkClick r:id="rId42"/>
+          </p:nvPr>
+        </p:nvSpPr>
+        <p:spPr>
+          <a:xfrm>
+            <a:off x="2657246" y="4632960"/>
+            <a:ext cx="2200046" cy="365760"/>
+          </a:xfrm>
+          <a:prstGeom prst="roundRect">
+            <a:avLst/>
+          </a:prstGeom>
+          <a:solidFill>
+            <a:srgbClr val="E8EEF7"/>
+          </a:solidFill>
+          <a:ln>
+            <a:solidFill>
+              <a:srgbClr val="1F3A5F"/>
+            </a:solidFill>
+          </a:ln>
+        </p:spPr>
+        <p:style>
+          <a:lnRef idx="1">
+            <a:schemeClr val="accent1"/>
+          </a:lnRef>
+          <a:fillRef idx="3">
+            <a:schemeClr val="accent1"/>
+          </a:fillRef>
+          <a:effectRef idx="2">
+            <a:schemeClr val="accent1"/>
+          </a:effectRef>
+          <a:fontRef idx="minor">
+            <a:schemeClr val="lt1"/>
+          </a:fontRef>
+        </p:style>
+        <p:txBody>
+          <a:bodyPr rtlCol="0" anchor="ctr" lIns="45720" rIns="45720"/>
+          <a:lstStyle/>
+          <a:p>
+            <a:pPr algn="ctr"/>
+            <a:r>
+              <a:rPr sz="900">
+                <a:solidFill>
+                  <a:srgbClr val="1F3A5F"/>
+                </a:solidFill>
+              </a:rPr>
+              <a:t>Gram 34: Cerritos contact bearing 004, codename Dank</a:t>
+            </a:r>
+          </a:p>
+        </p:txBody>
+      </p:sp>
+      <p:sp>
+        <p:nvSpPr>
+          <p:cNvPr id="26" name="TextBox 25"/>
+          <p:cNvSpPr txBox="1"/>
+          <p:nvPr/>
+        </p:nvSpPr>
+        <p:spPr>
+          <a:xfrm>
+            <a:off x="2657246" y="5017008"/>
+            <a:ext cx="2200046" cy="1447800"/>
+          </a:xfrm>
+          <a:prstGeom prst="rect">
+            <a:avLst/>
+          </a:prstGeom>
+          <a:noFill/>
+        </p:spPr>
+        <p:txBody>
+          <a:bodyPr wrap="square">
+            <a:spAutoFit/>
+          </a:bodyPr>
+          <a:lstStyle/>
+          <a:p>
+            <a:r>
+              <a:rPr sz="800">
+                <a:hlinkClick r:id="rId43"/>
+              </a:rPr>
+              <a:t>Lofar 1</a:t>
+            </a:r>
+          </a:p>
+          <a:p>
+            <a:r>
+              <a:rPr sz="800">
+                <a:hlinkClick r:id="rId44"/>
+              </a:rPr>
+              <a:t>Lofar 2</a:t>
+            </a:r>
+          </a:p>
+          <a:p>
+            <a:r>
+              <a:rPr sz="800">
+                <a:hlinkClick r:id="rId45"/>
+              </a:rPr>
+              <a:t>Lofar 3</a:t>
+            </a:r>
+          </a:p>
+        </p:txBody>
+      </p:sp>
+      <p:sp>
+        <p:nvSpPr>
+          <p:cNvPr id="27" name="Rounded Rectangle 26"/>
+          <p:cNvSpPr/>
+          <p:nvPr>
+            <a:hlinkClick r:id="rId46"/>
+          </p:nvPr>
+        </p:nvSpPr>
+        <p:spPr>
+          <a:xfrm>
+            <a:off x="4948732" y="4632960"/>
+            <a:ext cx="2200046" cy="365760"/>
+          </a:xfrm>
+          <a:prstGeom prst="roundRect">
+            <a:avLst/>
+          </a:prstGeom>
+          <a:solidFill>
+            <a:srgbClr val="E8EEF7"/>
+          </a:solidFill>
+          <a:ln>
+            <a:solidFill>
+              <a:srgbClr val="1F3A5F"/>
+            </a:solidFill>
+          </a:ln>
+        </p:spPr>
+        <p:style>
+          <a:lnRef idx="1">
+            <a:schemeClr val="accent1"/>
+          </a:lnRef>
+          <a:fillRef idx="3">
+            <a:schemeClr val="accent1"/>
+          </a:fillRef>
+          <a:effectRef idx="2">
+            <a:schemeClr val="accent1"/>
+          </a:effectRef>
+          <a:fontRef idx="minor">
+            <a:schemeClr val="lt1"/>
+          </a:fontRef>
+        </p:style>
+        <p:txBody>
+          <a:bodyPr rtlCol="0" anchor="ctr" lIns="45720" rIns="45720"/>
+          <a:lstStyle/>
+          <a:p>
+            <a:pPr algn="ctr"/>
+            <a:r>
+              <a:rPr sz="900">
+                <a:solidFill>
+                  <a:srgbClr val="1F3A5F"/>
+                </a:solidFill>
+              </a:rPr>
+              <a:t>Gram 35: FR Intrepid-class, Category 2, Gandalf</a:t>
+            </a:r>
+          </a:p>
+        </p:txBody>
+      </p:sp>
+      <p:sp>
+        <p:nvSpPr>
+          <p:cNvPr id="28" name="TextBox 27"/>
+          <p:cNvSpPr txBox="1"/>
+          <p:nvPr/>
+        </p:nvSpPr>
+        <p:spPr>
+          <a:xfrm>
+            <a:off x="4948732" y="5017008"/>
+            <a:ext cx="2200046" cy="1447800"/>
+          </a:xfrm>
+          <a:prstGeom prst="rect">
+            <a:avLst/>
+          </a:prstGeom>
+          <a:noFill/>
+        </p:spPr>
+        <p:txBody>
+          <a:bodyPr wrap="square">
+            <a:spAutoFit/>
+          </a:bodyPr>
+          <a:lstStyle/>
+          <a:p>
+            <a:r>
+              <a:rPr sz="800">
+                <a:hlinkClick r:id="rId47"/>
+              </a:rPr>
+              <a:t>Lofar 1</a:t>
+            </a:r>
+          </a:p>
+          <a:p>
+            <a:r>
+              <a:rPr sz="800">
+                <a:hlinkClick r:id="rId48"/>
+              </a:rPr>
+              <a:t>Lofar 2</a:t>
+            </a:r>
+          </a:p>
+        </p:txBody>
+      </p:sp>
+      <p:sp>
+        <p:nvSpPr>
+          <p:cNvPr id="29" name="Rounded Rectangle 28"/>
+          <p:cNvSpPr/>
+          <p:nvPr>
+            <a:hlinkClick r:id="rId49"/>
+          </p:nvPr>
+        </p:nvSpPr>
+        <p:spPr>
+          <a:xfrm>
+            <a:off x="7240219" y="4632960"/>
+            <a:ext cx="2200046" cy="365760"/>
+          </a:xfrm>
+          <a:prstGeom prst="roundRect">
+            <a:avLst/>
+          </a:prstGeom>
+          <a:solidFill>
+            <a:srgbClr val="E8EEF7"/>
+          </a:solidFill>
+          <a:ln>
+            <a:solidFill>
+              <a:srgbClr val="1F3A5F"/>
+            </a:solidFill>
+          </a:ln>
+        </p:spPr>
+        <p:style>
+          <a:lnRef idx="1">
+            <a:schemeClr val="accent1"/>
+          </a:lnRef>
+          <a:fillRef idx="3">
+            <a:schemeClr val="accent1"/>
+          </a:fillRef>
+          <a:effectRef idx="2">
+            <a:schemeClr val="accent1"/>
+          </a:effectRef>
+          <a:fontRef idx="minor">
+            <a:schemeClr val="lt1"/>
+          </a:fontRef>
+        </p:style>
+        <p:txBody>
+          <a:bodyPr rtlCol="0" anchor="ctr" lIns="45720" rIns="45720"/>
+          <a:lstStyle/>
+          <a:p>
+            <a:pPr algn="ctr"/>
+            <a:r>
+              <a:rPr sz="900">
+                <a:solidFill>
+                  <a:srgbClr val="1F3A5F"/>
+                </a:solidFill>
+              </a:rPr>
+              <a:t>Gram 36: FR Rebel One, Category 3, Mustafar</a:t>
+            </a:r>
+          </a:p>
+        </p:txBody>
+      </p:sp>
+      <p:sp>
+        <p:nvSpPr>
+          <p:cNvPr id="30" name="TextBox 29"/>
+          <p:cNvSpPr txBox="1"/>
+          <p:nvPr/>
+        </p:nvSpPr>
+        <p:spPr>
+          <a:xfrm>
+            <a:off x="7240219" y="5017008"/>
+            <a:ext cx="2200046" cy="1447800"/>
+          </a:xfrm>
+          <a:prstGeom prst="rect">
+            <a:avLst/>
+          </a:prstGeom>
+          <a:noFill/>
+        </p:spPr>
+        <p:txBody>
+          <a:bodyPr wrap="square">
+            <a:spAutoFit/>
+          </a:bodyPr>
+          <a:lstStyle/>
+          <a:p>
+            <a:r>
+              <a:rPr sz="800">
+                <a:hlinkClick r:id="rId50"/>
+              </a:rPr>
+              <a:t>Lofar 1</a:t>
+            </a:r>
+          </a:p>
+          <a:p>
+            <a:r>
+              <a:rPr sz="800">
+                <a:hlinkClick r:id="rId51"/>
+              </a:rPr>
+              <a:t>Lofar 2</a:t>
+            </a:r>
+          </a:p>
+          <a:p>
+            <a:r>
+              <a:rPr sz="800">
+                <a:hlinkClick r:id="rId52"/>
+              </a:rPr>
+              <a:t>Lofar 3</a:t>
+            </a:r>
+          </a:p>
+          <a:p>
+            <a:r>
+              <a:rPr sz="800">
+                <a:hlinkClick r:id="rId53"/>
+              </a:rPr>
+              <a:t>Lofar 4</a:t>
+            </a:r>
+          </a:p>
+        </p:txBody>
+      </p:sp>
+      <p:sp>
+        <p:nvSpPr>
+          <p:cNvPr id="31" name="Rounded Rectangle 30"/>
+          <p:cNvSpPr/>
+          <p:nvPr>
+            <a:hlinkClick r:id="rId54"/>
+          </p:nvPr>
+        </p:nvSpPr>
+        <p:spPr>
+          <a:xfrm>
+            <a:off x="9531705" y="4632960"/>
+            <a:ext cx="2200046" cy="365760"/>
+          </a:xfrm>
+          <a:prstGeom prst="roundRect">
+            <a:avLst/>
+          </a:prstGeom>
+          <a:solidFill>
+            <a:srgbClr val="E8EEF7"/>
+          </a:solidFill>
+          <a:ln>
+            <a:solidFill>
+              <a:srgbClr val="1F3A5F"/>
+            </a:solidFill>
+          </a:ln>
+        </p:spPr>
+        <p:style>
+          <a:lnRef idx="1">
+            <a:schemeClr val="accent1"/>
+          </a:lnRef>
+          <a:fillRef idx="3">
+            <a:schemeClr val="accent1"/>
+          </a:fillRef>
+          <a:effectRef idx="2">
+            <a:schemeClr val="accent1"/>
+          </a:effectRef>
+          <a:fontRef idx="minor">
+            <a:schemeClr val="lt1"/>
+          </a:fontRef>
+        </p:style>
+        <p:txBody>
+          <a:bodyPr rtlCol="0" anchor="ctr" lIns="45720" rIns="45720"/>
+          <a:lstStyle/>
+          <a:p>
+            <a:pPr algn="ctr"/>
+            <a:r>
+              <a:rPr sz="900">
+                <a:solidFill>
+                  <a:srgbClr val="1F3A5F"/>
+                </a:solidFill>
+              </a:rPr>
+              <a:t>Gram 37: FR Intrepid-class, Category 2, Tatooine</a:t>
+            </a:r>
+          </a:p>
+        </p:txBody>
+      </p:sp>
+      <p:sp>
+        <p:nvSpPr>
+          <p:cNvPr id="32" name="TextBox 31"/>
+          <p:cNvSpPr txBox="1"/>
+          <p:nvPr/>
+        </p:nvSpPr>
+        <p:spPr>
+          <a:xfrm>
+            <a:off x="9531705" y="5017008"/>
+            <a:ext cx="2200046" cy="1447800"/>
+          </a:xfrm>
+          <a:prstGeom prst="rect">
+            <a:avLst/>
+          </a:prstGeom>
+          <a:noFill/>
+        </p:spPr>
+        <p:txBody>
+          <a:bodyPr wrap="square">
+            <a:spAutoFit/>
+          </a:bodyPr>
+          <a:lstStyle/>
+          <a:p>
+            <a:r>
+              <a:rPr sz="800">
+                <a:hlinkClick r:id="rId55"/>
+              </a:rPr>
+              <a:t>Lofar 1</a:t>
+            </a:r>
+          </a:p>
+          <a:p>
+            <a:r>
+              <a:rPr sz="800">
+                <a:hlinkClick r:id="rId56"/>
+              </a:rPr>
+              <a:t>Lofar 2</a:t>
+            </a:r>
+          </a:p>
+          <a:p>
+            <a:r>
+              <a:rPr sz="800">
+                <a:hlinkClick r:id="rId57"/>
+              </a:rPr>
+              <a:t>Lofar 3</a:t>
+            </a:r>
+          </a:p>
+        </p:txBody>
+      </p:sp>
+    </p:spTree>
+  </p:cSld>
+  <p:clrMapOvr>
+    <a:masterClrMapping/>
+  </p:clrMapOvr>
+</p:sld>
+</file>
+
+<file path=ppt/slides/slide4.xml><?xml version="1.0" encoding="utf-8"?>
+<p:sld xmlns:a="http://schemas.openxmlformats.org/drawingml/2006/main" xmlns:p="http://schemas.openxmlformats.org/presentationml/2006/main" xmlns:r="http://schemas.openxmlformats.org/officeDocument/2006/relationships">
+  <p:cSld>
+    <p:spTree>
+      <p:nvGrpSpPr>
+        <p:cNvPr id="1" name=""/>
+        <p:cNvGrpSpPr/>
+        <p:nvPr/>
+      </p:nvGrpSpPr>
+      <p:grpSpPr/>
+      <p:sp>
+        <p:nvSpPr>
+          <p:cNvPr id="2" name="Rectangle 1"/>
+          <p:cNvSpPr/>
+          <p:nvPr/>
+        </p:nvSpPr>
+        <p:spPr>
+          <a:xfrm>
+            <a:off x="0" y="0"/>
+            <a:ext cx="12188952" cy="548640"/>
+          </a:xfrm>
+          <a:prstGeom prst="rect">
+            <a:avLst/>
+          </a:prstGeom>
+          <a:solidFill>
+            <a:srgbClr val="1F3A5F"/>
+          </a:solidFill>
+          <a:ln>
+            <a:noFill/>
+          </a:ln>
+        </p:spPr>
+        <p:style>
+          <a:lnRef idx="1">
+            <a:schemeClr val="accent1"/>
+          </a:lnRef>
+          <a:fillRef idx="3">
+            <a:schemeClr val="accent1"/>
+          </a:fillRef>
+          <a:effectRef idx="2">
+            <a:schemeClr val="accent1"/>
+          </a:effectRef>
+          <a:fontRef idx="minor">
+            <a:schemeClr val="lt1"/>
+          </a:fontRef>
+        </p:style>
+        <p:txBody>
+          <a:bodyPr rtlCol="0" anchor="ctr" lIns="182880" rIns="182880"/>
+          <a:lstStyle/>
+          <a:p>
+            <a:pPr algn="ctr"/>
+            <a:r>
+              <a:rPr sz="2000" b="1">
+                <a:solidFill>
+                  <a:srgbClr val="FFFFFF"/>
+                </a:solidFill>
+              </a:rPr>
+              <a:t>Instructor Week 3 Grams — Page 3 of 3</a:t>
+            </a:r>
+          </a:p>
+        </p:txBody>
+      </p:sp>
+      <p:sp>
+        <p:nvSpPr>
+          <p:cNvPr id="3" name="Rounded Rectangle 2"/>
+          <p:cNvSpPr/>
+          <p:nvPr>
+            <a:hlinkClick r:id="rId2"/>
+          </p:nvPr>
+        </p:nvSpPr>
+        <p:spPr>
+          <a:xfrm>
+            <a:off x="365760" y="731520"/>
+            <a:ext cx="2200046" cy="365760"/>
+          </a:xfrm>
+          <a:prstGeom prst="roundRect">
+            <a:avLst/>
+          </a:prstGeom>
+          <a:solidFill>
+            <a:srgbClr val="E8EEF7"/>
+          </a:solidFill>
+          <a:ln>
+            <a:solidFill>
+              <a:srgbClr val="1F3A5F"/>
+            </a:solidFill>
+          </a:ln>
+        </p:spPr>
+        <p:style>
+          <a:lnRef idx="1">
+            <a:schemeClr val="accent1"/>
+          </a:lnRef>
+          <a:fillRef idx="3">
+            <a:schemeClr val="accent1"/>
+          </a:fillRef>
+          <a:effectRef idx="2">
+            <a:schemeClr val="accent1"/>
+          </a:effectRef>
+          <a:fontRef idx="minor">
+            <a:schemeClr val="lt1"/>
+          </a:fontRef>
+        </p:style>
+        <p:txBody>
+          <a:bodyPr rtlCol="0" anchor="ctr" lIns="45720" rIns="45720"/>
+          <a:lstStyle/>
+          <a:p>
+            <a:pPr algn="ctr"/>
+            <a:r>
+              <a:rPr sz="900">
+                <a:solidFill>
+                  <a:srgbClr val="1F3A5F"/>
+                </a:solidFill>
+              </a:rPr>
+              <a:t>Gram 38: FR Reliant, Category 3, Caprica</a:t>
+            </a:r>
+          </a:p>
+        </p:txBody>
+      </p:sp>
+      <p:sp>
+        <p:nvSpPr>
+          <p:cNvPr id="4" name="TextBox 3"/>
+          <p:cNvSpPr txBox="1"/>
+          <p:nvPr/>
+        </p:nvSpPr>
+        <p:spPr>
+          <a:xfrm>
+            <a:off x="365760" y="1115568"/>
+            <a:ext cx="2200046" cy="1447800"/>
+          </a:xfrm>
+          <a:prstGeom prst="rect">
+            <a:avLst/>
+          </a:prstGeom>
+          <a:noFill/>
+        </p:spPr>
+        <p:txBody>
+          <a:bodyPr wrap="square">
+            <a:spAutoFit/>
+          </a:bodyPr>
+          <a:lstStyle/>
+          <a:p>
+            <a:r>
+              <a:rPr sz="800">
+                <a:hlinkClick r:id="rId3"/>
+              </a:rPr>
+              <a:t>Lofar 1</a:t>
+            </a:r>
+          </a:p>
+          <a:p>
+            <a:r>
+              <a:rPr sz="800">
+                <a:hlinkClick r:id="rId4"/>
+              </a:rPr>
+              <a:t>Lofar 2</a:t>
+            </a:r>
+          </a:p>
+        </p:txBody>
+      </p:sp>
+      <p:sp>
+        <p:nvSpPr>
+          <p:cNvPr id="5" name="Rounded Rectangle 4"/>
+          <p:cNvSpPr/>
+          <p:nvPr>
+            <a:hlinkClick r:id="rId5"/>
+          </p:nvPr>
+        </p:nvSpPr>
+        <p:spPr>
+          <a:xfrm>
+            <a:off x="2657246" y="731520"/>
+            <a:ext cx="2200046" cy="365760"/>
+          </a:xfrm>
+          <a:prstGeom prst="roundRect">
+            <a:avLst/>
+          </a:prstGeom>
+          <a:solidFill>
+            <a:srgbClr val="E8EEF7"/>
+          </a:solidFill>
+          <a:ln>
+            <a:solidFill>
+              <a:srgbClr val="1F3A5F"/>
+            </a:solidFill>
+          </a:ln>
+        </p:spPr>
+        <p:style>
+          <a:lnRef idx="1">
+            <a:schemeClr val="accent1"/>
+          </a:lnRef>
+          <a:fillRef idx="3">
+            <a:schemeClr val="accent1"/>
+          </a:fillRef>
+          <a:effectRef idx="2">
+            <a:schemeClr val="accent1"/>
+          </a:effectRef>
+          <a:fontRef idx="minor">
+            <a:schemeClr val="lt1"/>
+          </a:fontRef>
+        </p:style>
+        <p:txBody>
+          <a:bodyPr rtlCol="0" anchor="ctr" lIns="45720" rIns="45720"/>
+          <a:lstStyle/>
+          <a:p>
+            <a:pPr algn="ctr"/>
+            <a:r>
+              <a:rPr sz="900">
+                <a:solidFill>
+                  <a:srgbClr val="1F3A5F"/>
+                </a:solidFill>
+              </a:rPr>
+              <a:t>Gram 39: FR Stargazer, Category 1, Betazed</a:t>
+            </a:r>
+          </a:p>
+        </p:txBody>
+      </p:sp>
+      <p:sp>
+        <p:nvSpPr>
+          <p:cNvPr id="6" name="TextBox 5"/>
+          <p:cNvSpPr txBox="1"/>
+          <p:nvPr/>
+        </p:nvSpPr>
+        <p:spPr>
+          <a:xfrm>
+            <a:off x="2657246" y="1115568"/>
+            <a:ext cx="2200046" cy="1447800"/>
+          </a:xfrm>
+          <a:prstGeom prst="rect">
+            <a:avLst/>
+          </a:prstGeom>
+          <a:noFill/>
+        </p:spPr>
+        <p:txBody>
+          <a:bodyPr wrap="square">
+            <a:spAutoFit/>
+          </a:bodyPr>
+          <a:lstStyle/>
+          <a:p>
+            <a:r>
+              <a:rPr sz="800">
+                <a:hlinkClick r:id="rId6"/>
+              </a:rPr>
+              <a:t>Lofar 1</a:t>
+            </a:r>
+          </a:p>
+          <a:p>
+            <a:r>
+              <a:rPr sz="800">
+                <a:hlinkClick r:id="rId7"/>
+              </a:rPr>
+              <a:t>Lofar 2</a:t>
+            </a:r>
+          </a:p>
+          <a:p>
+            <a:r>
+              <a:rPr sz="800">
+                <a:hlinkClick r:id="rId8"/>
+              </a:rPr>
+              <a:t>Lofar 3</a:t>
+            </a:r>
+          </a:p>
+          <a:p>
+            <a:r>
+              <a:rPr sz="800">
+                <a:hlinkClick r:id="rId9"/>
+              </a:rPr>
+              <a:t>Lofar 4</a:t>
+            </a:r>
+          </a:p>
+        </p:txBody>
+      </p:sp>
+      <p:sp>
+        <p:nvSpPr>
+          <p:cNvPr id="7" name="Rounded Rectangle 6"/>
+          <p:cNvSpPr/>
+          <p:nvPr>
+            <a:hlinkClick r:id="rId10"/>
+          </p:nvPr>
+        </p:nvSpPr>
+        <p:spPr>
+          <a:xfrm>
+            <a:off x="4948732" y="731520"/>
+            <a:ext cx="2200046" cy="365760"/>
+          </a:xfrm>
+          <a:prstGeom prst="roundRect">
+            <a:avLst/>
+          </a:prstGeom>
+          <a:solidFill>
+            <a:srgbClr val="E8EEF7"/>
+          </a:solidFill>
+          <a:ln>
+            <a:solidFill>
+              <a:srgbClr val="1F3A5F"/>
+            </a:solidFill>
+          </a:ln>
+        </p:spPr>
+        <p:style>
+          <a:lnRef idx="1">
+            <a:schemeClr val="accent1"/>
+          </a:lnRef>
+          <a:fillRef idx="3">
+            <a:schemeClr val="accent1"/>
+          </a:fillRef>
+          <a:effectRef idx="2">
+            <a:schemeClr val="accent1"/>
+          </a:effectRef>
+          <a:fontRef idx="minor">
+            <a:schemeClr val="lt1"/>
+          </a:fontRef>
+        </p:style>
+        <p:txBody>
+          <a:bodyPr rtlCol="0" anchor="ctr" lIns="45720" rIns="45720"/>
+          <a:lstStyle/>
+          <a:p>
+            <a:pPr algn="ctr"/>
+            <a:r>
+              <a:rPr sz="900">
+                <a:solidFill>
+                  <a:srgbClr val="1F3A5F"/>
+                </a:solidFill>
+              </a:rPr>
+              <a:t>Gram 40: FR Defiant-class, Category 2, Endor</a:t>
+            </a:r>
+          </a:p>
+        </p:txBody>
+      </p:sp>
+      <p:sp>
+        <p:nvSpPr>
+          <p:cNvPr id="8" name="TextBox 7"/>
+          <p:cNvSpPr txBox="1"/>
+          <p:nvPr/>
+        </p:nvSpPr>
+        <p:spPr>
+          <a:xfrm>
+            <a:off x="4948732" y="1115568"/>
+            <a:ext cx="2200046" cy="1447800"/>
+          </a:xfrm>
+          <a:prstGeom prst="rect">
+            <a:avLst/>
+          </a:prstGeom>
+          <a:noFill/>
+        </p:spPr>
+        <p:txBody>
+          <a:bodyPr wrap="square">
+            <a:spAutoFit/>
+          </a:bodyPr>
+          <a:lstStyle/>
+          <a:p>
+            <a:r>
+              <a:rPr sz="800">
+                <a:hlinkClick r:id="rId11"/>
+              </a:rPr>
+              <a:t>Lofar 1</a:t>
+            </a:r>
+          </a:p>
+          <a:p>
+            <a:r>
+              <a:rPr sz="800">
+                <a:hlinkClick r:id="rId12"/>
+              </a:rPr>
+              <a:t>Lofar 2</a:t>
+            </a:r>
+          </a:p>
+          <a:p>
+            <a:r>
+              <a:rPr sz="800">
+                <a:hlinkClick r:id="rId13"/>
+              </a:rPr>
+              <a:t>Lofar 3</a:t>
+            </a:r>
+          </a:p>
+          <a:p>
+            <a:r>
+              <a:rPr sz="800">
+                <a:hlinkClick r:id="rId14"/>
+              </a:rPr>
+              <a:t>Lofar 4</a:t>
+            </a:r>
+          </a:p>
+        </p:txBody>
+      </p:sp>
+      <p:sp>
+        <p:nvSpPr>
+          <p:cNvPr id="9" name="Rounded Rectangle 8"/>
+          <p:cNvSpPr/>
+          <p:nvPr>
+            <a:hlinkClick r:id="rId15"/>
+          </p:nvPr>
+        </p:nvSpPr>
+        <p:spPr>
+          <a:xfrm>
+            <a:off x="7240219" y="731520"/>
+            <a:ext cx="2200046" cy="365760"/>
+          </a:xfrm>
+          <a:prstGeom prst="roundRect">
+            <a:avLst/>
+          </a:prstGeom>
+          <a:solidFill>
+            <a:srgbClr val="E8EEF7"/>
+          </a:solidFill>
+          <a:ln>
+            <a:solidFill>
+              <a:srgbClr val="1F3A5F"/>
+            </a:solidFill>
+          </a:ln>
+        </p:spPr>
+        <p:style>
+          <a:lnRef idx="1">
+            <a:schemeClr val="accent1"/>
+          </a:lnRef>
+          <a:fillRef idx="3">
+            <a:schemeClr val="accent1"/>
+          </a:fillRef>
+          <a:effectRef idx="2">
+            <a:schemeClr val="accent1"/>
+          </a:effectRef>
+          <a:fontRef idx="minor">
+            <a:schemeClr val="lt1"/>
+          </a:fontRef>
+        </p:style>
+        <p:txBody>
+          <a:bodyPr rtlCol="0" anchor="ctr" lIns="45720" rIns="45720"/>
+          <a:lstStyle/>
+          <a:p>
+            <a:pPr algn="ctr"/>
+            <a:r>
+              <a:rPr sz="900">
+                <a:solidFill>
+                  <a:srgbClr val="1F3A5F"/>
+                </a:solidFill>
+              </a:rPr>
+              <a:t>Gram 41: FR Tantive IV, Category 3, Betazed</a:t>
+            </a:r>
+          </a:p>
+        </p:txBody>
+      </p:sp>
+      <p:sp>
+        <p:nvSpPr>
+          <p:cNvPr id="10" name="TextBox 9"/>
+          <p:cNvSpPr txBox="1"/>
+          <p:nvPr/>
+        </p:nvSpPr>
+        <p:spPr>
+          <a:xfrm>
+            <a:off x="7240219" y="1115568"/>
+            <a:ext cx="2200046" cy="1447800"/>
+          </a:xfrm>
+          <a:prstGeom prst="rect">
+            <a:avLst/>
+          </a:prstGeom>
+          <a:noFill/>
+        </p:spPr>
+        <p:txBody>
+          <a:bodyPr wrap="square">
+            <a:spAutoFit/>
+          </a:bodyPr>
+          <a:lstStyle/>
+          <a:p>
+            <a:r>
+              <a:rPr sz="800">
+                <a:hlinkClick r:id="rId16"/>
+              </a:rPr>
+              <a:t>Lofar 1</a:t>
+            </a:r>
+          </a:p>
+          <a:p>
+            <a:r>
+              <a:rPr sz="800">
+                <a:hlinkClick r:id="rId17"/>
+              </a:rPr>
+              <a:t>Lofar 2</a:t>
+            </a:r>
+          </a:p>
+          <a:p>
+            <a:r>
+              <a:rPr sz="800">
+                <a:hlinkClick r:id="rId18"/>
+              </a:rPr>
+              <a:t>Lofar 3</a:t>
+            </a:r>
+          </a:p>
+        </p:txBody>
+      </p:sp>
+      <p:sp>
+        <p:nvSpPr>
+          <p:cNvPr id="11" name="Rounded Rectangle 10"/>
+          <p:cNvSpPr/>
+          <p:nvPr>
+            <a:hlinkClick r:id="rId19"/>
+          </p:nvPr>
+        </p:nvSpPr>
+        <p:spPr>
+          <a:xfrm>
+            <a:off x="9531705" y="731520"/>
+            <a:ext cx="2200046" cy="365760"/>
+          </a:xfrm>
+          <a:prstGeom prst="roundRect">
+            <a:avLst/>
+          </a:prstGeom>
+          <a:solidFill>
+            <a:srgbClr val="E8EEF7"/>
+          </a:solidFill>
+          <a:ln>
+            <a:solidFill>
+              <a:srgbClr val="1F3A5F"/>
+            </a:solidFill>
+          </a:ln>
+        </p:spPr>
+        <p:style>
+          <a:lnRef idx="1">
+            <a:schemeClr val="accent1"/>
+          </a:lnRef>
+          <a:fillRef idx="3">
+            <a:schemeClr val="accent1"/>
+          </a:fillRef>
+          <a:effectRef idx="2">
+            <a:schemeClr val="accent1"/>
+          </a:effectRef>
+          <a:fontRef idx="minor">
+            <a:schemeClr val="lt1"/>
+          </a:fontRef>
+        </p:style>
+        <p:txBody>
+          <a:bodyPr rtlCol="0" anchor="ctr" lIns="45720" rIns="45720"/>
+          <a:lstStyle/>
+          <a:p>
+            <a:pPr algn="ctr"/>
+            <a:r>
+              <a:rPr sz="900">
+                <a:solidFill>
+                  <a:srgbClr val="1F3A5F"/>
+                </a:solidFill>
+              </a:rPr>
+              <a:t>Gram 42: FR TIE Bomber, Category 3, Mustafar</a:t>
+            </a:r>
+          </a:p>
+        </p:txBody>
+      </p:sp>
+      <p:sp>
+        <p:nvSpPr>
+          <p:cNvPr id="12" name="TextBox 11"/>
+          <p:cNvSpPr txBox="1"/>
+          <p:nvPr/>
+        </p:nvSpPr>
+        <p:spPr>
+          <a:xfrm>
+            <a:off x="9531705" y="1115568"/>
+            <a:ext cx="2200046" cy="1447800"/>
+          </a:xfrm>
+          <a:prstGeom prst="rect">
+            <a:avLst/>
+          </a:prstGeom>
+          <a:noFill/>
+        </p:spPr>
+        <p:txBody>
+          <a:bodyPr wrap="square">
+            <a:spAutoFit/>
+          </a:bodyPr>
+          <a:lstStyle/>
+          <a:p>
+            <a:r>
+              <a:rPr sz="800">
+                <a:hlinkClick r:id="rId20"/>
+              </a:rPr>
+              <a:t>Lofar 1</a:t>
+            </a:r>
+          </a:p>
+        </p:txBody>
+      </p:sp>
+    </p:spTree>
+  </p:cSld>
+  <p:clrMapOvr>
+    <a:masterClrMapping/>
+  </p:clrMapOvr>
+</p:sld>
+</file>
+
+<file path=ppt/slides/slide5.xml><?xml version="1.0" encoding="utf-8"?>
+<p:sld xmlns:a="http://schemas.openxmlformats.org/drawingml/2006/main" xmlns:p="http://schemas.openxmlformats.org/presentationml/2006/main" xmlns:r="http://schemas.openxmlformats.org/officeDocument/2006/relationships">
+  <p:cSld>
+    <p:spTree>
+      <p:nvGrpSpPr>
+        <p:cNvPr id="1" name=""/>
+        <p:cNvGrpSpPr/>
+        <p:nvPr/>
+      </p:nvGrpSpPr>
+      <p:grpSpPr/>
+      <p:sp>
+        <p:nvSpPr>
+          <p:cNvPr id="2" name="TextBox 1"/>
+          <p:cNvSpPr txBox="1"/>
+          <p:nvPr/>
+        </p:nvSpPr>
+        <p:spPr>
+          <a:xfrm>
+            <a:off x="914400" y="2377440"/>
+            <a:ext cx="10360152" cy="1280160"/>
+          </a:xfrm>
+          <a:prstGeom prst="rect">
+            <a:avLst/>
+          </a:prstGeom>
+          <a:noFill/>
+        </p:spPr>
+        <p:txBody>
+          <a:bodyPr wrap="square">
+            <a:spAutoFit/>
+          </a:bodyPr>
+          <a:lstStyle/>
+          <a:p>
+            <a:pPr algn="ctr"/>
+            <a:r>
+              <a:rPr sz="4000" b="1">
+                <a:solidFill>
+                  <a:srgbClr val="1F3A5F"/>
+                </a:solidFill>
+              </a:rPr>
+              <a:t>End of Instructor Week 3 Grams</a:t>
+            </a:r>
+          </a:p>
+        </p:txBody>
+      </p:sp>
+      <p:sp>
+        <p:nvSpPr>
+          <p:cNvPr id="3" name="TextBox 2"/>
+          <p:cNvSpPr txBox="1"/>
+          <p:nvPr/>
+        </p:nvSpPr>
+        <p:spPr>
+          <a:xfrm>
+            <a:off x="914400" y="3840480"/>
+            <a:ext cx="10360152" cy="731520"/>
+          </a:xfrm>
+          <a:prstGeom prst="rect">
+            <a:avLst/>
+          </a:prstGeom>
+          <a:noFill/>
+        </p:spPr>
+        <p:txBody>
+          <a:bodyPr wrap="none">
+            <a:spAutoFit/>
+          </a:bodyPr>
+          <a:lstStyle/>
+          <a:p>
+            <a:pPr algn="ctr"/>
+            <a:r>
+              <a:rPr sz="2400">
+                <a:solidFill>
+                  <a:srgbClr val="1F3A5F"/>
+                </a:solidFill>
+              </a:rPr>
+              <a:t>Instructor Version</a:t>
             </a:r>
           </a:p>
         </p:txBody>

--- a/source/Instructor Week 3 Grams/Instructor Week 3 Grams.pptx
+++ b/source/Instructor Week 3 Grams/Instructor Week 3 Grams.pptx
@@ -8,8 +8,6 @@
     <p:sldId id="256" r:id="rId7"/>
     <p:sldId id="257" r:id="rId8"/>
     <p:sldId id="258" r:id="rId9"/>
-    <p:sldId id="259" r:id="rId10"/>
-    <p:sldId id="260" r:id="rId11"/>
   </p:sldIdLst>
   <p:sldSz cx="12188952" cy="6858000" type="screen4x3"/>
   <p:notesSz cx="6858000" cy="9144000"/>
@@ -3094,14 +3092,120 @@
       <p:grpSpPr/>
       <p:sp>
         <p:nvSpPr>
-          <p:cNvPr id="2" name="TextBox 1"/>
+          <p:cNvPr id="2" name="Rectangle 1"/>
+          <p:cNvSpPr/>
+          <p:nvPr/>
+        </p:nvSpPr>
+        <p:spPr>
+          <a:xfrm>
+            <a:off x="0" y="0"/>
+            <a:ext cx="12188952" cy="548640"/>
+          </a:xfrm>
+          <a:prstGeom prst="rect">
+            <a:avLst/>
+          </a:prstGeom>
+          <a:solidFill>
+            <a:srgbClr val="1F3A5F"/>
+          </a:solidFill>
+          <a:ln>
+            <a:noFill/>
+          </a:ln>
+        </p:spPr>
+        <p:style>
+          <a:lnRef idx="1">
+            <a:schemeClr val="accent1"/>
+          </a:lnRef>
+          <a:fillRef idx="3">
+            <a:schemeClr val="accent1"/>
+          </a:fillRef>
+          <a:effectRef idx="2">
+            <a:schemeClr val="accent1"/>
+          </a:effectRef>
+          <a:fontRef idx="minor">
+            <a:schemeClr val="lt1"/>
+          </a:fontRef>
+        </p:style>
+        <p:txBody>
+          <a:bodyPr rtlCol="0" anchor="ctr" lIns="182880" rIns="182880"/>
+          <a:lstStyle/>
+          <a:p>
+            <a:pPr algn="ctr"/>
+            <a:r>
+              <a:rPr sz="2000" b="1">
+                <a:solidFill>
+                  <a:srgbClr val="FFFFFF"/>
+                </a:solidFill>
+              </a:rPr>
+              <a:t>Instructor Week 3 Grams — Page 1 of 3</a:t>
+            </a:r>
+          </a:p>
+        </p:txBody>
+      </p:sp>
+      <p:sp>
+        <p:nvSpPr>
+          <p:cNvPr id="3" name="Rounded Rectangle 2">
+            <a:hlinkClick r:id="rId2"/>
+          </p:cNvPr>
+          <p:cNvSpPr/>
+          <p:nvPr/>
+        </p:nvSpPr>
+        <p:spPr>
+          <a:xfrm>
+            <a:off x="365760" y="731520"/>
+            <a:ext cx="2200046" cy="365760"/>
+          </a:xfrm>
+          <a:prstGeom prst="roundRect">
+            <a:avLst/>
+          </a:prstGeom>
+          <a:solidFill>
+            <a:srgbClr val="E8EEF7"/>
+          </a:solidFill>
+          <a:ln>
+            <a:solidFill>
+              <a:srgbClr val="1F3A5F"/>
+            </a:solidFill>
+          </a:ln>
+        </p:spPr>
+        <p:style>
+          <a:lnRef idx="1">
+            <a:schemeClr val="accent1"/>
+          </a:lnRef>
+          <a:fillRef idx="3">
+            <a:schemeClr val="accent1"/>
+          </a:fillRef>
+          <a:effectRef idx="2">
+            <a:schemeClr val="accent1"/>
+          </a:effectRef>
+          <a:fontRef idx="minor">
+            <a:schemeClr val="lt1"/>
+          </a:fontRef>
+        </p:style>
+        <p:txBody>
+          <a:bodyPr rtlCol="0" anchor="ctr" lIns="45720" rIns="45720"/>
+          <a:lstStyle/>
+          <a:p>
+            <a:pPr algn="ctr"/>
+            <a:r>
+              <a:rPr sz="900">
+                <a:solidFill>
+                  <a:srgbClr val="1F3A5F"/>
+                </a:solidFill>
+              </a:rPr>
+              <a:t>Gram 1: Intrepid-class contact bearing 127, codename Defiant</a:t>
+            </a:r>
+          </a:p>
+        </p:txBody>
+      </p:sp>
+      <p:sp>
+        <p:nvSpPr>
+          <p:cNvPr id="4" name="TextBox 3"/>
           <p:cNvSpPr txBox="1"/>
           <p:nvPr/>
         </p:nvSpPr>
         <p:spPr>
           <a:xfrm>
-            <a:off x="914400" y="2377440"/>
-            <a:ext cx="10360152" cy="1280160"/>
+            <a:off x="365760" y="1115568"/>
+            <a:ext cx="2200046" cy="1447800"/>
           </a:xfrm>
           <a:prstGeom prst="rect">
             <a:avLst/>
@@ -3114,28 +3218,96 @@
           </a:bodyPr>
           <a:lstStyle/>
           <a:p>
+            <a:r>
+              <a:rPr sz="800">
+                <a:hlinkClick r:id="rId3"/>
+              </a:rPr>
+              <a:t>Lofar 1</a:t>
+            </a:r>
+          </a:p>
+          <a:p>
+            <a:r>
+              <a:rPr sz="800">
+                <a:hlinkClick r:id="rId4"/>
+              </a:rPr>
+              <a:t>Lofar 2</a:t>
+            </a:r>
+          </a:p>
+          <a:p>
+            <a:r>
+              <a:rPr sz="800">
+                <a:hlinkClick r:id="rId5"/>
+              </a:rPr>
+              <a:t>Lofar 3</a:t>
+            </a:r>
+          </a:p>
+        </p:txBody>
+      </p:sp>
+      <p:sp>
+        <p:nvSpPr>
+          <p:cNvPr id="5" name="Rounded Rectangle 4">
+            <a:hlinkClick r:id="rId6"/>
+          </p:cNvPr>
+          <p:cNvSpPr/>
+          <p:nvPr/>
+        </p:nvSpPr>
+        <p:spPr>
+          <a:xfrm>
+            <a:off x="2657246" y="731520"/>
+            <a:ext cx="2200046" cy="365760"/>
+          </a:xfrm>
+          <a:prstGeom prst="roundRect">
+            <a:avLst/>
+          </a:prstGeom>
+          <a:solidFill>
+            <a:srgbClr val="E8EEF7"/>
+          </a:solidFill>
+          <a:ln>
+            <a:solidFill>
+              <a:srgbClr val="1F3A5F"/>
+            </a:solidFill>
+          </a:ln>
+        </p:spPr>
+        <p:style>
+          <a:lnRef idx="1">
+            <a:schemeClr val="accent1"/>
+          </a:lnRef>
+          <a:fillRef idx="3">
+            <a:schemeClr val="accent1"/>
+          </a:fillRef>
+          <a:effectRef idx="2">
+            <a:schemeClr val="accent1"/>
+          </a:effectRef>
+          <a:fontRef idx="minor">
+            <a:schemeClr val="lt1"/>
+          </a:fontRef>
+        </p:style>
+        <p:txBody>
+          <a:bodyPr rtlCol="0" anchor="ctr" lIns="45720" rIns="45720"/>
+          <a:lstStyle/>
+          <a:p>
             <a:pPr algn="ctr"/>
             <a:r>
-              <a:rPr sz="4000" b="1">
+              <a:rPr sz="900">
                 <a:solidFill>
                   <a:srgbClr val="1F3A5F"/>
                 </a:solidFill>
               </a:rPr>
-              <a:t>Welcome to Instructor Week 3 Grams</a:t>
-            </a:r>
-          </a:p>
-        </p:txBody>
-      </p:sp>
-      <p:sp>
-        <p:nvSpPr>
-          <p:cNvPr id="3" name="TextBox 2"/>
+              <a:t>Gram 2: FR Miranda-class, Category 3, Tatooine</a:t>
+            </a:r>
+          </a:p>
+        </p:txBody>
+      </p:sp>
+      <p:sp>
+        <p:nvSpPr>
+          <p:cNvPr id="6" name="TextBox 5"/>
           <p:cNvSpPr txBox="1"/>
           <p:nvPr/>
         </p:nvSpPr>
         <p:spPr>
           <a:xfrm>
-            <a:off x="914400" y="3840480"/>
-            <a:ext cx="10360152" cy="731520"/>
+            <a:off x="2657246" y="1115568"/>
+            <a:ext cx="2200046" cy="1447800"/>
           </a:xfrm>
           <a:prstGeom prst="rect">
             <a:avLst/>
@@ -3143,19 +3315,1350 @@
           <a:noFill/>
         </p:spPr>
         <p:txBody>
-          <a:bodyPr wrap="none">
+          <a:bodyPr wrap="square">
             <a:spAutoFit/>
           </a:bodyPr>
           <a:lstStyle/>
           <a:p>
+            <a:r>
+              <a:rPr sz="800">
+                <a:hlinkClick r:id="rId7"/>
+              </a:rPr>
+              <a:t>Lofar 1</a:t>
+            </a:r>
+          </a:p>
+          <a:p>
+            <a:r>
+              <a:rPr sz="800">
+                <a:hlinkClick r:id="rId8"/>
+              </a:rPr>
+              <a:t>Lofar 2</a:t>
+            </a:r>
+          </a:p>
+        </p:txBody>
+      </p:sp>
+      <p:sp>
+        <p:nvSpPr>
+          <p:cNvPr id="7" name="Rounded Rectangle 6">
+            <a:hlinkClick r:id="rId9"/>
+          </p:cNvPr>
+          <p:cNvSpPr/>
+          <p:nvPr/>
+        </p:nvSpPr>
+        <p:spPr>
+          <a:xfrm>
+            <a:off x="4948732" y="731520"/>
+            <a:ext cx="2200046" cy="365760"/>
+          </a:xfrm>
+          <a:prstGeom prst="roundRect">
+            <a:avLst/>
+          </a:prstGeom>
+          <a:solidFill>
+            <a:srgbClr val="E8EEF7"/>
+          </a:solidFill>
+          <a:ln>
+            <a:solidFill>
+              <a:srgbClr val="1F3A5F"/>
+            </a:solidFill>
+          </a:ln>
+        </p:spPr>
+        <p:style>
+          <a:lnRef idx="1">
+            <a:schemeClr val="accent1"/>
+          </a:lnRef>
+          <a:fillRef idx="3">
+            <a:schemeClr val="accent1"/>
+          </a:fillRef>
+          <a:effectRef idx="2">
+            <a:schemeClr val="accent1"/>
+          </a:effectRef>
+          <a:fontRef idx="minor">
+            <a:schemeClr val="lt1"/>
+          </a:fontRef>
+        </p:style>
+        <p:txBody>
+          <a:bodyPr rtlCol="0" anchor="ctr" lIns="45720" rIns="45720"/>
+          <a:lstStyle/>
+          <a:p>
             <a:pPr algn="ctr"/>
             <a:r>
-              <a:rPr sz="2400">
+              <a:rPr sz="900">
                 <a:solidFill>
                   <a:srgbClr val="1F3A5F"/>
                 </a:solidFill>
               </a:rPr>
-              <a:t>Instructor Version</a:t>
+              <a:t>Gram 3: FR Outrider, Category 2, Cardassia</a:t>
+            </a:r>
+          </a:p>
+        </p:txBody>
+      </p:sp>
+      <p:sp>
+        <p:nvSpPr>
+          <p:cNvPr id="8" name="TextBox 7"/>
+          <p:cNvSpPr txBox="1"/>
+          <p:nvPr/>
+        </p:nvSpPr>
+        <p:spPr>
+          <a:xfrm>
+            <a:off x="4948732" y="1115568"/>
+            <a:ext cx="2200046" cy="1447800"/>
+          </a:xfrm>
+          <a:prstGeom prst="rect">
+            <a:avLst/>
+          </a:prstGeom>
+          <a:noFill/>
+        </p:spPr>
+        <p:txBody>
+          <a:bodyPr wrap="square">
+            <a:spAutoFit/>
+          </a:bodyPr>
+          <a:lstStyle/>
+          <a:p>
+            <a:r>
+              <a:rPr sz="800">
+                <a:hlinkClick r:id="rId10"/>
+              </a:rPr>
+              <a:t>Lofar 1</a:t>
+            </a:r>
+          </a:p>
+          <a:p>
+            <a:r>
+              <a:rPr sz="800">
+                <a:hlinkClick r:id="rId11"/>
+              </a:rPr>
+              <a:t>Lofar 2</a:t>
+            </a:r>
+          </a:p>
+          <a:p>
+            <a:r>
+              <a:rPr sz="800">
+                <a:hlinkClick r:id="rId12"/>
+              </a:rPr>
+              <a:t>Lofar 3</a:t>
+            </a:r>
+          </a:p>
+        </p:txBody>
+      </p:sp>
+      <p:sp>
+        <p:nvSpPr>
+          <p:cNvPr id="9" name="Rounded Rectangle 8">
+            <a:hlinkClick r:id="rId13"/>
+          </p:cNvPr>
+          <p:cNvSpPr/>
+          <p:nvPr/>
+        </p:nvSpPr>
+        <p:spPr>
+          <a:xfrm>
+            <a:off x="7240219" y="731520"/>
+            <a:ext cx="2200046" cy="365760"/>
+          </a:xfrm>
+          <a:prstGeom prst="roundRect">
+            <a:avLst/>
+          </a:prstGeom>
+          <a:solidFill>
+            <a:srgbClr val="E8EEF7"/>
+          </a:solidFill>
+          <a:ln>
+            <a:solidFill>
+              <a:srgbClr val="1F3A5F"/>
+            </a:solidFill>
+          </a:ln>
+        </p:spPr>
+        <p:style>
+          <a:lnRef idx="1">
+            <a:schemeClr val="accent1"/>
+          </a:lnRef>
+          <a:fillRef idx="3">
+            <a:schemeClr val="accent1"/>
+          </a:fillRef>
+          <a:effectRef idx="2">
+            <a:schemeClr val="accent1"/>
+          </a:effectRef>
+          <a:fontRef idx="minor">
+            <a:schemeClr val="lt1"/>
+          </a:fontRef>
+        </p:style>
+        <p:txBody>
+          <a:bodyPr rtlCol="0" anchor="ctr" lIns="45720" rIns="45720"/>
+          <a:lstStyle/>
+          <a:p>
+            <a:pPr algn="ctr"/>
+            <a:r>
+              <a:rPr sz="900">
+                <a:solidFill>
+                  <a:srgbClr val="1F3A5F"/>
+                </a:solidFill>
+              </a:rPr>
+              <a:t>Gram 4: FR Defiant, Category 4, Defiant</a:t>
+            </a:r>
+          </a:p>
+        </p:txBody>
+      </p:sp>
+      <p:sp>
+        <p:nvSpPr>
+          <p:cNvPr id="10" name="TextBox 9"/>
+          <p:cNvSpPr txBox="1"/>
+          <p:nvPr/>
+        </p:nvSpPr>
+        <p:spPr>
+          <a:xfrm>
+            <a:off x="7240219" y="1115568"/>
+            <a:ext cx="2200046" cy="1447800"/>
+          </a:xfrm>
+          <a:prstGeom prst="rect">
+            <a:avLst/>
+          </a:prstGeom>
+          <a:noFill/>
+        </p:spPr>
+        <p:txBody>
+          <a:bodyPr wrap="square">
+            <a:spAutoFit/>
+          </a:bodyPr>
+          <a:lstStyle/>
+          <a:p>
+            <a:r>
+              <a:rPr sz="800">
+                <a:hlinkClick r:id="rId14"/>
+              </a:rPr>
+              <a:t>Lofar 1</a:t>
+            </a:r>
+          </a:p>
+          <a:p>
+            <a:r>
+              <a:rPr sz="800">
+                <a:hlinkClick r:id="rId15"/>
+              </a:rPr>
+              <a:t>Lofar 2</a:t>
+            </a:r>
+          </a:p>
+          <a:p>
+            <a:r>
+              <a:rPr sz="800">
+                <a:hlinkClick r:id="rId16"/>
+              </a:rPr>
+              <a:t>Lofar 3</a:t>
+            </a:r>
+          </a:p>
+          <a:p>
+            <a:r>
+              <a:rPr sz="800">
+                <a:hlinkClick r:id="rId17"/>
+              </a:rPr>
+              <a:t>Lofar 4</a:t>
+            </a:r>
+          </a:p>
+        </p:txBody>
+      </p:sp>
+      <p:sp>
+        <p:nvSpPr>
+          <p:cNvPr id="11" name="Rounded Rectangle 10">
+            <a:hlinkClick r:id="rId18"/>
+          </p:cNvPr>
+          <p:cNvSpPr/>
+          <p:nvPr/>
+        </p:nvSpPr>
+        <p:spPr>
+          <a:xfrm>
+            <a:off x="9531705" y="731520"/>
+            <a:ext cx="2200046" cy="365760"/>
+          </a:xfrm>
+          <a:prstGeom prst="roundRect">
+            <a:avLst/>
+          </a:prstGeom>
+          <a:solidFill>
+            <a:srgbClr val="E8EEF7"/>
+          </a:solidFill>
+          <a:ln>
+            <a:solidFill>
+              <a:srgbClr val="1F3A5F"/>
+            </a:solidFill>
+          </a:ln>
+        </p:spPr>
+        <p:style>
+          <a:lnRef idx="1">
+            <a:schemeClr val="accent1"/>
+          </a:lnRef>
+          <a:fillRef idx="3">
+            <a:schemeClr val="accent1"/>
+          </a:fillRef>
+          <a:effectRef idx="2">
+            <a:schemeClr val="accent1"/>
+          </a:effectRef>
+          <a:fontRef idx="minor">
+            <a:schemeClr val="lt1"/>
+          </a:fontRef>
+        </p:style>
+        <p:txBody>
+          <a:bodyPr rtlCol="0" anchor="ctr" lIns="45720" rIns="45720"/>
+          <a:lstStyle/>
+          <a:p>
+            <a:pPr algn="ctr"/>
+            <a:r>
+              <a:rPr sz="900">
+                <a:solidFill>
+                  <a:srgbClr val="1F3A5F"/>
+                </a:solidFill>
+              </a:rPr>
+              <a:t>Gram 5: FR Nebulon-B, Category 4, Tatooine</a:t>
+            </a:r>
+          </a:p>
+        </p:txBody>
+      </p:sp>
+      <p:sp>
+        <p:nvSpPr>
+          <p:cNvPr id="12" name="TextBox 11"/>
+          <p:cNvSpPr txBox="1"/>
+          <p:nvPr/>
+        </p:nvSpPr>
+        <p:spPr>
+          <a:xfrm>
+            <a:off x="9531705" y="1115568"/>
+            <a:ext cx="2200046" cy="1447800"/>
+          </a:xfrm>
+          <a:prstGeom prst="rect">
+            <a:avLst/>
+          </a:prstGeom>
+          <a:noFill/>
+        </p:spPr>
+        <p:txBody>
+          <a:bodyPr wrap="square">
+            <a:spAutoFit/>
+          </a:bodyPr>
+          <a:lstStyle/>
+          <a:p>
+            <a:r>
+              <a:rPr sz="800">
+                <a:hlinkClick r:id="rId19"/>
+              </a:rPr>
+              <a:t>Lofar 1</a:t>
+            </a:r>
+          </a:p>
+          <a:p>
+            <a:r>
+              <a:rPr sz="800">
+                <a:hlinkClick r:id="rId20"/>
+              </a:rPr>
+              <a:t>Lofar 2</a:t>
+            </a:r>
+          </a:p>
+          <a:p>
+            <a:r>
+              <a:rPr sz="800">
+                <a:hlinkClick r:id="rId21"/>
+              </a:rPr>
+              <a:t>Lofar 3</a:t>
+            </a:r>
+          </a:p>
+          <a:p>
+            <a:r>
+              <a:rPr sz="800">
+                <a:hlinkClick r:id="rId22"/>
+              </a:rPr>
+              <a:t>Lofar 4</a:t>
+            </a:r>
+          </a:p>
+        </p:txBody>
+      </p:sp>
+      <p:sp>
+        <p:nvSpPr>
+          <p:cNvPr id="13" name="Rounded Rectangle 12">
+            <a:hlinkClick r:id="rId23"/>
+          </p:cNvPr>
+          <p:cNvSpPr/>
+          <p:nvPr/>
+        </p:nvSpPr>
+        <p:spPr>
+          <a:xfrm>
+            <a:off x="365760" y="2682240"/>
+            <a:ext cx="2200046" cy="365760"/>
+          </a:xfrm>
+          <a:prstGeom prst="roundRect">
+            <a:avLst/>
+          </a:prstGeom>
+          <a:solidFill>
+            <a:srgbClr val="E8EEF7"/>
+          </a:solidFill>
+          <a:ln>
+            <a:solidFill>
+              <a:srgbClr val="1F3A5F"/>
+            </a:solidFill>
+          </a:ln>
+        </p:spPr>
+        <p:style>
+          <a:lnRef idx="1">
+            <a:schemeClr val="accent1"/>
+          </a:lnRef>
+          <a:fillRef idx="3">
+            <a:schemeClr val="accent1"/>
+          </a:fillRef>
+          <a:effectRef idx="2">
+            <a:schemeClr val="accent1"/>
+          </a:effectRef>
+          <a:fontRef idx="minor">
+            <a:schemeClr val="lt1"/>
+          </a:fontRef>
+        </p:style>
+        <p:txBody>
+          <a:bodyPr rtlCol="0" anchor="ctr" lIns="45720" rIns="45720"/>
+          <a:lstStyle/>
+          <a:p>
+            <a:pPr algn="ctr"/>
+            <a:r>
+              <a:rPr sz="900">
+                <a:solidFill>
+                  <a:srgbClr val="1F3A5F"/>
+                </a:solidFill>
+              </a:rPr>
+              <a:t>Gram 6: FR Devastator, Category 3, Trill</a:t>
+            </a:r>
+          </a:p>
+        </p:txBody>
+      </p:sp>
+      <p:sp>
+        <p:nvSpPr>
+          <p:cNvPr id="14" name="TextBox 13"/>
+          <p:cNvSpPr txBox="1"/>
+          <p:nvPr/>
+        </p:nvSpPr>
+        <p:spPr>
+          <a:xfrm>
+            <a:off x="365760" y="3066288"/>
+            <a:ext cx="2200046" cy="1447800"/>
+          </a:xfrm>
+          <a:prstGeom prst="rect">
+            <a:avLst/>
+          </a:prstGeom>
+          <a:noFill/>
+        </p:spPr>
+        <p:txBody>
+          <a:bodyPr wrap="square">
+            <a:spAutoFit/>
+          </a:bodyPr>
+          <a:lstStyle/>
+          <a:p>
+            <a:r>
+              <a:rPr sz="800">
+                <a:hlinkClick r:id="rId24"/>
+              </a:rPr>
+              <a:t>Lofar 1</a:t>
+            </a:r>
+          </a:p>
+        </p:txBody>
+      </p:sp>
+      <p:sp>
+        <p:nvSpPr>
+          <p:cNvPr id="15" name="Rounded Rectangle 14">
+            <a:hlinkClick r:id="rId25"/>
+          </p:cNvPr>
+          <p:cNvSpPr/>
+          <p:nvPr/>
+        </p:nvSpPr>
+        <p:spPr>
+          <a:xfrm>
+            <a:off x="2657246" y="2682240"/>
+            <a:ext cx="2200046" cy="365760"/>
+          </a:xfrm>
+          <a:prstGeom prst="roundRect">
+            <a:avLst/>
+          </a:prstGeom>
+          <a:solidFill>
+            <a:srgbClr val="E8EEF7"/>
+          </a:solidFill>
+          <a:ln>
+            <a:solidFill>
+              <a:srgbClr val="1F3A5F"/>
+            </a:solidFill>
+          </a:ln>
+        </p:spPr>
+        <p:style>
+          <a:lnRef idx="1">
+            <a:schemeClr val="accent1"/>
+          </a:lnRef>
+          <a:fillRef idx="3">
+            <a:schemeClr val="accent1"/>
+          </a:fillRef>
+          <a:effectRef idx="2">
+            <a:schemeClr val="accent1"/>
+          </a:effectRef>
+          <a:fontRef idx="minor">
+            <a:schemeClr val="lt1"/>
+          </a:fontRef>
+        </p:style>
+        <p:txBody>
+          <a:bodyPr rtlCol="0" anchor="ctr" lIns="45720" rIns="45720"/>
+          <a:lstStyle/>
+          <a:p>
+            <a:pPr algn="ctr"/>
+            <a:r>
+              <a:rPr sz="900">
+                <a:solidFill>
+                  <a:srgbClr val="1F3A5F"/>
+                </a:solidFill>
+              </a:rPr>
+              <a:t>Gram 9: Discovery contact bearing 231, codename Gandalf</a:t>
+            </a:r>
+          </a:p>
+        </p:txBody>
+      </p:sp>
+      <p:sp>
+        <p:nvSpPr>
+          <p:cNvPr id="16" name="TextBox 15"/>
+          <p:cNvSpPr txBox="1"/>
+          <p:nvPr/>
+        </p:nvSpPr>
+        <p:spPr>
+          <a:xfrm>
+            <a:off x="2657246" y="3066288"/>
+            <a:ext cx="2200046" cy="1447800"/>
+          </a:xfrm>
+          <a:prstGeom prst="rect">
+            <a:avLst/>
+          </a:prstGeom>
+          <a:noFill/>
+        </p:spPr>
+        <p:txBody>
+          <a:bodyPr wrap="square">
+            <a:spAutoFit/>
+          </a:bodyPr>
+          <a:lstStyle/>
+          <a:p>
+            <a:r>
+              <a:rPr sz="800">
+                <a:hlinkClick r:id="rId26"/>
+              </a:rPr>
+              <a:t>Lofar 1</a:t>
+            </a:r>
+          </a:p>
+          <a:p>
+            <a:r>
+              <a:rPr sz="800">
+                <a:hlinkClick r:id="rId27"/>
+              </a:rPr>
+              <a:t>Lofar 2</a:t>
+            </a:r>
+          </a:p>
+        </p:txBody>
+      </p:sp>
+      <p:sp>
+        <p:nvSpPr>
+          <p:cNvPr id="17" name="Rounded Rectangle 16">
+            <a:hlinkClick r:id="rId28"/>
+          </p:cNvPr>
+          <p:cNvSpPr/>
+          <p:nvPr/>
+        </p:nvSpPr>
+        <p:spPr>
+          <a:xfrm>
+            <a:off x="4948732" y="2682240"/>
+            <a:ext cx="2200046" cy="365760"/>
+          </a:xfrm>
+          <a:prstGeom prst="roundRect">
+            <a:avLst/>
+          </a:prstGeom>
+          <a:solidFill>
+            <a:srgbClr val="E8EEF7"/>
+          </a:solidFill>
+          <a:ln>
+            <a:solidFill>
+              <a:srgbClr val="1F3A5F"/>
+            </a:solidFill>
+          </a:ln>
+        </p:spPr>
+        <p:style>
+          <a:lnRef idx="1">
+            <a:schemeClr val="accent1"/>
+          </a:lnRef>
+          <a:fillRef idx="3">
+            <a:schemeClr val="accent1"/>
+          </a:fillRef>
+          <a:effectRef idx="2">
+            <a:schemeClr val="accent1"/>
+          </a:effectRef>
+          <a:fontRef idx="minor">
+            <a:schemeClr val="lt1"/>
+          </a:fontRef>
+        </p:style>
+        <p:txBody>
+          <a:bodyPr rtlCol="0" anchor="ctr" lIns="45720" rIns="45720"/>
+          <a:lstStyle/>
+          <a:p>
+            <a:pPr algn="ctr"/>
+            <a:r>
+              <a:rPr sz="900">
+                <a:solidFill>
+                  <a:srgbClr val="1F3A5F"/>
+                </a:solidFill>
+              </a:rPr>
+              <a:t>Gram 11: FR Devastator, Category 3, Tantive</a:t>
+            </a:r>
+          </a:p>
+        </p:txBody>
+      </p:sp>
+      <p:sp>
+        <p:nvSpPr>
+          <p:cNvPr id="18" name="TextBox 17"/>
+          <p:cNvSpPr txBox="1"/>
+          <p:nvPr/>
+        </p:nvSpPr>
+        <p:spPr>
+          <a:xfrm>
+            <a:off x="4948732" y="3066288"/>
+            <a:ext cx="2200046" cy="1447800"/>
+          </a:xfrm>
+          <a:prstGeom prst="rect">
+            <a:avLst/>
+          </a:prstGeom>
+          <a:noFill/>
+        </p:spPr>
+        <p:txBody>
+          <a:bodyPr wrap="square">
+            <a:spAutoFit/>
+          </a:bodyPr>
+          <a:lstStyle/>
+          <a:p>
+            <a:r>
+              <a:rPr sz="800">
+                <a:hlinkClick r:id="rId29"/>
+              </a:rPr>
+              <a:t>Lofar 1</a:t>
+            </a:r>
+          </a:p>
+          <a:p>
+            <a:r>
+              <a:rPr sz="800">
+                <a:hlinkClick r:id="rId30"/>
+              </a:rPr>
+              <a:t>Lofar 2</a:t>
+            </a:r>
+          </a:p>
+        </p:txBody>
+      </p:sp>
+      <p:sp>
+        <p:nvSpPr>
+          <p:cNvPr id="19" name="Rounded Rectangle 18">
+            <a:hlinkClick r:id="rId31"/>
+          </p:cNvPr>
+          <p:cNvSpPr/>
+          <p:nvPr/>
+        </p:nvSpPr>
+        <p:spPr>
+          <a:xfrm>
+            <a:off x="7240219" y="2682240"/>
+            <a:ext cx="2200046" cy="365760"/>
+          </a:xfrm>
+          <a:prstGeom prst="roundRect">
+            <a:avLst/>
+          </a:prstGeom>
+          <a:solidFill>
+            <a:srgbClr val="E8EEF7"/>
+          </a:solidFill>
+          <a:ln>
+            <a:solidFill>
+              <a:srgbClr val="1F3A5F"/>
+            </a:solidFill>
+          </a:ln>
+        </p:spPr>
+        <p:style>
+          <a:lnRef idx="1">
+            <a:schemeClr val="accent1"/>
+          </a:lnRef>
+          <a:fillRef idx="3">
+            <a:schemeClr val="accent1"/>
+          </a:fillRef>
+          <a:effectRef idx="2">
+            <a:schemeClr val="accent1"/>
+          </a:effectRef>
+          <a:fontRef idx="minor">
+            <a:schemeClr val="lt1"/>
+          </a:fontRef>
+        </p:style>
+        <p:txBody>
+          <a:bodyPr rtlCol="0" anchor="ctr" lIns="45720" rIns="45720"/>
+          <a:lstStyle/>
+          <a:p>
+            <a:pPr algn="ctr"/>
+            <a:r>
+              <a:rPr sz="900">
+                <a:solidFill>
+                  <a:srgbClr val="1F3A5F"/>
+                </a:solidFill>
+              </a:rPr>
+              <a:t>Gram 12: FR Star Destroyer, Category 3, Tantive</a:t>
+            </a:r>
+          </a:p>
+        </p:txBody>
+      </p:sp>
+      <p:sp>
+        <p:nvSpPr>
+          <p:cNvPr id="20" name="TextBox 19"/>
+          <p:cNvSpPr txBox="1"/>
+          <p:nvPr/>
+        </p:nvSpPr>
+        <p:spPr>
+          <a:xfrm>
+            <a:off x="7240219" y="3066288"/>
+            <a:ext cx="2200046" cy="1447800"/>
+          </a:xfrm>
+          <a:prstGeom prst="rect">
+            <a:avLst/>
+          </a:prstGeom>
+          <a:noFill/>
+        </p:spPr>
+        <p:txBody>
+          <a:bodyPr wrap="square">
+            <a:spAutoFit/>
+          </a:bodyPr>
+          <a:lstStyle/>
+          <a:p>
+            <a:r>
+              <a:rPr sz="800">
+                <a:hlinkClick r:id="rId32"/>
+              </a:rPr>
+              <a:t>Lofar 1</a:t>
+            </a:r>
+          </a:p>
+          <a:p>
+            <a:r>
+              <a:rPr sz="800">
+                <a:hlinkClick r:id="rId33"/>
+              </a:rPr>
+              <a:t>Lofar 2</a:t>
+            </a:r>
+          </a:p>
+          <a:p>
+            <a:r>
+              <a:rPr sz="800">
+                <a:hlinkClick r:id="rId34"/>
+              </a:rPr>
+              <a:t>Lofar 3</a:t>
+            </a:r>
+          </a:p>
+        </p:txBody>
+      </p:sp>
+      <p:sp>
+        <p:nvSpPr>
+          <p:cNvPr id="21" name="Rounded Rectangle 20">
+            <a:hlinkClick r:id="rId35"/>
+          </p:cNvPr>
+          <p:cNvSpPr/>
+          <p:nvPr/>
+        </p:nvSpPr>
+        <p:spPr>
+          <a:xfrm>
+            <a:off x="9531705" y="2682240"/>
+            <a:ext cx="2200046" cy="365760"/>
+          </a:xfrm>
+          <a:prstGeom prst="roundRect">
+            <a:avLst/>
+          </a:prstGeom>
+          <a:solidFill>
+            <a:srgbClr val="E8EEF7"/>
+          </a:solidFill>
+          <a:ln>
+            <a:solidFill>
+              <a:srgbClr val="1F3A5F"/>
+            </a:solidFill>
+          </a:ln>
+        </p:spPr>
+        <p:style>
+          <a:lnRef idx="1">
+            <a:schemeClr val="accent1"/>
+          </a:lnRef>
+          <a:fillRef idx="3">
+            <a:schemeClr val="accent1"/>
+          </a:fillRef>
+          <a:effectRef idx="2">
+            <a:schemeClr val="accent1"/>
+          </a:effectRef>
+          <a:fontRef idx="minor">
+            <a:schemeClr val="lt1"/>
+          </a:fontRef>
+        </p:style>
+        <p:txBody>
+          <a:bodyPr rtlCol="0" anchor="ctr" lIns="45720" rIns="45720"/>
+          <a:lstStyle/>
+          <a:p>
+            <a:pPr algn="ctr"/>
+            <a:r>
+              <a:rPr sz="900">
+                <a:solidFill>
+                  <a:srgbClr val="1F3A5F"/>
+                </a:solidFill>
+              </a:rPr>
+              <a:t>Gram 13: FR Imperial-class, Category 1, Yavin</a:t>
+            </a:r>
+          </a:p>
+        </p:txBody>
+      </p:sp>
+      <p:sp>
+        <p:nvSpPr>
+          <p:cNvPr id="22" name="TextBox 21"/>
+          <p:cNvSpPr txBox="1"/>
+          <p:nvPr/>
+        </p:nvSpPr>
+        <p:spPr>
+          <a:xfrm>
+            <a:off x="9531705" y="3066288"/>
+            <a:ext cx="2200046" cy="1447800"/>
+          </a:xfrm>
+          <a:prstGeom prst="rect">
+            <a:avLst/>
+          </a:prstGeom>
+          <a:noFill/>
+        </p:spPr>
+        <p:txBody>
+          <a:bodyPr wrap="square">
+            <a:spAutoFit/>
+          </a:bodyPr>
+          <a:lstStyle/>
+          <a:p>
+            <a:r>
+              <a:rPr sz="800">
+                <a:hlinkClick r:id="rId36"/>
+              </a:rPr>
+              <a:t>Lofar 1</a:t>
+            </a:r>
+          </a:p>
+          <a:p>
+            <a:r>
+              <a:rPr sz="800">
+                <a:hlinkClick r:id="rId37"/>
+              </a:rPr>
+              <a:t>Lofar 2</a:t>
+            </a:r>
+          </a:p>
+          <a:p>
+            <a:r>
+              <a:rPr sz="800">
+                <a:hlinkClick r:id="rId38"/>
+              </a:rPr>
+              <a:t>Lofar 3</a:t>
+            </a:r>
+          </a:p>
+          <a:p>
+            <a:r>
+              <a:rPr sz="800">
+                <a:hlinkClick r:id="rId39"/>
+              </a:rPr>
+              <a:t>Lofar 4</a:t>
+            </a:r>
+          </a:p>
+        </p:txBody>
+      </p:sp>
+      <p:sp>
+        <p:nvSpPr>
+          <p:cNvPr id="23" name="Rounded Rectangle 22">
+            <a:hlinkClick r:id="rId40"/>
+          </p:cNvPr>
+          <p:cNvSpPr/>
+          <p:nvPr/>
+        </p:nvSpPr>
+        <p:spPr>
+          <a:xfrm>
+            <a:off x="365760" y="4632960"/>
+            <a:ext cx="2200046" cy="365760"/>
+          </a:xfrm>
+          <a:prstGeom prst="roundRect">
+            <a:avLst/>
+          </a:prstGeom>
+          <a:solidFill>
+            <a:srgbClr val="E8EEF7"/>
+          </a:solidFill>
+          <a:ln>
+            <a:solidFill>
+              <a:srgbClr val="1F3A5F"/>
+            </a:solidFill>
+          </a:ln>
+        </p:spPr>
+        <p:style>
+          <a:lnRef idx="1">
+            <a:schemeClr val="accent1"/>
+          </a:lnRef>
+          <a:fillRef idx="3">
+            <a:schemeClr val="accent1"/>
+          </a:fillRef>
+          <a:effectRef idx="2">
+            <a:schemeClr val="accent1"/>
+          </a:effectRef>
+          <a:fontRef idx="minor">
+            <a:schemeClr val="lt1"/>
+          </a:fontRef>
+        </p:style>
+        <p:txBody>
+          <a:bodyPr rtlCol="0" anchor="ctr" lIns="45720" rIns="45720"/>
+          <a:lstStyle/>
+          <a:p>
+            <a:pPr algn="ctr"/>
+            <a:r>
+              <a:rPr sz="900">
+                <a:solidFill>
+                  <a:srgbClr val="1F3A5F"/>
+                </a:solidFill>
+              </a:rPr>
+              <a:t>Gram 15: FR Mon Calamari Cruiser, Category 2, Bajor</a:t>
+            </a:r>
+          </a:p>
+        </p:txBody>
+      </p:sp>
+      <p:sp>
+        <p:nvSpPr>
+          <p:cNvPr id="24" name="TextBox 23"/>
+          <p:cNvSpPr txBox="1"/>
+          <p:nvPr/>
+        </p:nvSpPr>
+        <p:spPr>
+          <a:xfrm>
+            <a:off x="365760" y="5017008"/>
+            <a:ext cx="2200046" cy="1447800"/>
+          </a:xfrm>
+          <a:prstGeom prst="rect">
+            <a:avLst/>
+          </a:prstGeom>
+          <a:noFill/>
+        </p:spPr>
+        <p:txBody>
+          <a:bodyPr wrap="square">
+            <a:spAutoFit/>
+          </a:bodyPr>
+          <a:lstStyle/>
+          <a:p>
+            <a:r>
+              <a:rPr sz="800">
+                <a:hlinkClick r:id="rId41"/>
+              </a:rPr>
+              <a:t>Lofar 1</a:t>
+            </a:r>
+          </a:p>
+          <a:p>
+            <a:r>
+              <a:rPr sz="800">
+                <a:hlinkClick r:id="rId42"/>
+              </a:rPr>
+              <a:t>Lofar 2</a:t>
+            </a:r>
+          </a:p>
+          <a:p>
+            <a:r>
+              <a:rPr sz="800">
+                <a:hlinkClick r:id="rId43"/>
+              </a:rPr>
+              <a:t>Lofar 3</a:t>
+            </a:r>
+          </a:p>
+          <a:p>
+            <a:r>
+              <a:rPr sz="800">
+                <a:hlinkClick r:id="rId44"/>
+              </a:rPr>
+              <a:t>Lofar 4</a:t>
+            </a:r>
+          </a:p>
+        </p:txBody>
+      </p:sp>
+      <p:sp>
+        <p:nvSpPr>
+          <p:cNvPr id="25" name="Rounded Rectangle 24">
+            <a:hlinkClick r:id="rId45"/>
+          </p:cNvPr>
+          <p:cNvSpPr/>
+          <p:nvPr/>
+        </p:nvSpPr>
+        <p:spPr>
+          <a:xfrm>
+            <a:off x="2657246" y="4632960"/>
+            <a:ext cx="2200046" cy="365760"/>
+          </a:xfrm>
+          <a:prstGeom prst="roundRect">
+            <a:avLst/>
+          </a:prstGeom>
+          <a:solidFill>
+            <a:srgbClr val="E8EEF7"/>
+          </a:solidFill>
+          <a:ln>
+            <a:solidFill>
+              <a:srgbClr val="1F3A5F"/>
+            </a:solidFill>
+          </a:ln>
+        </p:spPr>
+        <p:style>
+          <a:lnRef idx="1">
+            <a:schemeClr val="accent1"/>
+          </a:lnRef>
+          <a:fillRef idx="3">
+            <a:schemeClr val="accent1"/>
+          </a:fillRef>
+          <a:effectRef idx="2">
+            <a:schemeClr val="accent1"/>
+          </a:effectRef>
+          <a:fontRef idx="minor">
+            <a:schemeClr val="lt1"/>
+          </a:fontRef>
+        </p:style>
+        <p:txBody>
+          <a:bodyPr rtlCol="0" anchor="ctr" lIns="45720" rIns="45720"/>
+          <a:lstStyle/>
+          <a:p>
+            <a:pPr algn="ctr"/>
+            <a:r>
+              <a:rPr sz="900">
+                <a:solidFill>
+                  <a:srgbClr val="1F3A5F"/>
+                </a:solidFill>
+              </a:rPr>
+              <a:t>Gram 17: FR Razor Crest, Category 1, Mustafar</a:t>
+            </a:r>
+          </a:p>
+        </p:txBody>
+      </p:sp>
+      <p:sp>
+        <p:nvSpPr>
+          <p:cNvPr id="26" name="TextBox 25"/>
+          <p:cNvSpPr txBox="1"/>
+          <p:nvPr/>
+        </p:nvSpPr>
+        <p:spPr>
+          <a:xfrm>
+            <a:off x="2657246" y="5017008"/>
+            <a:ext cx="2200046" cy="1447800"/>
+          </a:xfrm>
+          <a:prstGeom prst="rect">
+            <a:avLst/>
+          </a:prstGeom>
+          <a:noFill/>
+        </p:spPr>
+        <p:txBody>
+          <a:bodyPr wrap="square">
+            <a:spAutoFit/>
+          </a:bodyPr>
+          <a:lstStyle/>
+          <a:p>
+            <a:r>
+              <a:rPr sz="800">
+                <a:hlinkClick r:id="rId46"/>
+              </a:rPr>
+              <a:t>Lofar 1</a:t>
+            </a:r>
+          </a:p>
+          <a:p>
+            <a:r>
+              <a:rPr sz="800">
+                <a:hlinkClick r:id="rId47"/>
+              </a:rPr>
+              <a:t>Lofar 2</a:t>
+            </a:r>
+          </a:p>
+          <a:p>
+            <a:r>
+              <a:rPr sz="800">
+                <a:hlinkClick r:id="rId48"/>
+              </a:rPr>
+              <a:t>Lofar 3</a:t>
+            </a:r>
+          </a:p>
+          <a:p>
+            <a:r>
+              <a:rPr sz="800">
+                <a:hlinkClick r:id="rId49"/>
+              </a:rPr>
+              <a:t>Lofar 4</a:t>
+            </a:r>
+          </a:p>
+        </p:txBody>
+      </p:sp>
+      <p:sp>
+        <p:nvSpPr>
+          <p:cNvPr id="27" name="Rounded Rectangle 26">
+            <a:hlinkClick r:id="rId50"/>
+          </p:cNvPr>
+          <p:cNvSpPr/>
+          <p:nvPr/>
+        </p:nvSpPr>
+        <p:spPr>
+          <a:xfrm>
+            <a:off x="4948732" y="4632960"/>
+            <a:ext cx="2200046" cy="365760"/>
+          </a:xfrm>
+          <a:prstGeom prst="roundRect">
+            <a:avLst/>
+          </a:prstGeom>
+          <a:solidFill>
+            <a:srgbClr val="E8EEF7"/>
+          </a:solidFill>
+          <a:ln>
+            <a:solidFill>
+              <a:srgbClr val="1F3A5F"/>
+            </a:solidFill>
+          </a:ln>
+        </p:spPr>
+        <p:style>
+          <a:lnRef idx="1">
+            <a:schemeClr val="accent1"/>
+          </a:lnRef>
+          <a:fillRef idx="3">
+            <a:schemeClr val="accent1"/>
+          </a:fillRef>
+          <a:effectRef idx="2">
+            <a:schemeClr val="accent1"/>
+          </a:effectRef>
+          <a:fontRef idx="minor">
+            <a:schemeClr val="lt1"/>
+          </a:fontRef>
+        </p:style>
+        <p:txBody>
+          <a:bodyPr rtlCol="0" anchor="ctr" lIns="45720" rIns="45720"/>
+          <a:lstStyle/>
+          <a:p>
+            <a:pPr algn="ctr"/>
+            <a:r>
+              <a:rPr sz="900">
+                <a:solidFill>
+                  <a:srgbClr val="1F3A5F"/>
+                </a:solidFill>
+              </a:rPr>
+              <a:t>Gram 18: FR X-wing, Category 3, Defiant</a:t>
+            </a:r>
+          </a:p>
+        </p:txBody>
+      </p:sp>
+      <p:sp>
+        <p:nvSpPr>
+          <p:cNvPr id="28" name="TextBox 27"/>
+          <p:cNvSpPr txBox="1"/>
+          <p:nvPr/>
+        </p:nvSpPr>
+        <p:spPr>
+          <a:xfrm>
+            <a:off x="4948732" y="5017008"/>
+            <a:ext cx="2200046" cy="1447800"/>
+          </a:xfrm>
+          <a:prstGeom prst="rect">
+            <a:avLst/>
+          </a:prstGeom>
+          <a:noFill/>
+        </p:spPr>
+        <p:txBody>
+          <a:bodyPr wrap="square">
+            <a:spAutoFit/>
+          </a:bodyPr>
+          <a:lstStyle/>
+          <a:p>
+            <a:r>
+              <a:rPr sz="800">
+                <a:hlinkClick r:id="rId51"/>
+              </a:rPr>
+              <a:t>Lofar 1</a:t>
+            </a:r>
+          </a:p>
+        </p:txBody>
+      </p:sp>
+      <p:sp>
+        <p:nvSpPr>
+          <p:cNvPr id="29" name="Rounded Rectangle 28">
+            <a:hlinkClick r:id="rId52"/>
+          </p:cNvPr>
+          <p:cNvSpPr/>
+          <p:nvPr/>
+        </p:nvSpPr>
+        <p:spPr>
+          <a:xfrm>
+            <a:off x="7240219" y="4632960"/>
+            <a:ext cx="2200046" cy="365760"/>
+          </a:xfrm>
+          <a:prstGeom prst="roundRect">
+            <a:avLst/>
+          </a:prstGeom>
+          <a:solidFill>
+            <a:srgbClr val="E8EEF7"/>
+          </a:solidFill>
+          <a:ln>
+            <a:solidFill>
+              <a:srgbClr val="1F3A5F"/>
+            </a:solidFill>
+          </a:ln>
+        </p:spPr>
+        <p:style>
+          <a:lnRef idx="1">
+            <a:schemeClr val="accent1"/>
+          </a:lnRef>
+          <a:fillRef idx="3">
+            <a:schemeClr val="accent1"/>
+          </a:fillRef>
+          <a:effectRef idx="2">
+            <a:schemeClr val="accent1"/>
+          </a:effectRef>
+          <a:fontRef idx="minor">
+            <a:schemeClr val="lt1"/>
+          </a:fontRef>
+        </p:style>
+        <p:txBody>
+          <a:bodyPr rtlCol="0" anchor="ctr" lIns="45720" rIns="45720"/>
+          <a:lstStyle/>
+          <a:p>
+            <a:pPr algn="ctr"/>
+            <a:r>
+              <a:rPr sz="900">
+                <a:solidFill>
+                  <a:srgbClr val="1F3A5F"/>
+                </a:solidFill>
+              </a:rPr>
+              <a:t>Gram 19: Devastator contact bearing 194, codename Trill</a:t>
+            </a:r>
+          </a:p>
+        </p:txBody>
+      </p:sp>
+      <p:sp>
+        <p:nvSpPr>
+          <p:cNvPr id="30" name="TextBox 29"/>
+          <p:cNvSpPr txBox="1"/>
+          <p:nvPr/>
+        </p:nvSpPr>
+        <p:spPr>
+          <a:xfrm>
+            <a:off x="7240219" y="5017008"/>
+            <a:ext cx="2200046" cy="1447800"/>
+          </a:xfrm>
+          <a:prstGeom prst="rect">
+            <a:avLst/>
+          </a:prstGeom>
+          <a:noFill/>
+        </p:spPr>
+        <p:txBody>
+          <a:bodyPr wrap="square">
+            <a:spAutoFit/>
+          </a:bodyPr>
+          <a:lstStyle/>
+          <a:p>
+            <a:r>
+              <a:rPr sz="800">
+                <a:hlinkClick r:id="rId53"/>
+              </a:rPr>
+              <a:t>Lofar 1</a:t>
+            </a:r>
+          </a:p>
+          <a:p>
+            <a:r>
+              <a:rPr sz="800">
+                <a:hlinkClick r:id="rId54"/>
+              </a:rPr>
+              <a:t>Lofar 2</a:t>
+            </a:r>
+          </a:p>
+          <a:p>
+            <a:r>
+              <a:rPr sz="800">
+                <a:hlinkClick r:id="rId55"/>
+              </a:rPr>
+              <a:t>Lofar 3</a:t>
+            </a:r>
+          </a:p>
+          <a:p>
+            <a:r>
+              <a:rPr sz="800">
+                <a:hlinkClick r:id="rId56"/>
+              </a:rPr>
+              <a:t>Lofar 4</a:t>
+            </a:r>
+          </a:p>
+        </p:txBody>
+      </p:sp>
+      <p:sp>
+        <p:nvSpPr>
+          <p:cNvPr id="31" name="Rounded Rectangle 30">
+            <a:hlinkClick r:id="rId57"/>
+          </p:cNvPr>
+          <p:cNvSpPr/>
+          <p:nvPr/>
+        </p:nvSpPr>
+        <p:spPr>
+          <a:xfrm>
+            <a:off x="9531705" y="4632960"/>
+            <a:ext cx="2200046" cy="365760"/>
+          </a:xfrm>
+          <a:prstGeom prst="roundRect">
+            <a:avLst/>
+          </a:prstGeom>
+          <a:solidFill>
+            <a:srgbClr val="E8EEF7"/>
+          </a:solidFill>
+          <a:ln>
+            <a:solidFill>
+              <a:srgbClr val="1F3A5F"/>
+            </a:solidFill>
+          </a:ln>
+        </p:spPr>
+        <p:style>
+          <a:lnRef idx="1">
+            <a:schemeClr val="accent1"/>
+          </a:lnRef>
+          <a:fillRef idx="3">
+            <a:schemeClr val="accent1"/>
+          </a:fillRef>
+          <a:effectRef idx="2">
+            <a:schemeClr val="accent1"/>
+          </a:effectRef>
+          <a:fontRef idx="minor">
+            <a:schemeClr val="lt1"/>
+          </a:fontRef>
+        </p:style>
+        <p:txBody>
+          <a:bodyPr rtlCol="0" anchor="ctr" lIns="45720" rIns="45720"/>
+          <a:lstStyle/>
+          <a:p>
+            <a:pPr algn="ctr"/>
+            <a:r>
+              <a:rPr sz="900">
+                <a:solidFill>
+                  <a:srgbClr val="1F3A5F"/>
+                </a:solidFill>
+              </a:rPr>
+              <a:t>Gram 20: FR TIE Fighter, Category 1, Coruscant</a:t>
+            </a:r>
+          </a:p>
+        </p:txBody>
+      </p:sp>
+      <p:sp>
+        <p:nvSpPr>
+          <p:cNvPr id="32" name="TextBox 31"/>
+          <p:cNvSpPr txBox="1"/>
+          <p:nvPr/>
+        </p:nvSpPr>
+        <p:spPr>
+          <a:xfrm>
+            <a:off x="9531705" y="5017008"/>
+            <a:ext cx="2200046" cy="1447800"/>
+          </a:xfrm>
+          <a:prstGeom prst="rect">
+            <a:avLst/>
+          </a:prstGeom>
+          <a:noFill/>
+        </p:spPr>
+        <p:txBody>
+          <a:bodyPr wrap="square">
+            <a:spAutoFit/>
+          </a:bodyPr>
+          <a:lstStyle/>
+          <a:p>
+            <a:r>
+              <a:rPr sz="800">
+                <a:hlinkClick r:id="rId58"/>
+              </a:rPr>
+              <a:t>Lofar 1</a:t>
+            </a:r>
+          </a:p>
+          <a:p>
+            <a:r>
+              <a:rPr sz="800">
+                <a:hlinkClick r:id="rId59"/>
+              </a:rPr>
+              <a:t>Lofar 2</a:t>
+            </a:r>
+          </a:p>
+          <a:p>
+            <a:r>
+              <a:rPr sz="800">
+                <a:hlinkClick r:id="rId60"/>
+              </a:rPr>
+              <a:t>Lofar 3</a:t>
             </a:r>
           </a:p>
         </p:txBody>
@@ -3224,18 +4727,18 @@
                   <a:srgbClr val="FFFFFF"/>
                 </a:solidFill>
               </a:rPr>
-              <a:t>Instructor Week 3 Grams — Page 1 of 3</a:t>
-            </a:r>
-          </a:p>
-        </p:txBody>
-      </p:sp>
-      <p:sp>
-        <p:nvSpPr>
-          <p:cNvPr id="3" name="Rounded Rectangle 2"/>
+              <a:t>Instructor Week 3 Grams — Page 2 of 3</a:t>
+            </a:r>
+          </a:p>
+        </p:txBody>
+      </p:sp>
+      <p:sp>
+        <p:nvSpPr>
+          <p:cNvPr id="3" name="Rounded Rectangle 2">
+            <a:hlinkClick r:id="rId2"/>
+          </p:cNvPr>
           <p:cNvSpPr/>
-          <p:nvPr>
-            <a:hlinkClick r:id="rId2"/>
-          </p:nvPr>
+          <p:nvPr/>
         </p:nvSpPr>
         <p:spPr>
           <a:xfrm>
@@ -3279,7 +4782,7 @@
                   <a:srgbClr val="1F3A5F"/>
                 </a:solidFill>
               </a:rPr>
-              <a:t>Gram 1: Intrepid-class contact bearing 127, codename Defiant</a:t>
+              <a:t>Gram 21: FR Discovery, Category 4, Defiant</a:t>
             </a:r>
           </a:p>
         </p:txBody>
@@ -3329,15 +4832,23 @@
               <a:t>Lofar 3</a:t>
             </a:r>
           </a:p>
-        </p:txBody>
-      </p:sp>
-      <p:sp>
-        <p:nvSpPr>
-          <p:cNvPr id="5" name="Rounded Rectangle 4"/>
+          <a:p>
+            <a:r>
+              <a:rPr sz="800">
+                <a:hlinkClick r:id="rId6"/>
+              </a:rPr>
+              <a:t>Lofar 4</a:t>
+            </a:r>
+          </a:p>
+        </p:txBody>
+      </p:sp>
+      <p:sp>
+        <p:nvSpPr>
+          <p:cNvPr id="5" name="Rounded Rectangle 4">
+            <a:hlinkClick r:id="rId7"/>
+          </p:cNvPr>
           <p:cNvSpPr/>
-          <p:nvPr>
-            <a:hlinkClick r:id="rId6"/>
-          </p:nvPr>
+          <p:nvPr/>
         </p:nvSpPr>
         <p:spPr>
           <a:xfrm>
@@ -3381,7 +4892,7 @@
                   <a:srgbClr val="1F3A5F"/>
                 </a:solidFill>
               </a:rPr>
-              <a:t>Gram 2: FR Miranda-class, Category 3, Tatooine</a:t>
+              <a:t>Gram 22: Razor Crest contact bearing 239, codename Dank</a:t>
             </a:r>
           </a:p>
         </p:txBody>
@@ -3410,28 +4921,20 @@
           <a:p>
             <a:r>
               <a:rPr sz="800">
-                <a:hlinkClick r:id="rId7"/>
+                <a:hlinkClick r:id="rId8"/>
               </a:rPr>
               <a:t>Lofar 1</a:t>
             </a:r>
           </a:p>
-          <a:p>
-            <a:r>
-              <a:rPr sz="800">
-                <a:hlinkClick r:id="rId8"/>
-              </a:rPr>
-              <a:t>Lofar 2</a:t>
-            </a:r>
-          </a:p>
-        </p:txBody>
-      </p:sp>
-      <p:sp>
-        <p:nvSpPr>
-          <p:cNvPr id="7" name="Rounded Rectangle 6"/>
+        </p:txBody>
+      </p:sp>
+      <p:sp>
+        <p:nvSpPr>
+          <p:cNvPr id="7" name="Rounded Rectangle 6">
+            <a:hlinkClick r:id="rId9"/>
+          </p:cNvPr>
           <p:cNvSpPr/>
-          <p:nvPr>
-            <a:hlinkClick r:id="rId9"/>
-          </p:nvPr>
+          <p:nvPr/>
         </p:nvSpPr>
         <p:spPr>
           <a:xfrm>
@@ -3475,7 +4978,7 @@
                   <a:srgbClr val="1F3A5F"/>
                 </a:solidFill>
               </a:rPr>
-              <a:t>Gram 3: FR Outrider, Category 2, Cardassia</a:t>
+              <a:t>Gram 23: FR Devastator, Category 1, Risa</a:t>
             </a:r>
           </a:p>
         </p:txBody>
@@ -3509,31 +5012,15 @@
               <a:t>Lofar 1</a:t>
             </a:r>
           </a:p>
-          <a:p>
-            <a:r>
-              <a:rPr sz="800">
-                <a:hlinkClick r:id="rId11"/>
-              </a:rPr>
-              <a:t>Lofar 2</a:t>
-            </a:r>
-          </a:p>
-          <a:p>
-            <a:r>
-              <a:rPr sz="800">
-                <a:hlinkClick r:id="rId12"/>
-              </a:rPr>
-              <a:t>Lofar 3</a:t>
-            </a:r>
-          </a:p>
-        </p:txBody>
-      </p:sp>
-      <p:sp>
-        <p:nvSpPr>
-          <p:cNvPr id="9" name="Rounded Rectangle 8"/>
+        </p:txBody>
+      </p:sp>
+      <p:sp>
+        <p:nvSpPr>
+          <p:cNvPr id="9" name="Rounded Rectangle 8">
+            <a:hlinkClick r:id="rId11"/>
+          </p:cNvPr>
           <p:cNvSpPr/>
-          <p:nvPr>
-            <a:hlinkClick r:id="rId13"/>
-          </p:nvPr>
+          <p:nvPr/>
         </p:nvSpPr>
         <p:spPr>
           <a:xfrm>
@@ -3577,7 +5064,7 @@
                   <a:srgbClr val="1F3A5F"/>
                 </a:solidFill>
               </a:rPr>
-              <a:t>Gram 4: FR Defiant, Category 4, Defiant</a:t>
+              <a:t>Gram 25: FR Imperial-class, Category 4, Coruscant</a:t>
             </a:r>
           </a:p>
         </p:txBody>
@@ -3606,9 +5093,25 @@
           <a:p>
             <a:r>
               <a:rPr sz="800">
+                <a:hlinkClick r:id="rId12"/>
+              </a:rPr>
+              <a:t>Lofar 1</a:t>
+            </a:r>
+          </a:p>
+          <a:p>
+            <a:r>
+              <a:rPr sz="800">
+                <a:hlinkClick r:id="rId13"/>
+              </a:rPr>
+              <a:t>Lofar 2</a:t>
+            </a:r>
+          </a:p>
+          <a:p>
+            <a:r>
+              <a:rPr sz="800">
                 <a:hlinkClick r:id="rId14"/>
               </a:rPr>
-              <a:t>Lofar 1</a:t>
+              <a:t>Lofar 3</a:t>
             </a:r>
           </a:p>
           <a:p>
@@ -3616,22 +5119,6 @@
               <a:rPr sz="800">
                 <a:hlinkClick r:id="rId15"/>
               </a:rPr>
-              <a:t>Lofar 2</a:t>
-            </a:r>
-          </a:p>
-          <a:p>
-            <a:r>
-              <a:rPr sz="800">
-                <a:hlinkClick r:id="rId16"/>
-              </a:rPr>
-              <a:t>Lofar 3</a:t>
-            </a:r>
-          </a:p>
-          <a:p>
-            <a:r>
-              <a:rPr sz="800">
-                <a:hlinkClick r:id="rId17"/>
-              </a:rPr>
               <a:t>Lofar 4</a:t>
             </a:r>
           </a:p>
@@ -3639,11 +5126,11 @@
       </p:sp>
       <p:sp>
         <p:nvSpPr>
-          <p:cNvPr id="11" name="Rounded Rectangle 10"/>
+          <p:cNvPr id="11" name="Rounded Rectangle 10">
+            <a:hlinkClick r:id="rId16"/>
+          </p:cNvPr>
           <p:cNvSpPr/>
-          <p:nvPr>
-            <a:hlinkClick r:id="rId18"/>
-          </p:nvPr>
+          <p:nvPr/>
         </p:nvSpPr>
         <p:spPr>
           <a:xfrm>
@@ -3687,7 +5174,7 @@
                   <a:srgbClr val="1F3A5F"/>
                 </a:solidFill>
               </a:rPr>
-              <a:t>Gram 5: FR Nebulon-B, Category 4, Tatooine</a:t>
+              <a:t>Gram 26: Enterprise contact bearing 229, codename Betazed</a:t>
             </a:r>
           </a:p>
         </p:txBody>
@@ -3716,9 +5203,25 @@
           <a:p>
             <a:r>
               <a:rPr sz="800">
+                <a:hlinkClick r:id="rId17"/>
+              </a:rPr>
+              <a:t>Lofar 1</a:t>
+            </a:r>
+          </a:p>
+          <a:p>
+            <a:r>
+              <a:rPr sz="800">
+                <a:hlinkClick r:id="rId18"/>
+              </a:rPr>
+              <a:t>Lofar 2</a:t>
+            </a:r>
+          </a:p>
+          <a:p>
+            <a:r>
+              <a:rPr sz="800">
                 <a:hlinkClick r:id="rId19"/>
               </a:rPr>
-              <a:t>Lofar 1</a:t>
+              <a:t>Lofar 3</a:t>
             </a:r>
           </a:p>
           <a:p>
@@ -3726,22 +5229,6 @@
               <a:rPr sz="800">
                 <a:hlinkClick r:id="rId20"/>
               </a:rPr>
-              <a:t>Lofar 2</a:t>
-            </a:r>
-          </a:p>
-          <a:p>
-            <a:r>
-              <a:rPr sz="800">
-                <a:hlinkClick r:id="rId21"/>
-              </a:rPr>
-              <a:t>Lofar 3</a:t>
-            </a:r>
-          </a:p>
-          <a:p>
-            <a:r>
-              <a:rPr sz="800">
-                <a:hlinkClick r:id="rId22"/>
-              </a:rPr>
               <a:t>Lofar 4</a:t>
             </a:r>
           </a:p>
@@ -3749,11 +5236,11 @@
       </p:sp>
       <p:sp>
         <p:nvSpPr>
-          <p:cNvPr id="13" name="Rounded Rectangle 12"/>
+          <p:cNvPr id="13" name="Rounded Rectangle 12">
+            <a:hlinkClick r:id="rId21"/>
+          </p:cNvPr>
           <p:cNvSpPr/>
-          <p:nvPr>
-            <a:hlinkClick r:id="rId23"/>
-          </p:nvPr>
+          <p:nvPr/>
         </p:nvSpPr>
         <p:spPr>
           <a:xfrm>
@@ -3797,7 +5284,7 @@
                   <a:srgbClr val="1F3A5F"/>
                 </a:solidFill>
               </a:rPr>
-              <a:t>Gram 6: FR Devastator, Category 3, Trill</a:t>
+              <a:t>Gram 27: FR Prometheus, Category 1, Kobol</a:t>
             </a:r>
           </a:p>
         </p:txBody>
@@ -3826,20 +5313,28 @@
           <a:p>
             <a:r>
               <a:rPr sz="800">
-                <a:hlinkClick r:id="rId24"/>
+                <a:hlinkClick r:id="rId22"/>
               </a:rPr>
               <a:t>Lofar 1</a:t>
             </a:r>
           </a:p>
-        </p:txBody>
-      </p:sp>
-      <p:sp>
-        <p:nvSpPr>
-          <p:cNvPr id="15" name="Rounded Rectangle 14"/>
+          <a:p>
+            <a:r>
+              <a:rPr sz="800">
+                <a:hlinkClick r:id="rId23"/>
+              </a:rPr>
+              <a:t>Lofar 2</a:t>
+            </a:r>
+          </a:p>
+        </p:txBody>
+      </p:sp>
+      <p:sp>
+        <p:nvSpPr>
+          <p:cNvPr id="15" name="Rounded Rectangle 14">
+            <a:hlinkClick r:id="rId24"/>
+          </p:cNvPr>
           <p:cNvSpPr/>
-          <p:nvPr>
-            <a:hlinkClick r:id="rId25"/>
-          </p:nvPr>
+          <p:nvPr/>
         </p:nvSpPr>
         <p:spPr>
           <a:xfrm>
@@ -3883,7 +5378,7 @@
                   <a:srgbClr val="1F3A5F"/>
                 </a:solidFill>
               </a:rPr>
-              <a:t>Gram 9: Discovery contact bearing 231, codename Gandalf</a:t>
+              <a:t>Gram 29: FR X-wing, Category 1, Betazed</a:t>
             </a:r>
           </a:p>
         </p:txBody>
@@ -3912,9 +5407,17 @@
           <a:p>
             <a:r>
               <a:rPr sz="800">
+                <a:hlinkClick r:id="rId25"/>
+              </a:rPr>
+              <a:t>Lofar 1</a:t>
+            </a:r>
+          </a:p>
+          <a:p>
+            <a:r>
+              <a:rPr sz="800">
                 <a:hlinkClick r:id="rId26"/>
               </a:rPr>
-              <a:t>Lofar 1</a:t>
+              <a:t>Lofar 2</a:t>
             </a:r>
           </a:p>
           <a:p>
@@ -3922,18 +5425,26 @@
               <a:rPr sz="800">
                 <a:hlinkClick r:id="rId27"/>
               </a:rPr>
-              <a:t>Lofar 2</a:t>
-            </a:r>
-          </a:p>
-        </p:txBody>
-      </p:sp>
-      <p:sp>
-        <p:nvSpPr>
-          <p:cNvPr id="17" name="Rounded Rectangle 16"/>
+              <a:t>Lofar 3</a:t>
+            </a:r>
+          </a:p>
+          <a:p>
+            <a:r>
+              <a:rPr sz="800">
+                <a:hlinkClick r:id="rId28"/>
+              </a:rPr>
+              <a:t>Lofar 4</a:t>
+            </a:r>
+          </a:p>
+        </p:txBody>
+      </p:sp>
+      <p:sp>
+        <p:nvSpPr>
+          <p:cNvPr id="17" name="Rounded Rectangle 16">
+            <a:hlinkClick r:id="rId29"/>
+          </p:cNvPr>
           <p:cNvSpPr/>
-          <p:nvPr>
-            <a:hlinkClick r:id="rId28"/>
-          </p:nvPr>
+          <p:nvPr/>
         </p:nvSpPr>
         <p:spPr>
           <a:xfrm>
@@ -3977,7 +5488,7 @@
                   <a:srgbClr val="1F3A5F"/>
                 </a:solidFill>
               </a:rPr>
-              <a:t>Gram 11: FR Devastator, Category 3, Tantive</a:t>
+              <a:t>Gram 30: FR Imperial-class, Category 1, Vulcan</a:t>
             </a:r>
           </a:p>
         </p:txBody>
@@ -4006,7 +5517,7 @@
           <a:p>
             <a:r>
               <a:rPr sz="800">
-                <a:hlinkClick r:id="rId29"/>
+                <a:hlinkClick r:id="rId30"/>
               </a:rPr>
               <a:t>Lofar 1</a:t>
             </a:r>
@@ -4014,7 +5525,7 @@
           <a:p>
             <a:r>
               <a:rPr sz="800">
-                <a:hlinkClick r:id="rId30"/>
+                <a:hlinkClick r:id="rId31"/>
               </a:rPr>
               <a:t>Lofar 2</a:t>
             </a:r>
@@ -4023,11 +5534,11 @@
       </p:sp>
       <p:sp>
         <p:nvSpPr>
-          <p:cNvPr id="19" name="Rounded Rectangle 18"/>
+          <p:cNvPr id="19" name="Rounded Rectangle 18">
+            <a:hlinkClick r:id="rId32"/>
+          </p:cNvPr>
           <p:cNvSpPr/>
-          <p:nvPr>
-            <a:hlinkClick r:id="rId31"/>
-          </p:nvPr>
+          <p:nvPr/>
         </p:nvSpPr>
         <p:spPr>
           <a:xfrm>
@@ -4071,7 +5582,7 @@
                   <a:srgbClr val="1F3A5F"/>
                 </a:solidFill>
               </a:rPr>
-              <a:t>Gram 12: FR Star Destroyer, Category 3, Tantive</a:t>
+              <a:t>Gram 31: FR B-wing, Category 2, Hoth</a:t>
             </a:r>
           </a:p>
         </p:txBody>
@@ -4100,7 +5611,7 @@
           <a:p>
             <a:r>
               <a:rPr sz="800">
-                <a:hlinkClick r:id="rId32"/>
+                <a:hlinkClick r:id="rId33"/>
               </a:rPr>
               <a:t>Lofar 1</a:t>
             </a:r>
@@ -4108,28 +5619,20 @@
           <a:p>
             <a:r>
               <a:rPr sz="800">
-                <a:hlinkClick r:id="rId33"/>
+                <a:hlinkClick r:id="rId34"/>
               </a:rPr>
               <a:t>Lofar 2</a:t>
             </a:r>
           </a:p>
-          <a:p>
-            <a:r>
-              <a:rPr sz="800">
-                <a:hlinkClick r:id="rId34"/>
-              </a:rPr>
-              <a:t>Lofar 3</a:t>
-            </a:r>
-          </a:p>
-        </p:txBody>
-      </p:sp>
-      <p:sp>
-        <p:nvSpPr>
-          <p:cNvPr id="21" name="Rounded Rectangle 20"/>
+        </p:txBody>
+      </p:sp>
+      <p:sp>
+        <p:nvSpPr>
+          <p:cNvPr id="21" name="Rounded Rectangle 20">
+            <a:hlinkClick r:id="rId35"/>
+          </p:cNvPr>
           <p:cNvSpPr/>
-          <p:nvPr>
-            <a:hlinkClick r:id="rId35"/>
-          </p:nvPr>
+          <p:nvPr/>
         </p:nvSpPr>
         <p:spPr>
           <a:xfrm>
@@ -4173,7 +5676,7 @@
                   <a:srgbClr val="1F3A5F"/>
                 </a:solidFill>
               </a:rPr>
-              <a:t>Gram 13: FR Imperial-class, Category 1, Yavin</a:t>
+              <a:t>Gram 32: Venator-class contact bearing 263, codename Risa</a:t>
             </a:r>
           </a:p>
         </p:txBody>
@@ -4235,11 +5738,11 @@
       </p:sp>
       <p:sp>
         <p:nvSpPr>
-          <p:cNvPr id="23" name="Rounded Rectangle 22"/>
+          <p:cNvPr id="23" name="Rounded Rectangle 22">
+            <a:hlinkClick r:id="rId40"/>
+          </p:cNvPr>
           <p:cNvSpPr/>
-          <p:nvPr>
-            <a:hlinkClick r:id="rId40"/>
-          </p:nvPr>
+          <p:nvPr/>
         </p:nvSpPr>
         <p:spPr>
           <a:xfrm>
@@ -4283,7 +5786,7 @@
                   <a:srgbClr val="1F3A5F"/>
                 </a:solidFill>
               </a:rPr>
-              <a:t>Gram 15: FR Mon Calamari Cruiser, Category 2, Bajor</a:t>
+              <a:t>Gram 33: FR Ghost, Category 2, Kobol</a:t>
             </a:r>
           </a:p>
         </p:txBody>
@@ -4317,39 +5820,15 @@
               <a:t>Lofar 1</a:t>
             </a:r>
           </a:p>
-          <a:p>
-            <a:r>
-              <a:rPr sz="800">
-                <a:hlinkClick r:id="rId42"/>
-              </a:rPr>
-              <a:t>Lofar 2</a:t>
-            </a:r>
-          </a:p>
-          <a:p>
-            <a:r>
-              <a:rPr sz="800">
-                <a:hlinkClick r:id="rId43"/>
-              </a:rPr>
-              <a:t>Lofar 3</a:t>
-            </a:r>
-          </a:p>
-          <a:p>
-            <a:r>
-              <a:rPr sz="800">
-                <a:hlinkClick r:id="rId44"/>
-              </a:rPr>
-              <a:t>Lofar 4</a:t>
-            </a:r>
-          </a:p>
-        </p:txBody>
-      </p:sp>
-      <p:sp>
-        <p:nvSpPr>
-          <p:cNvPr id="25" name="Rounded Rectangle 24"/>
+        </p:txBody>
+      </p:sp>
+      <p:sp>
+        <p:nvSpPr>
+          <p:cNvPr id="25" name="Rounded Rectangle 24">
+            <a:hlinkClick r:id="rId42"/>
+          </p:cNvPr>
           <p:cNvSpPr/>
-          <p:nvPr>
-            <a:hlinkClick r:id="rId45"/>
-          </p:nvPr>
+          <p:nvPr/>
         </p:nvSpPr>
         <p:spPr>
           <a:xfrm>
@@ -4393,7 +5872,7 @@
                   <a:srgbClr val="1F3A5F"/>
                 </a:solidFill>
               </a:rPr>
-              <a:t>Gram 17: FR Razor Crest, Category 1, Mustafar</a:t>
+              <a:t>Gram 34: Cerritos contact bearing 004, codename Dank</a:t>
             </a:r>
           </a:p>
         </p:txBody>
@@ -4422,7 +5901,7 @@
           <a:p>
             <a:r>
               <a:rPr sz="800">
-                <a:hlinkClick r:id="rId46"/>
+                <a:hlinkClick r:id="rId43"/>
               </a:rPr>
               <a:t>Lofar 1</a:t>
             </a:r>
@@ -4430,7 +5909,7 @@
           <a:p>
             <a:r>
               <a:rPr sz="800">
-                <a:hlinkClick r:id="rId47"/>
+                <a:hlinkClick r:id="rId44"/>
               </a:rPr>
               <a:t>Lofar 2</a:t>
             </a:r>
@@ -4438,28 +5917,20 @@
           <a:p>
             <a:r>
               <a:rPr sz="800">
-                <a:hlinkClick r:id="rId48"/>
+                <a:hlinkClick r:id="rId45"/>
               </a:rPr>
               <a:t>Lofar 3</a:t>
             </a:r>
           </a:p>
-          <a:p>
-            <a:r>
-              <a:rPr sz="800">
-                <a:hlinkClick r:id="rId49"/>
-              </a:rPr>
-              <a:t>Lofar 4</a:t>
-            </a:r>
-          </a:p>
-        </p:txBody>
-      </p:sp>
-      <p:sp>
-        <p:nvSpPr>
-          <p:cNvPr id="27" name="Rounded Rectangle 26"/>
+        </p:txBody>
+      </p:sp>
+      <p:sp>
+        <p:nvSpPr>
+          <p:cNvPr id="27" name="Rounded Rectangle 26">
+            <a:hlinkClick r:id="rId46"/>
+          </p:cNvPr>
           <p:cNvSpPr/>
-          <p:nvPr>
-            <a:hlinkClick r:id="rId50"/>
-          </p:nvPr>
+          <p:nvPr/>
         </p:nvSpPr>
         <p:spPr>
           <a:xfrm>
@@ -4503,7 +5974,7 @@
                   <a:srgbClr val="1F3A5F"/>
                 </a:solidFill>
               </a:rPr>
-              <a:t>Gram 18: FR X-wing, Category 3, Defiant</a:t>
+              <a:t>Gram 35: FR Intrepid-class, Category 2, Gandalf</a:t>
             </a:r>
           </a:p>
         </p:txBody>
@@ -4532,20 +6003,28 @@
           <a:p>
             <a:r>
               <a:rPr sz="800">
-                <a:hlinkClick r:id="rId51"/>
+                <a:hlinkClick r:id="rId47"/>
               </a:rPr>
               <a:t>Lofar 1</a:t>
             </a:r>
           </a:p>
-        </p:txBody>
-      </p:sp>
-      <p:sp>
-        <p:nvSpPr>
-          <p:cNvPr id="29" name="Rounded Rectangle 28"/>
+          <a:p>
+            <a:r>
+              <a:rPr sz="800">
+                <a:hlinkClick r:id="rId48"/>
+              </a:rPr>
+              <a:t>Lofar 2</a:t>
+            </a:r>
+          </a:p>
+        </p:txBody>
+      </p:sp>
+      <p:sp>
+        <p:nvSpPr>
+          <p:cNvPr id="29" name="Rounded Rectangle 28">
+            <a:hlinkClick r:id="rId49"/>
+          </p:cNvPr>
           <p:cNvSpPr/>
-          <p:nvPr>
-            <a:hlinkClick r:id="rId52"/>
-          </p:nvPr>
+          <p:nvPr/>
         </p:nvSpPr>
         <p:spPr>
           <a:xfrm>
@@ -4589,7 +6068,7 @@
                   <a:srgbClr val="1F3A5F"/>
                 </a:solidFill>
               </a:rPr>
-              <a:t>Gram 19: Devastator contact bearing 194, codename Trill</a:t>
+              <a:t>Gram 36: FR Rebel One, Category 3, Mustafar</a:t>
             </a:r>
           </a:p>
         </p:txBody>
@@ -4618,32 +6097,32 @@
           <a:p>
             <a:r>
               <a:rPr sz="800">
+                <a:hlinkClick r:id="rId50"/>
+              </a:rPr>
+              <a:t>Lofar 1</a:t>
+            </a:r>
+          </a:p>
+          <a:p>
+            <a:r>
+              <a:rPr sz="800">
+                <a:hlinkClick r:id="rId51"/>
+              </a:rPr>
+              <a:t>Lofar 2</a:t>
+            </a:r>
+          </a:p>
+          <a:p>
+            <a:r>
+              <a:rPr sz="800">
+                <a:hlinkClick r:id="rId52"/>
+              </a:rPr>
+              <a:t>Lofar 3</a:t>
+            </a:r>
+          </a:p>
+          <a:p>
+            <a:r>
+              <a:rPr sz="800">
                 <a:hlinkClick r:id="rId53"/>
               </a:rPr>
-              <a:t>Lofar 1</a:t>
-            </a:r>
-          </a:p>
-          <a:p>
-            <a:r>
-              <a:rPr sz="800">
-                <a:hlinkClick r:id="rId54"/>
-              </a:rPr>
-              <a:t>Lofar 2</a:t>
-            </a:r>
-          </a:p>
-          <a:p>
-            <a:r>
-              <a:rPr sz="800">
-                <a:hlinkClick r:id="rId55"/>
-              </a:rPr>
-              <a:t>Lofar 3</a:t>
-            </a:r>
-          </a:p>
-          <a:p>
-            <a:r>
-              <a:rPr sz="800">
-                <a:hlinkClick r:id="rId56"/>
-              </a:rPr>
               <a:t>Lofar 4</a:t>
             </a:r>
           </a:p>
@@ -4651,11 +6130,11 @@
       </p:sp>
       <p:sp>
         <p:nvSpPr>
-          <p:cNvPr id="31" name="Rounded Rectangle 30"/>
+          <p:cNvPr id="31" name="Rounded Rectangle 30">
+            <a:hlinkClick r:id="rId54"/>
+          </p:cNvPr>
           <p:cNvSpPr/>
-          <p:nvPr>
-            <a:hlinkClick r:id="rId57"/>
-          </p:nvPr>
+          <p:nvPr/>
         </p:nvSpPr>
         <p:spPr>
           <a:xfrm>
@@ -4699,7 +6178,7 @@
                   <a:srgbClr val="1F3A5F"/>
                 </a:solidFill>
               </a:rPr>
-              <a:t>Gram 20: FR TIE Fighter, Category 1, Coruscant</a:t>
+              <a:t>Gram 37: FR Intrepid-class, Category 2, Tatooine</a:t>
             </a:r>
           </a:p>
         </p:txBody>
@@ -4728,7 +6207,7 @@
           <a:p>
             <a:r>
               <a:rPr sz="800">
-                <a:hlinkClick r:id="rId58"/>
+                <a:hlinkClick r:id="rId55"/>
               </a:rPr>
               <a:t>Lofar 1</a:t>
             </a:r>
@@ -4736,7 +6215,7 @@
           <a:p>
             <a:r>
               <a:rPr sz="800">
-                <a:hlinkClick r:id="rId59"/>
+                <a:hlinkClick r:id="rId56"/>
               </a:rPr>
               <a:t>Lofar 2</a:t>
             </a:r>
@@ -4744,7 +6223,7 @@
           <a:p>
             <a:r>
               <a:rPr sz="800">
-                <a:hlinkClick r:id="rId60"/>
+                <a:hlinkClick r:id="rId57"/>
               </a:rPr>
               <a:t>Lofar 3</a:t>
             </a:r>
@@ -4815,18 +6294,18 @@
                   <a:srgbClr val="FFFFFF"/>
                 </a:solidFill>
               </a:rPr>
-              <a:t>Instructor Week 3 Grams — Page 2 of 3</a:t>
-            </a:r>
-          </a:p>
-        </p:txBody>
-      </p:sp>
-      <p:sp>
-        <p:nvSpPr>
-          <p:cNvPr id="3" name="Rounded Rectangle 2"/>
+              <a:t>Instructor Week 3 Grams — Page 3 of 3</a:t>
+            </a:r>
+          </a:p>
+        </p:txBody>
+      </p:sp>
+      <p:sp>
+        <p:nvSpPr>
+          <p:cNvPr id="3" name="Rounded Rectangle 2">
+            <a:hlinkClick r:id="rId2"/>
+          </p:cNvPr>
           <p:cNvSpPr/>
-          <p:nvPr>
-            <a:hlinkClick r:id="rId2"/>
-          </p:nvPr>
+          <p:nvPr/>
         </p:nvSpPr>
         <p:spPr>
           <a:xfrm>
@@ -4870,7 +6349,7 @@
                   <a:srgbClr val="1F3A5F"/>
                 </a:solidFill>
               </a:rPr>
-              <a:t>Gram 21: FR Discovery, Category 4, Defiant</a:t>
+              <a:t>Gram 38: FR Reliant, Category 3, Caprica</a:t>
             </a:r>
           </a:p>
         </p:txBody>
@@ -4912,31 +6391,15 @@
               <a:t>Lofar 2</a:t>
             </a:r>
           </a:p>
-          <a:p>
-            <a:r>
-              <a:rPr sz="800">
-                <a:hlinkClick r:id="rId5"/>
-              </a:rPr>
-              <a:t>Lofar 3</a:t>
-            </a:r>
-          </a:p>
-          <a:p>
-            <a:r>
-              <a:rPr sz="800">
-                <a:hlinkClick r:id="rId6"/>
-              </a:rPr>
-              <a:t>Lofar 4</a:t>
-            </a:r>
-          </a:p>
-        </p:txBody>
-      </p:sp>
-      <p:sp>
-        <p:nvSpPr>
-          <p:cNvPr id="5" name="Rounded Rectangle 4"/>
+        </p:txBody>
+      </p:sp>
+      <p:sp>
+        <p:nvSpPr>
+          <p:cNvPr id="5" name="Rounded Rectangle 4">
+            <a:hlinkClick r:id="rId5"/>
+          </p:cNvPr>
           <p:cNvSpPr/>
-          <p:nvPr>
-            <a:hlinkClick r:id="rId7"/>
-          </p:nvPr>
+          <p:nvPr/>
         </p:nvSpPr>
         <p:spPr>
           <a:xfrm>
@@ -4980,7 +6443,7 @@
                   <a:srgbClr val="1F3A5F"/>
                 </a:solidFill>
               </a:rPr>
-              <a:t>Gram 22: Razor Crest contact bearing 239, codename Dank</a:t>
+              <a:t>Gram 39: FR Stargazer, Category 1, Betazed</a:t>
             </a:r>
           </a:p>
         </p:txBody>
@@ -5009,20 +6472,44 @@
           <a:p>
             <a:r>
               <a:rPr sz="800">
+                <a:hlinkClick r:id="rId6"/>
+              </a:rPr>
+              <a:t>Lofar 1</a:t>
+            </a:r>
+          </a:p>
+          <a:p>
+            <a:r>
+              <a:rPr sz="800">
+                <a:hlinkClick r:id="rId7"/>
+              </a:rPr>
+              <a:t>Lofar 2</a:t>
+            </a:r>
+          </a:p>
+          <a:p>
+            <a:r>
+              <a:rPr sz="800">
                 <a:hlinkClick r:id="rId8"/>
               </a:rPr>
-              <a:t>Lofar 1</a:t>
-            </a:r>
-          </a:p>
-        </p:txBody>
-      </p:sp>
-      <p:sp>
-        <p:nvSpPr>
-          <p:cNvPr id="7" name="Rounded Rectangle 6"/>
+              <a:t>Lofar 3</a:t>
+            </a:r>
+          </a:p>
+          <a:p>
+            <a:r>
+              <a:rPr sz="800">
+                <a:hlinkClick r:id="rId9"/>
+              </a:rPr>
+              <a:t>Lofar 4</a:t>
+            </a:r>
+          </a:p>
+        </p:txBody>
+      </p:sp>
+      <p:sp>
+        <p:nvSpPr>
+          <p:cNvPr id="7" name="Rounded Rectangle 6">
+            <a:hlinkClick r:id="rId10"/>
+          </p:cNvPr>
           <p:cNvSpPr/>
-          <p:nvPr>
-            <a:hlinkClick r:id="rId9"/>
-          </p:nvPr>
+          <p:nvPr/>
         </p:nvSpPr>
         <p:spPr>
           <a:xfrm>
@@ -5066,7 +6553,7 @@
                   <a:srgbClr val="1F3A5F"/>
                 </a:solidFill>
               </a:rPr>
-              <a:t>Gram 23: FR Devastator, Category 1, Risa</a:t>
+              <a:t>Gram 40: FR Defiant-class, Category 2, Endor</a:t>
             </a:r>
           </a:p>
         </p:txBody>
@@ -5095,20 +6582,44 @@
           <a:p>
             <a:r>
               <a:rPr sz="800">
-                <a:hlinkClick r:id="rId10"/>
+                <a:hlinkClick r:id="rId11"/>
               </a:rPr>
               <a:t>Lofar 1</a:t>
             </a:r>
           </a:p>
-        </p:txBody>
-      </p:sp>
-      <p:sp>
-        <p:nvSpPr>
-          <p:cNvPr id="9" name="Rounded Rectangle 8"/>
+          <a:p>
+            <a:r>
+              <a:rPr sz="800">
+                <a:hlinkClick r:id="rId12"/>
+              </a:rPr>
+              <a:t>Lofar 2</a:t>
+            </a:r>
+          </a:p>
+          <a:p>
+            <a:r>
+              <a:rPr sz="800">
+                <a:hlinkClick r:id="rId13"/>
+              </a:rPr>
+              <a:t>Lofar 3</a:t>
+            </a:r>
+          </a:p>
+          <a:p>
+            <a:r>
+              <a:rPr sz="800">
+                <a:hlinkClick r:id="rId14"/>
+              </a:rPr>
+              <a:t>Lofar 4</a:t>
+            </a:r>
+          </a:p>
+        </p:txBody>
+      </p:sp>
+      <p:sp>
+        <p:nvSpPr>
+          <p:cNvPr id="9" name="Rounded Rectangle 8">
+            <a:hlinkClick r:id="rId15"/>
+          </p:cNvPr>
           <p:cNvSpPr/>
-          <p:nvPr>
-            <a:hlinkClick r:id="rId11"/>
-          </p:nvPr>
+          <p:nvPr/>
         </p:nvSpPr>
         <p:spPr>
           <a:xfrm>
@@ -5152,7 +6663,7 @@
                   <a:srgbClr val="1F3A5F"/>
                 </a:solidFill>
               </a:rPr>
-              <a:t>Gram 25: FR Imperial-class, Category 4, Coruscant</a:t>
+              <a:t>Gram 41: FR Tantive IV, Category 3, Betazed</a:t>
             </a:r>
           </a:p>
         </p:txBody>
@@ -5181,7 +6692,7 @@
           <a:p>
             <a:r>
               <a:rPr sz="800">
-                <a:hlinkClick r:id="rId12"/>
+                <a:hlinkClick r:id="rId16"/>
               </a:rPr>
               <a:t>Lofar 1</a:t>
             </a:r>
@@ -5189,7 +6700,7 @@
           <a:p>
             <a:r>
               <a:rPr sz="800">
-                <a:hlinkClick r:id="rId13"/>
+                <a:hlinkClick r:id="rId17"/>
               </a:rPr>
               <a:t>Lofar 2</a:t>
             </a:r>
@@ -5197,28 +6708,20 @@
           <a:p>
             <a:r>
               <a:rPr sz="800">
-                <a:hlinkClick r:id="rId14"/>
+                <a:hlinkClick r:id="rId18"/>
               </a:rPr>
               <a:t>Lofar 3</a:t>
             </a:r>
           </a:p>
-          <a:p>
-            <a:r>
-              <a:rPr sz="800">
-                <a:hlinkClick r:id="rId15"/>
-              </a:rPr>
-              <a:t>Lofar 4</a:t>
-            </a:r>
-          </a:p>
-        </p:txBody>
-      </p:sp>
-      <p:sp>
-        <p:nvSpPr>
-          <p:cNvPr id="11" name="Rounded Rectangle 10"/>
+        </p:txBody>
+      </p:sp>
+      <p:sp>
+        <p:nvSpPr>
+          <p:cNvPr id="11" name="Rounded Rectangle 10">
+            <a:hlinkClick r:id="rId19"/>
+          </p:cNvPr>
           <p:cNvSpPr/>
-          <p:nvPr>
-            <a:hlinkClick r:id="rId16"/>
-          </p:nvPr>
+          <p:nvPr/>
         </p:nvSpPr>
         <p:spPr>
           <a:xfrm>
@@ -5262,7 +6765,7 @@
                   <a:srgbClr val="1F3A5F"/>
                 </a:solidFill>
               </a:rPr>
-              <a:t>Gram 26: Enterprise contact bearing 229, codename Betazed</a:t>
+              <a:t>Gram 42: FR TIE Bomber, Category 3, Mustafar</a:t>
             </a:r>
           </a:p>
         </p:txBody>
@@ -5291,1686 +6794,9 @@
           <a:p>
             <a:r>
               <a:rPr sz="800">
-                <a:hlinkClick r:id="rId17"/>
+                <a:hlinkClick r:id="rId20"/>
               </a:rPr>
               <a:t>Lofar 1</a:t>
-            </a:r>
-          </a:p>
-          <a:p>
-            <a:r>
-              <a:rPr sz="800">
-                <a:hlinkClick r:id="rId18"/>
-              </a:rPr>
-              <a:t>Lofar 2</a:t>
-            </a:r>
-          </a:p>
-          <a:p>
-            <a:r>
-              <a:rPr sz="800">
-                <a:hlinkClick r:id="rId19"/>
-              </a:rPr>
-              <a:t>Lofar 3</a:t>
-            </a:r>
-          </a:p>
-          <a:p>
-            <a:r>
-              <a:rPr sz="800">
-                <a:hlinkClick r:id="rId20"/>
-              </a:rPr>
-              <a:t>Lofar 4</a:t>
-            </a:r>
-          </a:p>
-        </p:txBody>
-      </p:sp>
-      <p:sp>
-        <p:nvSpPr>
-          <p:cNvPr id="13" name="Rounded Rectangle 12"/>
-          <p:cNvSpPr/>
-          <p:nvPr>
-            <a:hlinkClick r:id="rId21"/>
-          </p:nvPr>
-        </p:nvSpPr>
-        <p:spPr>
-          <a:xfrm>
-            <a:off x="365760" y="2682240"/>
-            <a:ext cx="2200046" cy="365760"/>
-          </a:xfrm>
-          <a:prstGeom prst="roundRect">
-            <a:avLst/>
-          </a:prstGeom>
-          <a:solidFill>
-            <a:srgbClr val="E8EEF7"/>
-          </a:solidFill>
-          <a:ln>
-            <a:solidFill>
-              <a:srgbClr val="1F3A5F"/>
-            </a:solidFill>
-          </a:ln>
-        </p:spPr>
-        <p:style>
-          <a:lnRef idx="1">
-            <a:schemeClr val="accent1"/>
-          </a:lnRef>
-          <a:fillRef idx="3">
-            <a:schemeClr val="accent1"/>
-          </a:fillRef>
-          <a:effectRef idx="2">
-            <a:schemeClr val="accent1"/>
-          </a:effectRef>
-          <a:fontRef idx="minor">
-            <a:schemeClr val="lt1"/>
-          </a:fontRef>
-        </p:style>
-        <p:txBody>
-          <a:bodyPr rtlCol="0" anchor="ctr" lIns="45720" rIns="45720"/>
-          <a:lstStyle/>
-          <a:p>
-            <a:pPr algn="ctr"/>
-            <a:r>
-              <a:rPr sz="900">
-                <a:solidFill>
-                  <a:srgbClr val="1F3A5F"/>
-                </a:solidFill>
-              </a:rPr>
-              <a:t>Gram 27: FR Prometheus, Category 1, Kobol</a:t>
-            </a:r>
-          </a:p>
-        </p:txBody>
-      </p:sp>
-      <p:sp>
-        <p:nvSpPr>
-          <p:cNvPr id="14" name="TextBox 13"/>
-          <p:cNvSpPr txBox="1"/>
-          <p:nvPr/>
-        </p:nvSpPr>
-        <p:spPr>
-          <a:xfrm>
-            <a:off x="365760" y="3066288"/>
-            <a:ext cx="2200046" cy="1447800"/>
-          </a:xfrm>
-          <a:prstGeom prst="rect">
-            <a:avLst/>
-          </a:prstGeom>
-          <a:noFill/>
-        </p:spPr>
-        <p:txBody>
-          <a:bodyPr wrap="square">
-            <a:spAutoFit/>
-          </a:bodyPr>
-          <a:lstStyle/>
-          <a:p>
-            <a:r>
-              <a:rPr sz="800">
-                <a:hlinkClick r:id="rId22"/>
-              </a:rPr>
-              <a:t>Lofar 1</a:t>
-            </a:r>
-          </a:p>
-          <a:p>
-            <a:r>
-              <a:rPr sz="800">
-                <a:hlinkClick r:id="rId23"/>
-              </a:rPr>
-              <a:t>Lofar 2</a:t>
-            </a:r>
-          </a:p>
-        </p:txBody>
-      </p:sp>
-      <p:sp>
-        <p:nvSpPr>
-          <p:cNvPr id="15" name="Rounded Rectangle 14"/>
-          <p:cNvSpPr/>
-          <p:nvPr>
-            <a:hlinkClick r:id="rId24"/>
-          </p:nvPr>
-        </p:nvSpPr>
-        <p:spPr>
-          <a:xfrm>
-            <a:off x="2657246" y="2682240"/>
-            <a:ext cx="2200046" cy="365760"/>
-          </a:xfrm>
-          <a:prstGeom prst="roundRect">
-            <a:avLst/>
-          </a:prstGeom>
-          <a:solidFill>
-            <a:srgbClr val="E8EEF7"/>
-          </a:solidFill>
-          <a:ln>
-            <a:solidFill>
-              <a:srgbClr val="1F3A5F"/>
-            </a:solidFill>
-          </a:ln>
-        </p:spPr>
-        <p:style>
-          <a:lnRef idx="1">
-            <a:schemeClr val="accent1"/>
-          </a:lnRef>
-          <a:fillRef idx="3">
-            <a:schemeClr val="accent1"/>
-          </a:fillRef>
-          <a:effectRef idx="2">
-            <a:schemeClr val="accent1"/>
-          </a:effectRef>
-          <a:fontRef idx="minor">
-            <a:schemeClr val="lt1"/>
-          </a:fontRef>
-        </p:style>
-        <p:txBody>
-          <a:bodyPr rtlCol="0" anchor="ctr" lIns="45720" rIns="45720"/>
-          <a:lstStyle/>
-          <a:p>
-            <a:pPr algn="ctr"/>
-            <a:r>
-              <a:rPr sz="900">
-                <a:solidFill>
-                  <a:srgbClr val="1F3A5F"/>
-                </a:solidFill>
-              </a:rPr>
-              <a:t>Gram 29: FR X-wing, Category 1, Betazed</a:t>
-            </a:r>
-          </a:p>
-        </p:txBody>
-      </p:sp>
-      <p:sp>
-        <p:nvSpPr>
-          <p:cNvPr id="16" name="TextBox 15"/>
-          <p:cNvSpPr txBox="1"/>
-          <p:nvPr/>
-        </p:nvSpPr>
-        <p:spPr>
-          <a:xfrm>
-            <a:off x="2657246" y="3066288"/>
-            <a:ext cx="2200046" cy="1447800"/>
-          </a:xfrm>
-          <a:prstGeom prst="rect">
-            <a:avLst/>
-          </a:prstGeom>
-          <a:noFill/>
-        </p:spPr>
-        <p:txBody>
-          <a:bodyPr wrap="square">
-            <a:spAutoFit/>
-          </a:bodyPr>
-          <a:lstStyle/>
-          <a:p>
-            <a:r>
-              <a:rPr sz="800">
-                <a:hlinkClick r:id="rId25"/>
-              </a:rPr>
-              <a:t>Lofar 1</a:t>
-            </a:r>
-          </a:p>
-          <a:p>
-            <a:r>
-              <a:rPr sz="800">
-                <a:hlinkClick r:id="rId26"/>
-              </a:rPr>
-              <a:t>Lofar 2</a:t>
-            </a:r>
-          </a:p>
-          <a:p>
-            <a:r>
-              <a:rPr sz="800">
-                <a:hlinkClick r:id="rId27"/>
-              </a:rPr>
-              <a:t>Lofar 3</a:t>
-            </a:r>
-          </a:p>
-          <a:p>
-            <a:r>
-              <a:rPr sz="800">
-                <a:hlinkClick r:id="rId28"/>
-              </a:rPr>
-              <a:t>Lofar 4</a:t>
-            </a:r>
-          </a:p>
-        </p:txBody>
-      </p:sp>
-      <p:sp>
-        <p:nvSpPr>
-          <p:cNvPr id="17" name="Rounded Rectangle 16"/>
-          <p:cNvSpPr/>
-          <p:nvPr>
-            <a:hlinkClick r:id="rId29"/>
-          </p:nvPr>
-        </p:nvSpPr>
-        <p:spPr>
-          <a:xfrm>
-            <a:off x="4948732" y="2682240"/>
-            <a:ext cx="2200046" cy="365760"/>
-          </a:xfrm>
-          <a:prstGeom prst="roundRect">
-            <a:avLst/>
-          </a:prstGeom>
-          <a:solidFill>
-            <a:srgbClr val="E8EEF7"/>
-          </a:solidFill>
-          <a:ln>
-            <a:solidFill>
-              <a:srgbClr val="1F3A5F"/>
-            </a:solidFill>
-          </a:ln>
-        </p:spPr>
-        <p:style>
-          <a:lnRef idx="1">
-            <a:schemeClr val="accent1"/>
-          </a:lnRef>
-          <a:fillRef idx="3">
-            <a:schemeClr val="accent1"/>
-          </a:fillRef>
-          <a:effectRef idx="2">
-            <a:schemeClr val="accent1"/>
-          </a:effectRef>
-          <a:fontRef idx="minor">
-            <a:schemeClr val="lt1"/>
-          </a:fontRef>
-        </p:style>
-        <p:txBody>
-          <a:bodyPr rtlCol="0" anchor="ctr" lIns="45720" rIns="45720"/>
-          <a:lstStyle/>
-          <a:p>
-            <a:pPr algn="ctr"/>
-            <a:r>
-              <a:rPr sz="900">
-                <a:solidFill>
-                  <a:srgbClr val="1F3A5F"/>
-                </a:solidFill>
-              </a:rPr>
-              <a:t>Gram 30: FR Imperial-class, Category 1, Vulcan</a:t>
-            </a:r>
-          </a:p>
-        </p:txBody>
-      </p:sp>
-      <p:sp>
-        <p:nvSpPr>
-          <p:cNvPr id="18" name="TextBox 17"/>
-          <p:cNvSpPr txBox="1"/>
-          <p:nvPr/>
-        </p:nvSpPr>
-        <p:spPr>
-          <a:xfrm>
-            <a:off x="4948732" y="3066288"/>
-            <a:ext cx="2200046" cy="1447800"/>
-          </a:xfrm>
-          <a:prstGeom prst="rect">
-            <a:avLst/>
-          </a:prstGeom>
-          <a:noFill/>
-        </p:spPr>
-        <p:txBody>
-          <a:bodyPr wrap="square">
-            <a:spAutoFit/>
-          </a:bodyPr>
-          <a:lstStyle/>
-          <a:p>
-            <a:r>
-              <a:rPr sz="800">
-                <a:hlinkClick r:id="rId30"/>
-              </a:rPr>
-              <a:t>Lofar 1</a:t>
-            </a:r>
-          </a:p>
-          <a:p>
-            <a:r>
-              <a:rPr sz="800">
-                <a:hlinkClick r:id="rId31"/>
-              </a:rPr>
-              <a:t>Lofar 2</a:t>
-            </a:r>
-          </a:p>
-        </p:txBody>
-      </p:sp>
-      <p:sp>
-        <p:nvSpPr>
-          <p:cNvPr id="19" name="Rounded Rectangle 18"/>
-          <p:cNvSpPr/>
-          <p:nvPr>
-            <a:hlinkClick r:id="rId32"/>
-          </p:nvPr>
-        </p:nvSpPr>
-        <p:spPr>
-          <a:xfrm>
-            <a:off x="7240219" y="2682240"/>
-            <a:ext cx="2200046" cy="365760"/>
-          </a:xfrm>
-          <a:prstGeom prst="roundRect">
-            <a:avLst/>
-          </a:prstGeom>
-          <a:solidFill>
-            <a:srgbClr val="E8EEF7"/>
-          </a:solidFill>
-          <a:ln>
-            <a:solidFill>
-              <a:srgbClr val="1F3A5F"/>
-            </a:solidFill>
-          </a:ln>
-        </p:spPr>
-        <p:style>
-          <a:lnRef idx="1">
-            <a:schemeClr val="accent1"/>
-          </a:lnRef>
-          <a:fillRef idx="3">
-            <a:schemeClr val="accent1"/>
-          </a:fillRef>
-          <a:effectRef idx="2">
-            <a:schemeClr val="accent1"/>
-          </a:effectRef>
-          <a:fontRef idx="minor">
-            <a:schemeClr val="lt1"/>
-          </a:fontRef>
-        </p:style>
-        <p:txBody>
-          <a:bodyPr rtlCol="0" anchor="ctr" lIns="45720" rIns="45720"/>
-          <a:lstStyle/>
-          <a:p>
-            <a:pPr algn="ctr"/>
-            <a:r>
-              <a:rPr sz="900">
-                <a:solidFill>
-                  <a:srgbClr val="1F3A5F"/>
-                </a:solidFill>
-              </a:rPr>
-              <a:t>Gram 31: FR B-wing, Category 2, Hoth</a:t>
-            </a:r>
-          </a:p>
-        </p:txBody>
-      </p:sp>
-      <p:sp>
-        <p:nvSpPr>
-          <p:cNvPr id="20" name="TextBox 19"/>
-          <p:cNvSpPr txBox="1"/>
-          <p:nvPr/>
-        </p:nvSpPr>
-        <p:spPr>
-          <a:xfrm>
-            <a:off x="7240219" y="3066288"/>
-            <a:ext cx="2200046" cy="1447800"/>
-          </a:xfrm>
-          <a:prstGeom prst="rect">
-            <a:avLst/>
-          </a:prstGeom>
-          <a:noFill/>
-        </p:spPr>
-        <p:txBody>
-          <a:bodyPr wrap="square">
-            <a:spAutoFit/>
-          </a:bodyPr>
-          <a:lstStyle/>
-          <a:p>
-            <a:r>
-              <a:rPr sz="800">
-                <a:hlinkClick r:id="rId33"/>
-              </a:rPr>
-              <a:t>Lofar 1</a:t>
-            </a:r>
-          </a:p>
-          <a:p>
-            <a:r>
-              <a:rPr sz="800">
-                <a:hlinkClick r:id="rId34"/>
-              </a:rPr>
-              <a:t>Lofar 2</a:t>
-            </a:r>
-          </a:p>
-        </p:txBody>
-      </p:sp>
-      <p:sp>
-        <p:nvSpPr>
-          <p:cNvPr id="21" name="Rounded Rectangle 20"/>
-          <p:cNvSpPr/>
-          <p:nvPr>
-            <a:hlinkClick r:id="rId35"/>
-          </p:nvPr>
-        </p:nvSpPr>
-        <p:spPr>
-          <a:xfrm>
-            <a:off x="9531705" y="2682240"/>
-            <a:ext cx="2200046" cy="365760"/>
-          </a:xfrm>
-          <a:prstGeom prst="roundRect">
-            <a:avLst/>
-          </a:prstGeom>
-          <a:solidFill>
-            <a:srgbClr val="E8EEF7"/>
-          </a:solidFill>
-          <a:ln>
-            <a:solidFill>
-              <a:srgbClr val="1F3A5F"/>
-            </a:solidFill>
-          </a:ln>
-        </p:spPr>
-        <p:style>
-          <a:lnRef idx="1">
-            <a:schemeClr val="accent1"/>
-          </a:lnRef>
-          <a:fillRef idx="3">
-            <a:schemeClr val="accent1"/>
-          </a:fillRef>
-          <a:effectRef idx="2">
-            <a:schemeClr val="accent1"/>
-          </a:effectRef>
-          <a:fontRef idx="minor">
-            <a:schemeClr val="lt1"/>
-          </a:fontRef>
-        </p:style>
-        <p:txBody>
-          <a:bodyPr rtlCol="0" anchor="ctr" lIns="45720" rIns="45720"/>
-          <a:lstStyle/>
-          <a:p>
-            <a:pPr algn="ctr"/>
-            <a:r>
-              <a:rPr sz="900">
-                <a:solidFill>
-                  <a:srgbClr val="1F3A5F"/>
-                </a:solidFill>
-              </a:rPr>
-              <a:t>Gram 32: Venator-class contact bearing 263, codename Risa</a:t>
-            </a:r>
-          </a:p>
-        </p:txBody>
-      </p:sp>
-      <p:sp>
-        <p:nvSpPr>
-          <p:cNvPr id="22" name="TextBox 21"/>
-          <p:cNvSpPr txBox="1"/>
-          <p:nvPr/>
-        </p:nvSpPr>
-        <p:spPr>
-          <a:xfrm>
-            <a:off x="9531705" y="3066288"/>
-            <a:ext cx="2200046" cy="1447800"/>
-          </a:xfrm>
-          <a:prstGeom prst="rect">
-            <a:avLst/>
-          </a:prstGeom>
-          <a:noFill/>
-        </p:spPr>
-        <p:txBody>
-          <a:bodyPr wrap="square">
-            <a:spAutoFit/>
-          </a:bodyPr>
-          <a:lstStyle/>
-          <a:p>
-            <a:r>
-              <a:rPr sz="800">
-                <a:hlinkClick r:id="rId36"/>
-              </a:rPr>
-              <a:t>Lofar 1</a:t>
-            </a:r>
-          </a:p>
-          <a:p>
-            <a:r>
-              <a:rPr sz="800">
-                <a:hlinkClick r:id="rId37"/>
-              </a:rPr>
-              <a:t>Lofar 2</a:t>
-            </a:r>
-          </a:p>
-          <a:p>
-            <a:r>
-              <a:rPr sz="800">
-                <a:hlinkClick r:id="rId38"/>
-              </a:rPr>
-              <a:t>Lofar 3</a:t>
-            </a:r>
-          </a:p>
-          <a:p>
-            <a:r>
-              <a:rPr sz="800">
-                <a:hlinkClick r:id="rId39"/>
-              </a:rPr>
-              <a:t>Lofar 4</a:t>
-            </a:r>
-          </a:p>
-        </p:txBody>
-      </p:sp>
-      <p:sp>
-        <p:nvSpPr>
-          <p:cNvPr id="23" name="Rounded Rectangle 22"/>
-          <p:cNvSpPr/>
-          <p:nvPr>
-            <a:hlinkClick r:id="rId40"/>
-          </p:nvPr>
-        </p:nvSpPr>
-        <p:spPr>
-          <a:xfrm>
-            <a:off x="365760" y="4632960"/>
-            <a:ext cx="2200046" cy="365760"/>
-          </a:xfrm>
-          <a:prstGeom prst="roundRect">
-            <a:avLst/>
-          </a:prstGeom>
-          <a:solidFill>
-            <a:srgbClr val="E8EEF7"/>
-          </a:solidFill>
-          <a:ln>
-            <a:solidFill>
-              <a:srgbClr val="1F3A5F"/>
-            </a:solidFill>
-          </a:ln>
-        </p:spPr>
-        <p:style>
-          <a:lnRef idx="1">
-            <a:schemeClr val="accent1"/>
-          </a:lnRef>
-          <a:fillRef idx="3">
-            <a:schemeClr val="accent1"/>
-          </a:fillRef>
-          <a:effectRef idx="2">
-            <a:schemeClr val="accent1"/>
-          </a:effectRef>
-          <a:fontRef idx="minor">
-            <a:schemeClr val="lt1"/>
-          </a:fontRef>
-        </p:style>
-        <p:txBody>
-          <a:bodyPr rtlCol="0" anchor="ctr" lIns="45720" rIns="45720"/>
-          <a:lstStyle/>
-          <a:p>
-            <a:pPr algn="ctr"/>
-            <a:r>
-              <a:rPr sz="900">
-                <a:solidFill>
-                  <a:srgbClr val="1F3A5F"/>
-                </a:solidFill>
-              </a:rPr>
-              <a:t>Gram 33: FR Ghost, Category 2, Kobol</a:t>
-            </a:r>
-          </a:p>
-        </p:txBody>
-      </p:sp>
-      <p:sp>
-        <p:nvSpPr>
-          <p:cNvPr id="24" name="TextBox 23"/>
-          <p:cNvSpPr txBox="1"/>
-          <p:nvPr/>
-        </p:nvSpPr>
-        <p:spPr>
-          <a:xfrm>
-            <a:off x="365760" y="5017008"/>
-            <a:ext cx="2200046" cy="1447800"/>
-          </a:xfrm>
-          <a:prstGeom prst="rect">
-            <a:avLst/>
-          </a:prstGeom>
-          <a:noFill/>
-        </p:spPr>
-        <p:txBody>
-          <a:bodyPr wrap="square">
-            <a:spAutoFit/>
-          </a:bodyPr>
-          <a:lstStyle/>
-          <a:p>
-            <a:r>
-              <a:rPr sz="800">
-                <a:hlinkClick r:id="rId41"/>
-              </a:rPr>
-              <a:t>Lofar 1</a:t>
-            </a:r>
-          </a:p>
-        </p:txBody>
-      </p:sp>
-      <p:sp>
-        <p:nvSpPr>
-          <p:cNvPr id="25" name="Rounded Rectangle 24"/>
-          <p:cNvSpPr/>
-          <p:nvPr>
-            <a:hlinkClick r:id="rId42"/>
-          </p:nvPr>
-        </p:nvSpPr>
-        <p:spPr>
-          <a:xfrm>
-            <a:off x="2657246" y="4632960"/>
-            <a:ext cx="2200046" cy="365760"/>
-          </a:xfrm>
-          <a:prstGeom prst="roundRect">
-            <a:avLst/>
-          </a:prstGeom>
-          <a:solidFill>
-            <a:srgbClr val="E8EEF7"/>
-          </a:solidFill>
-          <a:ln>
-            <a:solidFill>
-              <a:srgbClr val="1F3A5F"/>
-            </a:solidFill>
-          </a:ln>
-        </p:spPr>
-        <p:style>
-          <a:lnRef idx="1">
-            <a:schemeClr val="accent1"/>
-          </a:lnRef>
-          <a:fillRef idx="3">
-            <a:schemeClr val="accent1"/>
-          </a:fillRef>
-          <a:effectRef idx="2">
-            <a:schemeClr val="accent1"/>
-          </a:effectRef>
-          <a:fontRef idx="minor">
-            <a:schemeClr val="lt1"/>
-          </a:fontRef>
-        </p:style>
-        <p:txBody>
-          <a:bodyPr rtlCol="0" anchor="ctr" lIns="45720" rIns="45720"/>
-          <a:lstStyle/>
-          <a:p>
-            <a:pPr algn="ctr"/>
-            <a:r>
-              <a:rPr sz="900">
-                <a:solidFill>
-                  <a:srgbClr val="1F3A5F"/>
-                </a:solidFill>
-              </a:rPr>
-              <a:t>Gram 34: Cerritos contact bearing 004, codename Dank</a:t>
-            </a:r>
-          </a:p>
-        </p:txBody>
-      </p:sp>
-      <p:sp>
-        <p:nvSpPr>
-          <p:cNvPr id="26" name="TextBox 25"/>
-          <p:cNvSpPr txBox="1"/>
-          <p:nvPr/>
-        </p:nvSpPr>
-        <p:spPr>
-          <a:xfrm>
-            <a:off x="2657246" y="5017008"/>
-            <a:ext cx="2200046" cy="1447800"/>
-          </a:xfrm>
-          <a:prstGeom prst="rect">
-            <a:avLst/>
-          </a:prstGeom>
-          <a:noFill/>
-        </p:spPr>
-        <p:txBody>
-          <a:bodyPr wrap="square">
-            <a:spAutoFit/>
-          </a:bodyPr>
-          <a:lstStyle/>
-          <a:p>
-            <a:r>
-              <a:rPr sz="800">
-                <a:hlinkClick r:id="rId43"/>
-              </a:rPr>
-              <a:t>Lofar 1</a:t>
-            </a:r>
-          </a:p>
-          <a:p>
-            <a:r>
-              <a:rPr sz="800">
-                <a:hlinkClick r:id="rId44"/>
-              </a:rPr>
-              <a:t>Lofar 2</a:t>
-            </a:r>
-          </a:p>
-          <a:p>
-            <a:r>
-              <a:rPr sz="800">
-                <a:hlinkClick r:id="rId45"/>
-              </a:rPr>
-              <a:t>Lofar 3</a:t>
-            </a:r>
-          </a:p>
-        </p:txBody>
-      </p:sp>
-      <p:sp>
-        <p:nvSpPr>
-          <p:cNvPr id="27" name="Rounded Rectangle 26"/>
-          <p:cNvSpPr/>
-          <p:nvPr>
-            <a:hlinkClick r:id="rId46"/>
-          </p:nvPr>
-        </p:nvSpPr>
-        <p:spPr>
-          <a:xfrm>
-            <a:off x="4948732" y="4632960"/>
-            <a:ext cx="2200046" cy="365760"/>
-          </a:xfrm>
-          <a:prstGeom prst="roundRect">
-            <a:avLst/>
-          </a:prstGeom>
-          <a:solidFill>
-            <a:srgbClr val="E8EEF7"/>
-          </a:solidFill>
-          <a:ln>
-            <a:solidFill>
-              <a:srgbClr val="1F3A5F"/>
-            </a:solidFill>
-          </a:ln>
-        </p:spPr>
-        <p:style>
-          <a:lnRef idx="1">
-            <a:schemeClr val="accent1"/>
-          </a:lnRef>
-          <a:fillRef idx="3">
-            <a:schemeClr val="accent1"/>
-          </a:fillRef>
-          <a:effectRef idx="2">
-            <a:schemeClr val="accent1"/>
-          </a:effectRef>
-          <a:fontRef idx="minor">
-            <a:schemeClr val="lt1"/>
-          </a:fontRef>
-        </p:style>
-        <p:txBody>
-          <a:bodyPr rtlCol="0" anchor="ctr" lIns="45720" rIns="45720"/>
-          <a:lstStyle/>
-          <a:p>
-            <a:pPr algn="ctr"/>
-            <a:r>
-              <a:rPr sz="900">
-                <a:solidFill>
-                  <a:srgbClr val="1F3A5F"/>
-                </a:solidFill>
-              </a:rPr>
-              <a:t>Gram 35: FR Intrepid-class, Category 2, Gandalf</a:t>
-            </a:r>
-          </a:p>
-        </p:txBody>
-      </p:sp>
-      <p:sp>
-        <p:nvSpPr>
-          <p:cNvPr id="28" name="TextBox 27"/>
-          <p:cNvSpPr txBox="1"/>
-          <p:nvPr/>
-        </p:nvSpPr>
-        <p:spPr>
-          <a:xfrm>
-            <a:off x="4948732" y="5017008"/>
-            <a:ext cx="2200046" cy="1447800"/>
-          </a:xfrm>
-          <a:prstGeom prst="rect">
-            <a:avLst/>
-          </a:prstGeom>
-          <a:noFill/>
-        </p:spPr>
-        <p:txBody>
-          <a:bodyPr wrap="square">
-            <a:spAutoFit/>
-          </a:bodyPr>
-          <a:lstStyle/>
-          <a:p>
-            <a:r>
-              <a:rPr sz="800">
-                <a:hlinkClick r:id="rId47"/>
-              </a:rPr>
-              <a:t>Lofar 1</a:t>
-            </a:r>
-          </a:p>
-          <a:p>
-            <a:r>
-              <a:rPr sz="800">
-                <a:hlinkClick r:id="rId48"/>
-              </a:rPr>
-              <a:t>Lofar 2</a:t>
-            </a:r>
-          </a:p>
-        </p:txBody>
-      </p:sp>
-      <p:sp>
-        <p:nvSpPr>
-          <p:cNvPr id="29" name="Rounded Rectangle 28"/>
-          <p:cNvSpPr/>
-          <p:nvPr>
-            <a:hlinkClick r:id="rId49"/>
-          </p:nvPr>
-        </p:nvSpPr>
-        <p:spPr>
-          <a:xfrm>
-            <a:off x="7240219" y="4632960"/>
-            <a:ext cx="2200046" cy="365760"/>
-          </a:xfrm>
-          <a:prstGeom prst="roundRect">
-            <a:avLst/>
-          </a:prstGeom>
-          <a:solidFill>
-            <a:srgbClr val="E8EEF7"/>
-          </a:solidFill>
-          <a:ln>
-            <a:solidFill>
-              <a:srgbClr val="1F3A5F"/>
-            </a:solidFill>
-          </a:ln>
-        </p:spPr>
-        <p:style>
-          <a:lnRef idx="1">
-            <a:schemeClr val="accent1"/>
-          </a:lnRef>
-          <a:fillRef idx="3">
-            <a:schemeClr val="accent1"/>
-          </a:fillRef>
-          <a:effectRef idx="2">
-            <a:schemeClr val="accent1"/>
-          </a:effectRef>
-          <a:fontRef idx="minor">
-            <a:schemeClr val="lt1"/>
-          </a:fontRef>
-        </p:style>
-        <p:txBody>
-          <a:bodyPr rtlCol="0" anchor="ctr" lIns="45720" rIns="45720"/>
-          <a:lstStyle/>
-          <a:p>
-            <a:pPr algn="ctr"/>
-            <a:r>
-              <a:rPr sz="900">
-                <a:solidFill>
-                  <a:srgbClr val="1F3A5F"/>
-                </a:solidFill>
-              </a:rPr>
-              <a:t>Gram 36: FR Rebel One, Category 3, Mustafar</a:t>
-            </a:r>
-          </a:p>
-        </p:txBody>
-      </p:sp>
-      <p:sp>
-        <p:nvSpPr>
-          <p:cNvPr id="30" name="TextBox 29"/>
-          <p:cNvSpPr txBox="1"/>
-          <p:nvPr/>
-        </p:nvSpPr>
-        <p:spPr>
-          <a:xfrm>
-            <a:off x="7240219" y="5017008"/>
-            <a:ext cx="2200046" cy="1447800"/>
-          </a:xfrm>
-          <a:prstGeom prst="rect">
-            <a:avLst/>
-          </a:prstGeom>
-          <a:noFill/>
-        </p:spPr>
-        <p:txBody>
-          <a:bodyPr wrap="square">
-            <a:spAutoFit/>
-          </a:bodyPr>
-          <a:lstStyle/>
-          <a:p>
-            <a:r>
-              <a:rPr sz="800">
-                <a:hlinkClick r:id="rId50"/>
-              </a:rPr>
-              <a:t>Lofar 1</a:t>
-            </a:r>
-          </a:p>
-          <a:p>
-            <a:r>
-              <a:rPr sz="800">
-                <a:hlinkClick r:id="rId51"/>
-              </a:rPr>
-              <a:t>Lofar 2</a:t>
-            </a:r>
-          </a:p>
-          <a:p>
-            <a:r>
-              <a:rPr sz="800">
-                <a:hlinkClick r:id="rId52"/>
-              </a:rPr>
-              <a:t>Lofar 3</a:t>
-            </a:r>
-          </a:p>
-          <a:p>
-            <a:r>
-              <a:rPr sz="800">
-                <a:hlinkClick r:id="rId53"/>
-              </a:rPr>
-              <a:t>Lofar 4</a:t>
-            </a:r>
-          </a:p>
-        </p:txBody>
-      </p:sp>
-      <p:sp>
-        <p:nvSpPr>
-          <p:cNvPr id="31" name="Rounded Rectangle 30"/>
-          <p:cNvSpPr/>
-          <p:nvPr>
-            <a:hlinkClick r:id="rId54"/>
-          </p:nvPr>
-        </p:nvSpPr>
-        <p:spPr>
-          <a:xfrm>
-            <a:off x="9531705" y="4632960"/>
-            <a:ext cx="2200046" cy="365760"/>
-          </a:xfrm>
-          <a:prstGeom prst="roundRect">
-            <a:avLst/>
-          </a:prstGeom>
-          <a:solidFill>
-            <a:srgbClr val="E8EEF7"/>
-          </a:solidFill>
-          <a:ln>
-            <a:solidFill>
-              <a:srgbClr val="1F3A5F"/>
-            </a:solidFill>
-          </a:ln>
-        </p:spPr>
-        <p:style>
-          <a:lnRef idx="1">
-            <a:schemeClr val="accent1"/>
-          </a:lnRef>
-          <a:fillRef idx="3">
-            <a:schemeClr val="accent1"/>
-          </a:fillRef>
-          <a:effectRef idx="2">
-            <a:schemeClr val="accent1"/>
-          </a:effectRef>
-          <a:fontRef idx="minor">
-            <a:schemeClr val="lt1"/>
-          </a:fontRef>
-        </p:style>
-        <p:txBody>
-          <a:bodyPr rtlCol="0" anchor="ctr" lIns="45720" rIns="45720"/>
-          <a:lstStyle/>
-          <a:p>
-            <a:pPr algn="ctr"/>
-            <a:r>
-              <a:rPr sz="900">
-                <a:solidFill>
-                  <a:srgbClr val="1F3A5F"/>
-                </a:solidFill>
-              </a:rPr>
-              <a:t>Gram 37: FR Intrepid-class, Category 2, Tatooine</a:t>
-            </a:r>
-          </a:p>
-        </p:txBody>
-      </p:sp>
-      <p:sp>
-        <p:nvSpPr>
-          <p:cNvPr id="32" name="TextBox 31"/>
-          <p:cNvSpPr txBox="1"/>
-          <p:nvPr/>
-        </p:nvSpPr>
-        <p:spPr>
-          <a:xfrm>
-            <a:off x="9531705" y="5017008"/>
-            <a:ext cx="2200046" cy="1447800"/>
-          </a:xfrm>
-          <a:prstGeom prst="rect">
-            <a:avLst/>
-          </a:prstGeom>
-          <a:noFill/>
-        </p:spPr>
-        <p:txBody>
-          <a:bodyPr wrap="square">
-            <a:spAutoFit/>
-          </a:bodyPr>
-          <a:lstStyle/>
-          <a:p>
-            <a:r>
-              <a:rPr sz="800">
-                <a:hlinkClick r:id="rId55"/>
-              </a:rPr>
-              <a:t>Lofar 1</a:t>
-            </a:r>
-          </a:p>
-          <a:p>
-            <a:r>
-              <a:rPr sz="800">
-                <a:hlinkClick r:id="rId56"/>
-              </a:rPr>
-              <a:t>Lofar 2</a:t>
-            </a:r>
-          </a:p>
-          <a:p>
-            <a:r>
-              <a:rPr sz="800">
-                <a:hlinkClick r:id="rId57"/>
-              </a:rPr>
-              <a:t>Lofar 3</a:t>
-            </a:r>
-          </a:p>
-        </p:txBody>
-      </p:sp>
-    </p:spTree>
-  </p:cSld>
-  <p:clrMapOvr>
-    <a:masterClrMapping/>
-  </p:clrMapOvr>
-</p:sld>
-</file>
-
-<file path=ppt/slides/slide4.xml><?xml version="1.0" encoding="utf-8"?>
-<p:sld xmlns:a="http://schemas.openxmlformats.org/drawingml/2006/main" xmlns:p="http://schemas.openxmlformats.org/presentationml/2006/main" xmlns:r="http://schemas.openxmlformats.org/officeDocument/2006/relationships">
-  <p:cSld>
-    <p:spTree>
-      <p:nvGrpSpPr>
-        <p:cNvPr id="1" name=""/>
-        <p:cNvGrpSpPr/>
-        <p:nvPr/>
-      </p:nvGrpSpPr>
-      <p:grpSpPr/>
-      <p:sp>
-        <p:nvSpPr>
-          <p:cNvPr id="2" name="Rectangle 1"/>
-          <p:cNvSpPr/>
-          <p:nvPr/>
-        </p:nvSpPr>
-        <p:spPr>
-          <a:xfrm>
-            <a:off x="0" y="0"/>
-            <a:ext cx="12188952" cy="548640"/>
-          </a:xfrm>
-          <a:prstGeom prst="rect">
-            <a:avLst/>
-          </a:prstGeom>
-          <a:solidFill>
-            <a:srgbClr val="1F3A5F"/>
-          </a:solidFill>
-          <a:ln>
-            <a:noFill/>
-          </a:ln>
-        </p:spPr>
-        <p:style>
-          <a:lnRef idx="1">
-            <a:schemeClr val="accent1"/>
-          </a:lnRef>
-          <a:fillRef idx="3">
-            <a:schemeClr val="accent1"/>
-          </a:fillRef>
-          <a:effectRef idx="2">
-            <a:schemeClr val="accent1"/>
-          </a:effectRef>
-          <a:fontRef idx="minor">
-            <a:schemeClr val="lt1"/>
-          </a:fontRef>
-        </p:style>
-        <p:txBody>
-          <a:bodyPr rtlCol="0" anchor="ctr" lIns="182880" rIns="182880"/>
-          <a:lstStyle/>
-          <a:p>
-            <a:pPr algn="ctr"/>
-            <a:r>
-              <a:rPr sz="2000" b="1">
-                <a:solidFill>
-                  <a:srgbClr val="FFFFFF"/>
-                </a:solidFill>
-              </a:rPr>
-              <a:t>Instructor Week 3 Grams — Page 3 of 3</a:t>
-            </a:r>
-          </a:p>
-        </p:txBody>
-      </p:sp>
-      <p:sp>
-        <p:nvSpPr>
-          <p:cNvPr id="3" name="Rounded Rectangle 2"/>
-          <p:cNvSpPr/>
-          <p:nvPr>
-            <a:hlinkClick r:id="rId2"/>
-          </p:nvPr>
-        </p:nvSpPr>
-        <p:spPr>
-          <a:xfrm>
-            <a:off x="365760" y="731520"/>
-            <a:ext cx="2200046" cy="365760"/>
-          </a:xfrm>
-          <a:prstGeom prst="roundRect">
-            <a:avLst/>
-          </a:prstGeom>
-          <a:solidFill>
-            <a:srgbClr val="E8EEF7"/>
-          </a:solidFill>
-          <a:ln>
-            <a:solidFill>
-              <a:srgbClr val="1F3A5F"/>
-            </a:solidFill>
-          </a:ln>
-        </p:spPr>
-        <p:style>
-          <a:lnRef idx="1">
-            <a:schemeClr val="accent1"/>
-          </a:lnRef>
-          <a:fillRef idx="3">
-            <a:schemeClr val="accent1"/>
-          </a:fillRef>
-          <a:effectRef idx="2">
-            <a:schemeClr val="accent1"/>
-          </a:effectRef>
-          <a:fontRef idx="minor">
-            <a:schemeClr val="lt1"/>
-          </a:fontRef>
-        </p:style>
-        <p:txBody>
-          <a:bodyPr rtlCol="0" anchor="ctr" lIns="45720" rIns="45720"/>
-          <a:lstStyle/>
-          <a:p>
-            <a:pPr algn="ctr"/>
-            <a:r>
-              <a:rPr sz="900">
-                <a:solidFill>
-                  <a:srgbClr val="1F3A5F"/>
-                </a:solidFill>
-              </a:rPr>
-              <a:t>Gram 38: FR Reliant, Category 3, Caprica</a:t>
-            </a:r>
-          </a:p>
-        </p:txBody>
-      </p:sp>
-      <p:sp>
-        <p:nvSpPr>
-          <p:cNvPr id="4" name="TextBox 3"/>
-          <p:cNvSpPr txBox="1"/>
-          <p:nvPr/>
-        </p:nvSpPr>
-        <p:spPr>
-          <a:xfrm>
-            <a:off x="365760" y="1115568"/>
-            <a:ext cx="2200046" cy="1447800"/>
-          </a:xfrm>
-          <a:prstGeom prst="rect">
-            <a:avLst/>
-          </a:prstGeom>
-          <a:noFill/>
-        </p:spPr>
-        <p:txBody>
-          <a:bodyPr wrap="square">
-            <a:spAutoFit/>
-          </a:bodyPr>
-          <a:lstStyle/>
-          <a:p>
-            <a:r>
-              <a:rPr sz="800">
-                <a:hlinkClick r:id="rId3"/>
-              </a:rPr>
-              <a:t>Lofar 1</a:t>
-            </a:r>
-          </a:p>
-          <a:p>
-            <a:r>
-              <a:rPr sz="800">
-                <a:hlinkClick r:id="rId4"/>
-              </a:rPr>
-              <a:t>Lofar 2</a:t>
-            </a:r>
-          </a:p>
-        </p:txBody>
-      </p:sp>
-      <p:sp>
-        <p:nvSpPr>
-          <p:cNvPr id="5" name="Rounded Rectangle 4"/>
-          <p:cNvSpPr/>
-          <p:nvPr>
-            <a:hlinkClick r:id="rId5"/>
-          </p:nvPr>
-        </p:nvSpPr>
-        <p:spPr>
-          <a:xfrm>
-            <a:off x="2657246" y="731520"/>
-            <a:ext cx="2200046" cy="365760"/>
-          </a:xfrm>
-          <a:prstGeom prst="roundRect">
-            <a:avLst/>
-          </a:prstGeom>
-          <a:solidFill>
-            <a:srgbClr val="E8EEF7"/>
-          </a:solidFill>
-          <a:ln>
-            <a:solidFill>
-              <a:srgbClr val="1F3A5F"/>
-            </a:solidFill>
-          </a:ln>
-        </p:spPr>
-        <p:style>
-          <a:lnRef idx="1">
-            <a:schemeClr val="accent1"/>
-          </a:lnRef>
-          <a:fillRef idx="3">
-            <a:schemeClr val="accent1"/>
-          </a:fillRef>
-          <a:effectRef idx="2">
-            <a:schemeClr val="accent1"/>
-          </a:effectRef>
-          <a:fontRef idx="minor">
-            <a:schemeClr val="lt1"/>
-          </a:fontRef>
-        </p:style>
-        <p:txBody>
-          <a:bodyPr rtlCol="0" anchor="ctr" lIns="45720" rIns="45720"/>
-          <a:lstStyle/>
-          <a:p>
-            <a:pPr algn="ctr"/>
-            <a:r>
-              <a:rPr sz="900">
-                <a:solidFill>
-                  <a:srgbClr val="1F3A5F"/>
-                </a:solidFill>
-              </a:rPr>
-              <a:t>Gram 39: FR Stargazer, Category 1, Betazed</a:t>
-            </a:r>
-          </a:p>
-        </p:txBody>
-      </p:sp>
-      <p:sp>
-        <p:nvSpPr>
-          <p:cNvPr id="6" name="TextBox 5"/>
-          <p:cNvSpPr txBox="1"/>
-          <p:nvPr/>
-        </p:nvSpPr>
-        <p:spPr>
-          <a:xfrm>
-            <a:off x="2657246" y="1115568"/>
-            <a:ext cx="2200046" cy="1447800"/>
-          </a:xfrm>
-          <a:prstGeom prst="rect">
-            <a:avLst/>
-          </a:prstGeom>
-          <a:noFill/>
-        </p:spPr>
-        <p:txBody>
-          <a:bodyPr wrap="square">
-            <a:spAutoFit/>
-          </a:bodyPr>
-          <a:lstStyle/>
-          <a:p>
-            <a:r>
-              <a:rPr sz="800">
-                <a:hlinkClick r:id="rId6"/>
-              </a:rPr>
-              <a:t>Lofar 1</a:t>
-            </a:r>
-          </a:p>
-          <a:p>
-            <a:r>
-              <a:rPr sz="800">
-                <a:hlinkClick r:id="rId7"/>
-              </a:rPr>
-              <a:t>Lofar 2</a:t>
-            </a:r>
-          </a:p>
-          <a:p>
-            <a:r>
-              <a:rPr sz="800">
-                <a:hlinkClick r:id="rId8"/>
-              </a:rPr>
-              <a:t>Lofar 3</a:t>
-            </a:r>
-          </a:p>
-          <a:p>
-            <a:r>
-              <a:rPr sz="800">
-                <a:hlinkClick r:id="rId9"/>
-              </a:rPr>
-              <a:t>Lofar 4</a:t>
-            </a:r>
-          </a:p>
-        </p:txBody>
-      </p:sp>
-      <p:sp>
-        <p:nvSpPr>
-          <p:cNvPr id="7" name="Rounded Rectangle 6"/>
-          <p:cNvSpPr/>
-          <p:nvPr>
-            <a:hlinkClick r:id="rId10"/>
-          </p:nvPr>
-        </p:nvSpPr>
-        <p:spPr>
-          <a:xfrm>
-            <a:off x="4948732" y="731520"/>
-            <a:ext cx="2200046" cy="365760"/>
-          </a:xfrm>
-          <a:prstGeom prst="roundRect">
-            <a:avLst/>
-          </a:prstGeom>
-          <a:solidFill>
-            <a:srgbClr val="E8EEF7"/>
-          </a:solidFill>
-          <a:ln>
-            <a:solidFill>
-              <a:srgbClr val="1F3A5F"/>
-            </a:solidFill>
-          </a:ln>
-        </p:spPr>
-        <p:style>
-          <a:lnRef idx="1">
-            <a:schemeClr val="accent1"/>
-          </a:lnRef>
-          <a:fillRef idx="3">
-            <a:schemeClr val="accent1"/>
-          </a:fillRef>
-          <a:effectRef idx="2">
-            <a:schemeClr val="accent1"/>
-          </a:effectRef>
-          <a:fontRef idx="minor">
-            <a:schemeClr val="lt1"/>
-          </a:fontRef>
-        </p:style>
-        <p:txBody>
-          <a:bodyPr rtlCol="0" anchor="ctr" lIns="45720" rIns="45720"/>
-          <a:lstStyle/>
-          <a:p>
-            <a:pPr algn="ctr"/>
-            <a:r>
-              <a:rPr sz="900">
-                <a:solidFill>
-                  <a:srgbClr val="1F3A5F"/>
-                </a:solidFill>
-              </a:rPr>
-              <a:t>Gram 40: FR Defiant-class, Category 2, Endor</a:t>
-            </a:r>
-          </a:p>
-        </p:txBody>
-      </p:sp>
-      <p:sp>
-        <p:nvSpPr>
-          <p:cNvPr id="8" name="TextBox 7"/>
-          <p:cNvSpPr txBox="1"/>
-          <p:nvPr/>
-        </p:nvSpPr>
-        <p:spPr>
-          <a:xfrm>
-            <a:off x="4948732" y="1115568"/>
-            <a:ext cx="2200046" cy="1447800"/>
-          </a:xfrm>
-          <a:prstGeom prst="rect">
-            <a:avLst/>
-          </a:prstGeom>
-          <a:noFill/>
-        </p:spPr>
-        <p:txBody>
-          <a:bodyPr wrap="square">
-            <a:spAutoFit/>
-          </a:bodyPr>
-          <a:lstStyle/>
-          <a:p>
-            <a:r>
-              <a:rPr sz="800">
-                <a:hlinkClick r:id="rId11"/>
-              </a:rPr>
-              <a:t>Lofar 1</a:t>
-            </a:r>
-          </a:p>
-          <a:p>
-            <a:r>
-              <a:rPr sz="800">
-                <a:hlinkClick r:id="rId12"/>
-              </a:rPr>
-              <a:t>Lofar 2</a:t>
-            </a:r>
-          </a:p>
-          <a:p>
-            <a:r>
-              <a:rPr sz="800">
-                <a:hlinkClick r:id="rId13"/>
-              </a:rPr>
-              <a:t>Lofar 3</a:t>
-            </a:r>
-          </a:p>
-          <a:p>
-            <a:r>
-              <a:rPr sz="800">
-                <a:hlinkClick r:id="rId14"/>
-              </a:rPr>
-              <a:t>Lofar 4</a:t>
-            </a:r>
-          </a:p>
-        </p:txBody>
-      </p:sp>
-      <p:sp>
-        <p:nvSpPr>
-          <p:cNvPr id="9" name="Rounded Rectangle 8"/>
-          <p:cNvSpPr/>
-          <p:nvPr>
-            <a:hlinkClick r:id="rId15"/>
-          </p:nvPr>
-        </p:nvSpPr>
-        <p:spPr>
-          <a:xfrm>
-            <a:off x="7240219" y="731520"/>
-            <a:ext cx="2200046" cy="365760"/>
-          </a:xfrm>
-          <a:prstGeom prst="roundRect">
-            <a:avLst/>
-          </a:prstGeom>
-          <a:solidFill>
-            <a:srgbClr val="E8EEF7"/>
-          </a:solidFill>
-          <a:ln>
-            <a:solidFill>
-              <a:srgbClr val="1F3A5F"/>
-            </a:solidFill>
-          </a:ln>
-        </p:spPr>
-        <p:style>
-          <a:lnRef idx="1">
-            <a:schemeClr val="accent1"/>
-          </a:lnRef>
-          <a:fillRef idx="3">
-            <a:schemeClr val="accent1"/>
-          </a:fillRef>
-          <a:effectRef idx="2">
-            <a:schemeClr val="accent1"/>
-          </a:effectRef>
-          <a:fontRef idx="minor">
-            <a:schemeClr val="lt1"/>
-          </a:fontRef>
-        </p:style>
-        <p:txBody>
-          <a:bodyPr rtlCol="0" anchor="ctr" lIns="45720" rIns="45720"/>
-          <a:lstStyle/>
-          <a:p>
-            <a:pPr algn="ctr"/>
-            <a:r>
-              <a:rPr sz="900">
-                <a:solidFill>
-                  <a:srgbClr val="1F3A5F"/>
-                </a:solidFill>
-              </a:rPr>
-              <a:t>Gram 41: FR Tantive IV, Category 3, Betazed</a:t>
-            </a:r>
-          </a:p>
-        </p:txBody>
-      </p:sp>
-      <p:sp>
-        <p:nvSpPr>
-          <p:cNvPr id="10" name="TextBox 9"/>
-          <p:cNvSpPr txBox="1"/>
-          <p:nvPr/>
-        </p:nvSpPr>
-        <p:spPr>
-          <a:xfrm>
-            <a:off x="7240219" y="1115568"/>
-            <a:ext cx="2200046" cy="1447800"/>
-          </a:xfrm>
-          <a:prstGeom prst="rect">
-            <a:avLst/>
-          </a:prstGeom>
-          <a:noFill/>
-        </p:spPr>
-        <p:txBody>
-          <a:bodyPr wrap="square">
-            <a:spAutoFit/>
-          </a:bodyPr>
-          <a:lstStyle/>
-          <a:p>
-            <a:r>
-              <a:rPr sz="800">
-                <a:hlinkClick r:id="rId16"/>
-              </a:rPr>
-              <a:t>Lofar 1</a:t>
-            </a:r>
-          </a:p>
-          <a:p>
-            <a:r>
-              <a:rPr sz="800">
-                <a:hlinkClick r:id="rId17"/>
-              </a:rPr>
-              <a:t>Lofar 2</a:t>
-            </a:r>
-          </a:p>
-          <a:p>
-            <a:r>
-              <a:rPr sz="800">
-                <a:hlinkClick r:id="rId18"/>
-              </a:rPr>
-              <a:t>Lofar 3</a:t>
-            </a:r>
-          </a:p>
-        </p:txBody>
-      </p:sp>
-      <p:sp>
-        <p:nvSpPr>
-          <p:cNvPr id="11" name="Rounded Rectangle 10"/>
-          <p:cNvSpPr/>
-          <p:nvPr>
-            <a:hlinkClick r:id="rId19"/>
-          </p:nvPr>
-        </p:nvSpPr>
-        <p:spPr>
-          <a:xfrm>
-            <a:off x="9531705" y="731520"/>
-            <a:ext cx="2200046" cy="365760"/>
-          </a:xfrm>
-          <a:prstGeom prst="roundRect">
-            <a:avLst/>
-          </a:prstGeom>
-          <a:solidFill>
-            <a:srgbClr val="E8EEF7"/>
-          </a:solidFill>
-          <a:ln>
-            <a:solidFill>
-              <a:srgbClr val="1F3A5F"/>
-            </a:solidFill>
-          </a:ln>
-        </p:spPr>
-        <p:style>
-          <a:lnRef idx="1">
-            <a:schemeClr val="accent1"/>
-          </a:lnRef>
-          <a:fillRef idx="3">
-            <a:schemeClr val="accent1"/>
-          </a:fillRef>
-          <a:effectRef idx="2">
-            <a:schemeClr val="accent1"/>
-          </a:effectRef>
-          <a:fontRef idx="minor">
-            <a:schemeClr val="lt1"/>
-          </a:fontRef>
-        </p:style>
-        <p:txBody>
-          <a:bodyPr rtlCol="0" anchor="ctr" lIns="45720" rIns="45720"/>
-          <a:lstStyle/>
-          <a:p>
-            <a:pPr algn="ctr"/>
-            <a:r>
-              <a:rPr sz="900">
-                <a:solidFill>
-                  <a:srgbClr val="1F3A5F"/>
-                </a:solidFill>
-              </a:rPr>
-              <a:t>Gram 42: FR TIE Bomber, Category 3, Mustafar</a:t>
-            </a:r>
-          </a:p>
-        </p:txBody>
-      </p:sp>
-      <p:sp>
-        <p:nvSpPr>
-          <p:cNvPr id="12" name="TextBox 11"/>
-          <p:cNvSpPr txBox="1"/>
-          <p:nvPr/>
-        </p:nvSpPr>
-        <p:spPr>
-          <a:xfrm>
-            <a:off x="9531705" y="1115568"/>
-            <a:ext cx="2200046" cy="1447800"/>
-          </a:xfrm>
-          <a:prstGeom prst="rect">
-            <a:avLst/>
-          </a:prstGeom>
-          <a:noFill/>
-        </p:spPr>
-        <p:txBody>
-          <a:bodyPr wrap="square">
-            <a:spAutoFit/>
-          </a:bodyPr>
-          <a:lstStyle/>
-          <a:p>
-            <a:r>
-              <a:rPr sz="800">
-                <a:hlinkClick r:id="rId20"/>
-              </a:rPr>
-              <a:t>Lofar 1</a:t>
-            </a:r>
-          </a:p>
-        </p:txBody>
-      </p:sp>
-    </p:spTree>
-  </p:cSld>
-  <p:clrMapOvr>
-    <a:masterClrMapping/>
-  </p:clrMapOvr>
-</p:sld>
-</file>
-
-<file path=ppt/slides/slide5.xml><?xml version="1.0" encoding="utf-8"?>
-<p:sld xmlns:a="http://schemas.openxmlformats.org/drawingml/2006/main" xmlns:p="http://schemas.openxmlformats.org/presentationml/2006/main" xmlns:r="http://schemas.openxmlformats.org/officeDocument/2006/relationships">
-  <p:cSld>
-    <p:spTree>
-      <p:nvGrpSpPr>
-        <p:cNvPr id="1" name=""/>
-        <p:cNvGrpSpPr/>
-        <p:nvPr/>
-      </p:nvGrpSpPr>
-      <p:grpSpPr/>
-      <p:sp>
-        <p:nvSpPr>
-          <p:cNvPr id="2" name="TextBox 1"/>
-          <p:cNvSpPr txBox="1"/>
-          <p:nvPr/>
-        </p:nvSpPr>
-        <p:spPr>
-          <a:xfrm>
-            <a:off x="914400" y="2377440"/>
-            <a:ext cx="10360152" cy="1280160"/>
-          </a:xfrm>
-          <a:prstGeom prst="rect">
-            <a:avLst/>
-          </a:prstGeom>
-          <a:noFill/>
-        </p:spPr>
-        <p:txBody>
-          <a:bodyPr wrap="square">
-            <a:spAutoFit/>
-          </a:bodyPr>
-          <a:lstStyle/>
-          <a:p>
-            <a:pPr algn="ctr"/>
-            <a:r>
-              <a:rPr sz="4000" b="1">
-                <a:solidFill>
-                  <a:srgbClr val="1F3A5F"/>
-                </a:solidFill>
-              </a:rPr>
-              <a:t>End of Instructor Week 3 Grams</a:t>
-            </a:r>
-          </a:p>
-        </p:txBody>
-      </p:sp>
-      <p:sp>
-        <p:nvSpPr>
-          <p:cNvPr id="3" name="TextBox 2"/>
-          <p:cNvSpPr txBox="1"/>
-          <p:nvPr/>
-        </p:nvSpPr>
-        <p:spPr>
-          <a:xfrm>
-            <a:off x="914400" y="3840480"/>
-            <a:ext cx="10360152" cy="731520"/>
-          </a:xfrm>
-          <a:prstGeom prst="rect">
-            <a:avLst/>
-          </a:prstGeom>
-          <a:noFill/>
-        </p:spPr>
-        <p:txBody>
-          <a:bodyPr wrap="none">
-            <a:spAutoFit/>
-          </a:bodyPr>
-          <a:lstStyle/>
-          <a:p>
-            <a:pPr algn="ctr"/>
-            <a:r>
-              <a:rPr sz="2400">
-                <a:solidFill>
-                  <a:srgbClr val="1F3A5F"/>
-                </a:solidFill>
-              </a:rPr>
-              <a:t>Instructor Version</a:t>
             </a:r>
           </a:p>
         </p:txBody>

--- a/source/Instructor Week 3 Grams/Instructor Week 3 Grams.pptx
+++ b/source/Instructor Week 3 Grams/Instructor Week 3 Grams.pptx
@@ -8,6 +8,8 @@
     <p:sldId id="256" r:id="rId7"/>
     <p:sldId id="257" r:id="rId8"/>
     <p:sldId id="258" r:id="rId9"/>
+    <p:sldId id="259" r:id="rId10"/>
+    <p:sldId id="260" r:id="rId11"/>
   </p:sldIdLst>
   <p:sldSz cx="12188952" cy="6858000" type="screen4x3"/>
   <p:notesSz cx="6858000" cy="9144000"/>
@@ -3092,120 +3094,48 @@
       <p:grpSpPr/>
       <p:sp>
         <p:nvSpPr>
-          <p:cNvPr id="2" name="Rectangle 1"/>
-          <p:cNvSpPr/>
-          <p:nvPr/>
-        </p:nvSpPr>
-        <p:spPr>
-          <a:xfrm>
-            <a:off x="0" y="0"/>
-            <a:ext cx="12188952" cy="548640"/>
+          <p:cNvPr id="2" name="TextBox 1"/>
+          <p:cNvSpPr txBox="1"/>
+          <p:nvPr/>
+        </p:nvSpPr>
+        <p:spPr>
+          <a:xfrm>
+            <a:off x="914400" y="2377440"/>
+            <a:ext cx="10360152" cy="1280160"/>
           </a:xfrm>
           <a:prstGeom prst="rect">
             <a:avLst/>
           </a:prstGeom>
-          <a:solidFill>
-            <a:srgbClr val="1F3A5F"/>
-          </a:solidFill>
-          <a:ln>
-            <a:noFill/>
-          </a:ln>
-        </p:spPr>
-        <p:style>
-          <a:lnRef idx="1">
-            <a:schemeClr val="accent1"/>
-          </a:lnRef>
-          <a:fillRef idx="3">
-            <a:schemeClr val="accent1"/>
-          </a:fillRef>
-          <a:effectRef idx="2">
-            <a:schemeClr val="accent1"/>
-          </a:effectRef>
-          <a:fontRef idx="minor">
-            <a:schemeClr val="lt1"/>
-          </a:fontRef>
-        </p:style>
-        <p:txBody>
-          <a:bodyPr rtlCol="0" anchor="ctr" lIns="182880" rIns="182880"/>
+          <a:noFill/>
+        </p:spPr>
+        <p:txBody>
+          <a:bodyPr wrap="square">
+            <a:spAutoFit/>
+          </a:bodyPr>
           <a:lstStyle/>
           <a:p>
             <a:pPr algn="ctr"/>
             <a:r>
-              <a:rPr sz="2000" b="1">
-                <a:solidFill>
-                  <a:srgbClr val="FFFFFF"/>
-                </a:solidFill>
-              </a:rPr>
-              <a:t>Instructor Week 3 Grams — Page 1 of 3</a:t>
-            </a:r>
-          </a:p>
-        </p:txBody>
-      </p:sp>
-      <p:sp>
-        <p:nvSpPr>
-          <p:cNvPr id="3" name="Rounded Rectangle 2">
-            <a:hlinkClick r:id="rId2"/>
-          </p:cNvPr>
-          <p:cNvSpPr/>
-          <p:nvPr/>
-        </p:nvSpPr>
-        <p:spPr>
-          <a:xfrm>
-            <a:off x="365760" y="731520"/>
-            <a:ext cx="2200046" cy="365760"/>
-          </a:xfrm>
-          <a:prstGeom prst="roundRect">
-            <a:avLst/>
-          </a:prstGeom>
-          <a:solidFill>
-            <a:srgbClr val="E8EEF7"/>
-          </a:solidFill>
-          <a:ln>
-            <a:solidFill>
-              <a:srgbClr val="1F3A5F"/>
-            </a:solidFill>
-          </a:ln>
-        </p:spPr>
-        <p:style>
-          <a:lnRef idx="1">
-            <a:schemeClr val="accent1"/>
-          </a:lnRef>
-          <a:fillRef idx="3">
-            <a:schemeClr val="accent1"/>
-          </a:fillRef>
-          <a:effectRef idx="2">
-            <a:schemeClr val="accent1"/>
-          </a:effectRef>
-          <a:fontRef idx="minor">
-            <a:schemeClr val="lt1"/>
-          </a:fontRef>
-        </p:style>
-        <p:txBody>
-          <a:bodyPr rtlCol="0" anchor="ctr" lIns="45720" rIns="45720"/>
-          <a:lstStyle/>
-          <a:p>
-            <a:pPr algn="ctr"/>
-            <a:r>
-              <a:rPr sz="900">
+              <a:rPr sz="4000" b="1">
                 <a:solidFill>
                   <a:srgbClr val="1F3A5F"/>
                 </a:solidFill>
               </a:rPr>
-              <a:t>Gram 1: Intrepid-class contact bearing 127, codename Defiant</a:t>
-            </a:r>
-          </a:p>
-        </p:txBody>
-      </p:sp>
-      <p:sp>
-        <p:nvSpPr>
-          <p:cNvPr id="4" name="TextBox 3"/>
+              <a:t>Welcome to Instructor Week 3 Grams</a:t>
+            </a:r>
+          </a:p>
+        </p:txBody>
+      </p:sp>
+      <p:sp>
+        <p:nvSpPr>
+          <p:cNvPr id="3" name="TextBox 2"/>
           <p:cNvSpPr txBox="1"/>
           <p:nvPr/>
         </p:nvSpPr>
         <p:spPr>
           <a:xfrm>
-            <a:off x="365760" y="1115568"/>
-            <a:ext cx="2200046" cy="1447800"/>
+            <a:off x="914400" y="3840480"/>
+            <a:ext cx="10360152" cy="731520"/>
           </a:xfrm>
           <a:prstGeom prst="rect">
             <a:avLst/>
@@ -3213,1452 +3143,19 @@
           <a:noFill/>
         </p:spPr>
         <p:txBody>
-          <a:bodyPr wrap="square">
+          <a:bodyPr wrap="none">
             <a:spAutoFit/>
           </a:bodyPr>
           <a:lstStyle/>
           <a:p>
-            <a:r>
-              <a:rPr sz="800">
-                <a:hlinkClick r:id="rId3"/>
-              </a:rPr>
-              <a:t>Lofar 1</a:t>
-            </a:r>
-          </a:p>
-          <a:p>
-            <a:r>
-              <a:rPr sz="800">
-                <a:hlinkClick r:id="rId4"/>
-              </a:rPr>
-              <a:t>Lofar 2</a:t>
-            </a:r>
-          </a:p>
-          <a:p>
-            <a:r>
-              <a:rPr sz="800">
-                <a:hlinkClick r:id="rId5"/>
-              </a:rPr>
-              <a:t>Lofar 3</a:t>
-            </a:r>
-          </a:p>
-        </p:txBody>
-      </p:sp>
-      <p:sp>
-        <p:nvSpPr>
-          <p:cNvPr id="5" name="Rounded Rectangle 4">
-            <a:hlinkClick r:id="rId6"/>
-          </p:cNvPr>
-          <p:cNvSpPr/>
-          <p:nvPr/>
-        </p:nvSpPr>
-        <p:spPr>
-          <a:xfrm>
-            <a:off x="2657246" y="731520"/>
-            <a:ext cx="2200046" cy="365760"/>
-          </a:xfrm>
-          <a:prstGeom prst="roundRect">
-            <a:avLst/>
-          </a:prstGeom>
-          <a:solidFill>
-            <a:srgbClr val="E8EEF7"/>
-          </a:solidFill>
-          <a:ln>
-            <a:solidFill>
-              <a:srgbClr val="1F3A5F"/>
-            </a:solidFill>
-          </a:ln>
-        </p:spPr>
-        <p:style>
-          <a:lnRef idx="1">
-            <a:schemeClr val="accent1"/>
-          </a:lnRef>
-          <a:fillRef idx="3">
-            <a:schemeClr val="accent1"/>
-          </a:fillRef>
-          <a:effectRef idx="2">
-            <a:schemeClr val="accent1"/>
-          </a:effectRef>
-          <a:fontRef idx="minor">
-            <a:schemeClr val="lt1"/>
-          </a:fontRef>
-        </p:style>
-        <p:txBody>
-          <a:bodyPr rtlCol="0" anchor="ctr" lIns="45720" rIns="45720"/>
-          <a:lstStyle/>
-          <a:p>
             <a:pPr algn="ctr"/>
             <a:r>
-              <a:rPr sz="900">
+              <a:rPr sz="2400">
                 <a:solidFill>
                   <a:srgbClr val="1F3A5F"/>
                 </a:solidFill>
               </a:rPr>
-              <a:t>Gram 2: FR Miranda-class, Category 3, Tatooine</a:t>
-            </a:r>
-          </a:p>
-        </p:txBody>
-      </p:sp>
-      <p:sp>
-        <p:nvSpPr>
-          <p:cNvPr id="6" name="TextBox 5"/>
-          <p:cNvSpPr txBox="1"/>
-          <p:nvPr/>
-        </p:nvSpPr>
-        <p:spPr>
-          <a:xfrm>
-            <a:off x="2657246" y="1115568"/>
-            <a:ext cx="2200046" cy="1447800"/>
-          </a:xfrm>
-          <a:prstGeom prst="rect">
-            <a:avLst/>
-          </a:prstGeom>
-          <a:noFill/>
-        </p:spPr>
-        <p:txBody>
-          <a:bodyPr wrap="square">
-            <a:spAutoFit/>
-          </a:bodyPr>
-          <a:lstStyle/>
-          <a:p>
-            <a:r>
-              <a:rPr sz="800">
-                <a:hlinkClick r:id="rId7"/>
-              </a:rPr>
-              <a:t>Lofar 1</a:t>
-            </a:r>
-          </a:p>
-          <a:p>
-            <a:r>
-              <a:rPr sz="800">
-                <a:hlinkClick r:id="rId8"/>
-              </a:rPr>
-              <a:t>Lofar 2</a:t>
-            </a:r>
-          </a:p>
-        </p:txBody>
-      </p:sp>
-      <p:sp>
-        <p:nvSpPr>
-          <p:cNvPr id="7" name="Rounded Rectangle 6">
-            <a:hlinkClick r:id="rId9"/>
-          </p:cNvPr>
-          <p:cNvSpPr/>
-          <p:nvPr/>
-        </p:nvSpPr>
-        <p:spPr>
-          <a:xfrm>
-            <a:off x="4948732" y="731520"/>
-            <a:ext cx="2200046" cy="365760"/>
-          </a:xfrm>
-          <a:prstGeom prst="roundRect">
-            <a:avLst/>
-          </a:prstGeom>
-          <a:solidFill>
-            <a:srgbClr val="E8EEF7"/>
-          </a:solidFill>
-          <a:ln>
-            <a:solidFill>
-              <a:srgbClr val="1F3A5F"/>
-            </a:solidFill>
-          </a:ln>
-        </p:spPr>
-        <p:style>
-          <a:lnRef idx="1">
-            <a:schemeClr val="accent1"/>
-          </a:lnRef>
-          <a:fillRef idx="3">
-            <a:schemeClr val="accent1"/>
-          </a:fillRef>
-          <a:effectRef idx="2">
-            <a:schemeClr val="accent1"/>
-          </a:effectRef>
-          <a:fontRef idx="minor">
-            <a:schemeClr val="lt1"/>
-          </a:fontRef>
-        </p:style>
-        <p:txBody>
-          <a:bodyPr rtlCol="0" anchor="ctr" lIns="45720" rIns="45720"/>
-          <a:lstStyle/>
-          <a:p>
-            <a:pPr algn="ctr"/>
-            <a:r>
-              <a:rPr sz="900">
-                <a:solidFill>
-                  <a:srgbClr val="1F3A5F"/>
-                </a:solidFill>
-              </a:rPr>
-              <a:t>Gram 3: FR Outrider, Category 2, Cardassia</a:t>
-            </a:r>
-          </a:p>
-        </p:txBody>
-      </p:sp>
-      <p:sp>
-        <p:nvSpPr>
-          <p:cNvPr id="8" name="TextBox 7"/>
-          <p:cNvSpPr txBox="1"/>
-          <p:nvPr/>
-        </p:nvSpPr>
-        <p:spPr>
-          <a:xfrm>
-            <a:off x="4948732" y="1115568"/>
-            <a:ext cx="2200046" cy="1447800"/>
-          </a:xfrm>
-          <a:prstGeom prst="rect">
-            <a:avLst/>
-          </a:prstGeom>
-          <a:noFill/>
-        </p:spPr>
-        <p:txBody>
-          <a:bodyPr wrap="square">
-            <a:spAutoFit/>
-          </a:bodyPr>
-          <a:lstStyle/>
-          <a:p>
-            <a:r>
-              <a:rPr sz="800">
-                <a:hlinkClick r:id="rId10"/>
-              </a:rPr>
-              <a:t>Lofar 1</a:t>
-            </a:r>
-          </a:p>
-          <a:p>
-            <a:r>
-              <a:rPr sz="800">
-                <a:hlinkClick r:id="rId11"/>
-              </a:rPr>
-              <a:t>Lofar 2</a:t>
-            </a:r>
-          </a:p>
-          <a:p>
-            <a:r>
-              <a:rPr sz="800">
-                <a:hlinkClick r:id="rId12"/>
-              </a:rPr>
-              <a:t>Lofar 3</a:t>
-            </a:r>
-          </a:p>
-        </p:txBody>
-      </p:sp>
-      <p:sp>
-        <p:nvSpPr>
-          <p:cNvPr id="9" name="Rounded Rectangle 8">
-            <a:hlinkClick r:id="rId13"/>
-          </p:cNvPr>
-          <p:cNvSpPr/>
-          <p:nvPr/>
-        </p:nvSpPr>
-        <p:spPr>
-          <a:xfrm>
-            <a:off x="7240219" y="731520"/>
-            <a:ext cx="2200046" cy="365760"/>
-          </a:xfrm>
-          <a:prstGeom prst="roundRect">
-            <a:avLst/>
-          </a:prstGeom>
-          <a:solidFill>
-            <a:srgbClr val="E8EEF7"/>
-          </a:solidFill>
-          <a:ln>
-            <a:solidFill>
-              <a:srgbClr val="1F3A5F"/>
-            </a:solidFill>
-          </a:ln>
-        </p:spPr>
-        <p:style>
-          <a:lnRef idx="1">
-            <a:schemeClr val="accent1"/>
-          </a:lnRef>
-          <a:fillRef idx="3">
-            <a:schemeClr val="accent1"/>
-          </a:fillRef>
-          <a:effectRef idx="2">
-            <a:schemeClr val="accent1"/>
-          </a:effectRef>
-          <a:fontRef idx="minor">
-            <a:schemeClr val="lt1"/>
-          </a:fontRef>
-        </p:style>
-        <p:txBody>
-          <a:bodyPr rtlCol="0" anchor="ctr" lIns="45720" rIns="45720"/>
-          <a:lstStyle/>
-          <a:p>
-            <a:pPr algn="ctr"/>
-            <a:r>
-              <a:rPr sz="900">
-                <a:solidFill>
-                  <a:srgbClr val="1F3A5F"/>
-                </a:solidFill>
-              </a:rPr>
-              <a:t>Gram 4: FR Defiant, Category 4, Defiant</a:t>
-            </a:r>
-          </a:p>
-        </p:txBody>
-      </p:sp>
-      <p:sp>
-        <p:nvSpPr>
-          <p:cNvPr id="10" name="TextBox 9"/>
-          <p:cNvSpPr txBox="1"/>
-          <p:nvPr/>
-        </p:nvSpPr>
-        <p:spPr>
-          <a:xfrm>
-            <a:off x="7240219" y="1115568"/>
-            <a:ext cx="2200046" cy="1447800"/>
-          </a:xfrm>
-          <a:prstGeom prst="rect">
-            <a:avLst/>
-          </a:prstGeom>
-          <a:noFill/>
-        </p:spPr>
-        <p:txBody>
-          <a:bodyPr wrap="square">
-            <a:spAutoFit/>
-          </a:bodyPr>
-          <a:lstStyle/>
-          <a:p>
-            <a:r>
-              <a:rPr sz="800">
-                <a:hlinkClick r:id="rId14"/>
-              </a:rPr>
-              <a:t>Lofar 1</a:t>
-            </a:r>
-          </a:p>
-          <a:p>
-            <a:r>
-              <a:rPr sz="800">
-                <a:hlinkClick r:id="rId15"/>
-              </a:rPr>
-              <a:t>Lofar 2</a:t>
-            </a:r>
-          </a:p>
-          <a:p>
-            <a:r>
-              <a:rPr sz="800">
-                <a:hlinkClick r:id="rId16"/>
-              </a:rPr>
-              <a:t>Lofar 3</a:t>
-            </a:r>
-          </a:p>
-          <a:p>
-            <a:r>
-              <a:rPr sz="800">
-                <a:hlinkClick r:id="rId17"/>
-              </a:rPr>
-              <a:t>Lofar 4</a:t>
-            </a:r>
-          </a:p>
-        </p:txBody>
-      </p:sp>
-      <p:sp>
-        <p:nvSpPr>
-          <p:cNvPr id="11" name="Rounded Rectangle 10">
-            <a:hlinkClick r:id="rId18"/>
-          </p:cNvPr>
-          <p:cNvSpPr/>
-          <p:nvPr/>
-        </p:nvSpPr>
-        <p:spPr>
-          <a:xfrm>
-            <a:off x="9531705" y="731520"/>
-            <a:ext cx="2200046" cy="365760"/>
-          </a:xfrm>
-          <a:prstGeom prst="roundRect">
-            <a:avLst/>
-          </a:prstGeom>
-          <a:solidFill>
-            <a:srgbClr val="E8EEF7"/>
-          </a:solidFill>
-          <a:ln>
-            <a:solidFill>
-              <a:srgbClr val="1F3A5F"/>
-            </a:solidFill>
-          </a:ln>
-        </p:spPr>
-        <p:style>
-          <a:lnRef idx="1">
-            <a:schemeClr val="accent1"/>
-          </a:lnRef>
-          <a:fillRef idx="3">
-            <a:schemeClr val="accent1"/>
-          </a:fillRef>
-          <a:effectRef idx="2">
-            <a:schemeClr val="accent1"/>
-          </a:effectRef>
-          <a:fontRef idx="minor">
-            <a:schemeClr val="lt1"/>
-          </a:fontRef>
-        </p:style>
-        <p:txBody>
-          <a:bodyPr rtlCol="0" anchor="ctr" lIns="45720" rIns="45720"/>
-          <a:lstStyle/>
-          <a:p>
-            <a:pPr algn="ctr"/>
-            <a:r>
-              <a:rPr sz="900">
-                <a:solidFill>
-                  <a:srgbClr val="1F3A5F"/>
-                </a:solidFill>
-              </a:rPr>
-              <a:t>Gram 5: FR Nebulon-B, Category 4, Tatooine</a:t>
-            </a:r>
-          </a:p>
-        </p:txBody>
-      </p:sp>
-      <p:sp>
-        <p:nvSpPr>
-          <p:cNvPr id="12" name="TextBox 11"/>
-          <p:cNvSpPr txBox="1"/>
-          <p:nvPr/>
-        </p:nvSpPr>
-        <p:spPr>
-          <a:xfrm>
-            <a:off x="9531705" y="1115568"/>
-            <a:ext cx="2200046" cy="1447800"/>
-          </a:xfrm>
-          <a:prstGeom prst="rect">
-            <a:avLst/>
-          </a:prstGeom>
-          <a:noFill/>
-        </p:spPr>
-        <p:txBody>
-          <a:bodyPr wrap="square">
-            <a:spAutoFit/>
-          </a:bodyPr>
-          <a:lstStyle/>
-          <a:p>
-            <a:r>
-              <a:rPr sz="800">
-                <a:hlinkClick r:id="rId19"/>
-              </a:rPr>
-              <a:t>Lofar 1</a:t>
-            </a:r>
-          </a:p>
-          <a:p>
-            <a:r>
-              <a:rPr sz="800">
-                <a:hlinkClick r:id="rId20"/>
-              </a:rPr>
-              <a:t>Lofar 2</a:t>
-            </a:r>
-          </a:p>
-          <a:p>
-            <a:r>
-              <a:rPr sz="800">
-                <a:hlinkClick r:id="rId21"/>
-              </a:rPr>
-              <a:t>Lofar 3</a:t>
-            </a:r>
-          </a:p>
-          <a:p>
-            <a:r>
-              <a:rPr sz="800">
-                <a:hlinkClick r:id="rId22"/>
-              </a:rPr>
-              <a:t>Lofar 4</a:t>
-            </a:r>
-          </a:p>
-        </p:txBody>
-      </p:sp>
-      <p:sp>
-        <p:nvSpPr>
-          <p:cNvPr id="13" name="Rounded Rectangle 12">
-            <a:hlinkClick r:id="rId23"/>
-          </p:cNvPr>
-          <p:cNvSpPr/>
-          <p:nvPr/>
-        </p:nvSpPr>
-        <p:spPr>
-          <a:xfrm>
-            <a:off x="365760" y="2682240"/>
-            <a:ext cx="2200046" cy="365760"/>
-          </a:xfrm>
-          <a:prstGeom prst="roundRect">
-            <a:avLst/>
-          </a:prstGeom>
-          <a:solidFill>
-            <a:srgbClr val="E8EEF7"/>
-          </a:solidFill>
-          <a:ln>
-            <a:solidFill>
-              <a:srgbClr val="1F3A5F"/>
-            </a:solidFill>
-          </a:ln>
-        </p:spPr>
-        <p:style>
-          <a:lnRef idx="1">
-            <a:schemeClr val="accent1"/>
-          </a:lnRef>
-          <a:fillRef idx="3">
-            <a:schemeClr val="accent1"/>
-          </a:fillRef>
-          <a:effectRef idx="2">
-            <a:schemeClr val="accent1"/>
-          </a:effectRef>
-          <a:fontRef idx="minor">
-            <a:schemeClr val="lt1"/>
-          </a:fontRef>
-        </p:style>
-        <p:txBody>
-          <a:bodyPr rtlCol="0" anchor="ctr" lIns="45720" rIns="45720"/>
-          <a:lstStyle/>
-          <a:p>
-            <a:pPr algn="ctr"/>
-            <a:r>
-              <a:rPr sz="900">
-                <a:solidFill>
-                  <a:srgbClr val="1F3A5F"/>
-                </a:solidFill>
-              </a:rPr>
-              <a:t>Gram 6: FR Devastator, Category 3, Trill</a:t>
-            </a:r>
-          </a:p>
-        </p:txBody>
-      </p:sp>
-      <p:sp>
-        <p:nvSpPr>
-          <p:cNvPr id="14" name="TextBox 13"/>
-          <p:cNvSpPr txBox="1"/>
-          <p:nvPr/>
-        </p:nvSpPr>
-        <p:spPr>
-          <a:xfrm>
-            <a:off x="365760" y="3066288"/>
-            <a:ext cx="2200046" cy="1447800"/>
-          </a:xfrm>
-          <a:prstGeom prst="rect">
-            <a:avLst/>
-          </a:prstGeom>
-          <a:noFill/>
-        </p:spPr>
-        <p:txBody>
-          <a:bodyPr wrap="square">
-            <a:spAutoFit/>
-          </a:bodyPr>
-          <a:lstStyle/>
-          <a:p>
-            <a:r>
-              <a:rPr sz="800">
-                <a:hlinkClick r:id="rId24"/>
-              </a:rPr>
-              <a:t>Lofar 1</a:t>
-            </a:r>
-          </a:p>
-        </p:txBody>
-      </p:sp>
-      <p:sp>
-        <p:nvSpPr>
-          <p:cNvPr id="15" name="Rounded Rectangle 14">
-            <a:hlinkClick r:id="rId25"/>
-          </p:cNvPr>
-          <p:cNvSpPr/>
-          <p:nvPr/>
-        </p:nvSpPr>
-        <p:spPr>
-          <a:xfrm>
-            <a:off x="2657246" y="2682240"/>
-            <a:ext cx="2200046" cy="365760"/>
-          </a:xfrm>
-          <a:prstGeom prst="roundRect">
-            <a:avLst/>
-          </a:prstGeom>
-          <a:solidFill>
-            <a:srgbClr val="E8EEF7"/>
-          </a:solidFill>
-          <a:ln>
-            <a:solidFill>
-              <a:srgbClr val="1F3A5F"/>
-            </a:solidFill>
-          </a:ln>
-        </p:spPr>
-        <p:style>
-          <a:lnRef idx="1">
-            <a:schemeClr val="accent1"/>
-          </a:lnRef>
-          <a:fillRef idx="3">
-            <a:schemeClr val="accent1"/>
-          </a:fillRef>
-          <a:effectRef idx="2">
-            <a:schemeClr val="accent1"/>
-          </a:effectRef>
-          <a:fontRef idx="minor">
-            <a:schemeClr val="lt1"/>
-          </a:fontRef>
-        </p:style>
-        <p:txBody>
-          <a:bodyPr rtlCol="0" anchor="ctr" lIns="45720" rIns="45720"/>
-          <a:lstStyle/>
-          <a:p>
-            <a:pPr algn="ctr"/>
-            <a:r>
-              <a:rPr sz="900">
-                <a:solidFill>
-                  <a:srgbClr val="1F3A5F"/>
-                </a:solidFill>
-              </a:rPr>
-              <a:t>Gram 9: Discovery contact bearing 231, codename Gandalf</a:t>
-            </a:r>
-          </a:p>
-        </p:txBody>
-      </p:sp>
-      <p:sp>
-        <p:nvSpPr>
-          <p:cNvPr id="16" name="TextBox 15"/>
-          <p:cNvSpPr txBox="1"/>
-          <p:nvPr/>
-        </p:nvSpPr>
-        <p:spPr>
-          <a:xfrm>
-            <a:off x="2657246" y="3066288"/>
-            <a:ext cx="2200046" cy="1447800"/>
-          </a:xfrm>
-          <a:prstGeom prst="rect">
-            <a:avLst/>
-          </a:prstGeom>
-          <a:noFill/>
-        </p:spPr>
-        <p:txBody>
-          <a:bodyPr wrap="square">
-            <a:spAutoFit/>
-          </a:bodyPr>
-          <a:lstStyle/>
-          <a:p>
-            <a:r>
-              <a:rPr sz="800">
-                <a:hlinkClick r:id="rId26"/>
-              </a:rPr>
-              <a:t>Lofar 1</a:t>
-            </a:r>
-          </a:p>
-          <a:p>
-            <a:r>
-              <a:rPr sz="800">
-                <a:hlinkClick r:id="rId27"/>
-              </a:rPr>
-              <a:t>Lofar 2</a:t>
-            </a:r>
-          </a:p>
-        </p:txBody>
-      </p:sp>
-      <p:sp>
-        <p:nvSpPr>
-          <p:cNvPr id="17" name="Rounded Rectangle 16">
-            <a:hlinkClick r:id="rId28"/>
-          </p:cNvPr>
-          <p:cNvSpPr/>
-          <p:nvPr/>
-        </p:nvSpPr>
-        <p:spPr>
-          <a:xfrm>
-            <a:off x="4948732" y="2682240"/>
-            <a:ext cx="2200046" cy="365760"/>
-          </a:xfrm>
-          <a:prstGeom prst="roundRect">
-            <a:avLst/>
-          </a:prstGeom>
-          <a:solidFill>
-            <a:srgbClr val="E8EEF7"/>
-          </a:solidFill>
-          <a:ln>
-            <a:solidFill>
-              <a:srgbClr val="1F3A5F"/>
-            </a:solidFill>
-          </a:ln>
-        </p:spPr>
-        <p:style>
-          <a:lnRef idx="1">
-            <a:schemeClr val="accent1"/>
-          </a:lnRef>
-          <a:fillRef idx="3">
-            <a:schemeClr val="accent1"/>
-          </a:fillRef>
-          <a:effectRef idx="2">
-            <a:schemeClr val="accent1"/>
-          </a:effectRef>
-          <a:fontRef idx="minor">
-            <a:schemeClr val="lt1"/>
-          </a:fontRef>
-        </p:style>
-        <p:txBody>
-          <a:bodyPr rtlCol="0" anchor="ctr" lIns="45720" rIns="45720"/>
-          <a:lstStyle/>
-          <a:p>
-            <a:pPr algn="ctr"/>
-            <a:r>
-              <a:rPr sz="900">
-                <a:solidFill>
-                  <a:srgbClr val="1F3A5F"/>
-                </a:solidFill>
-              </a:rPr>
-              <a:t>Gram 11: FR Devastator, Category 3, Tantive</a:t>
-            </a:r>
-          </a:p>
-        </p:txBody>
-      </p:sp>
-      <p:sp>
-        <p:nvSpPr>
-          <p:cNvPr id="18" name="TextBox 17"/>
-          <p:cNvSpPr txBox="1"/>
-          <p:nvPr/>
-        </p:nvSpPr>
-        <p:spPr>
-          <a:xfrm>
-            <a:off x="4948732" y="3066288"/>
-            <a:ext cx="2200046" cy="1447800"/>
-          </a:xfrm>
-          <a:prstGeom prst="rect">
-            <a:avLst/>
-          </a:prstGeom>
-          <a:noFill/>
-        </p:spPr>
-        <p:txBody>
-          <a:bodyPr wrap="square">
-            <a:spAutoFit/>
-          </a:bodyPr>
-          <a:lstStyle/>
-          <a:p>
-            <a:r>
-              <a:rPr sz="800">
-                <a:hlinkClick r:id="rId29"/>
-              </a:rPr>
-              <a:t>Lofar 1</a:t>
-            </a:r>
-          </a:p>
-          <a:p>
-            <a:r>
-              <a:rPr sz="800">
-                <a:hlinkClick r:id="rId30"/>
-              </a:rPr>
-              <a:t>Lofar 2</a:t>
-            </a:r>
-          </a:p>
-        </p:txBody>
-      </p:sp>
-      <p:sp>
-        <p:nvSpPr>
-          <p:cNvPr id="19" name="Rounded Rectangle 18">
-            <a:hlinkClick r:id="rId31"/>
-          </p:cNvPr>
-          <p:cNvSpPr/>
-          <p:nvPr/>
-        </p:nvSpPr>
-        <p:spPr>
-          <a:xfrm>
-            <a:off x="7240219" y="2682240"/>
-            <a:ext cx="2200046" cy="365760"/>
-          </a:xfrm>
-          <a:prstGeom prst="roundRect">
-            <a:avLst/>
-          </a:prstGeom>
-          <a:solidFill>
-            <a:srgbClr val="E8EEF7"/>
-          </a:solidFill>
-          <a:ln>
-            <a:solidFill>
-              <a:srgbClr val="1F3A5F"/>
-            </a:solidFill>
-          </a:ln>
-        </p:spPr>
-        <p:style>
-          <a:lnRef idx="1">
-            <a:schemeClr val="accent1"/>
-          </a:lnRef>
-          <a:fillRef idx="3">
-            <a:schemeClr val="accent1"/>
-          </a:fillRef>
-          <a:effectRef idx="2">
-            <a:schemeClr val="accent1"/>
-          </a:effectRef>
-          <a:fontRef idx="minor">
-            <a:schemeClr val="lt1"/>
-          </a:fontRef>
-        </p:style>
-        <p:txBody>
-          <a:bodyPr rtlCol="0" anchor="ctr" lIns="45720" rIns="45720"/>
-          <a:lstStyle/>
-          <a:p>
-            <a:pPr algn="ctr"/>
-            <a:r>
-              <a:rPr sz="900">
-                <a:solidFill>
-                  <a:srgbClr val="1F3A5F"/>
-                </a:solidFill>
-              </a:rPr>
-              <a:t>Gram 12: FR Star Destroyer, Category 3, Tantive</a:t>
-            </a:r>
-          </a:p>
-        </p:txBody>
-      </p:sp>
-      <p:sp>
-        <p:nvSpPr>
-          <p:cNvPr id="20" name="TextBox 19"/>
-          <p:cNvSpPr txBox="1"/>
-          <p:nvPr/>
-        </p:nvSpPr>
-        <p:spPr>
-          <a:xfrm>
-            <a:off x="7240219" y="3066288"/>
-            <a:ext cx="2200046" cy="1447800"/>
-          </a:xfrm>
-          <a:prstGeom prst="rect">
-            <a:avLst/>
-          </a:prstGeom>
-          <a:noFill/>
-        </p:spPr>
-        <p:txBody>
-          <a:bodyPr wrap="square">
-            <a:spAutoFit/>
-          </a:bodyPr>
-          <a:lstStyle/>
-          <a:p>
-            <a:r>
-              <a:rPr sz="800">
-                <a:hlinkClick r:id="rId32"/>
-              </a:rPr>
-              <a:t>Lofar 1</a:t>
-            </a:r>
-          </a:p>
-          <a:p>
-            <a:r>
-              <a:rPr sz="800">
-                <a:hlinkClick r:id="rId33"/>
-              </a:rPr>
-              <a:t>Lofar 2</a:t>
-            </a:r>
-          </a:p>
-          <a:p>
-            <a:r>
-              <a:rPr sz="800">
-                <a:hlinkClick r:id="rId34"/>
-              </a:rPr>
-              <a:t>Lofar 3</a:t>
-            </a:r>
-          </a:p>
-        </p:txBody>
-      </p:sp>
-      <p:sp>
-        <p:nvSpPr>
-          <p:cNvPr id="21" name="Rounded Rectangle 20">
-            <a:hlinkClick r:id="rId35"/>
-          </p:cNvPr>
-          <p:cNvSpPr/>
-          <p:nvPr/>
-        </p:nvSpPr>
-        <p:spPr>
-          <a:xfrm>
-            <a:off x="9531705" y="2682240"/>
-            <a:ext cx="2200046" cy="365760"/>
-          </a:xfrm>
-          <a:prstGeom prst="roundRect">
-            <a:avLst/>
-          </a:prstGeom>
-          <a:solidFill>
-            <a:srgbClr val="E8EEF7"/>
-          </a:solidFill>
-          <a:ln>
-            <a:solidFill>
-              <a:srgbClr val="1F3A5F"/>
-            </a:solidFill>
-          </a:ln>
-        </p:spPr>
-        <p:style>
-          <a:lnRef idx="1">
-            <a:schemeClr val="accent1"/>
-          </a:lnRef>
-          <a:fillRef idx="3">
-            <a:schemeClr val="accent1"/>
-          </a:fillRef>
-          <a:effectRef idx="2">
-            <a:schemeClr val="accent1"/>
-          </a:effectRef>
-          <a:fontRef idx="minor">
-            <a:schemeClr val="lt1"/>
-          </a:fontRef>
-        </p:style>
-        <p:txBody>
-          <a:bodyPr rtlCol="0" anchor="ctr" lIns="45720" rIns="45720"/>
-          <a:lstStyle/>
-          <a:p>
-            <a:pPr algn="ctr"/>
-            <a:r>
-              <a:rPr sz="900">
-                <a:solidFill>
-                  <a:srgbClr val="1F3A5F"/>
-                </a:solidFill>
-              </a:rPr>
-              <a:t>Gram 13: FR Imperial-class, Category 1, Yavin</a:t>
-            </a:r>
-          </a:p>
-        </p:txBody>
-      </p:sp>
-      <p:sp>
-        <p:nvSpPr>
-          <p:cNvPr id="22" name="TextBox 21"/>
-          <p:cNvSpPr txBox="1"/>
-          <p:nvPr/>
-        </p:nvSpPr>
-        <p:spPr>
-          <a:xfrm>
-            <a:off x="9531705" y="3066288"/>
-            <a:ext cx="2200046" cy="1447800"/>
-          </a:xfrm>
-          <a:prstGeom prst="rect">
-            <a:avLst/>
-          </a:prstGeom>
-          <a:noFill/>
-        </p:spPr>
-        <p:txBody>
-          <a:bodyPr wrap="square">
-            <a:spAutoFit/>
-          </a:bodyPr>
-          <a:lstStyle/>
-          <a:p>
-            <a:r>
-              <a:rPr sz="800">
-                <a:hlinkClick r:id="rId36"/>
-              </a:rPr>
-              <a:t>Lofar 1</a:t>
-            </a:r>
-          </a:p>
-          <a:p>
-            <a:r>
-              <a:rPr sz="800">
-                <a:hlinkClick r:id="rId37"/>
-              </a:rPr>
-              <a:t>Lofar 2</a:t>
-            </a:r>
-          </a:p>
-          <a:p>
-            <a:r>
-              <a:rPr sz="800">
-                <a:hlinkClick r:id="rId38"/>
-              </a:rPr>
-              <a:t>Lofar 3</a:t>
-            </a:r>
-          </a:p>
-          <a:p>
-            <a:r>
-              <a:rPr sz="800">
-                <a:hlinkClick r:id="rId39"/>
-              </a:rPr>
-              <a:t>Lofar 4</a:t>
-            </a:r>
-          </a:p>
-        </p:txBody>
-      </p:sp>
-      <p:sp>
-        <p:nvSpPr>
-          <p:cNvPr id="23" name="Rounded Rectangle 22">
-            <a:hlinkClick r:id="rId40"/>
-          </p:cNvPr>
-          <p:cNvSpPr/>
-          <p:nvPr/>
-        </p:nvSpPr>
-        <p:spPr>
-          <a:xfrm>
-            <a:off x="365760" y="4632960"/>
-            <a:ext cx="2200046" cy="365760"/>
-          </a:xfrm>
-          <a:prstGeom prst="roundRect">
-            <a:avLst/>
-          </a:prstGeom>
-          <a:solidFill>
-            <a:srgbClr val="E8EEF7"/>
-          </a:solidFill>
-          <a:ln>
-            <a:solidFill>
-              <a:srgbClr val="1F3A5F"/>
-            </a:solidFill>
-          </a:ln>
-        </p:spPr>
-        <p:style>
-          <a:lnRef idx="1">
-            <a:schemeClr val="accent1"/>
-          </a:lnRef>
-          <a:fillRef idx="3">
-            <a:schemeClr val="accent1"/>
-          </a:fillRef>
-          <a:effectRef idx="2">
-            <a:schemeClr val="accent1"/>
-          </a:effectRef>
-          <a:fontRef idx="minor">
-            <a:schemeClr val="lt1"/>
-          </a:fontRef>
-        </p:style>
-        <p:txBody>
-          <a:bodyPr rtlCol="0" anchor="ctr" lIns="45720" rIns="45720"/>
-          <a:lstStyle/>
-          <a:p>
-            <a:pPr algn="ctr"/>
-            <a:r>
-              <a:rPr sz="900">
-                <a:solidFill>
-                  <a:srgbClr val="1F3A5F"/>
-                </a:solidFill>
-              </a:rPr>
-              <a:t>Gram 15: FR Mon Calamari Cruiser, Category 2, Bajor</a:t>
-            </a:r>
-          </a:p>
-        </p:txBody>
-      </p:sp>
-      <p:sp>
-        <p:nvSpPr>
-          <p:cNvPr id="24" name="TextBox 23"/>
-          <p:cNvSpPr txBox="1"/>
-          <p:nvPr/>
-        </p:nvSpPr>
-        <p:spPr>
-          <a:xfrm>
-            <a:off x="365760" y="5017008"/>
-            <a:ext cx="2200046" cy="1447800"/>
-          </a:xfrm>
-          <a:prstGeom prst="rect">
-            <a:avLst/>
-          </a:prstGeom>
-          <a:noFill/>
-        </p:spPr>
-        <p:txBody>
-          <a:bodyPr wrap="square">
-            <a:spAutoFit/>
-          </a:bodyPr>
-          <a:lstStyle/>
-          <a:p>
-            <a:r>
-              <a:rPr sz="800">
-                <a:hlinkClick r:id="rId41"/>
-              </a:rPr>
-              <a:t>Lofar 1</a:t>
-            </a:r>
-          </a:p>
-          <a:p>
-            <a:r>
-              <a:rPr sz="800">
-                <a:hlinkClick r:id="rId42"/>
-              </a:rPr>
-              <a:t>Lofar 2</a:t>
-            </a:r>
-          </a:p>
-          <a:p>
-            <a:r>
-              <a:rPr sz="800">
-                <a:hlinkClick r:id="rId43"/>
-              </a:rPr>
-              <a:t>Lofar 3</a:t>
-            </a:r>
-          </a:p>
-          <a:p>
-            <a:r>
-              <a:rPr sz="800">
-                <a:hlinkClick r:id="rId44"/>
-              </a:rPr>
-              <a:t>Lofar 4</a:t>
-            </a:r>
-          </a:p>
-        </p:txBody>
-      </p:sp>
-      <p:sp>
-        <p:nvSpPr>
-          <p:cNvPr id="25" name="Rounded Rectangle 24">
-            <a:hlinkClick r:id="rId45"/>
-          </p:cNvPr>
-          <p:cNvSpPr/>
-          <p:nvPr/>
-        </p:nvSpPr>
-        <p:spPr>
-          <a:xfrm>
-            <a:off x="2657246" y="4632960"/>
-            <a:ext cx="2200046" cy="365760"/>
-          </a:xfrm>
-          <a:prstGeom prst="roundRect">
-            <a:avLst/>
-          </a:prstGeom>
-          <a:solidFill>
-            <a:srgbClr val="E8EEF7"/>
-          </a:solidFill>
-          <a:ln>
-            <a:solidFill>
-              <a:srgbClr val="1F3A5F"/>
-            </a:solidFill>
-          </a:ln>
-        </p:spPr>
-        <p:style>
-          <a:lnRef idx="1">
-            <a:schemeClr val="accent1"/>
-          </a:lnRef>
-          <a:fillRef idx="3">
-            <a:schemeClr val="accent1"/>
-          </a:fillRef>
-          <a:effectRef idx="2">
-            <a:schemeClr val="accent1"/>
-          </a:effectRef>
-          <a:fontRef idx="minor">
-            <a:schemeClr val="lt1"/>
-          </a:fontRef>
-        </p:style>
-        <p:txBody>
-          <a:bodyPr rtlCol="0" anchor="ctr" lIns="45720" rIns="45720"/>
-          <a:lstStyle/>
-          <a:p>
-            <a:pPr algn="ctr"/>
-            <a:r>
-              <a:rPr sz="900">
-                <a:solidFill>
-                  <a:srgbClr val="1F3A5F"/>
-                </a:solidFill>
-              </a:rPr>
-              <a:t>Gram 17: FR Razor Crest, Category 1, Mustafar</a:t>
-            </a:r>
-          </a:p>
-        </p:txBody>
-      </p:sp>
-      <p:sp>
-        <p:nvSpPr>
-          <p:cNvPr id="26" name="TextBox 25"/>
-          <p:cNvSpPr txBox="1"/>
-          <p:nvPr/>
-        </p:nvSpPr>
-        <p:spPr>
-          <a:xfrm>
-            <a:off x="2657246" y="5017008"/>
-            <a:ext cx="2200046" cy="1447800"/>
-          </a:xfrm>
-          <a:prstGeom prst="rect">
-            <a:avLst/>
-          </a:prstGeom>
-          <a:noFill/>
-        </p:spPr>
-        <p:txBody>
-          <a:bodyPr wrap="square">
-            <a:spAutoFit/>
-          </a:bodyPr>
-          <a:lstStyle/>
-          <a:p>
-            <a:r>
-              <a:rPr sz="800">
-                <a:hlinkClick r:id="rId46"/>
-              </a:rPr>
-              <a:t>Lofar 1</a:t>
-            </a:r>
-          </a:p>
-          <a:p>
-            <a:r>
-              <a:rPr sz="800">
-                <a:hlinkClick r:id="rId47"/>
-              </a:rPr>
-              <a:t>Lofar 2</a:t>
-            </a:r>
-          </a:p>
-          <a:p>
-            <a:r>
-              <a:rPr sz="800">
-                <a:hlinkClick r:id="rId48"/>
-              </a:rPr>
-              <a:t>Lofar 3</a:t>
-            </a:r>
-          </a:p>
-          <a:p>
-            <a:r>
-              <a:rPr sz="800">
-                <a:hlinkClick r:id="rId49"/>
-              </a:rPr>
-              <a:t>Lofar 4</a:t>
-            </a:r>
-          </a:p>
-        </p:txBody>
-      </p:sp>
-      <p:sp>
-        <p:nvSpPr>
-          <p:cNvPr id="27" name="Rounded Rectangle 26">
-            <a:hlinkClick r:id="rId50"/>
-          </p:cNvPr>
-          <p:cNvSpPr/>
-          <p:nvPr/>
-        </p:nvSpPr>
-        <p:spPr>
-          <a:xfrm>
-            <a:off x="4948732" y="4632960"/>
-            <a:ext cx="2200046" cy="365760"/>
-          </a:xfrm>
-          <a:prstGeom prst="roundRect">
-            <a:avLst/>
-          </a:prstGeom>
-          <a:solidFill>
-            <a:srgbClr val="E8EEF7"/>
-          </a:solidFill>
-          <a:ln>
-            <a:solidFill>
-              <a:srgbClr val="1F3A5F"/>
-            </a:solidFill>
-          </a:ln>
-        </p:spPr>
-        <p:style>
-          <a:lnRef idx="1">
-            <a:schemeClr val="accent1"/>
-          </a:lnRef>
-          <a:fillRef idx="3">
-            <a:schemeClr val="accent1"/>
-          </a:fillRef>
-          <a:effectRef idx="2">
-            <a:schemeClr val="accent1"/>
-          </a:effectRef>
-          <a:fontRef idx="minor">
-            <a:schemeClr val="lt1"/>
-          </a:fontRef>
-        </p:style>
-        <p:txBody>
-          <a:bodyPr rtlCol="0" anchor="ctr" lIns="45720" rIns="45720"/>
-          <a:lstStyle/>
-          <a:p>
-            <a:pPr algn="ctr"/>
-            <a:r>
-              <a:rPr sz="900">
-                <a:solidFill>
-                  <a:srgbClr val="1F3A5F"/>
-                </a:solidFill>
-              </a:rPr>
-              <a:t>Gram 18: FR X-wing, Category 3, Defiant</a:t>
-            </a:r>
-          </a:p>
-        </p:txBody>
-      </p:sp>
-      <p:sp>
-        <p:nvSpPr>
-          <p:cNvPr id="28" name="TextBox 27"/>
-          <p:cNvSpPr txBox="1"/>
-          <p:nvPr/>
-        </p:nvSpPr>
-        <p:spPr>
-          <a:xfrm>
-            <a:off x="4948732" y="5017008"/>
-            <a:ext cx="2200046" cy="1447800"/>
-          </a:xfrm>
-          <a:prstGeom prst="rect">
-            <a:avLst/>
-          </a:prstGeom>
-          <a:noFill/>
-        </p:spPr>
-        <p:txBody>
-          <a:bodyPr wrap="square">
-            <a:spAutoFit/>
-          </a:bodyPr>
-          <a:lstStyle/>
-          <a:p>
-            <a:r>
-              <a:rPr sz="800">
-                <a:hlinkClick r:id="rId51"/>
-              </a:rPr>
-              <a:t>Lofar 1</a:t>
-            </a:r>
-          </a:p>
-        </p:txBody>
-      </p:sp>
-      <p:sp>
-        <p:nvSpPr>
-          <p:cNvPr id="29" name="Rounded Rectangle 28">
-            <a:hlinkClick r:id="rId52"/>
-          </p:cNvPr>
-          <p:cNvSpPr/>
-          <p:nvPr/>
-        </p:nvSpPr>
-        <p:spPr>
-          <a:xfrm>
-            <a:off x="7240219" y="4632960"/>
-            <a:ext cx="2200046" cy="365760"/>
-          </a:xfrm>
-          <a:prstGeom prst="roundRect">
-            <a:avLst/>
-          </a:prstGeom>
-          <a:solidFill>
-            <a:srgbClr val="E8EEF7"/>
-          </a:solidFill>
-          <a:ln>
-            <a:solidFill>
-              <a:srgbClr val="1F3A5F"/>
-            </a:solidFill>
-          </a:ln>
-        </p:spPr>
-        <p:style>
-          <a:lnRef idx="1">
-            <a:schemeClr val="accent1"/>
-          </a:lnRef>
-          <a:fillRef idx="3">
-            <a:schemeClr val="accent1"/>
-          </a:fillRef>
-          <a:effectRef idx="2">
-            <a:schemeClr val="accent1"/>
-          </a:effectRef>
-          <a:fontRef idx="minor">
-            <a:schemeClr val="lt1"/>
-          </a:fontRef>
-        </p:style>
-        <p:txBody>
-          <a:bodyPr rtlCol="0" anchor="ctr" lIns="45720" rIns="45720"/>
-          <a:lstStyle/>
-          <a:p>
-            <a:pPr algn="ctr"/>
-            <a:r>
-              <a:rPr sz="900">
-                <a:solidFill>
-                  <a:srgbClr val="1F3A5F"/>
-                </a:solidFill>
-              </a:rPr>
-              <a:t>Gram 19: Devastator contact bearing 194, codename Trill</a:t>
-            </a:r>
-          </a:p>
-        </p:txBody>
-      </p:sp>
-      <p:sp>
-        <p:nvSpPr>
-          <p:cNvPr id="30" name="TextBox 29"/>
-          <p:cNvSpPr txBox="1"/>
-          <p:nvPr/>
-        </p:nvSpPr>
-        <p:spPr>
-          <a:xfrm>
-            <a:off x="7240219" y="5017008"/>
-            <a:ext cx="2200046" cy="1447800"/>
-          </a:xfrm>
-          <a:prstGeom prst="rect">
-            <a:avLst/>
-          </a:prstGeom>
-          <a:noFill/>
-        </p:spPr>
-        <p:txBody>
-          <a:bodyPr wrap="square">
-            <a:spAutoFit/>
-          </a:bodyPr>
-          <a:lstStyle/>
-          <a:p>
-            <a:r>
-              <a:rPr sz="800">
-                <a:hlinkClick r:id="rId53"/>
-              </a:rPr>
-              <a:t>Lofar 1</a:t>
-            </a:r>
-          </a:p>
-          <a:p>
-            <a:r>
-              <a:rPr sz="800">
-                <a:hlinkClick r:id="rId54"/>
-              </a:rPr>
-              <a:t>Lofar 2</a:t>
-            </a:r>
-          </a:p>
-          <a:p>
-            <a:r>
-              <a:rPr sz="800">
-                <a:hlinkClick r:id="rId55"/>
-              </a:rPr>
-              <a:t>Lofar 3</a:t>
-            </a:r>
-          </a:p>
-          <a:p>
-            <a:r>
-              <a:rPr sz="800">
-                <a:hlinkClick r:id="rId56"/>
-              </a:rPr>
-              <a:t>Lofar 4</a:t>
-            </a:r>
-          </a:p>
-        </p:txBody>
-      </p:sp>
-      <p:sp>
-        <p:nvSpPr>
-          <p:cNvPr id="31" name="Rounded Rectangle 30">
-            <a:hlinkClick r:id="rId57"/>
-          </p:cNvPr>
-          <p:cNvSpPr/>
-          <p:nvPr/>
-        </p:nvSpPr>
-        <p:spPr>
-          <a:xfrm>
-            <a:off x="9531705" y="4632960"/>
-            <a:ext cx="2200046" cy="365760"/>
-          </a:xfrm>
-          <a:prstGeom prst="roundRect">
-            <a:avLst/>
-          </a:prstGeom>
-          <a:solidFill>
-            <a:srgbClr val="E8EEF7"/>
-          </a:solidFill>
-          <a:ln>
-            <a:solidFill>
-              <a:srgbClr val="1F3A5F"/>
-            </a:solidFill>
-          </a:ln>
-        </p:spPr>
-        <p:style>
-          <a:lnRef idx="1">
-            <a:schemeClr val="accent1"/>
-          </a:lnRef>
-          <a:fillRef idx="3">
-            <a:schemeClr val="accent1"/>
-          </a:fillRef>
-          <a:effectRef idx="2">
-            <a:schemeClr val="accent1"/>
-          </a:effectRef>
-          <a:fontRef idx="minor">
-            <a:schemeClr val="lt1"/>
-          </a:fontRef>
-        </p:style>
-        <p:txBody>
-          <a:bodyPr rtlCol="0" anchor="ctr" lIns="45720" rIns="45720"/>
-          <a:lstStyle/>
-          <a:p>
-            <a:pPr algn="ctr"/>
-            <a:r>
-              <a:rPr sz="900">
-                <a:solidFill>
-                  <a:srgbClr val="1F3A5F"/>
-                </a:solidFill>
-              </a:rPr>
-              <a:t>Gram 20: FR TIE Fighter, Category 1, Coruscant</a:t>
-            </a:r>
-          </a:p>
-        </p:txBody>
-      </p:sp>
-      <p:sp>
-        <p:nvSpPr>
-          <p:cNvPr id="32" name="TextBox 31"/>
-          <p:cNvSpPr txBox="1"/>
-          <p:nvPr/>
-        </p:nvSpPr>
-        <p:spPr>
-          <a:xfrm>
-            <a:off x="9531705" y="5017008"/>
-            <a:ext cx="2200046" cy="1447800"/>
-          </a:xfrm>
-          <a:prstGeom prst="rect">
-            <a:avLst/>
-          </a:prstGeom>
-          <a:noFill/>
-        </p:spPr>
-        <p:txBody>
-          <a:bodyPr wrap="square">
-            <a:spAutoFit/>
-          </a:bodyPr>
-          <a:lstStyle/>
-          <a:p>
-            <a:r>
-              <a:rPr sz="800">
-                <a:hlinkClick r:id="rId58"/>
-              </a:rPr>
-              <a:t>Lofar 1</a:t>
-            </a:r>
-          </a:p>
-          <a:p>
-            <a:r>
-              <a:rPr sz="800">
-                <a:hlinkClick r:id="rId59"/>
-              </a:rPr>
-              <a:t>Lofar 2</a:t>
-            </a:r>
-          </a:p>
-          <a:p>
-            <a:r>
-              <a:rPr sz="800">
-                <a:hlinkClick r:id="rId60"/>
-              </a:rPr>
-              <a:t>Lofar 3</a:t>
+              <a:t>Instructor Version</a:t>
             </a:r>
           </a:p>
         </p:txBody>
@@ -4727,7 +3224,7 @@
                   <a:srgbClr val="FFFFFF"/>
                 </a:solidFill>
               </a:rPr>
-              <a:t>Instructor Week 3 Grams — Page 2 of 3</a:t>
+              <a:t>Instructor Week 3 Grams — Page 1 of 3</a:t>
             </a:r>
           </a:p>
         </p:txBody>
@@ -4782,7 +3279,7 @@
                   <a:srgbClr val="1F3A5F"/>
                 </a:solidFill>
               </a:rPr>
-              <a:t>Gram 21: FR Discovery, Category 4, Defiant</a:t>
+              <a:t>Gram 1: Intrepid-class contact bearing 127, codename Defiant</a:t>
             </a:r>
           </a:p>
         </p:txBody>
@@ -4832,20 +3329,12 @@
               <a:t>Lofar 3</a:t>
             </a:r>
           </a:p>
-          <a:p>
-            <a:r>
-              <a:rPr sz="800">
-                <a:hlinkClick r:id="rId6"/>
-              </a:rPr>
-              <a:t>Lofar 4</a:t>
-            </a:r>
-          </a:p>
         </p:txBody>
       </p:sp>
       <p:sp>
         <p:nvSpPr>
           <p:cNvPr id="5" name="Rounded Rectangle 4">
-            <a:hlinkClick r:id="rId7"/>
+            <a:hlinkClick r:id="rId6"/>
           </p:cNvPr>
           <p:cNvSpPr/>
           <p:nvPr/>
@@ -4892,7 +3381,7 @@
                   <a:srgbClr val="1F3A5F"/>
                 </a:solidFill>
               </a:rPr>
-              <a:t>Gram 22: Razor Crest contact bearing 239, codename Dank</a:t>
+              <a:t>Gram 2: FR Miranda-class, Category 3, Tatooine</a:t>
             </a:r>
           </a:p>
         </p:txBody>
@@ -4921,9 +3410,17 @@
           <a:p>
             <a:r>
               <a:rPr sz="800">
+                <a:hlinkClick r:id="rId7"/>
+              </a:rPr>
+              <a:t>Lofar 1</a:t>
+            </a:r>
+          </a:p>
+          <a:p>
+            <a:r>
+              <a:rPr sz="800">
                 <a:hlinkClick r:id="rId8"/>
               </a:rPr>
-              <a:t>Lofar 1</a:t>
+              <a:t>Lofar 2</a:t>
             </a:r>
           </a:p>
         </p:txBody>
@@ -4978,7 +3475,7 @@
                   <a:srgbClr val="1F3A5F"/>
                 </a:solidFill>
               </a:rPr>
-              <a:t>Gram 23: FR Devastator, Category 1, Risa</a:t>
+              <a:t>Gram 3: FR Outrider, Category 2, Cardassia</a:t>
             </a:r>
           </a:p>
         </p:txBody>
@@ -5012,12 +3509,28 @@
               <a:t>Lofar 1</a:t>
             </a:r>
           </a:p>
+          <a:p>
+            <a:r>
+              <a:rPr sz="800">
+                <a:hlinkClick r:id="rId11"/>
+              </a:rPr>
+              <a:t>Lofar 2</a:t>
+            </a:r>
+          </a:p>
+          <a:p>
+            <a:r>
+              <a:rPr sz="800">
+                <a:hlinkClick r:id="rId12"/>
+              </a:rPr>
+              <a:t>Lofar 3</a:t>
+            </a:r>
+          </a:p>
         </p:txBody>
       </p:sp>
       <p:sp>
         <p:nvSpPr>
           <p:cNvPr id="9" name="Rounded Rectangle 8">
-            <a:hlinkClick r:id="rId11"/>
+            <a:hlinkClick r:id="rId13"/>
           </p:cNvPr>
           <p:cNvSpPr/>
           <p:nvPr/>
@@ -5064,7 +3577,7 @@
                   <a:srgbClr val="1F3A5F"/>
                 </a:solidFill>
               </a:rPr>
-              <a:t>Gram 25: FR Imperial-class, Category 4, Coruscant</a:t>
+              <a:t>Gram 4: FR Defiant, Category 4, Defiant</a:t>
             </a:r>
           </a:p>
         </p:txBody>
@@ -5093,7 +3606,7 @@
           <a:p>
             <a:r>
               <a:rPr sz="800">
-                <a:hlinkClick r:id="rId12"/>
+                <a:hlinkClick r:id="rId14"/>
               </a:rPr>
               <a:t>Lofar 1</a:t>
             </a:r>
@@ -5101,7 +3614,7 @@
           <a:p>
             <a:r>
               <a:rPr sz="800">
-                <a:hlinkClick r:id="rId13"/>
+                <a:hlinkClick r:id="rId15"/>
               </a:rPr>
               <a:t>Lofar 2</a:t>
             </a:r>
@@ -5109,7 +3622,7 @@
           <a:p>
             <a:r>
               <a:rPr sz="800">
-                <a:hlinkClick r:id="rId14"/>
+                <a:hlinkClick r:id="rId16"/>
               </a:rPr>
               <a:t>Lofar 3</a:t>
             </a:r>
@@ -5117,7 +3630,7 @@
           <a:p>
             <a:r>
               <a:rPr sz="800">
-                <a:hlinkClick r:id="rId15"/>
+                <a:hlinkClick r:id="rId17"/>
               </a:rPr>
               <a:t>Lofar 4</a:t>
             </a:r>
@@ -5127,7 +3640,7 @@
       <p:sp>
         <p:nvSpPr>
           <p:cNvPr id="11" name="Rounded Rectangle 10">
-            <a:hlinkClick r:id="rId16"/>
+            <a:hlinkClick r:id="rId18"/>
           </p:cNvPr>
           <p:cNvSpPr/>
           <p:nvPr/>
@@ -5174,7 +3687,7 @@
                   <a:srgbClr val="1F3A5F"/>
                 </a:solidFill>
               </a:rPr>
-              <a:t>Gram 26: Enterprise contact bearing 229, codename Betazed</a:t>
+              <a:t>Gram 5: FR Nebulon-B, Category 4, Tatooine</a:t>
             </a:r>
           </a:p>
         </p:txBody>
@@ -5203,7 +3716,7 @@
           <a:p>
             <a:r>
               <a:rPr sz="800">
-                <a:hlinkClick r:id="rId17"/>
+                <a:hlinkClick r:id="rId19"/>
               </a:rPr>
               <a:t>Lofar 1</a:t>
             </a:r>
@@ -5211,7 +3724,7 @@
           <a:p>
             <a:r>
               <a:rPr sz="800">
-                <a:hlinkClick r:id="rId18"/>
+                <a:hlinkClick r:id="rId20"/>
               </a:rPr>
               <a:t>Lofar 2</a:t>
             </a:r>
@@ -5219,7 +3732,7 @@
           <a:p>
             <a:r>
               <a:rPr sz="800">
-                <a:hlinkClick r:id="rId19"/>
+                <a:hlinkClick r:id="rId21"/>
               </a:rPr>
               <a:t>Lofar 3</a:t>
             </a:r>
@@ -5227,7 +3740,7 @@
           <a:p>
             <a:r>
               <a:rPr sz="800">
-                <a:hlinkClick r:id="rId20"/>
+                <a:hlinkClick r:id="rId22"/>
               </a:rPr>
               <a:t>Lofar 4</a:t>
             </a:r>
@@ -5237,7 +3750,7 @@
       <p:sp>
         <p:nvSpPr>
           <p:cNvPr id="13" name="Rounded Rectangle 12">
-            <a:hlinkClick r:id="rId21"/>
+            <a:hlinkClick r:id="rId23"/>
           </p:cNvPr>
           <p:cNvSpPr/>
           <p:nvPr/>
@@ -5284,7 +3797,7 @@
                   <a:srgbClr val="1F3A5F"/>
                 </a:solidFill>
               </a:rPr>
-              <a:t>Gram 27: FR Prometheus, Category 1, Kobol</a:t>
+              <a:t>Gram 6: FR Devastator, Category 3, Trill</a:t>
             </a:r>
           </a:p>
         </p:txBody>
@@ -5313,25 +3826,17 @@
           <a:p>
             <a:r>
               <a:rPr sz="800">
-                <a:hlinkClick r:id="rId22"/>
+                <a:hlinkClick r:id="rId24"/>
               </a:rPr>
               <a:t>Lofar 1</a:t>
             </a:r>
           </a:p>
-          <a:p>
-            <a:r>
-              <a:rPr sz="800">
-                <a:hlinkClick r:id="rId23"/>
-              </a:rPr>
-              <a:t>Lofar 2</a:t>
-            </a:r>
-          </a:p>
         </p:txBody>
       </p:sp>
       <p:sp>
         <p:nvSpPr>
           <p:cNvPr id="15" name="Rounded Rectangle 14">
-            <a:hlinkClick r:id="rId24"/>
+            <a:hlinkClick r:id="rId25"/>
           </p:cNvPr>
           <p:cNvSpPr/>
           <p:nvPr/>
@@ -5378,7 +3883,7 @@
                   <a:srgbClr val="1F3A5F"/>
                 </a:solidFill>
               </a:rPr>
-              <a:t>Gram 29: FR X-wing, Category 1, Betazed</a:t>
+              <a:t>Gram 9: Discovery contact bearing 231, codename Gandalf</a:t>
             </a:r>
           </a:p>
         </p:txBody>
@@ -5407,7 +3912,7 @@
           <a:p>
             <a:r>
               <a:rPr sz="800">
-                <a:hlinkClick r:id="rId25"/>
+                <a:hlinkClick r:id="rId26"/>
               </a:rPr>
               <a:t>Lofar 1</a:t>
             </a:r>
@@ -5415,33 +3920,17 @@
           <a:p>
             <a:r>
               <a:rPr sz="800">
-                <a:hlinkClick r:id="rId26"/>
+                <a:hlinkClick r:id="rId27"/>
               </a:rPr>
               <a:t>Lofar 2</a:t>
             </a:r>
           </a:p>
-          <a:p>
-            <a:r>
-              <a:rPr sz="800">
-                <a:hlinkClick r:id="rId27"/>
-              </a:rPr>
-              <a:t>Lofar 3</a:t>
-            </a:r>
-          </a:p>
-          <a:p>
-            <a:r>
-              <a:rPr sz="800">
-                <a:hlinkClick r:id="rId28"/>
-              </a:rPr>
-              <a:t>Lofar 4</a:t>
-            </a:r>
-          </a:p>
         </p:txBody>
       </p:sp>
       <p:sp>
         <p:nvSpPr>
           <p:cNvPr id="17" name="Rounded Rectangle 16">
-            <a:hlinkClick r:id="rId29"/>
+            <a:hlinkClick r:id="rId28"/>
           </p:cNvPr>
           <p:cNvSpPr/>
           <p:nvPr/>
@@ -5488,7 +3977,7 @@
                   <a:srgbClr val="1F3A5F"/>
                 </a:solidFill>
               </a:rPr>
-              <a:t>Gram 30: FR Imperial-class, Category 1, Vulcan</a:t>
+              <a:t>Gram 11: FR Devastator, Category 3, Tantive</a:t>
             </a:r>
           </a:p>
         </p:txBody>
@@ -5517,16 +4006,16 @@
           <a:p>
             <a:r>
               <a:rPr sz="800">
+                <a:hlinkClick r:id="rId29"/>
+              </a:rPr>
+              <a:t>Lofar 1</a:t>
+            </a:r>
+          </a:p>
+          <a:p>
+            <a:r>
+              <a:rPr sz="800">
                 <a:hlinkClick r:id="rId30"/>
               </a:rPr>
-              <a:t>Lofar 1</a:t>
-            </a:r>
-          </a:p>
-          <a:p>
-            <a:r>
-              <a:rPr sz="800">
-                <a:hlinkClick r:id="rId31"/>
-              </a:rPr>
               <a:t>Lofar 2</a:t>
             </a:r>
           </a:p>
@@ -5535,7 +4024,7 @@
       <p:sp>
         <p:nvSpPr>
           <p:cNvPr id="19" name="Rounded Rectangle 18">
-            <a:hlinkClick r:id="rId32"/>
+            <a:hlinkClick r:id="rId31"/>
           </p:cNvPr>
           <p:cNvSpPr/>
           <p:nvPr/>
@@ -5582,7 +4071,7 @@
                   <a:srgbClr val="1F3A5F"/>
                 </a:solidFill>
               </a:rPr>
-              <a:t>Gram 31: FR B-wing, Category 2, Hoth</a:t>
+              <a:t>Gram 12: FR Star Destroyer, Category 3, Tantive</a:t>
             </a:r>
           </a:p>
         </p:txBody>
@@ -5611,9 +4100,17 @@
           <a:p>
             <a:r>
               <a:rPr sz="800">
+                <a:hlinkClick r:id="rId32"/>
+              </a:rPr>
+              <a:t>Lofar 1</a:t>
+            </a:r>
+          </a:p>
+          <a:p>
+            <a:r>
+              <a:rPr sz="800">
                 <a:hlinkClick r:id="rId33"/>
               </a:rPr>
-              <a:t>Lofar 1</a:t>
+              <a:t>Lofar 2</a:t>
             </a:r>
           </a:p>
           <a:p>
@@ -5621,7 +4118,7 @@
               <a:rPr sz="800">
                 <a:hlinkClick r:id="rId34"/>
               </a:rPr>
-              <a:t>Lofar 2</a:t>
+              <a:t>Lofar 3</a:t>
             </a:r>
           </a:p>
         </p:txBody>
@@ -5676,7 +4173,7 @@
                   <a:srgbClr val="1F3A5F"/>
                 </a:solidFill>
               </a:rPr>
-              <a:t>Gram 32: Venator-class contact bearing 263, codename Risa</a:t>
+              <a:t>Gram 13: FR Imperial-class, Category 1, Yavin</a:t>
             </a:r>
           </a:p>
         </p:txBody>
@@ -5786,7 +4283,7 @@
                   <a:srgbClr val="1F3A5F"/>
                 </a:solidFill>
               </a:rPr>
-              <a:t>Gram 33: FR Ghost, Category 2, Kobol</a:t>
+              <a:t>Gram 15: FR Mon Calamari Cruiser, Category 2, Bajor</a:t>
             </a:r>
           </a:p>
         </p:txBody>
@@ -5820,12 +4317,36 @@
               <a:t>Lofar 1</a:t>
             </a:r>
           </a:p>
+          <a:p>
+            <a:r>
+              <a:rPr sz="800">
+                <a:hlinkClick r:id="rId42"/>
+              </a:rPr>
+              <a:t>Lofar 2</a:t>
+            </a:r>
+          </a:p>
+          <a:p>
+            <a:r>
+              <a:rPr sz="800">
+                <a:hlinkClick r:id="rId43"/>
+              </a:rPr>
+              <a:t>Lofar 3</a:t>
+            </a:r>
+          </a:p>
+          <a:p>
+            <a:r>
+              <a:rPr sz="800">
+                <a:hlinkClick r:id="rId44"/>
+              </a:rPr>
+              <a:t>Lofar 4</a:t>
+            </a:r>
+          </a:p>
         </p:txBody>
       </p:sp>
       <p:sp>
         <p:nvSpPr>
           <p:cNvPr id="25" name="Rounded Rectangle 24">
-            <a:hlinkClick r:id="rId42"/>
+            <a:hlinkClick r:id="rId45"/>
           </p:cNvPr>
           <p:cNvSpPr/>
           <p:nvPr/>
@@ -5872,7 +4393,7 @@
                   <a:srgbClr val="1F3A5F"/>
                 </a:solidFill>
               </a:rPr>
-              <a:t>Gram 34: Cerritos contact bearing 004, codename Dank</a:t>
+              <a:t>Gram 17: FR Razor Crest, Category 1, Mustafar</a:t>
             </a:r>
           </a:p>
         </p:txBody>
@@ -5901,7 +4422,7 @@
           <a:p>
             <a:r>
               <a:rPr sz="800">
-                <a:hlinkClick r:id="rId43"/>
+                <a:hlinkClick r:id="rId46"/>
               </a:rPr>
               <a:t>Lofar 1</a:t>
             </a:r>
@@ -5909,7 +4430,7 @@
           <a:p>
             <a:r>
               <a:rPr sz="800">
-                <a:hlinkClick r:id="rId44"/>
+                <a:hlinkClick r:id="rId47"/>
               </a:rPr>
               <a:t>Lofar 2</a:t>
             </a:r>
@@ -5917,17 +4438,25 @@
           <a:p>
             <a:r>
               <a:rPr sz="800">
-                <a:hlinkClick r:id="rId45"/>
+                <a:hlinkClick r:id="rId48"/>
               </a:rPr>
               <a:t>Lofar 3</a:t>
             </a:r>
           </a:p>
+          <a:p>
+            <a:r>
+              <a:rPr sz="800">
+                <a:hlinkClick r:id="rId49"/>
+              </a:rPr>
+              <a:t>Lofar 4</a:t>
+            </a:r>
+          </a:p>
         </p:txBody>
       </p:sp>
       <p:sp>
         <p:nvSpPr>
           <p:cNvPr id="27" name="Rounded Rectangle 26">
-            <a:hlinkClick r:id="rId46"/>
+            <a:hlinkClick r:id="rId50"/>
           </p:cNvPr>
           <p:cNvSpPr/>
           <p:nvPr/>
@@ -5974,7 +4503,7 @@
                   <a:srgbClr val="1F3A5F"/>
                 </a:solidFill>
               </a:rPr>
-              <a:t>Gram 35: FR Intrepid-class, Category 2, Gandalf</a:t>
+              <a:t>Gram 18: FR X-wing, Category 3, Defiant</a:t>
             </a:r>
           </a:p>
         </p:txBody>
@@ -6003,25 +4532,17 @@
           <a:p>
             <a:r>
               <a:rPr sz="800">
-                <a:hlinkClick r:id="rId47"/>
+                <a:hlinkClick r:id="rId51"/>
               </a:rPr>
               <a:t>Lofar 1</a:t>
             </a:r>
           </a:p>
-          <a:p>
-            <a:r>
-              <a:rPr sz="800">
-                <a:hlinkClick r:id="rId48"/>
-              </a:rPr>
-              <a:t>Lofar 2</a:t>
-            </a:r>
-          </a:p>
         </p:txBody>
       </p:sp>
       <p:sp>
         <p:nvSpPr>
           <p:cNvPr id="29" name="Rounded Rectangle 28">
-            <a:hlinkClick r:id="rId49"/>
+            <a:hlinkClick r:id="rId52"/>
           </p:cNvPr>
           <p:cNvSpPr/>
           <p:nvPr/>
@@ -6068,7 +4589,7 @@
                   <a:srgbClr val="1F3A5F"/>
                 </a:solidFill>
               </a:rPr>
-              <a:t>Gram 36: FR Rebel One, Category 3, Mustafar</a:t>
+              <a:t>Gram 19: Devastator contact bearing 194, codename Trill</a:t>
             </a:r>
           </a:p>
         </p:txBody>
@@ -6097,7 +4618,7 @@
           <a:p>
             <a:r>
               <a:rPr sz="800">
-                <a:hlinkClick r:id="rId50"/>
+                <a:hlinkClick r:id="rId53"/>
               </a:rPr>
               <a:t>Lofar 1</a:t>
             </a:r>
@@ -6105,7 +4626,7 @@
           <a:p>
             <a:r>
               <a:rPr sz="800">
-                <a:hlinkClick r:id="rId51"/>
+                <a:hlinkClick r:id="rId54"/>
               </a:rPr>
               <a:t>Lofar 2</a:t>
             </a:r>
@@ -6113,7 +4634,7 @@
           <a:p>
             <a:r>
               <a:rPr sz="800">
-                <a:hlinkClick r:id="rId52"/>
+                <a:hlinkClick r:id="rId55"/>
               </a:rPr>
               <a:t>Lofar 3</a:t>
             </a:r>
@@ -6121,7 +4642,7 @@
           <a:p>
             <a:r>
               <a:rPr sz="800">
-                <a:hlinkClick r:id="rId53"/>
+                <a:hlinkClick r:id="rId56"/>
               </a:rPr>
               <a:t>Lofar 4</a:t>
             </a:r>
@@ -6131,7 +4652,7 @@
       <p:sp>
         <p:nvSpPr>
           <p:cNvPr id="31" name="Rounded Rectangle 30">
-            <a:hlinkClick r:id="rId54"/>
+            <a:hlinkClick r:id="rId57"/>
           </p:cNvPr>
           <p:cNvSpPr/>
           <p:nvPr/>
@@ -6178,7 +4699,7 @@
                   <a:srgbClr val="1F3A5F"/>
                 </a:solidFill>
               </a:rPr>
-              <a:t>Gram 37: FR Intrepid-class, Category 2, Tatooine</a:t>
+              <a:t>Gram 20: FR TIE Fighter, Category 1, Coruscant</a:t>
             </a:r>
           </a:p>
         </p:txBody>
@@ -6207,7 +4728,7 @@
           <a:p>
             <a:r>
               <a:rPr sz="800">
-                <a:hlinkClick r:id="rId55"/>
+                <a:hlinkClick r:id="rId58"/>
               </a:rPr>
               <a:t>Lofar 1</a:t>
             </a:r>
@@ -6215,7 +4736,7 @@
           <a:p>
             <a:r>
               <a:rPr sz="800">
-                <a:hlinkClick r:id="rId56"/>
+                <a:hlinkClick r:id="rId59"/>
               </a:rPr>
               <a:t>Lofar 2</a:t>
             </a:r>
@@ -6223,7 +4744,7 @@
           <a:p>
             <a:r>
               <a:rPr sz="800">
-                <a:hlinkClick r:id="rId57"/>
+                <a:hlinkClick r:id="rId60"/>
               </a:rPr>
               <a:t>Lofar 3</a:t>
             </a:r>
@@ -6294,7 +4815,7 @@
                   <a:srgbClr val="FFFFFF"/>
                 </a:solidFill>
               </a:rPr>
-              <a:t>Instructor Week 3 Grams — Page 3 of 3</a:t>
+              <a:t>Instructor Week 3 Grams — Page 2 of 3</a:t>
             </a:r>
           </a:p>
         </p:txBody>
@@ -6349,7 +4870,7 @@
                   <a:srgbClr val="1F3A5F"/>
                 </a:solidFill>
               </a:rPr>
-              <a:t>Gram 38: FR Reliant, Category 3, Caprica</a:t>
+              <a:t>Gram 21: FR Discovery, Category 4, Defiant</a:t>
             </a:r>
           </a:p>
         </p:txBody>
@@ -6391,12 +4912,28 @@
               <a:t>Lofar 2</a:t>
             </a:r>
           </a:p>
+          <a:p>
+            <a:r>
+              <a:rPr sz="800">
+                <a:hlinkClick r:id="rId5"/>
+              </a:rPr>
+              <a:t>Lofar 3</a:t>
+            </a:r>
+          </a:p>
+          <a:p>
+            <a:r>
+              <a:rPr sz="800">
+                <a:hlinkClick r:id="rId6"/>
+              </a:rPr>
+              <a:t>Lofar 4</a:t>
+            </a:r>
+          </a:p>
         </p:txBody>
       </p:sp>
       <p:sp>
         <p:nvSpPr>
           <p:cNvPr id="5" name="Rounded Rectangle 4">
-            <a:hlinkClick r:id="rId5"/>
+            <a:hlinkClick r:id="rId7"/>
           </p:cNvPr>
           <p:cNvSpPr/>
           <p:nvPr/>
@@ -6443,7 +4980,7 @@
                   <a:srgbClr val="1F3A5F"/>
                 </a:solidFill>
               </a:rPr>
-              <a:t>Gram 39: FR Stargazer, Category 1, Betazed</a:t>
+              <a:t>Gram 22: Razor Crest contact bearing 239, codename Dank</a:t>
             </a:r>
           </a:p>
         </p:txBody>
@@ -6472,41 +5009,17 @@
           <a:p>
             <a:r>
               <a:rPr sz="800">
-                <a:hlinkClick r:id="rId6"/>
+                <a:hlinkClick r:id="rId8"/>
               </a:rPr>
               <a:t>Lofar 1</a:t>
             </a:r>
           </a:p>
-          <a:p>
-            <a:r>
-              <a:rPr sz="800">
-                <a:hlinkClick r:id="rId7"/>
-              </a:rPr>
-              <a:t>Lofar 2</a:t>
-            </a:r>
-          </a:p>
-          <a:p>
-            <a:r>
-              <a:rPr sz="800">
-                <a:hlinkClick r:id="rId8"/>
-              </a:rPr>
-              <a:t>Lofar 3</a:t>
-            </a:r>
-          </a:p>
-          <a:p>
-            <a:r>
-              <a:rPr sz="800">
-                <a:hlinkClick r:id="rId9"/>
-              </a:rPr>
-              <a:t>Lofar 4</a:t>
-            </a:r>
-          </a:p>
         </p:txBody>
       </p:sp>
       <p:sp>
         <p:nvSpPr>
           <p:cNvPr id="7" name="Rounded Rectangle 6">
-            <a:hlinkClick r:id="rId10"/>
+            <a:hlinkClick r:id="rId9"/>
           </p:cNvPr>
           <p:cNvSpPr/>
           <p:nvPr/>
@@ -6553,7 +5066,7 @@
                   <a:srgbClr val="1F3A5F"/>
                 </a:solidFill>
               </a:rPr>
-              <a:t>Gram 40: FR Defiant-class, Category 2, Endor</a:t>
+              <a:t>Gram 23: FR Devastator, Category 1, Risa</a:t>
             </a:r>
           </a:p>
         </p:txBody>
@@ -6582,41 +5095,17 @@
           <a:p>
             <a:r>
               <a:rPr sz="800">
-                <a:hlinkClick r:id="rId11"/>
+                <a:hlinkClick r:id="rId10"/>
               </a:rPr>
               <a:t>Lofar 1</a:t>
             </a:r>
           </a:p>
-          <a:p>
-            <a:r>
-              <a:rPr sz="800">
-                <a:hlinkClick r:id="rId12"/>
-              </a:rPr>
-              <a:t>Lofar 2</a:t>
-            </a:r>
-          </a:p>
-          <a:p>
-            <a:r>
-              <a:rPr sz="800">
-                <a:hlinkClick r:id="rId13"/>
-              </a:rPr>
-              <a:t>Lofar 3</a:t>
-            </a:r>
-          </a:p>
-          <a:p>
-            <a:r>
-              <a:rPr sz="800">
-                <a:hlinkClick r:id="rId14"/>
-              </a:rPr>
-              <a:t>Lofar 4</a:t>
-            </a:r>
-          </a:p>
         </p:txBody>
       </p:sp>
       <p:sp>
         <p:nvSpPr>
           <p:cNvPr id="9" name="Rounded Rectangle 8">
-            <a:hlinkClick r:id="rId15"/>
+            <a:hlinkClick r:id="rId11"/>
           </p:cNvPr>
           <p:cNvSpPr/>
           <p:nvPr/>
@@ -6663,7 +5152,7 @@
                   <a:srgbClr val="1F3A5F"/>
                 </a:solidFill>
               </a:rPr>
-              <a:t>Gram 41: FR Tantive IV, Category 3, Betazed</a:t>
+              <a:t>Gram 25: FR Imperial-class, Category 4, Coruscant</a:t>
             </a:r>
           </a:p>
         </p:txBody>
@@ -6692,7 +5181,7 @@
           <a:p>
             <a:r>
               <a:rPr sz="800">
-                <a:hlinkClick r:id="rId16"/>
+                <a:hlinkClick r:id="rId12"/>
               </a:rPr>
               <a:t>Lofar 1</a:t>
             </a:r>
@@ -6700,7 +5189,7 @@
           <a:p>
             <a:r>
               <a:rPr sz="800">
-                <a:hlinkClick r:id="rId17"/>
+                <a:hlinkClick r:id="rId13"/>
               </a:rPr>
               <a:t>Lofar 2</a:t>
             </a:r>
@@ -6708,17 +5197,25 @@
           <a:p>
             <a:r>
               <a:rPr sz="800">
-                <a:hlinkClick r:id="rId18"/>
+                <a:hlinkClick r:id="rId14"/>
               </a:rPr>
               <a:t>Lofar 3</a:t>
             </a:r>
           </a:p>
+          <a:p>
+            <a:r>
+              <a:rPr sz="800">
+                <a:hlinkClick r:id="rId15"/>
+              </a:rPr>
+              <a:t>Lofar 4</a:t>
+            </a:r>
+          </a:p>
         </p:txBody>
       </p:sp>
       <p:sp>
         <p:nvSpPr>
           <p:cNvPr id="11" name="Rounded Rectangle 10">
-            <a:hlinkClick r:id="rId19"/>
+            <a:hlinkClick r:id="rId16"/>
           </p:cNvPr>
           <p:cNvSpPr/>
           <p:nvPr/>
@@ -6765,7 +5262,7 @@
                   <a:srgbClr val="1F3A5F"/>
                 </a:solidFill>
               </a:rPr>
-              <a:t>Gram 42: FR TIE Bomber, Category 3, Mustafar</a:t>
+              <a:t>Gram 26: Enterprise contact bearing 229, codename Betazed</a:t>
             </a:r>
           </a:p>
         </p:txBody>
@@ -6794,9 +5291,1686 @@
           <a:p>
             <a:r>
               <a:rPr sz="800">
+                <a:hlinkClick r:id="rId17"/>
+              </a:rPr>
+              <a:t>Lofar 1</a:t>
+            </a:r>
+          </a:p>
+          <a:p>
+            <a:r>
+              <a:rPr sz="800">
+                <a:hlinkClick r:id="rId18"/>
+              </a:rPr>
+              <a:t>Lofar 2</a:t>
+            </a:r>
+          </a:p>
+          <a:p>
+            <a:r>
+              <a:rPr sz="800">
+                <a:hlinkClick r:id="rId19"/>
+              </a:rPr>
+              <a:t>Lofar 3</a:t>
+            </a:r>
+          </a:p>
+          <a:p>
+            <a:r>
+              <a:rPr sz="800">
                 <a:hlinkClick r:id="rId20"/>
               </a:rPr>
+              <a:t>Lofar 4</a:t>
+            </a:r>
+          </a:p>
+        </p:txBody>
+      </p:sp>
+      <p:sp>
+        <p:nvSpPr>
+          <p:cNvPr id="13" name="Rounded Rectangle 12">
+            <a:hlinkClick r:id="rId21"/>
+          </p:cNvPr>
+          <p:cNvSpPr/>
+          <p:nvPr/>
+        </p:nvSpPr>
+        <p:spPr>
+          <a:xfrm>
+            <a:off x="365760" y="2682240"/>
+            <a:ext cx="2200046" cy="365760"/>
+          </a:xfrm>
+          <a:prstGeom prst="roundRect">
+            <a:avLst/>
+          </a:prstGeom>
+          <a:solidFill>
+            <a:srgbClr val="E8EEF7"/>
+          </a:solidFill>
+          <a:ln>
+            <a:solidFill>
+              <a:srgbClr val="1F3A5F"/>
+            </a:solidFill>
+          </a:ln>
+        </p:spPr>
+        <p:style>
+          <a:lnRef idx="1">
+            <a:schemeClr val="accent1"/>
+          </a:lnRef>
+          <a:fillRef idx="3">
+            <a:schemeClr val="accent1"/>
+          </a:fillRef>
+          <a:effectRef idx="2">
+            <a:schemeClr val="accent1"/>
+          </a:effectRef>
+          <a:fontRef idx="minor">
+            <a:schemeClr val="lt1"/>
+          </a:fontRef>
+        </p:style>
+        <p:txBody>
+          <a:bodyPr rtlCol="0" anchor="ctr" lIns="45720" rIns="45720"/>
+          <a:lstStyle/>
+          <a:p>
+            <a:pPr algn="ctr"/>
+            <a:r>
+              <a:rPr sz="900">
+                <a:solidFill>
+                  <a:srgbClr val="1F3A5F"/>
+                </a:solidFill>
+              </a:rPr>
+              <a:t>Gram 27: FR Prometheus, Category 1, Kobol</a:t>
+            </a:r>
+          </a:p>
+        </p:txBody>
+      </p:sp>
+      <p:sp>
+        <p:nvSpPr>
+          <p:cNvPr id="14" name="TextBox 13"/>
+          <p:cNvSpPr txBox="1"/>
+          <p:nvPr/>
+        </p:nvSpPr>
+        <p:spPr>
+          <a:xfrm>
+            <a:off x="365760" y="3066288"/>
+            <a:ext cx="2200046" cy="1447800"/>
+          </a:xfrm>
+          <a:prstGeom prst="rect">
+            <a:avLst/>
+          </a:prstGeom>
+          <a:noFill/>
+        </p:spPr>
+        <p:txBody>
+          <a:bodyPr wrap="square">
+            <a:spAutoFit/>
+          </a:bodyPr>
+          <a:lstStyle/>
+          <a:p>
+            <a:r>
+              <a:rPr sz="800">
+                <a:hlinkClick r:id="rId22"/>
+              </a:rPr>
               <a:t>Lofar 1</a:t>
+            </a:r>
+          </a:p>
+          <a:p>
+            <a:r>
+              <a:rPr sz="800">
+                <a:hlinkClick r:id="rId23"/>
+              </a:rPr>
+              <a:t>Lofar 2</a:t>
+            </a:r>
+          </a:p>
+        </p:txBody>
+      </p:sp>
+      <p:sp>
+        <p:nvSpPr>
+          <p:cNvPr id="15" name="Rounded Rectangle 14">
+            <a:hlinkClick r:id="rId24"/>
+          </p:cNvPr>
+          <p:cNvSpPr/>
+          <p:nvPr/>
+        </p:nvSpPr>
+        <p:spPr>
+          <a:xfrm>
+            <a:off x="2657246" y="2682240"/>
+            <a:ext cx="2200046" cy="365760"/>
+          </a:xfrm>
+          <a:prstGeom prst="roundRect">
+            <a:avLst/>
+          </a:prstGeom>
+          <a:solidFill>
+            <a:srgbClr val="E8EEF7"/>
+          </a:solidFill>
+          <a:ln>
+            <a:solidFill>
+              <a:srgbClr val="1F3A5F"/>
+            </a:solidFill>
+          </a:ln>
+        </p:spPr>
+        <p:style>
+          <a:lnRef idx="1">
+            <a:schemeClr val="accent1"/>
+          </a:lnRef>
+          <a:fillRef idx="3">
+            <a:schemeClr val="accent1"/>
+          </a:fillRef>
+          <a:effectRef idx="2">
+            <a:schemeClr val="accent1"/>
+          </a:effectRef>
+          <a:fontRef idx="minor">
+            <a:schemeClr val="lt1"/>
+          </a:fontRef>
+        </p:style>
+        <p:txBody>
+          <a:bodyPr rtlCol="0" anchor="ctr" lIns="45720" rIns="45720"/>
+          <a:lstStyle/>
+          <a:p>
+            <a:pPr algn="ctr"/>
+            <a:r>
+              <a:rPr sz="900">
+                <a:solidFill>
+                  <a:srgbClr val="1F3A5F"/>
+                </a:solidFill>
+              </a:rPr>
+              <a:t>Gram 29: FR X-wing, Category 1, Betazed</a:t>
+            </a:r>
+          </a:p>
+        </p:txBody>
+      </p:sp>
+      <p:sp>
+        <p:nvSpPr>
+          <p:cNvPr id="16" name="TextBox 15"/>
+          <p:cNvSpPr txBox="1"/>
+          <p:nvPr/>
+        </p:nvSpPr>
+        <p:spPr>
+          <a:xfrm>
+            <a:off x="2657246" y="3066288"/>
+            <a:ext cx="2200046" cy="1447800"/>
+          </a:xfrm>
+          <a:prstGeom prst="rect">
+            <a:avLst/>
+          </a:prstGeom>
+          <a:noFill/>
+        </p:spPr>
+        <p:txBody>
+          <a:bodyPr wrap="square">
+            <a:spAutoFit/>
+          </a:bodyPr>
+          <a:lstStyle/>
+          <a:p>
+            <a:r>
+              <a:rPr sz="800">
+                <a:hlinkClick r:id="rId25"/>
+              </a:rPr>
+              <a:t>Lofar 1</a:t>
+            </a:r>
+          </a:p>
+          <a:p>
+            <a:r>
+              <a:rPr sz="800">
+                <a:hlinkClick r:id="rId26"/>
+              </a:rPr>
+              <a:t>Lofar 2</a:t>
+            </a:r>
+          </a:p>
+          <a:p>
+            <a:r>
+              <a:rPr sz="800">
+                <a:hlinkClick r:id="rId27"/>
+              </a:rPr>
+              <a:t>Lofar 3</a:t>
+            </a:r>
+          </a:p>
+          <a:p>
+            <a:r>
+              <a:rPr sz="800">
+                <a:hlinkClick r:id="rId28"/>
+              </a:rPr>
+              <a:t>Lofar 4</a:t>
+            </a:r>
+          </a:p>
+        </p:txBody>
+      </p:sp>
+      <p:sp>
+        <p:nvSpPr>
+          <p:cNvPr id="17" name="Rounded Rectangle 16">
+            <a:hlinkClick r:id="rId29"/>
+          </p:cNvPr>
+          <p:cNvSpPr/>
+          <p:nvPr/>
+        </p:nvSpPr>
+        <p:spPr>
+          <a:xfrm>
+            <a:off x="4948732" y="2682240"/>
+            <a:ext cx="2200046" cy="365760"/>
+          </a:xfrm>
+          <a:prstGeom prst="roundRect">
+            <a:avLst/>
+          </a:prstGeom>
+          <a:solidFill>
+            <a:srgbClr val="E8EEF7"/>
+          </a:solidFill>
+          <a:ln>
+            <a:solidFill>
+              <a:srgbClr val="1F3A5F"/>
+            </a:solidFill>
+          </a:ln>
+        </p:spPr>
+        <p:style>
+          <a:lnRef idx="1">
+            <a:schemeClr val="accent1"/>
+          </a:lnRef>
+          <a:fillRef idx="3">
+            <a:schemeClr val="accent1"/>
+          </a:fillRef>
+          <a:effectRef idx="2">
+            <a:schemeClr val="accent1"/>
+          </a:effectRef>
+          <a:fontRef idx="minor">
+            <a:schemeClr val="lt1"/>
+          </a:fontRef>
+        </p:style>
+        <p:txBody>
+          <a:bodyPr rtlCol="0" anchor="ctr" lIns="45720" rIns="45720"/>
+          <a:lstStyle/>
+          <a:p>
+            <a:pPr algn="ctr"/>
+            <a:r>
+              <a:rPr sz="900">
+                <a:solidFill>
+                  <a:srgbClr val="1F3A5F"/>
+                </a:solidFill>
+              </a:rPr>
+              <a:t>Gram 30: FR Imperial-class, Category 1, Vulcan</a:t>
+            </a:r>
+          </a:p>
+        </p:txBody>
+      </p:sp>
+      <p:sp>
+        <p:nvSpPr>
+          <p:cNvPr id="18" name="TextBox 17"/>
+          <p:cNvSpPr txBox="1"/>
+          <p:nvPr/>
+        </p:nvSpPr>
+        <p:spPr>
+          <a:xfrm>
+            <a:off x="4948732" y="3066288"/>
+            <a:ext cx="2200046" cy="1447800"/>
+          </a:xfrm>
+          <a:prstGeom prst="rect">
+            <a:avLst/>
+          </a:prstGeom>
+          <a:noFill/>
+        </p:spPr>
+        <p:txBody>
+          <a:bodyPr wrap="square">
+            <a:spAutoFit/>
+          </a:bodyPr>
+          <a:lstStyle/>
+          <a:p>
+            <a:r>
+              <a:rPr sz="800">
+                <a:hlinkClick r:id="rId30"/>
+              </a:rPr>
+              <a:t>Lofar 1</a:t>
+            </a:r>
+          </a:p>
+          <a:p>
+            <a:r>
+              <a:rPr sz="800">
+                <a:hlinkClick r:id="rId31"/>
+              </a:rPr>
+              <a:t>Lofar 2</a:t>
+            </a:r>
+          </a:p>
+        </p:txBody>
+      </p:sp>
+      <p:sp>
+        <p:nvSpPr>
+          <p:cNvPr id="19" name="Rounded Rectangle 18">
+            <a:hlinkClick r:id="rId32"/>
+          </p:cNvPr>
+          <p:cNvSpPr/>
+          <p:nvPr/>
+        </p:nvSpPr>
+        <p:spPr>
+          <a:xfrm>
+            <a:off x="7240219" y="2682240"/>
+            <a:ext cx="2200046" cy="365760"/>
+          </a:xfrm>
+          <a:prstGeom prst="roundRect">
+            <a:avLst/>
+          </a:prstGeom>
+          <a:solidFill>
+            <a:srgbClr val="E8EEF7"/>
+          </a:solidFill>
+          <a:ln>
+            <a:solidFill>
+              <a:srgbClr val="1F3A5F"/>
+            </a:solidFill>
+          </a:ln>
+        </p:spPr>
+        <p:style>
+          <a:lnRef idx="1">
+            <a:schemeClr val="accent1"/>
+          </a:lnRef>
+          <a:fillRef idx="3">
+            <a:schemeClr val="accent1"/>
+          </a:fillRef>
+          <a:effectRef idx="2">
+            <a:schemeClr val="accent1"/>
+          </a:effectRef>
+          <a:fontRef idx="minor">
+            <a:schemeClr val="lt1"/>
+          </a:fontRef>
+        </p:style>
+        <p:txBody>
+          <a:bodyPr rtlCol="0" anchor="ctr" lIns="45720" rIns="45720"/>
+          <a:lstStyle/>
+          <a:p>
+            <a:pPr algn="ctr"/>
+            <a:r>
+              <a:rPr sz="900">
+                <a:solidFill>
+                  <a:srgbClr val="1F3A5F"/>
+                </a:solidFill>
+              </a:rPr>
+              <a:t>Gram 31: FR B-wing, Category 2, Hoth</a:t>
+            </a:r>
+          </a:p>
+        </p:txBody>
+      </p:sp>
+      <p:sp>
+        <p:nvSpPr>
+          <p:cNvPr id="20" name="TextBox 19"/>
+          <p:cNvSpPr txBox="1"/>
+          <p:nvPr/>
+        </p:nvSpPr>
+        <p:spPr>
+          <a:xfrm>
+            <a:off x="7240219" y="3066288"/>
+            <a:ext cx="2200046" cy="1447800"/>
+          </a:xfrm>
+          <a:prstGeom prst="rect">
+            <a:avLst/>
+          </a:prstGeom>
+          <a:noFill/>
+        </p:spPr>
+        <p:txBody>
+          <a:bodyPr wrap="square">
+            <a:spAutoFit/>
+          </a:bodyPr>
+          <a:lstStyle/>
+          <a:p>
+            <a:r>
+              <a:rPr sz="800">
+                <a:hlinkClick r:id="rId33"/>
+              </a:rPr>
+              <a:t>Lofar 1</a:t>
+            </a:r>
+          </a:p>
+          <a:p>
+            <a:r>
+              <a:rPr sz="800">
+                <a:hlinkClick r:id="rId34"/>
+              </a:rPr>
+              <a:t>Lofar 2</a:t>
+            </a:r>
+          </a:p>
+        </p:txBody>
+      </p:sp>
+      <p:sp>
+        <p:nvSpPr>
+          <p:cNvPr id="21" name="Rounded Rectangle 20">
+            <a:hlinkClick r:id="rId35"/>
+          </p:cNvPr>
+          <p:cNvSpPr/>
+          <p:nvPr/>
+        </p:nvSpPr>
+        <p:spPr>
+          <a:xfrm>
+            <a:off x="9531705" y="2682240"/>
+            <a:ext cx="2200046" cy="365760"/>
+          </a:xfrm>
+          <a:prstGeom prst="roundRect">
+            <a:avLst/>
+          </a:prstGeom>
+          <a:solidFill>
+            <a:srgbClr val="E8EEF7"/>
+          </a:solidFill>
+          <a:ln>
+            <a:solidFill>
+              <a:srgbClr val="1F3A5F"/>
+            </a:solidFill>
+          </a:ln>
+        </p:spPr>
+        <p:style>
+          <a:lnRef idx="1">
+            <a:schemeClr val="accent1"/>
+          </a:lnRef>
+          <a:fillRef idx="3">
+            <a:schemeClr val="accent1"/>
+          </a:fillRef>
+          <a:effectRef idx="2">
+            <a:schemeClr val="accent1"/>
+          </a:effectRef>
+          <a:fontRef idx="minor">
+            <a:schemeClr val="lt1"/>
+          </a:fontRef>
+        </p:style>
+        <p:txBody>
+          <a:bodyPr rtlCol="0" anchor="ctr" lIns="45720" rIns="45720"/>
+          <a:lstStyle/>
+          <a:p>
+            <a:pPr algn="ctr"/>
+            <a:r>
+              <a:rPr sz="900">
+                <a:solidFill>
+                  <a:srgbClr val="1F3A5F"/>
+                </a:solidFill>
+              </a:rPr>
+              <a:t>Gram 32: Venator-class contact bearing 263, codename Risa</a:t>
+            </a:r>
+          </a:p>
+        </p:txBody>
+      </p:sp>
+      <p:sp>
+        <p:nvSpPr>
+          <p:cNvPr id="22" name="TextBox 21"/>
+          <p:cNvSpPr txBox="1"/>
+          <p:nvPr/>
+        </p:nvSpPr>
+        <p:spPr>
+          <a:xfrm>
+            <a:off x="9531705" y="3066288"/>
+            <a:ext cx="2200046" cy="1447800"/>
+          </a:xfrm>
+          <a:prstGeom prst="rect">
+            <a:avLst/>
+          </a:prstGeom>
+          <a:noFill/>
+        </p:spPr>
+        <p:txBody>
+          <a:bodyPr wrap="square">
+            <a:spAutoFit/>
+          </a:bodyPr>
+          <a:lstStyle/>
+          <a:p>
+            <a:r>
+              <a:rPr sz="800">
+                <a:hlinkClick r:id="rId36"/>
+              </a:rPr>
+              <a:t>Lofar 1</a:t>
+            </a:r>
+          </a:p>
+          <a:p>
+            <a:r>
+              <a:rPr sz="800">
+                <a:hlinkClick r:id="rId37"/>
+              </a:rPr>
+              <a:t>Lofar 2</a:t>
+            </a:r>
+          </a:p>
+          <a:p>
+            <a:r>
+              <a:rPr sz="800">
+                <a:hlinkClick r:id="rId38"/>
+              </a:rPr>
+              <a:t>Lofar 3</a:t>
+            </a:r>
+          </a:p>
+          <a:p>
+            <a:r>
+              <a:rPr sz="800">
+                <a:hlinkClick r:id="rId39"/>
+              </a:rPr>
+              <a:t>Lofar 4</a:t>
+            </a:r>
+          </a:p>
+        </p:txBody>
+      </p:sp>
+      <p:sp>
+        <p:nvSpPr>
+          <p:cNvPr id="23" name="Rounded Rectangle 22">
+            <a:hlinkClick r:id="rId40"/>
+          </p:cNvPr>
+          <p:cNvSpPr/>
+          <p:nvPr/>
+        </p:nvSpPr>
+        <p:spPr>
+          <a:xfrm>
+            <a:off x="365760" y="4632960"/>
+            <a:ext cx="2200046" cy="365760"/>
+          </a:xfrm>
+          <a:prstGeom prst="roundRect">
+            <a:avLst/>
+          </a:prstGeom>
+          <a:solidFill>
+            <a:srgbClr val="E8EEF7"/>
+          </a:solidFill>
+          <a:ln>
+            <a:solidFill>
+              <a:srgbClr val="1F3A5F"/>
+            </a:solidFill>
+          </a:ln>
+        </p:spPr>
+        <p:style>
+          <a:lnRef idx="1">
+            <a:schemeClr val="accent1"/>
+          </a:lnRef>
+          <a:fillRef idx="3">
+            <a:schemeClr val="accent1"/>
+          </a:fillRef>
+          <a:effectRef idx="2">
+            <a:schemeClr val="accent1"/>
+          </a:effectRef>
+          <a:fontRef idx="minor">
+            <a:schemeClr val="lt1"/>
+          </a:fontRef>
+        </p:style>
+        <p:txBody>
+          <a:bodyPr rtlCol="0" anchor="ctr" lIns="45720" rIns="45720"/>
+          <a:lstStyle/>
+          <a:p>
+            <a:pPr algn="ctr"/>
+            <a:r>
+              <a:rPr sz="900">
+                <a:solidFill>
+                  <a:srgbClr val="1F3A5F"/>
+                </a:solidFill>
+              </a:rPr>
+              <a:t>Gram 33: FR Ghost, Category 2, Kobol</a:t>
+            </a:r>
+          </a:p>
+        </p:txBody>
+      </p:sp>
+      <p:sp>
+        <p:nvSpPr>
+          <p:cNvPr id="24" name="TextBox 23"/>
+          <p:cNvSpPr txBox="1"/>
+          <p:nvPr/>
+        </p:nvSpPr>
+        <p:spPr>
+          <a:xfrm>
+            <a:off x="365760" y="5017008"/>
+            <a:ext cx="2200046" cy="1447800"/>
+          </a:xfrm>
+          <a:prstGeom prst="rect">
+            <a:avLst/>
+          </a:prstGeom>
+          <a:noFill/>
+        </p:spPr>
+        <p:txBody>
+          <a:bodyPr wrap="square">
+            <a:spAutoFit/>
+          </a:bodyPr>
+          <a:lstStyle/>
+          <a:p>
+            <a:r>
+              <a:rPr sz="800">
+                <a:hlinkClick r:id="rId41"/>
+              </a:rPr>
+              <a:t>Lofar 1</a:t>
+            </a:r>
+          </a:p>
+        </p:txBody>
+      </p:sp>
+      <p:sp>
+        <p:nvSpPr>
+          <p:cNvPr id="25" name="Rounded Rectangle 24">
+            <a:hlinkClick r:id="rId42"/>
+          </p:cNvPr>
+          <p:cNvSpPr/>
+          <p:nvPr/>
+        </p:nvSpPr>
+        <p:spPr>
+          <a:xfrm>
+            <a:off x="2657246" y="4632960"/>
+            <a:ext cx="2200046" cy="365760"/>
+          </a:xfrm>
+          <a:prstGeom prst="roundRect">
+            <a:avLst/>
+          </a:prstGeom>
+          <a:solidFill>
+            <a:srgbClr val="E8EEF7"/>
+          </a:solidFill>
+          <a:ln>
+            <a:solidFill>
+              <a:srgbClr val="1F3A5F"/>
+            </a:solidFill>
+          </a:ln>
+        </p:spPr>
+        <p:style>
+          <a:lnRef idx="1">
+            <a:schemeClr val="accent1"/>
+          </a:lnRef>
+          <a:fillRef idx="3">
+            <a:schemeClr val="accent1"/>
+          </a:fillRef>
+          <a:effectRef idx="2">
+            <a:schemeClr val="accent1"/>
+          </a:effectRef>
+          <a:fontRef idx="minor">
+            <a:schemeClr val="lt1"/>
+          </a:fontRef>
+        </p:style>
+        <p:txBody>
+          <a:bodyPr rtlCol="0" anchor="ctr" lIns="45720" rIns="45720"/>
+          <a:lstStyle/>
+          <a:p>
+            <a:pPr algn="ctr"/>
+            <a:r>
+              <a:rPr sz="900">
+                <a:solidFill>
+                  <a:srgbClr val="1F3A5F"/>
+                </a:solidFill>
+              </a:rPr>
+              <a:t>Gram 34: Cerritos contact bearing 004, codename Dank</a:t>
+            </a:r>
+          </a:p>
+        </p:txBody>
+      </p:sp>
+      <p:sp>
+        <p:nvSpPr>
+          <p:cNvPr id="26" name="TextBox 25"/>
+          <p:cNvSpPr txBox="1"/>
+          <p:nvPr/>
+        </p:nvSpPr>
+        <p:spPr>
+          <a:xfrm>
+            <a:off x="2657246" y="5017008"/>
+            <a:ext cx="2200046" cy="1447800"/>
+          </a:xfrm>
+          <a:prstGeom prst="rect">
+            <a:avLst/>
+          </a:prstGeom>
+          <a:noFill/>
+        </p:spPr>
+        <p:txBody>
+          <a:bodyPr wrap="square">
+            <a:spAutoFit/>
+          </a:bodyPr>
+          <a:lstStyle/>
+          <a:p>
+            <a:r>
+              <a:rPr sz="800">
+                <a:hlinkClick r:id="rId43"/>
+              </a:rPr>
+              <a:t>Lofar 1</a:t>
+            </a:r>
+          </a:p>
+          <a:p>
+            <a:r>
+              <a:rPr sz="800">
+                <a:hlinkClick r:id="rId44"/>
+              </a:rPr>
+              <a:t>Lofar 2</a:t>
+            </a:r>
+          </a:p>
+          <a:p>
+            <a:r>
+              <a:rPr sz="800">
+                <a:hlinkClick r:id="rId45"/>
+              </a:rPr>
+              <a:t>Lofar 3</a:t>
+            </a:r>
+          </a:p>
+        </p:txBody>
+      </p:sp>
+      <p:sp>
+        <p:nvSpPr>
+          <p:cNvPr id="27" name="Rounded Rectangle 26">
+            <a:hlinkClick r:id="rId46"/>
+          </p:cNvPr>
+          <p:cNvSpPr/>
+          <p:nvPr/>
+        </p:nvSpPr>
+        <p:spPr>
+          <a:xfrm>
+            <a:off x="4948732" y="4632960"/>
+            <a:ext cx="2200046" cy="365760"/>
+          </a:xfrm>
+          <a:prstGeom prst="roundRect">
+            <a:avLst/>
+          </a:prstGeom>
+          <a:solidFill>
+            <a:srgbClr val="E8EEF7"/>
+          </a:solidFill>
+          <a:ln>
+            <a:solidFill>
+              <a:srgbClr val="1F3A5F"/>
+            </a:solidFill>
+          </a:ln>
+        </p:spPr>
+        <p:style>
+          <a:lnRef idx="1">
+            <a:schemeClr val="accent1"/>
+          </a:lnRef>
+          <a:fillRef idx="3">
+            <a:schemeClr val="accent1"/>
+          </a:fillRef>
+          <a:effectRef idx="2">
+            <a:schemeClr val="accent1"/>
+          </a:effectRef>
+          <a:fontRef idx="minor">
+            <a:schemeClr val="lt1"/>
+          </a:fontRef>
+        </p:style>
+        <p:txBody>
+          <a:bodyPr rtlCol="0" anchor="ctr" lIns="45720" rIns="45720"/>
+          <a:lstStyle/>
+          <a:p>
+            <a:pPr algn="ctr"/>
+            <a:r>
+              <a:rPr sz="900">
+                <a:solidFill>
+                  <a:srgbClr val="1F3A5F"/>
+                </a:solidFill>
+              </a:rPr>
+              <a:t>Gram 35: FR Intrepid-class, Category 2, Gandalf</a:t>
+            </a:r>
+          </a:p>
+        </p:txBody>
+      </p:sp>
+      <p:sp>
+        <p:nvSpPr>
+          <p:cNvPr id="28" name="TextBox 27"/>
+          <p:cNvSpPr txBox="1"/>
+          <p:nvPr/>
+        </p:nvSpPr>
+        <p:spPr>
+          <a:xfrm>
+            <a:off x="4948732" y="5017008"/>
+            <a:ext cx="2200046" cy="1447800"/>
+          </a:xfrm>
+          <a:prstGeom prst="rect">
+            <a:avLst/>
+          </a:prstGeom>
+          <a:noFill/>
+        </p:spPr>
+        <p:txBody>
+          <a:bodyPr wrap="square">
+            <a:spAutoFit/>
+          </a:bodyPr>
+          <a:lstStyle/>
+          <a:p>
+            <a:r>
+              <a:rPr sz="800">
+                <a:hlinkClick r:id="rId47"/>
+              </a:rPr>
+              <a:t>Lofar 1</a:t>
+            </a:r>
+          </a:p>
+          <a:p>
+            <a:r>
+              <a:rPr sz="800">
+                <a:hlinkClick r:id="rId48"/>
+              </a:rPr>
+              <a:t>Lofar 2</a:t>
+            </a:r>
+          </a:p>
+        </p:txBody>
+      </p:sp>
+      <p:sp>
+        <p:nvSpPr>
+          <p:cNvPr id="29" name="Rounded Rectangle 28">
+            <a:hlinkClick r:id="rId49"/>
+          </p:cNvPr>
+          <p:cNvSpPr/>
+          <p:nvPr/>
+        </p:nvSpPr>
+        <p:spPr>
+          <a:xfrm>
+            <a:off x="7240219" y="4632960"/>
+            <a:ext cx="2200046" cy="365760"/>
+          </a:xfrm>
+          <a:prstGeom prst="roundRect">
+            <a:avLst/>
+          </a:prstGeom>
+          <a:solidFill>
+            <a:srgbClr val="E8EEF7"/>
+          </a:solidFill>
+          <a:ln>
+            <a:solidFill>
+              <a:srgbClr val="1F3A5F"/>
+            </a:solidFill>
+          </a:ln>
+        </p:spPr>
+        <p:style>
+          <a:lnRef idx="1">
+            <a:schemeClr val="accent1"/>
+          </a:lnRef>
+          <a:fillRef idx="3">
+            <a:schemeClr val="accent1"/>
+          </a:fillRef>
+          <a:effectRef idx="2">
+            <a:schemeClr val="accent1"/>
+          </a:effectRef>
+          <a:fontRef idx="minor">
+            <a:schemeClr val="lt1"/>
+          </a:fontRef>
+        </p:style>
+        <p:txBody>
+          <a:bodyPr rtlCol="0" anchor="ctr" lIns="45720" rIns="45720"/>
+          <a:lstStyle/>
+          <a:p>
+            <a:pPr algn="ctr"/>
+            <a:r>
+              <a:rPr sz="900">
+                <a:solidFill>
+                  <a:srgbClr val="1F3A5F"/>
+                </a:solidFill>
+              </a:rPr>
+              <a:t>Gram 36: FR Rebel One, Category 3, Mustafar</a:t>
+            </a:r>
+          </a:p>
+        </p:txBody>
+      </p:sp>
+      <p:sp>
+        <p:nvSpPr>
+          <p:cNvPr id="30" name="TextBox 29"/>
+          <p:cNvSpPr txBox="1"/>
+          <p:nvPr/>
+        </p:nvSpPr>
+        <p:spPr>
+          <a:xfrm>
+            <a:off x="7240219" y="5017008"/>
+            <a:ext cx="2200046" cy="1447800"/>
+          </a:xfrm>
+          <a:prstGeom prst="rect">
+            <a:avLst/>
+          </a:prstGeom>
+          <a:noFill/>
+        </p:spPr>
+        <p:txBody>
+          <a:bodyPr wrap="square">
+            <a:spAutoFit/>
+          </a:bodyPr>
+          <a:lstStyle/>
+          <a:p>
+            <a:r>
+              <a:rPr sz="800">
+                <a:hlinkClick r:id="rId50"/>
+              </a:rPr>
+              <a:t>Lofar 1</a:t>
+            </a:r>
+          </a:p>
+          <a:p>
+            <a:r>
+              <a:rPr sz="800">
+                <a:hlinkClick r:id="rId51"/>
+              </a:rPr>
+              <a:t>Lofar 2</a:t>
+            </a:r>
+          </a:p>
+          <a:p>
+            <a:r>
+              <a:rPr sz="800">
+                <a:hlinkClick r:id="rId52"/>
+              </a:rPr>
+              <a:t>Lofar 3</a:t>
+            </a:r>
+          </a:p>
+          <a:p>
+            <a:r>
+              <a:rPr sz="800">
+                <a:hlinkClick r:id="rId53"/>
+              </a:rPr>
+              <a:t>Lofar 4</a:t>
+            </a:r>
+          </a:p>
+        </p:txBody>
+      </p:sp>
+      <p:sp>
+        <p:nvSpPr>
+          <p:cNvPr id="31" name="Rounded Rectangle 30">
+            <a:hlinkClick r:id="rId54"/>
+          </p:cNvPr>
+          <p:cNvSpPr/>
+          <p:nvPr/>
+        </p:nvSpPr>
+        <p:spPr>
+          <a:xfrm>
+            <a:off x="9531705" y="4632960"/>
+            <a:ext cx="2200046" cy="365760"/>
+          </a:xfrm>
+          <a:prstGeom prst="roundRect">
+            <a:avLst/>
+          </a:prstGeom>
+          <a:solidFill>
+            <a:srgbClr val="E8EEF7"/>
+          </a:solidFill>
+          <a:ln>
+            <a:solidFill>
+              <a:srgbClr val="1F3A5F"/>
+            </a:solidFill>
+          </a:ln>
+        </p:spPr>
+        <p:style>
+          <a:lnRef idx="1">
+            <a:schemeClr val="accent1"/>
+          </a:lnRef>
+          <a:fillRef idx="3">
+            <a:schemeClr val="accent1"/>
+          </a:fillRef>
+          <a:effectRef idx="2">
+            <a:schemeClr val="accent1"/>
+          </a:effectRef>
+          <a:fontRef idx="minor">
+            <a:schemeClr val="lt1"/>
+          </a:fontRef>
+        </p:style>
+        <p:txBody>
+          <a:bodyPr rtlCol="0" anchor="ctr" lIns="45720" rIns="45720"/>
+          <a:lstStyle/>
+          <a:p>
+            <a:pPr algn="ctr"/>
+            <a:r>
+              <a:rPr sz="900">
+                <a:solidFill>
+                  <a:srgbClr val="1F3A5F"/>
+                </a:solidFill>
+              </a:rPr>
+              <a:t>Gram 37: FR Intrepid-class, Category 2, Tatooine</a:t>
+            </a:r>
+          </a:p>
+        </p:txBody>
+      </p:sp>
+      <p:sp>
+        <p:nvSpPr>
+          <p:cNvPr id="32" name="TextBox 31"/>
+          <p:cNvSpPr txBox="1"/>
+          <p:nvPr/>
+        </p:nvSpPr>
+        <p:spPr>
+          <a:xfrm>
+            <a:off x="9531705" y="5017008"/>
+            <a:ext cx="2200046" cy="1447800"/>
+          </a:xfrm>
+          <a:prstGeom prst="rect">
+            <a:avLst/>
+          </a:prstGeom>
+          <a:noFill/>
+        </p:spPr>
+        <p:txBody>
+          <a:bodyPr wrap="square">
+            <a:spAutoFit/>
+          </a:bodyPr>
+          <a:lstStyle/>
+          <a:p>
+            <a:r>
+              <a:rPr sz="800">
+                <a:hlinkClick r:id="rId55"/>
+              </a:rPr>
+              <a:t>Lofar 1</a:t>
+            </a:r>
+          </a:p>
+          <a:p>
+            <a:r>
+              <a:rPr sz="800">
+                <a:hlinkClick r:id="rId56"/>
+              </a:rPr>
+              <a:t>Lofar 2</a:t>
+            </a:r>
+          </a:p>
+          <a:p>
+            <a:r>
+              <a:rPr sz="800">
+                <a:hlinkClick r:id="rId57"/>
+              </a:rPr>
+              <a:t>Lofar 3</a:t>
+            </a:r>
+          </a:p>
+        </p:txBody>
+      </p:sp>
+    </p:spTree>
+  </p:cSld>
+  <p:clrMapOvr>
+    <a:masterClrMapping/>
+  </p:clrMapOvr>
+</p:sld>
+</file>
+
+<file path=ppt/slides/slide4.xml><?xml version="1.0" encoding="utf-8"?>
+<p:sld xmlns:a="http://schemas.openxmlformats.org/drawingml/2006/main" xmlns:p="http://schemas.openxmlformats.org/presentationml/2006/main" xmlns:r="http://schemas.openxmlformats.org/officeDocument/2006/relationships">
+  <p:cSld>
+    <p:spTree>
+      <p:nvGrpSpPr>
+        <p:cNvPr id="1" name=""/>
+        <p:cNvGrpSpPr/>
+        <p:nvPr/>
+      </p:nvGrpSpPr>
+      <p:grpSpPr/>
+      <p:sp>
+        <p:nvSpPr>
+          <p:cNvPr id="2" name="Rectangle 1"/>
+          <p:cNvSpPr/>
+          <p:nvPr/>
+        </p:nvSpPr>
+        <p:spPr>
+          <a:xfrm>
+            <a:off x="0" y="0"/>
+            <a:ext cx="12188952" cy="548640"/>
+          </a:xfrm>
+          <a:prstGeom prst="rect">
+            <a:avLst/>
+          </a:prstGeom>
+          <a:solidFill>
+            <a:srgbClr val="1F3A5F"/>
+          </a:solidFill>
+          <a:ln>
+            <a:noFill/>
+          </a:ln>
+        </p:spPr>
+        <p:style>
+          <a:lnRef idx="1">
+            <a:schemeClr val="accent1"/>
+          </a:lnRef>
+          <a:fillRef idx="3">
+            <a:schemeClr val="accent1"/>
+          </a:fillRef>
+          <a:effectRef idx="2">
+            <a:schemeClr val="accent1"/>
+          </a:effectRef>
+          <a:fontRef idx="minor">
+            <a:schemeClr val="lt1"/>
+          </a:fontRef>
+        </p:style>
+        <p:txBody>
+          <a:bodyPr rtlCol="0" anchor="ctr" lIns="182880" rIns="182880"/>
+          <a:lstStyle/>
+          <a:p>
+            <a:pPr algn="ctr"/>
+            <a:r>
+              <a:rPr sz="2000" b="1">
+                <a:solidFill>
+                  <a:srgbClr val="FFFFFF"/>
+                </a:solidFill>
+              </a:rPr>
+              <a:t>Instructor Week 3 Grams — Page 3 of 3</a:t>
+            </a:r>
+          </a:p>
+        </p:txBody>
+      </p:sp>
+      <p:sp>
+        <p:nvSpPr>
+          <p:cNvPr id="3" name="Rounded Rectangle 2">
+            <a:hlinkClick r:id="rId2"/>
+          </p:cNvPr>
+          <p:cNvSpPr/>
+          <p:nvPr/>
+        </p:nvSpPr>
+        <p:spPr>
+          <a:xfrm>
+            <a:off x="365760" y="731520"/>
+            <a:ext cx="2200046" cy="365760"/>
+          </a:xfrm>
+          <a:prstGeom prst="roundRect">
+            <a:avLst/>
+          </a:prstGeom>
+          <a:solidFill>
+            <a:srgbClr val="E8EEF7"/>
+          </a:solidFill>
+          <a:ln>
+            <a:solidFill>
+              <a:srgbClr val="1F3A5F"/>
+            </a:solidFill>
+          </a:ln>
+        </p:spPr>
+        <p:style>
+          <a:lnRef idx="1">
+            <a:schemeClr val="accent1"/>
+          </a:lnRef>
+          <a:fillRef idx="3">
+            <a:schemeClr val="accent1"/>
+          </a:fillRef>
+          <a:effectRef idx="2">
+            <a:schemeClr val="accent1"/>
+          </a:effectRef>
+          <a:fontRef idx="minor">
+            <a:schemeClr val="lt1"/>
+          </a:fontRef>
+        </p:style>
+        <p:txBody>
+          <a:bodyPr rtlCol="0" anchor="ctr" lIns="45720" rIns="45720"/>
+          <a:lstStyle/>
+          <a:p>
+            <a:pPr algn="ctr"/>
+            <a:r>
+              <a:rPr sz="900">
+                <a:solidFill>
+                  <a:srgbClr val="1F3A5F"/>
+                </a:solidFill>
+              </a:rPr>
+              <a:t>Gram 38: FR Reliant, Category 3, Caprica</a:t>
+            </a:r>
+          </a:p>
+        </p:txBody>
+      </p:sp>
+      <p:sp>
+        <p:nvSpPr>
+          <p:cNvPr id="4" name="TextBox 3"/>
+          <p:cNvSpPr txBox="1"/>
+          <p:nvPr/>
+        </p:nvSpPr>
+        <p:spPr>
+          <a:xfrm>
+            <a:off x="365760" y="1115568"/>
+            <a:ext cx="2200046" cy="1447800"/>
+          </a:xfrm>
+          <a:prstGeom prst="rect">
+            <a:avLst/>
+          </a:prstGeom>
+          <a:noFill/>
+        </p:spPr>
+        <p:txBody>
+          <a:bodyPr wrap="square">
+            <a:spAutoFit/>
+          </a:bodyPr>
+          <a:lstStyle/>
+          <a:p>
+            <a:r>
+              <a:rPr sz="800">
+                <a:hlinkClick r:id="rId3"/>
+              </a:rPr>
+              <a:t>Lofar 1</a:t>
+            </a:r>
+          </a:p>
+          <a:p>
+            <a:r>
+              <a:rPr sz="800">
+                <a:hlinkClick r:id="rId4"/>
+              </a:rPr>
+              <a:t>Lofar 2</a:t>
+            </a:r>
+          </a:p>
+        </p:txBody>
+      </p:sp>
+      <p:sp>
+        <p:nvSpPr>
+          <p:cNvPr id="5" name="Rounded Rectangle 4">
+            <a:hlinkClick r:id="rId5"/>
+          </p:cNvPr>
+          <p:cNvSpPr/>
+          <p:nvPr/>
+        </p:nvSpPr>
+        <p:spPr>
+          <a:xfrm>
+            <a:off x="2657246" y="731520"/>
+            <a:ext cx="2200046" cy="365760"/>
+          </a:xfrm>
+          <a:prstGeom prst="roundRect">
+            <a:avLst/>
+          </a:prstGeom>
+          <a:solidFill>
+            <a:srgbClr val="E8EEF7"/>
+          </a:solidFill>
+          <a:ln>
+            <a:solidFill>
+              <a:srgbClr val="1F3A5F"/>
+            </a:solidFill>
+          </a:ln>
+        </p:spPr>
+        <p:style>
+          <a:lnRef idx="1">
+            <a:schemeClr val="accent1"/>
+          </a:lnRef>
+          <a:fillRef idx="3">
+            <a:schemeClr val="accent1"/>
+          </a:fillRef>
+          <a:effectRef idx="2">
+            <a:schemeClr val="accent1"/>
+          </a:effectRef>
+          <a:fontRef idx="minor">
+            <a:schemeClr val="lt1"/>
+          </a:fontRef>
+        </p:style>
+        <p:txBody>
+          <a:bodyPr rtlCol="0" anchor="ctr" lIns="45720" rIns="45720"/>
+          <a:lstStyle/>
+          <a:p>
+            <a:pPr algn="ctr"/>
+            <a:r>
+              <a:rPr sz="900">
+                <a:solidFill>
+                  <a:srgbClr val="1F3A5F"/>
+                </a:solidFill>
+              </a:rPr>
+              <a:t>Gram 39: FR Stargazer, Category 1, Betazed</a:t>
+            </a:r>
+          </a:p>
+        </p:txBody>
+      </p:sp>
+      <p:sp>
+        <p:nvSpPr>
+          <p:cNvPr id="6" name="TextBox 5"/>
+          <p:cNvSpPr txBox="1"/>
+          <p:nvPr/>
+        </p:nvSpPr>
+        <p:spPr>
+          <a:xfrm>
+            <a:off x="2657246" y="1115568"/>
+            <a:ext cx="2200046" cy="1447800"/>
+          </a:xfrm>
+          <a:prstGeom prst="rect">
+            <a:avLst/>
+          </a:prstGeom>
+          <a:noFill/>
+        </p:spPr>
+        <p:txBody>
+          <a:bodyPr wrap="square">
+            <a:spAutoFit/>
+          </a:bodyPr>
+          <a:lstStyle/>
+          <a:p>
+            <a:r>
+              <a:rPr sz="800">
+                <a:hlinkClick r:id="rId6"/>
+              </a:rPr>
+              <a:t>Lofar 1</a:t>
+            </a:r>
+          </a:p>
+          <a:p>
+            <a:r>
+              <a:rPr sz="800">
+                <a:hlinkClick r:id="rId7"/>
+              </a:rPr>
+              <a:t>Lofar 2</a:t>
+            </a:r>
+          </a:p>
+          <a:p>
+            <a:r>
+              <a:rPr sz="800">
+                <a:hlinkClick r:id="rId8"/>
+              </a:rPr>
+              <a:t>Lofar 3</a:t>
+            </a:r>
+          </a:p>
+          <a:p>
+            <a:r>
+              <a:rPr sz="800">
+                <a:hlinkClick r:id="rId9"/>
+              </a:rPr>
+              <a:t>Lofar 4</a:t>
+            </a:r>
+          </a:p>
+        </p:txBody>
+      </p:sp>
+      <p:sp>
+        <p:nvSpPr>
+          <p:cNvPr id="7" name="Rounded Rectangle 6">
+            <a:hlinkClick r:id="rId10"/>
+          </p:cNvPr>
+          <p:cNvSpPr/>
+          <p:nvPr/>
+        </p:nvSpPr>
+        <p:spPr>
+          <a:xfrm>
+            <a:off x="4948732" y="731520"/>
+            <a:ext cx="2200046" cy="365760"/>
+          </a:xfrm>
+          <a:prstGeom prst="roundRect">
+            <a:avLst/>
+          </a:prstGeom>
+          <a:solidFill>
+            <a:srgbClr val="E8EEF7"/>
+          </a:solidFill>
+          <a:ln>
+            <a:solidFill>
+              <a:srgbClr val="1F3A5F"/>
+            </a:solidFill>
+          </a:ln>
+        </p:spPr>
+        <p:style>
+          <a:lnRef idx="1">
+            <a:schemeClr val="accent1"/>
+          </a:lnRef>
+          <a:fillRef idx="3">
+            <a:schemeClr val="accent1"/>
+          </a:fillRef>
+          <a:effectRef idx="2">
+            <a:schemeClr val="accent1"/>
+          </a:effectRef>
+          <a:fontRef idx="minor">
+            <a:schemeClr val="lt1"/>
+          </a:fontRef>
+        </p:style>
+        <p:txBody>
+          <a:bodyPr rtlCol="0" anchor="ctr" lIns="45720" rIns="45720"/>
+          <a:lstStyle/>
+          <a:p>
+            <a:pPr algn="ctr"/>
+            <a:r>
+              <a:rPr sz="900">
+                <a:solidFill>
+                  <a:srgbClr val="1F3A5F"/>
+                </a:solidFill>
+              </a:rPr>
+              <a:t>Gram 40: FR Defiant-class, Category 2, Endor</a:t>
+            </a:r>
+          </a:p>
+        </p:txBody>
+      </p:sp>
+      <p:sp>
+        <p:nvSpPr>
+          <p:cNvPr id="8" name="TextBox 7"/>
+          <p:cNvSpPr txBox="1"/>
+          <p:nvPr/>
+        </p:nvSpPr>
+        <p:spPr>
+          <a:xfrm>
+            <a:off x="4948732" y="1115568"/>
+            <a:ext cx="2200046" cy="1447800"/>
+          </a:xfrm>
+          <a:prstGeom prst="rect">
+            <a:avLst/>
+          </a:prstGeom>
+          <a:noFill/>
+        </p:spPr>
+        <p:txBody>
+          <a:bodyPr wrap="square">
+            <a:spAutoFit/>
+          </a:bodyPr>
+          <a:lstStyle/>
+          <a:p>
+            <a:r>
+              <a:rPr sz="800">
+                <a:hlinkClick r:id="rId11"/>
+              </a:rPr>
+              <a:t>Lofar 1</a:t>
+            </a:r>
+          </a:p>
+          <a:p>
+            <a:r>
+              <a:rPr sz="800">
+                <a:hlinkClick r:id="rId12"/>
+              </a:rPr>
+              <a:t>Lofar 2</a:t>
+            </a:r>
+          </a:p>
+          <a:p>
+            <a:r>
+              <a:rPr sz="800">
+                <a:hlinkClick r:id="rId13"/>
+              </a:rPr>
+              <a:t>Lofar 3</a:t>
+            </a:r>
+          </a:p>
+          <a:p>
+            <a:r>
+              <a:rPr sz="800">
+                <a:hlinkClick r:id="rId14"/>
+              </a:rPr>
+              <a:t>Lofar 4</a:t>
+            </a:r>
+          </a:p>
+        </p:txBody>
+      </p:sp>
+      <p:sp>
+        <p:nvSpPr>
+          <p:cNvPr id="9" name="Rounded Rectangle 8">
+            <a:hlinkClick r:id="rId15"/>
+          </p:cNvPr>
+          <p:cNvSpPr/>
+          <p:nvPr/>
+        </p:nvSpPr>
+        <p:spPr>
+          <a:xfrm>
+            <a:off x="7240219" y="731520"/>
+            <a:ext cx="2200046" cy="365760"/>
+          </a:xfrm>
+          <a:prstGeom prst="roundRect">
+            <a:avLst/>
+          </a:prstGeom>
+          <a:solidFill>
+            <a:srgbClr val="E8EEF7"/>
+          </a:solidFill>
+          <a:ln>
+            <a:solidFill>
+              <a:srgbClr val="1F3A5F"/>
+            </a:solidFill>
+          </a:ln>
+        </p:spPr>
+        <p:style>
+          <a:lnRef idx="1">
+            <a:schemeClr val="accent1"/>
+          </a:lnRef>
+          <a:fillRef idx="3">
+            <a:schemeClr val="accent1"/>
+          </a:fillRef>
+          <a:effectRef idx="2">
+            <a:schemeClr val="accent1"/>
+          </a:effectRef>
+          <a:fontRef idx="minor">
+            <a:schemeClr val="lt1"/>
+          </a:fontRef>
+        </p:style>
+        <p:txBody>
+          <a:bodyPr rtlCol="0" anchor="ctr" lIns="45720" rIns="45720"/>
+          <a:lstStyle/>
+          <a:p>
+            <a:pPr algn="ctr"/>
+            <a:r>
+              <a:rPr sz="900">
+                <a:solidFill>
+                  <a:srgbClr val="1F3A5F"/>
+                </a:solidFill>
+              </a:rPr>
+              <a:t>Gram 41: FR Tantive IV, Category 3, Betazed</a:t>
+            </a:r>
+          </a:p>
+        </p:txBody>
+      </p:sp>
+      <p:sp>
+        <p:nvSpPr>
+          <p:cNvPr id="10" name="TextBox 9"/>
+          <p:cNvSpPr txBox="1"/>
+          <p:nvPr/>
+        </p:nvSpPr>
+        <p:spPr>
+          <a:xfrm>
+            <a:off x="7240219" y="1115568"/>
+            <a:ext cx="2200046" cy="1447800"/>
+          </a:xfrm>
+          <a:prstGeom prst="rect">
+            <a:avLst/>
+          </a:prstGeom>
+          <a:noFill/>
+        </p:spPr>
+        <p:txBody>
+          <a:bodyPr wrap="square">
+            <a:spAutoFit/>
+          </a:bodyPr>
+          <a:lstStyle/>
+          <a:p>
+            <a:r>
+              <a:rPr sz="800">
+                <a:hlinkClick r:id="rId16"/>
+              </a:rPr>
+              <a:t>Lofar 1</a:t>
+            </a:r>
+          </a:p>
+          <a:p>
+            <a:r>
+              <a:rPr sz="800">
+                <a:hlinkClick r:id="rId17"/>
+              </a:rPr>
+              <a:t>Lofar 2</a:t>
+            </a:r>
+          </a:p>
+          <a:p>
+            <a:r>
+              <a:rPr sz="800">
+                <a:hlinkClick r:id="rId18"/>
+              </a:rPr>
+              <a:t>Lofar 3</a:t>
+            </a:r>
+          </a:p>
+        </p:txBody>
+      </p:sp>
+      <p:sp>
+        <p:nvSpPr>
+          <p:cNvPr id="11" name="Rounded Rectangle 10">
+            <a:hlinkClick r:id="rId19"/>
+          </p:cNvPr>
+          <p:cNvSpPr/>
+          <p:nvPr/>
+        </p:nvSpPr>
+        <p:spPr>
+          <a:xfrm>
+            <a:off x="9531705" y="731520"/>
+            <a:ext cx="2200046" cy="365760"/>
+          </a:xfrm>
+          <a:prstGeom prst="roundRect">
+            <a:avLst/>
+          </a:prstGeom>
+          <a:solidFill>
+            <a:srgbClr val="E8EEF7"/>
+          </a:solidFill>
+          <a:ln>
+            <a:solidFill>
+              <a:srgbClr val="1F3A5F"/>
+            </a:solidFill>
+          </a:ln>
+        </p:spPr>
+        <p:style>
+          <a:lnRef idx="1">
+            <a:schemeClr val="accent1"/>
+          </a:lnRef>
+          <a:fillRef idx="3">
+            <a:schemeClr val="accent1"/>
+          </a:fillRef>
+          <a:effectRef idx="2">
+            <a:schemeClr val="accent1"/>
+          </a:effectRef>
+          <a:fontRef idx="minor">
+            <a:schemeClr val="lt1"/>
+          </a:fontRef>
+        </p:style>
+        <p:txBody>
+          <a:bodyPr rtlCol="0" anchor="ctr" lIns="45720" rIns="45720"/>
+          <a:lstStyle/>
+          <a:p>
+            <a:pPr algn="ctr"/>
+            <a:r>
+              <a:rPr sz="900">
+                <a:solidFill>
+                  <a:srgbClr val="1F3A5F"/>
+                </a:solidFill>
+              </a:rPr>
+              <a:t>Gram 42: FR TIE Bomber, Category 3, Mustafar</a:t>
+            </a:r>
+          </a:p>
+        </p:txBody>
+      </p:sp>
+      <p:sp>
+        <p:nvSpPr>
+          <p:cNvPr id="12" name="TextBox 11"/>
+          <p:cNvSpPr txBox="1"/>
+          <p:nvPr/>
+        </p:nvSpPr>
+        <p:spPr>
+          <a:xfrm>
+            <a:off x="9531705" y="1115568"/>
+            <a:ext cx="2200046" cy="1447800"/>
+          </a:xfrm>
+          <a:prstGeom prst="rect">
+            <a:avLst/>
+          </a:prstGeom>
+          <a:noFill/>
+        </p:spPr>
+        <p:txBody>
+          <a:bodyPr wrap="square">
+            <a:spAutoFit/>
+          </a:bodyPr>
+          <a:lstStyle/>
+          <a:p>
+            <a:r>
+              <a:rPr sz="800">
+                <a:hlinkClick r:id="rId20"/>
+              </a:rPr>
+              <a:t>Lofar 1</a:t>
+            </a:r>
+          </a:p>
+        </p:txBody>
+      </p:sp>
+    </p:spTree>
+  </p:cSld>
+  <p:clrMapOvr>
+    <a:masterClrMapping/>
+  </p:clrMapOvr>
+</p:sld>
+</file>
+
+<file path=ppt/slides/slide5.xml><?xml version="1.0" encoding="utf-8"?>
+<p:sld xmlns:a="http://schemas.openxmlformats.org/drawingml/2006/main" xmlns:p="http://schemas.openxmlformats.org/presentationml/2006/main" xmlns:r="http://schemas.openxmlformats.org/officeDocument/2006/relationships">
+  <p:cSld>
+    <p:spTree>
+      <p:nvGrpSpPr>
+        <p:cNvPr id="1" name=""/>
+        <p:cNvGrpSpPr/>
+        <p:nvPr/>
+      </p:nvGrpSpPr>
+      <p:grpSpPr/>
+      <p:sp>
+        <p:nvSpPr>
+          <p:cNvPr id="2" name="TextBox 1"/>
+          <p:cNvSpPr txBox="1"/>
+          <p:nvPr/>
+        </p:nvSpPr>
+        <p:spPr>
+          <a:xfrm>
+            <a:off x="914400" y="2377440"/>
+            <a:ext cx="10360152" cy="1280160"/>
+          </a:xfrm>
+          <a:prstGeom prst="rect">
+            <a:avLst/>
+          </a:prstGeom>
+          <a:noFill/>
+        </p:spPr>
+        <p:txBody>
+          <a:bodyPr wrap="square">
+            <a:spAutoFit/>
+          </a:bodyPr>
+          <a:lstStyle/>
+          <a:p>
+            <a:pPr algn="ctr"/>
+            <a:r>
+              <a:rPr sz="4000" b="1">
+                <a:solidFill>
+                  <a:srgbClr val="1F3A5F"/>
+                </a:solidFill>
+              </a:rPr>
+              <a:t>End of Instructor Week 3 Grams</a:t>
+            </a:r>
+          </a:p>
+        </p:txBody>
+      </p:sp>
+      <p:sp>
+        <p:nvSpPr>
+          <p:cNvPr id="3" name="TextBox 2"/>
+          <p:cNvSpPr txBox="1"/>
+          <p:nvPr/>
+        </p:nvSpPr>
+        <p:spPr>
+          <a:xfrm>
+            <a:off x="914400" y="3840480"/>
+            <a:ext cx="10360152" cy="731520"/>
+          </a:xfrm>
+          <a:prstGeom prst="rect">
+            <a:avLst/>
+          </a:prstGeom>
+          <a:noFill/>
+        </p:spPr>
+        <p:txBody>
+          <a:bodyPr wrap="none">
+            <a:spAutoFit/>
+          </a:bodyPr>
+          <a:lstStyle/>
+          <a:p>
+            <a:pPr algn="ctr"/>
+            <a:r>
+              <a:rPr sz="2400">
+                <a:solidFill>
+                  <a:srgbClr val="1F3A5F"/>
+                </a:solidFill>
+              </a:rPr>
+              <a:t>Instructor Version</a:t>
             </a:r>
           </a:p>
         </p:txBody>
